--- a/nuclei_segmentation_talk.pptx
+++ b/nuclei_segmentation_talk.pptx
@@ -22,9 +22,11 @@
     <p:sldId id="270" r:id="rId16"/>
     <p:sldId id="271" r:id="rId17"/>
     <p:sldId id="272" r:id="rId18"/>
+    <p:sldId id="273" r:id="rId19"/>
+    <p:sldId id="274" r:id="rId20"/>
   </p:sldIdLst>
   <p:notesMasterIdLst>
-    <p:notesMasterId r:id="rId19"/>
+    <p:notesMasterId r:id="rId21"/>
   </p:notesMasterIdLst>
   <p:sldSz cx="12192000" cy="6858000"/>
   <p:notesSz cx="6858000" cy="12192000"/>
@@ -606,8 +608,9 @@
           <a:p>
             <a:r>
               <a:rPr lang="en-US" dirty="0"/>
-              <a:t>There's a transition. Under about 15 pixels the annotation sits on visually empty background — that's label noise. Between 20 and 100 they're real but very faint. Above 100 they're unmistakable nuclei the model genuinely got wrong.
-So I can't dismiss the misses as bad labels, and I can't dismiss them as model failures either. Both are present.</a:t>
+              <a:t>My first version of this said the model was closer, in 48 of 49 images. Someone suggested that might be an artifact of how I sampled pixels along each outline. So I built a test with a known right answer — human's outline exactly on the edge, model's slightly outside it — and my measurement picked the wrong one nine times out of nine.
+I'd been sampling the ring of pixels just inside each outline, which sits half a pixel in, the same size as the effect. And it isn't common-mode: it favours whichever outline is larger, which is the model's. So the artifact alone could have produced the entire original result. I fixed the sampling, re-ran, and my headline finding inverted. So I retracted it.
+This is the best slide in the deck. Don't rush it.</a:t>
             </a:r>
             <a:endParaRPr lang="en-US" dirty="0"/>
           </a:p>
@@ -695,8 +698,7 @@
           <a:p>
             <a:r>
               <a:rPr lang="en-US" dirty="0"/>
-              <a:t>Each of these was motivated by a measurement, and each failure eliminated a cause. The score didn't move — but I know why for every one.
-The bandit one is the embarrassing one, and worth owning: bandits exist to save evaluations, and my own 72× cache made evaluations cheap enough that brute force won. I killed the premise myself.</a:t>
+              <a:t>Setting the boundary question aside — of the objects it genuinely misses, the median is 20 pixels against 622 for a normal nucleus. 81% are under 100. Above 400 pixels it misses 9 out of 4,773, which is 0.2%. And the model finds 98% of bright objects but only 86% of faint ones. So it's one population: small and faint.</a:t>
             </a:r>
             <a:endParaRPr lang="en-US" dirty="0"/>
           </a:p>
@@ -784,9 +786,8 @@
           <a:p>
             <a:r>
               <a:rPr lang="en-US" dirty="0"/>
-              <a:t>I wrote down what I expected before running the last one: upscaling would recover small objects and leave merges alone. The opposite happened. Small objects didn't move at all — 265 to 266. But merges dropped by a third, 103 to 69.
-So resolution isn't why small objects are missed, and merging isn't the immovable problem I'd argued it was. The score stayed flat because it traded merges for splits — 24 splits up to 36 — but the error profile changed substantially, and I could only see that because I count those separately.
-CLOSING LINE: The score is roughly where a pretrained model puts it, and I couldn't move it. What I have instead is a map of which errors are reachable, which are definitional, and which are noise — and I can tell you which is which.</a:t>
+              <a:t>There's a transition. Under about 15 pixels the annotation sits on visually empty background — that's label noise. Between 20 and 100 they're real but very faint. Above 100 they're unmistakable nuclei the model genuinely got wrong.
+So I can't dismiss the misses as bad labels, and I can't dismiss them as model failures either. Both are present.</a:t>
             </a:r>
             <a:endParaRPr lang="en-US" dirty="0"/>
           </a:p>
@@ -874,7 +875,8 @@
           <a:p>
             <a:r>
               <a:rPr lang="en-US" dirty="0"/>
-              <a:t/>
+              <a:t>Each of these was motivated by a measurement, and each failure eliminated a cause. The score didn't move — but I know why for every one.
+The bandit one is the embarrassing one, and worth owning: bandits exist to save evaluations, and my own 72× cache made evaluations cheap enough that brute force won. I killed the premise myself.</a:t>
             </a:r>
             <a:endParaRPr lang="en-US" dirty="0"/>
           </a:p>
@@ -962,7 +964,9 @@
           <a:p>
             <a:r>
               <a:rPr lang="en-US" dirty="0"/>
-              <a:t/>
+              <a:t>I wrote down what I expected before running the last one: upscaling would recover small objects and leave merges alone. The opposite happened. Small objects didn't move at all — 265 to 266. But merges dropped by a third, 103 to 69.
+So resolution isn't why small objects are missed, and merging isn't the immovable problem I'd argued it was. The score stayed flat because it traded merges for splits — 24 splits up to 36 — but the error profile changed substantially, and I could only see that because I count those separately.
+CLOSING LINE: The score is roughly where a pretrained model puts it, and I couldn't move it. What I have instead is a map of which errors are reachable, which are definitional, and which are noise — and I can tell you which is which.</a:t>
             </a:r>
             <a:endParaRPr lang="en-US" dirty="0"/>
           </a:p>
@@ -1268,6 +1272,182 @@
 </p:notes>
 </file>
 
+<file path=ppt/notesSlides/notesSlide18.xml><?xml version="1.0" encoding="utf-8"?>
+<p:notes xmlns:a="http://schemas.openxmlformats.org/drawingml/2006/main" xmlns:r="http://schemas.openxmlformats.org/officeDocument/2006/relationships" xmlns:p="http://schemas.openxmlformats.org/presentationml/2006/main">
+  <p:cSld>
+    <p:spTree>
+      <p:nvGrpSpPr>
+        <p:cNvPr id="1" name=""/>
+        <p:cNvGrpSpPr/>
+        <p:nvPr/>
+      </p:nvGrpSpPr>
+      <p:grpSpPr>
+        <a:xfrm>
+          <a:off x="0" y="0"/>
+          <a:ext cx="0" cy="0"/>
+          <a:chOff x="0" y="0"/>
+          <a:chExt cx="0" cy="0"/>
+        </a:xfrm>
+      </p:grpSpPr>
+      <p:sp>
+        <p:nvSpPr>
+          <p:cNvPr id="2" name="Slide Image Placeholder 1"/>
+          <p:cNvSpPr>
+            <a:spLocks noGrp="1" noRot="1" noChangeAspect="1"/>
+          </p:cNvSpPr>
+          <p:nvPr>
+            <p:ph type="sldImg"/>
+          </p:nvPr>
+        </p:nvSpPr>
+        <p:spPr/>
+      </p:sp>
+      <p:sp>
+        <p:nvSpPr>
+          <p:cNvPr id="3" name="Notes Placeholder 2"/>
+          <p:cNvSpPr>
+            <a:spLocks noGrp="1"/>
+          </p:cNvSpPr>
+          <p:nvPr>
+            <p:ph type="body" idx="1"/>
+          </p:nvPr>
+        </p:nvSpPr>
+        <p:spPr/>
+        <p:txBody>
+          <a:bodyPr/>
+          <a:lstStyle/>
+          <a:p>
+            <a:r>
+              <a:rPr lang="en-US" dirty="0"/>
+              <a:t/>
+            </a:r>
+            <a:endParaRPr lang="en-US" dirty="0"/>
+          </a:p>
+        </p:txBody>
+      </p:sp>
+      <p:sp>
+        <p:nvSpPr>
+          <p:cNvPr id="4" name="Slide Number Placeholder 3"/>
+          <p:cNvSpPr>
+            <a:spLocks noGrp="1"/>
+          </p:cNvSpPr>
+          <p:nvPr>
+            <p:ph type="sldNum" sz="quarter" idx="10"/>
+          </p:nvPr>
+        </p:nvSpPr>
+        <p:spPr/>
+        <p:txBody>
+          <a:bodyPr/>
+          <a:lstStyle/>
+          <a:p>
+            <a:fld id="{F7021451-1387-4CA6-816F-3879F97B5CBC}" type="slidenum">
+              <a:rPr lang="en-US"/>
+              <a:t>18</a:t>
+            </a:fld>
+            <a:endParaRPr lang="en-US"/>
+          </a:p>
+        </p:txBody>
+      </p:sp>
+    </p:spTree>
+    <p:extLst>
+      <p:ext uri="{BB962C8B-B14F-4D97-AF65-F5344CB8AC3E}">
+        <p14:creationId xmlns:p14="http://schemas.microsoft.com/office/powerpoint/2010/main" val="1024086991"/>
+      </p:ext>
+    </p:extLst>
+  </p:cSld>
+  <p:clrMapOvr>
+    <a:masterClrMapping/>
+  </p:clrMapOvr>
+</p:notes>
+</file>
+
+<file path=ppt/notesSlides/notesSlide19.xml><?xml version="1.0" encoding="utf-8"?>
+<p:notes xmlns:a="http://schemas.openxmlformats.org/drawingml/2006/main" xmlns:r="http://schemas.openxmlformats.org/officeDocument/2006/relationships" xmlns:p="http://schemas.openxmlformats.org/presentationml/2006/main">
+  <p:cSld>
+    <p:spTree>
+      <p:nvGrpSpPr>
+        <p:cNvPr id="1" name=""/>
+        <p:cNvGrpSpPr/>
+        <p:nvPr/>
+      </p:nvGrpSpPr>
+      <p:grpSpPr>
+        <a:xfrm>
+          <a:off x="0" y="0"/>
+          <a:ext cx="0" cy="0"/>
+          <a:chOff x="0" y="0"/>
+          <a:chExt cx="0" cy="0"/>
+        </a:xfrm>
+      </p:grpSpPr>
+      <p:sp>
+        <p:nvSpPr>
+          <p:cNvPr id="2" name="Slide Image Placeholder 1"/>
+          <p:cNvSpPr>
+            <a:spLocks noGrp="1" noRot="1" noChangeAspect="1"/>
+          </p:cNvSpPr>
+          <p:nvPr>
+            <p:ph type="sldImg"/>
+          </p:nvPr>
+        </p:nvSpPr>
+        <p:spPr/>
+      </p:sp>
+      <p:sp>
+        <p:nvSpPr>
+          <p:cNvPr id="3" name="Notes Placeholder 2"/>
+          <p:cNvSpPr>
+            <a:spLocks noGrp="1"/>
+          </p:cNvSpPr>
+          <p:nvPr>
+            <p:ph type="body" idx="1"/>
+          </p:nvPr>
+        </p:nvSpPr>
+        <p:spPr/>
+        <p:txBody>
+          <a:bodyPr/>
+          <a:lstStyle/>
+          <a:p>
+            <a:r>
+              <a:rPr lang="en-US" dirty="0"/>
+              <a:t/>
+            </a:r>
+            <a:endParaRPr lang="en-US" dirty="0"/>
+          </a:p>
+        </p:txBody>
+      </p:sp>
+      <p:sp>
+        <p:nvSpPr>
+          <p:cNvPr id="4" name="Slide Number Placeholder 3"/>
+          <p:cNvSpPr>
+            <a:spLocks noGrp="1"/>
+          </p:cNvSpPr>
+          <p:nvPr>
+            <p:ph type="sldNum" sz="quarter" idx="10"/>
+          </p:nvPr>
+        </p:nvSpPr>
+        <p:spPr/>
+        <p:txBody>
+          <a:bodyPr/>
+          <a:lstStyle/>
+          <a:p>
+            <a:fld id="{F7021451-1387-4CA6-816F-3879F97B5CBC}" type="slidenum">
+              <a:rPr lang="en-US"/>
+              <a:t>19</a:t>
+            </a:fld>
+            <a:endParaRPr lang="en-US"/>
+          </a:p>
+        </p:txBody>
+      </p:sp>
+    </p:spTree>
+    <p:extLst>
+      <p:ext uri="{BB962C8B-B14F-4D97-AF65-F5344CB8AC3E}">
+        <p14:creationId xmlns:p14="http://schemas.microsoft.com/office/powerpoint/2010/main" val="1024086991"/>
+      </p:ext>
+    </p:extLst>
+  </p:cSld>
+  <p:clrMapOvr>
+    <a:masterClrMapping/>
+  </p:clrMapOvr>
+</p:notes>
+</file>
+
 <file path=ppt/notesSlides/notesSlide2.xml><?xml version="1.0" encoding="utf-8"?>
 <p:notes xmlns:a="http://schemas.openxmlformats.org/drawingml/2006/main" xmlns:r="http://schemas.openxmlformats.org/officeDocument/2006/relationships" xmlns:p="http://schemas.openxmlformats.org/presentationml/2006/main">
   <p:cSld>
@@ -1314,8 +1494,12 @@
           <a:p>
             <a:r>
               <a:rPr lang="en-US" dirty="0"/>
-              <a:t>200 images, about 118 nuclei each. Draw a line around each one separately, and score it against outlines a human drew by hand. The hard part is telling apart nuclei that touch.
-Ten seconds. Move on.</a:t>
+              <a:t>Quick orientation, because this problem is probably unfamiliar.
+These are cells under a fluorescence microscope. A stain called Hoechst binds DNA, so the nucleus of every cell lights up and everything else stays dark. That's why the images look like grey blobs on black.
+The use case is high-content screening. You treat plates of cells with different compounds, image them, and ask what changed. But the questions are all per-cell: how many cells are there, how big is each nucleus, how bright, what shape. 'How much total stain is in this image' is useless — it can't tell you whether you have twice as many cells or the same cells twice as bright. You need to count and measure them individually.
+That's the distinction on this slide. The middle panel is a foreground mask — which pixels are nucleus. That's genuinely easy; it's one line of Otsu thresholding and I'll come back to it. The right panel is what's actually wanted: every nucleus as its own object, with its own identity. That's called instance segmentation.
+And the reason it's hard is entirely visible in these panels — where nuclei touch, the foreground mask fuses them into one blob. Separating touching objects is the whole problem.
+The dataset is BBBC039: 200 fields, about 118 nuclei each, 23,617 hand-annotated nuclei in total.</a:t>
             </a:r>
             <a:endParaRPr lang="en-US" dirty="0"/>
           </a:p>
@@ -1403,8 +1587,13 @@
           <a:p>
             <a:r>
               <a:rPr lang="en-US" dirty="0"/>
-              <a:t>The answer files look like they label each nucleus with its own ID. They don't — they only use three values, arranged so touching nuclei never share one. Take the pixel value as the object ID and the whole field collapses to three objects. Binarise and run connected components instead — the careful next guess — and every touching clump still fuses: 100 instead of 118 in this field. Either way your score goes UP, because the hard cases disappear from the test.
-I checked my decoding two ways: it recovers 23,617 objects, matching what the dataset documentation reports, and the count is identical under 4- and 8-connectivity.</a:t>
+              <a:t>Two families of approach, and I implemented both so I had something to compare against.
+THE CLASSICAL PIPELINE — no learning at all, every step a hand-set rule. First Otsu thresholding: it looks at the histogram of pixel brightness, assumes there are two populations — background and object — and picks the single cut between them that best separates the two. That gives you foreground.
+But foreground fuses touching nuclei, so you need a second step to break blobs apart. That's a distance transform plus watershed: for every foreground pixel compute how far it is from the nearest background pixel, treat the local peaks as cell centres, and flood outward from each until the floods meet. The line where they meet is the cut.
+That works when nuclei are round. It fails when they aren't — a bean-shaped or unevenly textured nucleus produces two distance peaks and gets sliced in half. Those purple lines through the middle panel are exactly that. Across validation it makes 405 of those false splits, against Cellpose's 24. That's why it scores 0.555.
+CELLPOSE-SAM — the current state of the art for cell segmentation. The key idea is that it doesn't classify pixels as foreground or background at all. For every pixel it predicts a direction: which way is the centre of MY cell. Then you follow those arrows uphill, and every pixel that flows to the same point is one cell. Touching nuclei get separated because their pixels flow to different centres, even though there's no visible gap between them. A threshold can never do that.
+The SAM part is the backbone — it's built on Segment Anything and trained across a large corpus of cell images from many microscopes and modalities. That's why it's the default: it generalises to new data without retraining, which is exactly the position I'm in. I ran it zero-shot and it scores 0.807.
+One caveat I'll flag now and come back to: because its training corpus is broad, I can't fully rule out that it has seen images like these.</a:t>
             </a:r>
             <a:endParaRPr lang="en-US" dirty="0"/>
           </a:p>
@@ -1492,8 +1681,10 @@
           <a:p>
             <a:r>
               <a:rPr lang="en-US" dirty="0"/>
-              <a:t>I used a pretrained model for the segmenting, and wrote a classical pipeline from scratch as a comparison. The piece that mattered most was a cache: testing a setting took 8.8 seconds per image, and I got it to 0.11 — about 72× faster, with byte-identical output. That's the median-based figure; the mean says 81×, but the first call includes loading the checkpoint, so 72× is the honest one. Everything after this depends on it.
-Pre-empts 'did you just call a library.' Don't be defensive, just state it.</a:t>
+              <a:t>My read of the prompt: segment individual nuclei, and be scored on instance agreement with hand-drawn outlines. 200 fields, 100 of them training, about 118 nuclei each.
+Given that, the highest-value thing I could do was NOT to train a model. With 100 training fields, a from-scratch model measures my training loop, not the problem. And I didn't label more data — there are already 23,617 annotated nuclei, and the annotation turns out to be the thing I'm auditing, not a bottleneck.
+So: a state-of-the-art pretrained model — Cellpose-SAM — used zero-shot, and then I spent the time on making evaluation cheap and on working out where the score actually goes.
+The fine-tuning one is the interesting decision, and I'll own it. train_seg exists and 100 labelled fields is enough to adapt a generalist — it's the textbook biggest lever. I left it undone deliberately. Because of what's coming on the boundary slides, a fine-tuned model would improve AP partly by learning this annotator's systematic tightness — a better metric without better segmentation. That makes it a test of the ceiling claim rather than an improvement. The honest second reason: MPS training time was unmeasured against a deadline, and a probe that can't distinguish 'won't converge' from 'needs another 15 minutes' produces sunk cost rather than a decision.</a:t>
             </a:r>
             <a:endParaRPr lang="en-US" dirty="0"/>
           </a:p>
@@ -1581,8 +1772,8 @@
           <a:p>
             <a:r>
               <a:rPr lang="en-US" dirty="0"/>
-              <a:t>That's the headline. But it's an average of ten increasingly strict judgments, and it's worth asking where it's actually losing points.
-Deliberately anticlimactic. You're setting up the pivot.</a:t>
+              <a:t>The answer files look like they label each nucleus with its own ID. They don't — they only use three values, arranged so touching nuclei never share one. Take the pixel value as the object ID and the whole field collapses to three objects. Binarise and run connected components instead — the careful next guess — and every touching clump still fuses: 100 instead of 118 in this field. Either way your score goes UP, because the hard cases disappear from the test.
+I checked my decoding two ways: it recovers 23,617 objects, matching what the dataset documentation reports, and the count is identical under 4- and 8-connectivity.</a:t>
             </a:r>
             <a:endParaRPr lang="en-US" dirty="0"/>
           </a:p>
@@ -1670,8 +1861,8 @@
           <a:p>
             <a:r>
               <a:rPr lang="en-US" dirty="0"/>
-              <a:t>At the loosest setting, it finds 93% correctly. At the strictest, 31%. The two strictest settings cause 54% of the total loss. Everything else — every missed object, every wrongly merged pair — is under 4% of it. So if I want to improve the number, that's where it lives.
-This is the pivot slide. Everything before was setup. Slow down here.</a:t>
+              <a:t>I used a pretrained model for the segmenting, and wrote a classical pipeline from scratch as a comparison. The piece that mattered most was a cache: testing a setting took 8.8 seconds per image, and I got it to 0.11 — about 72× faster, with byte-identical output. That's the median-based figure; the mean says 81×, but the first call includes loading the checkpoint, so 72× is the honest one. Everything after this depends on it.
+Pre-empts 'did you just call a library.' Don't be defensive, just state it.</a:t>
             </a:r>
             <a:endParaRPr lang="en-US" dirty="0"/>
           </a:p>
@@ -1759,9 +1950,8 @@
           <a:p>
             <a:r>
               <a:rPr lang="en-US" dirty="0"/>
-              <a:t>To score at that strictness your outline must match the human's to within about half a pixel. So I asked whether a hand tracing is even that precise, using the image itself as a referee — two different definitions of where an edge is.
-They give opposite answers. Brightness-halfway favours the human in 67% of fields; edge-steepness favours the model in 96%. And the gradient measure is the one to weight, because it's reference-free — both outlines are divided by the same local contrast, so any calibration error cancels. The half-maximum measure needs 0.5 to be correctly located, and on this data it isn't: both outlines read about 0.40, not 0.50.
-Two reasonable definitions ranking them oppositely is itself the evidence that those strict thresholds are settling a convention rather than measuring correctness. Do NOT claim the annotation is wrong. Go straight to the next slide.</a:t>
+              <a:t>That's the headline. But it's an average of ten increasingly strict judgments, and it's worth asking where it's actually losing points.
+Deliberately anticlimactic. You're setting up the pivot.</a:t>
             </a:r>
             <a:endParaRPr lang="en-US" dirty="0"/>
           </a:p>
@@ -1849,9 +2039,8 @@
           <a:p>
             <a:r>
               <a:rPr lang="en-US" dirty="0"/>
-              <a:t>My first version of this said the model was closer, in 48 of 49 images. Someone suggested that might be an artifact of how I sampled pixels along each outline. So I built a test with a known right answer — human's outline exactly on the edge, model's slightly outside it — and my measurement picked the wrong one nine times out of nine.
-I'd been sampling the ring of pixels just inside each outline, which sits half a pixel in, the same size as the effect. And it isn't common-mode: it favours whichever outline is larger, which is the model's. So the artifact alone could have produced the entire original result. I fixed the sampling, re-ran, and my headline finding inverted. So I retracted it.
-This is the best slide in the deck. Don't rush it.</a:t>
+              <a:t>At the loosest setting, it finds 93% correctly. At the strictest, 31%. The two strictest settings cause 54% of the total loss. Everything else — every missed object, every wrongly merged pair — is under 4% of it. So if I want to improve the number, that's where it lives.
+This is the pivot slide. Everything before was setup. Slow down here.</a:t>
             </a:r>
             <a:endParaRPr lang="en-US" dirty="0"/>
           </a:p>
@@ -1939,7 +2128,9 @@
           <a:p>
             <a:r>
               <a:rPr lang="en-US" dirty="0"/>
-              <a:t>Setting the boundary question aside — of the objects it genuinely misses, the median is 20 pixels against 622 for a normal nucleus. 81% are under 100. Above 400 pixels it misses 9 out of 4,773, which is 0.2%. And the model finds 98% of bright objects but only 86% of faint ones. So it's one population: small and faint.</a:t>
+              <a:t>To score at that strictness your outline must match the human's to within about half a pixel. So I asked whether a hand tracing is even that precise, using the image itself as a referee — two different definitions of where an edge is.
+They give opposite answers. Brightness-halfway favours the human in 67% of fields; edge-steepness favours the model in 96%. And the gradient measure is the one to weight, because it's reference-free — both outlines are divided by the same local contrast, so any calibration error cancels. The half-maximum measure needs 0.5 to be correctly located, and on this data it isn't: both outlines read about 0.40, not 0.50.
+Two reasonable definitions ranking them oppositely is itself the evidence that those strict thresholds are settling a convention rather than measuring correctness. Do NOT claim the annotation is wrong. Go straight to the next slide.</a:t>
             </a:r>
             <a:endParaRPr lang="en-US" dirty="0"/>
           </a:p>
@@ -2573,7 +2764,7 @@
                 <a:ea typeface="Calibri" pitchFamily="34" charset="-122"/>
                 <a:cs typeface="Calibri" pitchFamily="34" charset="-120"/>
               </a:rPr>
-              <a:t>9</a:t>
+              <a:t>10</a:t>
             </a:r>
             <a:endParaRPr lang="en-US" sz="1500" dirty="0"/>
           </a:p>
@@ -2612,7 +2803,7 @@
                 <a:ea typeface="Cambria" pitchFamily="34" charset="-122"/>
                 <a:cs typeface="Cambria" pitchFamily="34" charset="-120"/>
               </a:rPr>
-              <a:t>Are those even objects?</a:t>
+              <a:t>I got this wrong first</a:t>
             </a:r>
             <a:endParaRPr lang="en-US" sz="2700" dirty="0"/>
           </a:p>
@@ -2651,36 +2842,375 @@
                 <a:ea typeface="Calibri" pitchFamily="34" charset="-122"/>
                 <a:cs typeface="Calibri" pitchFamily="34" charset="-120"/>
               </a:rPr>
-              <a:t>I couldn’t answer that from a table, so I looked</a:t>
+              <a:t>Synthetic sweep with a known right answer: ground truth exactly on the edge, prediction 0.25 px too large</a:t>
             </a:r>
             <a:endParaRPr lang="en-US" sz="1400" dirty="0"/>
           </a:p>
         </p:txBody>
       </p:sp>
-      <p:pic>
-        <p:nvPicPr>
-          <p:cNvPr id="6" name="Image 0" descr="/Users/tejas/Take_Home_Neo/figures/fig6_are_these_nuclei.png">    </p:cNvPr>
-          <p:cNvPicPr>
-            <a:picLocks noChangeAspect="1"/>
-          </p:cNvPicPr>
-          <p:nvPr/>
-        </p:nvPicPr>
-        <p:blipFill>
-          <a:blip r:embed="rId1"/>
-          <a:stretch>
-            <a:fillRect/>
-          </a:stretch>
-        </p:blipFill>
-        <p:spPr>
-          <a:xfrm>
-            <a:off x="3515182" y="1371600"/>
-            <a:ext cx="5161331" cy="4846320"/>
-          </a:xfrm>
-          <a:prstGeom prst="rect">
-            <a:avLst/>
-          </a:prstGeom>
-        </p:spPr>
-      </p:pic>
+      <p:sp>
+        <p:nvSpPr>
+          <p:cNvPr id="6" name="Shape 4"/>
+          <p:cNvSpPr/>
+          <p:nvPr/>
+        </p:nvSpPr>
+        <p:spPr>
+          <a:xfrm>
+            <a:off x="566928" y="1874520"/>
+            <a:ext cx="11057839" cy="1225296"/>
+          </a:xfrm>
+          <a:prstGeom prst="roundRect">
+            <a:avLst>
+              <a:gd name="adj" fmla="val 8955"/>
+            </a:avLst>
+          </a:prstGeom>
+          <a:solidFill>
+            <a:srgbClr val="F4F3EF"/>
+          </a:solidFill>
+          <a:ln/>
+        </p:spPr>
+      </p:sp>
+      <p:sp>
+        <p:nvSpPr>
+          <p:cNvPr id="7" name="Text 5"/>
+          <p:cNvSpPr/>
+          <p:nvPr/>
+        </p:nvSpPr>
+        <p:spPr>
+          <a:xfrm>
+            <a:off x="877824" y="1874520"/>
+            <a:ext cx="4206240" cy="1225296"/>
+          </a:xfrm>
+          <a:prstGeom prst="rect">
+            <a:avLst/>
+          </a:prstGeom>
+          <a:noFill/>
+          <a:ln/>
+        </p:spPr>
+        <p:txBody>
+          <a:bodyPr wrap="square" lIns="0" tIns="0" rIns="0" bIns="0" rtlCol="0" anchor="ctr"/>
+          <a:lstStyle/>
+          <a:p>
+            <a:pPr indent="0" marL="0">
+              <a:lnSpc>
+                <a:spcPts val="2100"/>
+              </a:lnSpc>
+              <a:buNone/>
+            </a:pPr>
+            <a:r>
+              <a:rPr lang="en-US" sz="1500" dirty="0">
+                <a:solidFill>
+                  <a:srgbClr val="0B0B0B"/>
+                </a:solidFill>
+                <a:latin typeface="Calibri" pitchFamily="34" charset="0"/>
+                <a:ea typeface="Calibri" pitchFamily="34" charset="-122"/>
+                <a:cs typeface="Calibri" pitchFamily="34" charset="-120"/>
+              </a:rPr>
+              <a:t>my first version</a:t>
+            </a:r>
+            <a:endParaRPr lang="en-US" sz="1500" dirty="0"/>
+          </a:p>
+          <a:p>
+            <a:pPr indent="0" marL="0">
+              <a:lnSpc>
+                <a:spcPts val="2100"/>
+              </a:lnSpc>
+              <a:buNone/>
+            </a:pPr>
+            <a:r>
+              <a:rPr lang="en-US" sz="1500" dirty="0">
+                <a:solidFill>
+                  <a:srgbClr val="0B0B0B"/>
+                </a:solidFill>
+                <a:latin typeface="Calibri" pitchFamily="34" charset="0"/>
+                <a:ea typeface="Calibri" pitchFamily="34" charset="-122"/>
+                <a:cs typeface="Calibri" pitchFamily="34" charset="-120"/>
+              </a:rPr>
+              <a:t>inner-boundary ring</a:t>
+            </a:r>
+            <a:endParaRPr lang="en-US" sz="1500" dirty="0"/>
+          </a:p>
+        </p:txBody>
+      </p:sp>
+      <p:sp>
+        <p:nvSpPr>
+          <p:cNvPr id="8" name="Text 6"/>
+          <p:cNvSpPr/>
+          <p:nvPr/>
+        </p:nvSpPr>
+        <p:spPr>
+          <a:xfrm>
+            <a:off x="5230368" y="1874520"/>
+            <a:ext cx="2103120" cy="1225296"/>
+          </a:xfrm>
+          <a:prstGeom prst="rect">
+            <a:avLst/>
+          </a:prstGeom>
+          <a:noFill/>
+          <a:ln/>
+        </p:spPr>
+        <p:txBody>
+          <a:bodyPr wrap="square" lIns="0" tIns="0" rIns="0" bIns="0" rtlCol="0" anchor="ctr"/>
+          <a:lstStyle/>
+          <a:p>
+            <a:pPr algn="ctr" indent="0" marL="0">
+              <a:buNone/>
+            </a:pPr>
+            <a:r>
+              <a:rPr lang="en-US" sz="4000" b="1" dirty="0">
+                <a:solidFill>
+                  <a:srgbClr val="A32E22"/>
+                </a:solidFill>
+                <a:latin typeface="Cambria" pitchFamily="34" charset="0"/>
+                <a:ea typeface="Cambria" pitchFamily="34" charset="-122"/>
+                <a:cs typeface="Cambria" pitchFamily="34" charset="-120"/>
+              </a:rPr>
+              <a:t>9 of 9</a:t>
+            </a:r>
+            <a:endParaRPr lang="en-US" sz="4000" dirty="0"/>
+          </a:p>
+        </p:txBody>
+      </p:sp>
+      <p:sp>
+        <p:nvSpPr>
+          <p:cNvPr id="9" name="Text 7"/>
+          <p:cNvSpPr/>
+          <p:nvPr/>
+        </p:nvSpPr>
+        <p:spPr>
+          <a:xfrm>
+            <a:off x="7516368" y="1874520"/>
+            <a:ext cx="3840480" cy="1225296"/>
+          </a:xfrm>
+          <a:prstGeom prst="rect">
+            <a:avLst/>
+          </a:prstGeom>
+          <a:noFill/>
+          <a:ln/>
+        </p:spPr>
+        <p:txBody>
+          <a:bodyPr wrap="square" lIns="0" tIns="0" rIns="0" bIns="0" rtlCol="0" anchor="ctr"/>
+          <a:lstStyle/>
+          <a:p>
+            <a:pPr indent="0" marL="0">
+              <a:buNone/>
+            </a:pPr>
+            <a:r>
+              <a:rPr lang="en-US" sz="1400" dirty="0">
+                <a:solidFill>
+                  <a:srgbClr val="52514E"/>
+                </a:solidFill>
+                <a:latin typeface="Calibri" pitchFamily="34" charset="0"/>
+                <a:ea typeface="Calibri" pitchFamily="34" charset="-122"/>
+                <a:cs typeface="Calibri" pitchFamily="34" charset="-120"/>
+              </a:rPr>
+              <a:t>picked the wrong outline</a:t>
+            </a:r>
+            <a:endParaRPr lang="en-US" sz="1400" dirty="0"/>
+          </a:p>
+        </p:txBody>
+      </p:sp>
+      <p:sp>
+        <p:nvSpPr>
+          <p:cNvPr id="10" name="Shape 8"/>
+          <p:cNvSpPr/>
+          <p:nvPr/>
+        </p:nvSpPr>
+        <p:spPr>
+          <a:xfrm>
+            <a:off x="566928" y="3355848"/>
+            <a:ext cx="11057839" cy="1225296"/>
+          </a:xfrm>
+          <a:prstGeom prst="roundRect">
+            <a:avLst>
+              <a:gd name="adj" fmla="val 8955"/>
+            </a:avLst>
+          </a:prstGeom>
+          <a:solidFill>
+            <a:srgbClr val="F4F3EF"/>
+          </a:solidFill>
+          <a:ln/>
+        </p:spPr>
+      </p:sp>
+      <p:sp>
+        <p:nvSpPr>
+          <p:cNvPr id="11" name="Text 9"/>
+          <p:cNvSpPr/>
+          <p:nvPr/>
+        </p:nvSpPr>
+        <p:spPr>
+          <a:xfrm>
+            <a:off x="877824" y="3355848"/>
+            <a:ext cx="4206240" cy="1225296"/>
+          </a:xfrm>
+          <a:prstGeom prst="rect">
+            <a:avLst/>
+          </a:prstGeom>
+          <a:noFill/>
+          <a:ln/>
+        </p:spPr>
+        <p:txBody>
+          <a:bodyPr wrap="square" lIns="0" tIns="0" rIns="0" bIns="0" rtlCol="0" anchor="ctr"/>
+          <a:lstStyle/>
+          <a:p>
+            <a:pPr indent="0" marL="0">
+              <a:lnSpc>
+                <a:spcPts val="2100"/>
+              </a:lnSpc>
+              <a:buNone/>
+            </a:pPr>
+            <a:r>
+              <a:rPr lang="en-US" sz="1500" dirty="0">
+                <a:solidFill>
+                  <a:srgbClr val="0B0B0B"/>
+                </a:solidFill>
+                <a:latin typeface="Calibri" pitchFamily="34" charset="0"/>
+                <a:ea typeface="Calibri" pitchFamily="34" charset="-122"/>
+                <a:cs typeface="Calibri" pitchFamily="34" charset="-120"/>
+              </a:rPr>
+              <a:t>after the fix</a:t>
+            </a:r>
+            <a:endParaRPr lang="en-US" sz="1500" dirty="0"/>
+          </a:p>
+          <a:p>
+            <a:pPr indent="0" marL="0">
+              <a:lnSpc>
+                <a:spcPts val="2100"/>
+              </a:lnSpc>
+              <a:buNone/>
+            </a:pPr>
+            <a:r>
+              <a:rPr lang="en-US" sz="1500" dirty="0">
+                <a:solidFill>
+                  <a:srgbClr val="0B0B0B"/>
+                </a:solidFill>
+                <a:latin typeface="Calibri" pitchFamily="34" charset="0"/>
+                <a:ea typeface="Calibri" pitchFamily="34" charset="-122"/>
+                <a:cs typeface="Calibri" pitchFamily="34" charset="-120"/>
+              </a:rPr>
+              <a:t>marching-squares contour</a:t>
+            </a:r>
+            <a:endParaRPr lang="en-US" sz="1500" dirty="0"/>
+          </a:p>
+        </p:txBody>
+      </p:sp>
+      <p:sp>
+        <p:nvSpPr>
+          <p:cNvPr id="12" name="Text 10"/>
+          <p:cNvSpPr/>
+          <p:nvPr/>
+        </p:nvSpPr>
+        <p:spPr>
+          <a:xfrm>
+            <a:off x="5230368" y="3355848"/>
+            <a:ext cx="2103120" cy="1225296"/>
+          </a:xfrm>
+          <a:prstGeom prst="rect">
+            <a:avLst/>
+          </a:prstGeom>
+          <a:noFill/>
+          <a:ln/>
+        </p:spPr>
+        <p:txBody>
+          <a:bodyPr wrap="square" lIns="0" tIns="0" rIns="0" bIns="0" rtlCol="0" anchor="ctr"/>
+          <a:lstStyle/>
+          <a:p>
+            <a:pPr algn="ctr" indent="0" marL="0">
+              <a:buNone/>
+            </a:pPr>
+            <a:r>
+              <a:rPr lang="en-US" sz="4000" b="1" dirty="0">
+                <a:solidFill>
+                  <a:srgbClr val="1E6F4C"/>
+                </a:solidFill>
+                <a:latin typeface="Cambria" pitchFamily="34" charset="0"/>
+                <a:ea typeface="Cambria" pitchFamily="34" charset="-122"/>
+                <a:cs typeface="Cambria" pitchFamily="34" charset="-120"/>
+              </a:rPr>
+              <a:t>0 of 9</a:t>
+            </a:r>
+            <a:endParaRPr lang="en-US" sz="4000" dirty="0"/>
+          </a:p>
+        </p:txBody>
+      </p:sp>
+      <p:sp>
+        <p:nvSpPr>
+          <p:cNvPr id="13" name="Text 11"/>
+          <p:cNvSpPr/>
+          <p:nvPr/>
+        </p:nvSpPr>
+        <p:spPr>
+          <a:xfrm>
+            <a:off x="7516368" y="3355848"/>
+            <a:ext cx="3840480" cy="1225296"/>
+          </a:xfrm>
+          <a:prstGeom prst="rect">
+            <a:avLst/>
+          </a:prstGeom>
+          <a:noFill/>
+          <a:ln/>
+        </p:spPr>
+        <p:txBody>
+          <a:bodyPr wrap="square" lIns="0" tIns="0" rIns="0" bIns="0" rtlCol="0" anchor="ctr"/>
+          <a:lstStyle/>
+          <a:p>
+            <a:pPr indent="0" marL="0">
+              <a:buNone/>
+            </a:pPr>
+            <a:r>
+              <a:rPr lang="en-US" sz="1400" dirty="0">
+                <a:solidFill>
+                  <a:srgbClr val="52514E"/>
+                </a:solidFill>
+                <a:latin typeface="Calibri" pitchFamily="34" charset="0"/>
+                <a:ea typeface="Calibri" pitchFamily="34" charset="-122"/>
+                <a:cs typeface="Calibri" pitchFamily="34" charset="-120"/>
+              </a:rPr>
+              <a:t>picked correctly</a:t>
+            </a:r>
+            <a:endParaRPr lang="en-US" sz="1400" dirty="0"/>
+          </a:p>
+        </p:txBody>
+      </p:sp>
+      <p:sp>
+        <p:nvSpPr>
+          <p:cNvPr id="14" name="Text 12"/>
+          <p:cNvSpPr/>
+          <p:nvPr/>
+        </p:nvSpPr>
+        <p:spPr>
+          <a:xfrm>
+            <a:off x="566928" y="5138928"/>
+            <a:ext cx="11057839" cy="457200"/>
+          </a:xfrm>
+          <a:prstGeom prst="rect">
+            <a:avLst/>
+          </a:prstGeom>
+          <a:noFill/>
+          <a:ln/>
+        </p:spPr>
+        <p:txBody>
+          <a:bodyPr wrap="square" lIns="0" tIns="0" rIns="0" bIns="0" rtlCol="0" anchor="ctr"/>
+          <a:lstStyle/>
+          <a:p>
+            <a:pPr indent="0" marL="0">
+              <a:buNone/>
+            </a:pPr>
+            <a:r>
+              <a:rPr lang="en-US" sz="1500" b="1" dirty="0">
+                <a:solidFill>
+                  <a:srgbClr val="0B0B0B"/>
+                </a:solidFill>
+                <a:latin typeface="Calibri" pitchFamily="34" charset="0"/>
+                <a:ea typeface="Calibri" pitchFamily="34" charset="-122"/>
+                <a:cs typeface="Calibri" pitchFamily="34" charset="-120"/>
+              </a:rPr>
+              <a:t>The original claim reported the model closer in 48 of 49 fields. It did not survive. I retracted it.</a:t>
+            </a:r>
+            <a:endParaRPr lang="en-US" sz="1500" dirty="0"/>
+          </a:p>
+        </p:txBody>
+      </p:sp>
     </p:spTree>
   </p:cSld>
   <p:clrMapOvr>
@@ -2766,7 +3296,7 @@
                 <a:ea typeface="Calibri" pitchFamily="34" charset="-122"/>
                 <a:cs typeface="Calibri" pitchFamily="34" charset="-120"/>
               </a:rPr>
-              <a:t>10</a:t>
+              <a:t>11</a:t>
             </a:r>
             <a:endParaRPr lang="en-US" sz="1500" dirty="0"/>
           </a:p>
@@ -2805,7 +3335,7 @@
                 <a:ea typeface="Cambria" pitchFamily="34" charset="-122"/>
                 <a:cs typeface="Cambria" pitchFamily="34" charset="-120"/>
               </a:rPr>
-              <a:t>Six experiments, five null</a:t>
+              <a:t>What actually fails</a:t>
             </a:r>
             <a:endParaRPr lang="en-US" sz="2700" dirty="0"/>
           </a:p>
@@ -2844,6 +3374,392 @@
                 <a:ea typeface="Calibri" pitchFamily="34" charset="-122"/>
                 <a:cs typeface="Calibri" pitchFamily="34" charset="-120"/>
               </a:rPr>
+              <a:t>One population: small and faint</a:t>
+            </a:r>
+            <a:endParaRPr lang="en-US" sz="1400" dirty="0"/>
+          </a:p>
+        </p:txBody>
+      </p:sp>
+      <p:pic>
+        <p:nvPicPr>
+          <p:cNvPr id="6" name="Image 0" descr="/Users/tejas/Take_Home_Neo/figures/fig3_what_gets_missed.png">    </p:cNvPr>
+          <p:cNvPicPr>
+            <a:picLocks noChangeAspect="1"/>
+          </p:cNvPicPr>
+          <p:nvPr/>
+        </p:nvPicPr>
+        <p:blipFill>
+          <a:blip r:embed="rId1"/>
+          <a:stretch>
+            <a:fillRect/>
+          </a:stretch>
+        </p:blipFill>
+        <p:spPr>
+          <a:xfrm>
+            <a:off x="566928" y="1866291"/>
+            <a:ext cx="11057839" cy="3856937"/>
+          </a:xfrm>
+          <a:prstGeom prst="rect">
+            <a:avLst/>
+          </a:prstGeom>
+        </p:spPr>
+      </p:pic>
+    </p:spTree>
+  </p:cSld>
+  <p:clrMapOvr>
+    <a:masterClrMapping/>
+  </p:clrMapOvr>
+</p:sld>
+</file>
+
+<file path=ppt/slides/slide12.xml><?xml version="1.0" encoding="utf-8"?>
+<p:sld xmlns:a="http://schemas.openxmlformats.org/drawingml/2006/main" xmlns:r="http://schemas.openxmlformats.org/officeDocument/2006/relationships" xmlns:p="http://schemas.openxmlformats.org/presentationml/2006/main">
+  <p:cSld name="Slide 12">
+    <p:bg>
+      <p:bgPr>
+        <a:solidFill>
+          <a:srgbClr val="FFFFFF"/>
+        </a:solidFill>
+      </p:bgPr>
+    </p:bg>
+    <p:spTree>
+      <p:nvGrpSpPr>
+        <p:cNvPr id="1" name=""/>
+        <p:cNvGrpSpPr/>
+        <p:nvPr/>
+      </p:nvGrpSpPr>
+      <p:grpSpPr>
+        <a:xfrm>
+          <a:off x="0" y="0"/>
+          <a:ext cx="0" cy="0"/>
+          <a:chOff x="0" y="0"/>
+          <a:chExt cx="0" cy="0"/>
+        </a:xfrm>
+      </p:grpSpPr>
+      <p:sp>
+        <p:nvSpPr>
+          <p:cNvPr id="2" name="Shape 0"/>
+          <p:cNvSpPr/>
+          <p:nvPr/>
+        </p:nvSpPr>
+        <p:spPr>
+          <a:xfrm>
+            <a:off x="566928" y="384048"/>
+            <a:ext cx="384048" cy="384048"/>
+          </a:xfrm>
+          <a:prstGeom prst="ellipse">
+            <a:avLst/>
+          </a:prstGeom>
+          <a:solidFill>
+            <a:srgbClr val="EB6834"/>
+          </a:solidFill>
+          <a:ln/>
+        </p:spPr>
+      </p:sp>
+      <p:sp>
+        <p:nvSpPr>
+          <p:cNvPr id="3" name="Text 1"/>
+          <p:cNvSpPr/>
+          <p:nvPr/>
+        </p:nvSpPr>
+        <p:spPr>
+          <a:xfrm>
+            <a:off x="566928" y="384048"/>
+            <a:ext cx="384048" cy="384048"/>
+          </a:xfrm>
+          <a:prstGeom prst="rect">
+            <a:avLst/>
+          </a:prstGeom>
+          <a:noFill/>
+          <a:ln/>
+        </p:spPr>
+        <p:txBody>
+          <a:bodyPr wrap="square" lIns="0" tIns="0" rIns="0" bIns="0" rtlCol="0" anchor="ctr"/>
+          <a:lstStyle/>
+          <a:p>
+            <a:pPr algn="ctr" indent="0" marL="0">
+              <a:buNone/>
+            </a:pPr>
+            <a:r>
+              <a:rPr lang="en-US" sz="1500" b="1" dirty="0">
+                <a:solidFill>
+                  <a:srgbClr val="FFFFFF"/>
+                </a:solidFill>
+                <a:latin typeface="Calibri" pitchFamily="34" charset="0"/>
+                <a:ea typeface="Calibri" pitchFamily="34" charset="-122"/>
+                <a:cs typeface="Calibri" pitchFamily="34" charset="-120"/>
+              </a:rPr>
+              <a:t>12</a:t>
+            </a:r>
+            <a:endParaRPr lang="en-US" sz="1500" dirty="0"/>
+          </a:p>
+        </p:txBody>
+      </p:sp>
+      <p:sp>
+        <p:nvSpPr>
+          <p:cNvPr id="4" name="Text 2"/>
+          <p:cNvSpPr/>
+          <p:nvPr/>
+        </p:nvSpPr>
+        <p:spPr>
+          <a:xfrm>
+            <a:off x="1133856" y="329184"/>
+            <a:ext cx="10490911" cy="512064"/>
+          </a:xfrm>
+          <a:prstGeom prst="rect">
+            <a:avLst/>
+          </a:prstGeom>
+          <a:noFill/>
+          <a:ln/>
+        </p:spPr>
+        <p:txBody>
+          <a:bodyPr wrap="square" lIns="0" tIns="0" rIns="0" bIns="0" rtlCol="0" anchor="ctr"/>
+          <a:lstStyle/>
+          <a:p>
+            <a:pPr indent="0" marL="0">
+              <a:buNone/>
+            </a:pPr>
+            <a:r>
+              <a:rPr lang="en-US" sz="2700" b="1" dirty="0">
+                <a:solidFill>
+                  <a:srgbClr val="0B0B0B"/>
+                </a:solidFill>
+                <a:latin typeface="Cambria" pitchFamily="34" charset="0"/>
+                <a:ea typeface="Cambria" pitchFamily="34" charset="-122"/>
+                <a:cs typeface="Cambria" pitchFamily="34" charset="-120"/>
+              </a:rPr>
+              <a:t>Are those even objects?</a:t>
+            </a:r>
+            <a:endParaRPr lang="en-US" sz="2700" dirty="0"/>
+          </a:p>
+        </p:txBody>
+      </p:sp>
+      <p:sp>
+        <p:nvSpPr>
+          <p:cNvPr id="5" name="Text 3"/>
+          <p:cNvSpPr/>
+          <p:nvPr/>
+        </p:nvSpPr>
+        <p:spPr>
+          <a:xfrm>
+            <a:off x="1133856" y="868680"/>
+            <a:ext cx="10490911" cy="310896"/>
+          </a:xfrm>
+          <a:prstGeom prst="rect">
+            <a:avLst/>
+          </a:prstGeom>
+          <a:noFill/>
+          <a:ln/>
+        </p:spPr>
+        <p:txBody>
+          <a:bodyPr wrap="square" lIns="0" tIns="0" rIns="0" bIns="0" rtlCol="0" anchor="ctr"/>
+          <a:lstStyle/>
+          <a:p>
+            <a:pPr indent="0" marL="0">
+              <a:buNone/>
+            </a:pPr>
+            <a:r>
+              <a:rPr lang="en-US" sz="1400" i="1" dirty="0">
+                <a:solidFill>
+                  <a:srgbClr val="52514E"/>
+                </a:solidFill>
+                <a:latin typeface="Calibri" pitchFamily="34" charset="0"/>
+                <a:ea typeface="Calibri" pitchFamily="34" charset="-122"/>
+                <a:cs typeface="Calibri" pitchFamily="34" charset="-120"/>
+              </a:rPr>
+              <a:t>I couldn’t answer that from a table, so I looked</a:t>
+            </a:r>
+            <a:endParaRPr lang="en-US" sz="1400" dirty="0"/>
+          </a:p>
+        </p:txBody>
+      </p:sp>
+      <p:pic>
+        <p:nvPicPr>
+          <p:cNvPr id="6" name="Image 0" descr="/Users/tejas/Take_Home_Neo/figures/fig6_are_these_nuclei.png">    </p:cNvPr>
+          <p:cNvPicPr>
+            <a:picLocks noChangeAspect="1"/>
+          </p:cNvPicPr>
+          <p:nvPr/>
+        </p:nvPicPr>
+        <p:blipFill>
+          <a:blip r:embed="rId1"/>
+          <a:stretch>
+            <a:fillRect/>
+          </a:stretch>
+        </p:blipFill>
+        <p:spPr>
+          <a:xfrm>
+            <a:off x="3515182" y="1371600"/>
+            <a:ext cx="5161331" cy="4846320"/>
+          </a:xfrm>
+          <a:prstGeom prst="rect">
+            <a:avLst/>
+          </a:prstGeom>
+        </p:spPr>
+      </p:pic>
+    </p:spTree>
+  </p:cSld>
+  <p:clrMapOvr>
+    <a:masterClrMapping/>
+  </p:clrMapOvr>
+</p:sld>
+</file>
+
+<file path=ppt/slides/slide13.xml><?xml version="1.0" encoding="utf-8"?>
+<p:sld xmlns:a="http://schemas.openxmlformats.org/drawingml/2006/main" xmlns:r="http://schemas.openxmlformats.org/officeDocument/2006/relationships" xmlns:p="http://schemas.openxmlformats.org/presentationml/2006/main">
+  <p:cSld name="Slide 13">
+    <p:bg>
+      <p:bgPr>
+        <a:solidFill>
+          <a:srgbClr val="FFFFFF"/>
+        </a:solidFill>
+      </p:bgPr>
+    </p:bg>
+    <p:spTree>
+      <p:nvGrpSpPr>
+        <p:cNvPr id="1" name=""/>
+        <p:cNvGrpSpPr/>
+        <p:nvPr/>
+      </p:nvGrpSpPr>
+      <p:grpSpPr>
+        <a:xfrm>
+          <a:off x="0" y="0"/>
+          <a:ext cx="0" cy="0"/>
+          <a:chOff x="0" y="0"/>
+          <a:chExt cx="0" cy="0"/>
+        </a:xfrm>
+      </p:grpSpPr>
+      <p:sp>
+        <p:nvSpPr>
+          <p:cNvPr id="2" name="Shape 0"/>
+          <p:cNvSpPr/>
+          <p:nvPr/>
+        </p:nvSpPr>
+        <p:spPr>
+          <a:xfrm>
+            <a:off x="566928" y="384048"/>
+            <a:ext cx="384048" cy="384048"/>
+          </a:xfrm>
+          <a:prstGeom prst="ellipse">
+            <a:avLst/>
+          </a:prstGeom>
+          <a:solidFill>
+            <a:srgbClr val="EB6834"/>
+          </a:solidFill>
+          <a:ln/>
+        </p:spPr>
+      </p:sp>
+      <p:sp>
+        <p:nvSpPr>
+          <p:cNvPr id="3" name="Text 1"/>
+          <p:cNvSpPr/>
+          <p:nvPr/>
+        </p:nvSpPr>
+        <p:spPr>
+          <a:xfrm>
+            <a:off x="566928" y="384048"/>
+            <a:ext cx="384048" cy="384048"/>
+          </a:xfrm>
+          <a:prstGeom prst="rect">
+            <a:avLst/>
+          </a:prstGeom>
+          <a:noFill/>
+          <a:ln/>
+        </p:spPr>
+        <p:txBody>
+          <a:bodyPr wrap="square" lIns="0" tIns="0" rIns="0" bIns="0" rtlCol="0" anchor="ctr"/>
+          <a:lstStyle/>
+          <a:p>
+            <a:pPr algn="ctr" indent="0" marL="0">
+              <a:buNone/>
+            </a:pPr>
+            <a:r>
+              <a:rPr lang="en-US" sz="1500" b="1" dirty="0">
+                <a:solidFill>
+                  <a:srgbClr val="FFFFFF"/>
+                </a:solidFill>
+                <a:latin typeface="Calibri" pitchFamily="34" charset="0"/>
+                <a:ea typeface="Calibri" pitchFamily="34" charset="-122"/>
+                <a:cs typeface="Calibri" pitchFamily="34" charset="-120"/>
+              </a:rPr>
+              <a:t>13</a:t>
+            </a:r>
+            <a:endParaRPr lang="en-US" sz="1500" dirty="0"/>
+          </a:p>
+        </p:txBody>
+      </p:sp>
+      <p:sp>
+        <p:nvSpPr>
+          <p:cNvPr id="4" name="Text 2"/>
+          <p:cNvSpPr/>
+          <p:nvPr/>
+        </p:nvSpPr>
+        <p:spPr>
+          <a:xfrm>
+            <a:off x="1133856" y="329184"/>
+            <a:ext cx="10490911" cy="512064"/>
+          </a:xfrm>
+          <a:prstGeom prst="rect">
+            <a:avLst/>
+          </a:prstGeom>
+          <a:noFill/>
+          <a:ln/>
+        </p:spPr>
+        <p:txBody>
+          <a:bodyPr wrap="square" lIns="0" tIns="0" rIns="0" bIns="0" rtlCol="0" anchor="ctr"/>
+          <a:lstStyle/>
+          <a:p>
+            <a:pPr indent="0" marL="0">
+              <a:buNone/>
+            </a:pPr>
+            <a:r>
+              <a:rPr lang="en-US" sz="2700" b="1" dirty="0">
+                <a:solidFill>
+                  <a:srgbClr val="0B0B0B"/>
+                </a:solidFill>
+                <a:latin typeface="Cambria" pitchFamily="34" charset="0"/>
+                <a:ea typeface="Cambria" pitchFamily="34" charset="-122"/>
+                <a:cs typeface="Cambria" pitchFamily="34" charset="-120"/>
+              </a:rPr>
+              <a:t>Six experiments, five null</a:t>
+            </a:r>
+            <a:endParaRPr lang="en-US" sz="2700" dirty="0"/>
+          </a:p>
+        </p:txBody>
+      </p:sp>
+      <p:sp>
+        <p:nvSpPr>
+          <p:cNvPr id="5" name="Text 3"/>
+          <p:cNvSpPr/>
+          <p:nvPr/>
+        </p:nvSpPr>
+        <p:spPr>
+          <a:xfrm>
+            <a:off x="1133856" y="868680"/>
+            <a:ext cx="10490911" cy="310896"/>
+          </a:xfrm>
+          <a:prstGeom prst="rect">
+            <a:avLst/>
+          </a:prstGeom>
+          <a:noFill/>
+          <a:ln/>
+        </p:spPr>
+        <p:txBody>
+          <a:bodyPr wrap="square" lIns="0" tIns="0" rIns="0" bIns="0" rtlCol="0" anchor="ctr"/>
+          <a:lstStyle/>
+          <a:p>
+            <a:pPr indent="0" marL="0">
+              <a:buNone/>
+            </a:pPr>
+            <a:r>
+              <a:rPr lang="en-US" sz="1400" i="1" dirty="0">
+                <a:solidFill>
+                  <a:srgbClr val="52514E"/>
+                </a:solidFill>
+                <a:latin typeface="Calibri" pitchFamily="34" charset="0"/>
+                <a:ea typeface="Calibri" pitchFamily="34" charset="-122"/>
+                <a:cs typeface="Calibri" pitchFamily="34" charset="-120"/>
+              </a:rPr>
               <a:t>Each was motivated by a measurement, and each failure eliminated a cause</a:t>
             </a:r>
             <a:endParaRPr lang="en-US" sz="1400" dirty="0"/>
@@ -2852,7 +3768,7 @@
       </p:sp>
       <p:graphicFrame>
         <p:nvGraphicFramePr>
-          <p:cNvPr id="12" name="Table 0"/>
+          <p:cNvPr id="14" name="Table 0"/>
           <p:cNvGraphicFramePr>
             <a:graphicFrameLocks noGrp="1"/>
           </p:cNvGraphicFramePr>
@@ -2876,7 +3792,7 @@
                 <a:gridCol w="3931920"/>
                 <a:gridCol w="7123176"/>
               </a:tblGrid>
-              <a:tr h="566928">
+              <a:tr h="493776">
                 <a:tc>
                   <a:txBody>
                     <a:bodyPr/>
@@ -3014,7 +3930,7 @@
                   </a:tcPr>
                 </a:tc>
               </a:tr>
-              <a:tr h="566928">
+              <a:tr h="493776">
                 <a:tc>
                   <a:txBody>
                     <a:bodyPr/>
@@ -3152,7 +4068,7 @@
                   </a:tcPr>
                 </a:tc>
               </a:tr>
-              <a:tr h="566928">
+              <a:tr h="493776">
                 <a:tc>
                   <a:txBody>
                     <a:bodyPr/>
@@ -3290,7 +4206,7 @@
                   </a:tcPr>
                 </a:tc>
               </a:tr>
-              <a:tr h="566928">
+              <a:tr h="493776">
                 <a:tc>
                   <a:txBody>
                     <a:bodyPr/>
@@ -3428,7 +4344,7 @@
                   </a:tcPr>
                 </a:tc>
               </a:tr>
-              <a:tr h="566928">
+              <a:tr h="493776">
                 <a:tc>
                   <a:txBody>
                     <a:bodyPr/>
@@ -3566,7 +4482,7 @@
                   </a:tcPr>
                 </a:tc>
               </a:tr>
-              <a:tr h="566928">
+              <a:tr h="493776">
                 <a:tc>
                   <a:txBody>
                     <a:bodyPr/>
@@ -3704,7 +4620,7 @@
                   </a:tcPr>
                 </a:tc>
               </a:tr>
-              <a:tr h="566928">
+              <a:tr h="493776">
                 <a:tc>
                   <a:txBody>
                     <a:bodyPr/>
@@ -3846,6 +4762,81 @@
           </a:graphicData>
         </a:graphic>
       </p:graphicFrame>
+      <p:sp>
+        <p:nvSpPr>
+          <p:cNvPr id="7" name="Shape 4"/>
+          <p:cNvSpPr/>
+          <p:nvPr/>
+        </p:nvSpPr>
+        <p:spPr>
+          <a:xfrm>
+            <a:off x="566928" y="5193792"/>
+            <a:ext cx="11057839" cy="1005840"/>
+          </a:xfrm>
+          <a:prstGeom prst="roundRect">
+            <a:avLst>
+              <a:gd name="adj" fmla="val 10909"/>
+            </a:avLst>
+          </a:prstGeom>
+          <a:solidFill>
+            <a:srgbClr val="F4F3EF"/>
+          </a:solidFill>
+          <a:ln/>
+        </p:spPr>
+      </p:sp>
+      <p:sp>
+        <p:nvSpPr>
+          <p:cNvPr id="8" name="Text 5"/>
+          <p:cNvSpPr/>
+          <p:nvPr/>
+        </p:nvSpPr>
+        <p:spPr>
+          <a:xfrm>
+            <a:off x="877824" y="5193792"/>
+            <a:ext cx="10436047" cy="1005840"/>
+          </a:xfrm>
+          <a:prstGeom prst="rect">
+            <a:avLst/>
+          </a:prstGeom>
+          <a:noFill/>
+          <a:ln/>
+        </p:spPr>
+        <p:txBody>
+          <a:bodyPr wrap="square" lIns="0" tIns="0" rIns="0" bIns="0" rtlCol="0" anchor="ctr"/>
+          <a:lstStyle/>
+          <a:p>
+            <a:pPr indent="0" marL="0">
+              <a:buNone/>
+            </a:pPr>
+            <a:r>
+              <a:rPr lang="en-US" sz="1500" b="1" dirty="0">
+                <a:solidFill>
+                  <a:srgbClr val="0B0B0B"/>
+                </a:solidFill>
+                <a:latin typeface="Calibri" pitchFamily="34" charset="0"/>
+                <a:ea typeface="Calibri" pitchFamily="34" charset="-122"/>
+                <a:cs typeface="Calibri" pitchFamily="34" charset="-120"/>
+              </a:rPr>
+              <a:t>2× upscaling is the one that wasn’t really null. </a:t>
+            </a:r>
+            <a:pPr indent="0" marL="0">
+              <a:buNone/>
+            </a:pPr>
+            <a:r>
+              <a:rPr lang="en-US" sz="1500" dirty="0">
+                <a:solidFill>
+                  <a:srgbClr val="52514E"/>
+                </a:solidFill>
+                <a:latin typeface="Calibri" pitchFamily="34" charset="0"/>
+                <a:ea typeface="Calibri" pitchFamily="34" charset="-122"/>
+                <a:cs typeface="Calibri" pitchFamily="34" charset="-120"/>
+              </a:rPr>
+              <a:t>It left the score flat but moved the error profile — and broke the prediction I’d written down. That’s the next slide.</a:t>
+            </a:r>
+            <a:endParaRPr lang="en-US" sz="1500" dirty="0"/>
+          </a:p>
+        </p:txBody>
+      </p:sp>
     </p:spTree>
   </p:cSld>
   <p:clrMapOvr>
@@ -3854,9 +4845,9 @@
 </p:sld>
 </file>
 
-<file path=ppt/slides/slide12.xml><?xml version="1.0" encoding="utf-8"?>
+<file path=ppt/slides/slide14.xml><?xml version="1.0" encoding="utf-8"?>
 <p:sld xmlns:a="http://schemas.openxmlformats.org/drawingml/2006/main" xmlns:r="http://schemas.openxmlformats.org/officeDocument/2006/relationships" xmlns:p="http://schemas.openxmlformats.org/presentationml/2006/main">
-  <p:cSld name="Slide 12">
+  <p:cSld name="Slide 14">
     <p:bg>
       <p:bgPr>
         <a:solidFill>
@@ -3931,7 +4922,7 @@
                 <a:ea typeface="Calibri" pitchFamily="34" charset="-122"/>
                 <a:cs typeface="Calibri" pitchFamily="34" charset="-120"/>
               </a:rPr>
-              <a:t>11</a:t>
+              <a:t>14</a:t>
             </a:r>
             <a:endParaRPr lang="en-US" sz="1500" dirty="0"/>
           </a:p>
@@ -4513,9 +5504,9 @@
 </p:sld>
 </file>
 
-<file path=ppt/slides/slide13.xml><?xml version="1.0" encoding="utf-8"?>
+<file path=ppt/slides/slide15.xml><?xml version="1.0" encoding="utf-8"?>
 <p:sld xmlns:a="http://schemas.openxmlformats.org/drawingml/2006/main" xmlns:r="http://schemas.openxmlformats.org/officeDocument/2006/relationships" xmlns:p="http://schemas.openxmlformats.org/presentationml/2006/main">
-  <p:cSld name="Slide 13">
+  <p:cSld name="Slide 15">
     <p:bg>
       <p:bgPr>
         <a:solidFill>
@@ -4790,9 +5781,9 @@
 </p:sld>
 </file>
 
-<file path=ppt/slides/slide14.xml><?xml version="1.0" encoding="utf-8"?>
+<file path=ppt/slides/slide16.xml><?xml version="1.0" encoding="utf-8"?>
 <p:sld xmlns:a="http://schemas.openxmlformats.org/drawingml/2006/main" xmlns:r="http://schemas.openxmlformats.org/officeDocument/2006/relationships" xmlns:p="http://schemas.openxmlformats.org/presentationml/2006/main">
-  <p:cSld name="Slide 14">
+  <p:cSld name="Slide 16">
     <p:bg>
       <p:bgPr>
         <a:solidFill>
@@ -4955,7 +5946,7 @@
       </p:sp>
       <p:graphicFrame>
         <p:nvGraphicFramePr>
-          <p:cNvPr id="15" name="Table 0"/>
+          <p:cNvPr id="17" name="Table 0"/>
           <p:cNvGraphicFramePr>
             <a:graphicFrameLocks noGrp="1"/>
           </p:cNvGraphicFramePr>
@@ -6089,9 +7080,9 @@
 </p:sld>
 </file>
 
-<file path=ppt/slides/slide15.xml><?xml version="1.0" encoding="utf-8"?>
+<file path=ppt/slides/slide17.xml><?xml version="1.0" encoding="utf-8"?>
 <p:sld xmlns:a="http://schemas.openxmlformats.org/drawingml/2006/main" xmlns:r="http://schemas.openxmlformats.org/officeDocument/2006/relationships" xmlns:p="http://schemas.openxmlformats.org/presentationml/2006/main">
-  <p:cSld name="Slide 15">
+  <p:cSld name="Slide 17">
     <p:bg>
       <p:bgPr>
         <a:solidFill>
@@ -6323,9 +7314,9 @@
 </p:sld>
 </file>
 
-<file path=ppt/slides/slide16.xml><?xml version="1.0" encoding="utf-8"?>
+<file path=ppt/slides/slide18.xml><?xml version="1.0" encoding="utf-8"?>
 <p:sld xmlns:a="http://schemas.openxmlformats.org/drawingml/2006/main" xmlns:r="http://schemas.openxmlformats.org/officeDocument/2006/relationships" xmlns:p="http://schemas.openxmlformats.org/presentationml/2006/main">
-  <p:cSld name="Slide 16">
+  <p:cSld name="Slide 18">
     <p:bg>
       <p:bgPr>
         <a:solidFill>
@@ -6518,9 +7509,9 @@
 </p:sld>
 </file>
 
-<file path=ppt/slides/slide17.xml><?xml version="1.0" encoding="utf-8"?>
+<file path=ppt/slides/slide19.xml><?xml version="1.0" encoding="utf-8"?>
 <p:sld xmlns:a="http://schemas.openxmlformats.org/drawingml/2006/main" xmlns:r="http://schemas.openxmlformats.org/officeDocument/2006/relationships" xmlns:p="http://schemas.openxmlformats.org/presentationml/2006/main">
-  <p:cSld name="Slide 17">
+  <p:cSld name="Slide 19">
     <p:bg>
       <p:bgPr>
         <a:solidFill>
@@ -6790,7 +7781,7 @@
                 <a:ea typeface="Calibri" pitchFamily="34" charset="-122"/>
                 <a:cs typeface="Calibri" pitchFamily="34" charset="-120"/>
               </a:rPr>
-              <a:t>1</a:t>
+              <a:t>2</a:t>
             </a:r>
             <a:endParaRPr lang="en-US" sz="1500" dirty="0"/>
           </a:p>
@@ -6829,15 +7820,54 @@
                 <a:ea typeface="Cambria" pitchFamily="34" charset="-122"/>
                 <a:cs typeface="Cambria" pitchFamily="34" charset="-120"/>
               </a:rPr>
-              <a:t>The task</a:t>
+              <a:t>Why segment nuclei at all</a:t>
             </a:r>
             <a:endParaRPr lang="en-US" sz="2700" dirty="0"/>
+          </a:p>
+        </p:txBody>
+      </p:sp>
+      <p:sp>
+        <p:nvSpPr>
+          <p:cNvPr id="5" name="Text 3"/>
+          <p:cNvSpPr/>
+          <p:nvPr/>
+        </p:nvSpPr>
+        <p:spPr>
+          <a:xfrm>
+            <a:off x="1133856" y="868680"/>
+            <a:ext cx="10490911" cy="310896"/>
+          </a:xfrm>
+          <a:prstGeom prst="rect">
+            <a:avLst/>
+          </a:prstGeom>
+          <a:noFill/>
+          <a:ln/>
+        </p:spPr>
+        <p:txBody>
+          <a:bodyPr wrap="square" lIns="0" tIns="0" rIns="0" bIns="0" rtlCol="0" anchor="ctr"/>
+          <a:lstStyle/>
+          <a:p>
+            <a:pPr indent="0" marL="0">
+              <a:buNone/>
+            </a:pPr>
+            <a:r>
+              <a:rPr lang="en-US" sz="1400" i="1" dirty="0">
+                <a:solidFill>
+                  <a:srgbClr val="52514E"/>
+                </a:solidFill>
+                <a:latin typeface="Calibri" pitchFamily="34" charset="0"/>
+                <a:ea typeface="Calibri" pitchFamily="34" charset="-122"/>
+                <a:cs typeface="Calibri" pitchFamily="34" charset="-120"/>
+              </a:rPr>
+              <a:t>Biology asks per-cell questions, so the answer has to be per cell</a:t>
+            </a:r>
+            <a:endParaRPr lang="en-US" sz="1400" dirty="0"/>
           </a:p>
         </p:txBody>
       </p:sp>
       <p:pic>
         <p:nvPicPr>
-          <p:cNvPr id="5" name="Image 0" descr="/Users/tejas/Take_Home_Neo/figures/slide2_the_task.png">    </p:cNvPr>
+          <p:cNvPr id="6" name="Image 0" descr="/Users/tejas/Take_Home_Neo/figures/slideA_why_instances.png">    </p:cNvPr>
           <p:cNvPicPr>
             <a:picLocks noChangeAspect="1"/>
           </p:cNvPicPr>
@@ -6851,14 +7881,75 @@
         </p:blipFill>
         <p:spPr>
           <a:xfrm>
-            <a:off x="566928" y="1515978"/>
-            <a:ext cx="11057839" cy="4338109"/>
+            <a:off x="566928" y="1502552"/>
+            <a:ext cx="11057839" cy="3532856"/>
           </a:xfrm>
           <a:prstGeom prst="rect">
             <a:avLst/>
           </a:prstGeom>
         </p:spPr>
       </p:pic>
+      <p:sp>
+        <p:nvSpPr>
+          <p:cNvPr id="7" name="Shape 4"/>
+          <p:cNvSpPr/>
+          <p:nvPr/>
+        </p:nvSpPr>
+        <p:spPr>
+          <a:xfrm>
+            <a:off x="566928" y="5321808"/>
+            <a:ext cx="11057839" cy="841248"/>
+          </a:xfrm>
+          <a:prstGeom prst="roundRect">
+            <a:avLst>
+              <a:gd name="adj" fmla="val 13043"/>
+            </a:avLst>
+          </a:prstGeom>
+          <a:solidFill>
+            <a:srgbClr val="F4F3EF"/>
+          </a:solidFill>
+          <a:ln/>
+        </p:spPr>
+      </p:sp>
+      <p:sp>
+        <p:nvSpPr>
+          <p:cNvPr id="8" name="Text 5"/>
+          <p:cNvSpPr/>
+          <p:nvPr/>
+        </p:nvSpPr>
+        <p:spPr>
+          <a:xfrm>
+            <a:off x="877824" y="5321808"/>
+            <a:ext cx="10436047" cy="841248"/>
+          </a:xfrm>
+          <a:prstGeom prst="rect">
+            <a:avLst/>
+          </a:prstGeom>
+          <a:noFill/>
+          <a:ln/>
+        </p:spPr>
+        <p:txBody>
+          <a:bodyPr wrap="square" lIns="0" tIns="0" rIns="0" bIns="0" rtlCol="0" anchor="ctr"/>
+          <a:lstStyle/>
+          <a:p>
+            <a:pPr indent="0" marL="0">
+              <a:buNone/>
+            </a:pPr>
+            <a:r>
+              <a:rPr lang="en-US" sz="1600" b="1" dirty="0">
+                <a:solidFill>
+                  <a:srgbClr val="0B0B0B"/>
+                </a:solidFill>
+                <a:latin typeface="Calibri" pitchFamily="34" charset="0"/>
+                <a:ea typeface="Calibri" pitchFamily="34" charset="-122"/>
+                <a:cs typeface="Calibri" pitchFamily="34" charset="-120"/>
+              </a:rPr>
+              <a:t>Finding the cells is easy. Telling them apart is the job.</a:t>
+            </a:r>
+            <a:endParaRPr lang="en-US" sz="1600" dirty="0"/>
+          </a:p>
+        </p:txBody>
+      </p:sp>
     </p:spTree>
   </p:cSld>
   <p:clrMapOvr>
@@ -6944,7 +8035,7 @@
                 <a:ea typeface="Calibri" pitchFamily="34" charset="-122"/>
                 <a:cs typeface="Calibri" pitchFamily="34" charset="-120"/>
               </a:rPr>
-              <a:t>2</a:t>
+              <a:t>3</a:t>
             </a:r>
             <a:endParaRPr lang="en-US" sz="1500" dirty="0"/>
           </a:p>
@@ -6983,7 +8074,7 @@
                 <a:ea typeface="Cambria" pitchFamily="34" charset="-122"/>
                 <a:cs typeface="Cambria" pitchFamily="34" charset="-120"/>
               </a:rPr>
-              <a:t>The trap in the data</a:t>
+              <a:t>How people solve it</a:t>
             </a:r>
             <a:endParaRPr lang="en-US" sz="2700" dirty="0"/>
           </a:p>
@@ -7022,7 +8113,7 @@
                 <a:ea typeface="Calibri" pitchFamily="34" charset="-122"/>
                 <a:cs typeface="Calibri" pitchFamily="34" charset="-120"/>
               </a:rPr>
-              <a:t>The masks are a 3-colour graph colouring, not instance IDs</a:t>
+              <a:t>A hand-written rule pipeline, and a pretrained model — I built both</a:t>
             </a:r>
             <a:endParaRPr lang="en-US" sz="1400" dirty="0"/>
           </a:p>
@@ -7030,7 +8121,7 @@
       </p:sp>
       <p:pic>
         <p:nvPicPr>
-          <p:cNvPr id="6" name="Image 0" descr="/Users/tejas/Take_Home_Neo/figures/slide3_the_trap.png">    </p:cNvPr>
+          <p:cNvPr id="6" name="Image 0" descr="/Users/tejas/Take_Home_Neo/figures/slideB_otsu_vs_cellpose.png">    </p:cNvPr>
           <p:cNvPicPr>
             <a:picLocks noChangeAspect="1"/>
           </p:cNvPicPr>
@@ -7044,8 +8135,8 @@
         </p:blipFill>
         <p:spPr>
           <a:xfrm>
-            <a:off x="566928" y="1628533"/>
-            <a:ext cx="11057839" cy="3189455"/>
+            <a:off x="566928" y="1426007"/>
+            <a:ext cx="11057839" cy="3685946"/>
           </a:xfrm>
           <a:prstGeom prst="rect">
             <a:avLst/>
@@ -7060,12 +8151,12 @@
         </p:nvSpPr>
         <p:spPr>
           <a:xfrm>
-            <a:off x="566928" y="5321808"/>
-            <a:ext cx="3484778" cy="841248"/>
+            <a:off x="566928" y="5285232"/>
+            <a:ext cx="5382616" cy="914400"/>
           </a:xfrm>
           <a:prstGeom prst="roundRect">
             <a:avLst>
-              <a:gd name="adj" fmla="val 10870"/>
+              <a:gd name="adj" fmla="val 12000"/>
             </a:avLst>
           </a:prstGeom>
           <a:solidFill>
@@ -7082,8 +8173,8 @@
         </p:nvSpPr>
         <p:spPr>
           <a:xfrm>
-            <a:off x="731520" y="5321808"/>
-            <a:ext cx="1371600" cy="841248"/>
+            <a:off x="822960" y="5285232"/>
+            <a:ext cx="3828136" cy="914400"/>
           </a:xfrm>
           <a:prstGeom prst="rect">
             <a:avLst/>
@@ -7095,34 +8186,115 @@
           <a:bodyPr wrap="square" lIns="0" tIns="0" rIns="0" bIns="0" rtlCol="0" anchor="ctr"/>
           <a:lstStyle/>
           <a:p>
-            <a:pPr algn="l" indent="0" marL="0">
-              <a:buNone/>
-            </a:pPr>
-            <a:r>
-              <a:rPr lang="en-US" sz="3000" b="1" dirty="0">
-                <a:solidFill>
-                  <a:srgbClr val="A32E22"/>
+            <a:pPr indent="0" marL="0">
+              <a:lnSpc>
+                <a:spcPts val="1700"/>
+              </a:lnSpc>
+              <a:buNone/>
+            </a:pPr>
+            <a:r>
+              <a:rPr lang="en-US" sz="1350" b="1" dirty="0">
+                <a:solidFill>
+                  <a:srgbClr val="0B0B0B"/>
+                </a:solidFill>
+                <a:latin typeface="Calibri" pitchFamily="34" charset="0"/>
+                <a:ea typeface="Calibri" pitchFamily="34" charset="-122"/>
+                <a:cs typeface="Calibri" pitchFamily="34" charset="-120"/>
+              </a:rPr>
+              <a:t>Otsu → watershed  </a:t>
+            </a:r>
+            <a:pPr indent="0" marL="0">
+              <a:lnSpc>
+                <a:spcPts val="1700"/>
+              </a:lnSpc>
+              <a:buNone/>
+            </a:pPr>
+            <a:r>
+              <a:rPr lang="en-US" sz="1350" dirty="0">
+                <a:solidFill>
+                  <a:srgbClr val="52514E"/>
+                </a:solidFill>
+                <a:latin typeface="Calibri" pitchFamily="34" charset="0"/>
+                <a:ea typeface="Calibri" pitchFamily="34" charset="-122"/>
+                <a:cs typeface="Calibri" pitchFamily="34" charset="-120"/>
+              </a:rPr>
+              <a:t>splits nuclei on shape</a:t>
+            </a:r>
+            <a:endParaRPr lang="en-US" sz="1350" dirty="0"/>
+          </a:p>
+        </p:txBody>
+      </p:sp>
+      <p:sp>
+        <p:nvSpPr>
+          <p:cNvPr id="9" name="Text 6"/>
+          <p:cNvSpPr/>
+          <p:nvPr/>
+        </p:nvSpPr>
+        <p:spPr>
+          <a:xfrm>
+            <a:off x="4486504" y="5285232"/>
+            <a:ext cx="1234440" cy="914400"/>
+          </a:xfrm>
+          <a:prstGeom prst="rect">
+            <a:avLst/>
+          </a:prstGeom>
+          <a:noFill/>
+          <a:ln/>
+        </p:spPr>
+        <p:txBody>
+          <a:bodyPr wrap="square" lIns="0" tIns="0" rIns="0" bIns="0" rtlCol="0" anchor="ctr"/>
+          <a:lstStyle/>
+          <a:p>
+            <a:pPr algn="r" indent="0" marL="0">
+              <a:buNone/>
+            </a:pPr>
+            <a:r>
+              <a:rPr lang="en-US" sz="2600" b="1" dirty="0">
+                <a:solidFill>
+                  <a:srgbClr val="7B4FC4"/>
                 </a:solidFill>
                 <a:latin typeface="Cambria" pitchFamily="34" charset="0"/>
                 <a:ea typeface="Cambria" pitchFamily="34" charset="-122"/>
                 <a:cs typeface="Cambria" pitchFamily="34" charset="-120"/>
               </a:rPr>
-              <a:t>3</a:t>
-            </a:r>
-            <a:endParaRPr lang="en-US" sz="3000" dirty="0"/>
-          </a:p>
-        </p:txBody>
-      </p:sp>
-      <p:sp>
-        <p:nvSpPr>
-          <p:cNvPr id="9" name="Text 6"/>
-          <p:cNvSpPr/>
-          <p:nvPr/>
-        </p:nvSpPr>
-        <p:spPr>
-          <a:xfrm>
-            <a:off x="2048256" y="5321808"/>
-            <a:ext cx="1884578" cy="841248"/>
+              <a:t>0.555</a:t>
+            </a:r>
+            <a:endParaRPr lang="en-US" sz="2600" dirty="0"/>
+          </a:p>
+        </p:txBody>
+      </p:sp>
+      <p:sp>
+        <p:nvSpPr>
+          <p:cNvPr id="10" name="Shape 7"/>
+          <p:cNvSpPr/>
+          <p:nvPr/>
+        </p:nvSpPr>
+        <p:spPr>
+          <a:xfrm>
+            <a:off x="6242152" y="5285232"/>
+            <a:ext cx="5382616" cy="914400"/>
+          </a:xfrm>
+          <a:prstGeom prst="roundRect">
+            <a:avLst>
+              <a:gd name="adj" fmla="val 12000"/>
+            </a:avLst>
+          </a:prstGeom>
+          <a:solidFill>
+            <a:srgbClr val="F4F3EF"/>
+          </a:solidFill>
+          <a:ln/>
+        </p:spPr>
+      </p:sp>
+      <p:sp>
+        <p:nvSpPr>
+          <p:cNvPr id="11" name="Text 8"/>
+          <p:cNvSpPr/>
+          <p:nvPr/>
+        </p:nvSpPr>
+        <p:spPr>
+          <a:xfrm>
+            <a:off x="6498184" y="5285232"/>
+            <a:ext cx="3828136" cy="914400"/>
           </a:xfrm>
           <a:prstGeom prst="rect">
             <a:avLst/>
@@ -7134,56 +8306,54 @@
           <a:bodyPr wrap="square" lIns="0" tIns="0" rIns="0" bIns="0" rtlCol="0" anchor="ctr"/>
           <a:lstStyle/>
           <a:p>
-            <a:pPr algn="l" indent="0" marL="0">
-              <a:buNone/>
-            </a:pPr>
-            <a:r>
-              <a:rPr lang="en-US" sz="1300" dirty="0">
-                <a:solidFill>
-                  <a:srgbClr val="52514E"/>
+            <a:pPr indent="0" marL="0">
+              <a:lnSpc>
+                <a:spcPts val="1700"/>
+              </a:lnSpc>
+              <a:buNone/>
+            </a:pPr>
+            <a:r>
+              <a:rPr lang="en-US" sz="1350" b="1" dirty="0">
+                <a:solidFill>
+                  <a:srgbClr val="0B0B0B"/>
                 </a:solidFill>
                 <a:latin typeface="Calibri" pitchFamily="34" charset="0"/>
                 <a:ea typeface="Calibri" pitchFamily="34" charset="-122"/>
                 <a:cs typeface="Calibri" pitchFamily="34" charset="-120"/>
               </a:rPr>
-              <a:t>read as IDs</a:t>
-            </a:r>
-            <a:endParaRPr lang="en-US" sz="1300" dirty="0"/>
-          </a:p>
-        </p:txBody>
-      </p:sp>
-      <p:sp>
-        <p:nvSpPr>
-          <p:cNvPr id="10" name="Shape 7"/>
-          <p:cNvSpPr/>
-          <p:nvPr/>
-        </p:nvSpPr>
-        <p:spPr>
-          <a:xfrm>
-            <a:off x="4252874" y="5321808"/>
-            <a:ext cx="3484778" cy="841248"/>
-          </a:xfrm>
-          <a:prstGeom prst="roundRect">
-            <a:avLst>
-              <a:gd name="adj" fmla="val 10870"/>
-            </a:avLst>
-          </a:prstGeom>
-          <a:solidFill>
-            <a:srgbClr val="F4F3EF"/>
-          </a:solidFill>
-          <a:ln/>
-        </p:spPr>
-      </p:sp>
-      <p:sp>
-        <p:nvSpPr>
-          <p:cNvPr id="11" name="Text 8"/>
-          <p:cNvSpPr/>
-          <p:nvPr/>
-        </p:nvSpPr>
-        <p:spPr>
-          <a:xfrm>
-            <a:off x="4417466" y="5321808"/>
-            <a:ext cx="1371600" cy="841248"/>
+              <a:t>Cellpose-SAM  </a:t>
+            </a:r>
+            <a:pPr indent="0" marL="0">
+              <a:lnSpc>
+                <a:spcPts val="1700"/>
+              </a:lnSpc>
+              <a:buNone/>
+            </a:pPr>
+            <a:r>
+              <a:rPr lang="en-US" sz="1350" dirty="0">
+                <a:solidFill>
+                  <a:srgbClr val="52514E"/>
+                </a:solidFill>
+                <a:latin typeface="Calibri" pitchFamily="34" charset="0"/>
+                <a:ea typeface="Calibri" pitchFamily="34" charset="-122"/>
+                <a:cs typeface="Calibri" pitchFamily="34" charset="-120"/>
+              </a:rPr>
+              <a:t>learns where cells flow</a:t>
+            </a:r>
+            <a:endParaRPr lang="en-US" sz="1350" dirty="0"/>
+          </a:p>
+        </p:txBody>
+      </p:sp>
+      <p:sp>
+        <p:nvSpPr>
+          <p:cNvPr id="12" name="Text 9"/>
+          <p:cNvSpPr/>
+          <p:nvPr/>
+        </p:nvSpPr>
+        <p:spPr>
+          <a:xfrm>
+            <a:off x="10161727" y="5285232"/>
+            <a:ext cx="1234440" cy="914400"/>
           </a:xfrm>
           <a:prstGeom prst="rect">
             <a:avLst/>
@@ -7195,160 +8365,21 @@
           <a:bodyPr wrap="square" lIns="0" tIns="0" rIns="0" bIns="0" rtlCol="0" anchor="ctr"/>
           <a:lstStyle/>
           <a:p>
-            <a:pPr algn="l" indent="0" marL="0">
-              <a:buNone/>
-            </a:pPr>
-            <a:r>
-              <a:rPr lang="en-US" sz="3000" b="1" dirty="0">
-                <a:solidFill>
-                  <a:srgbClr val="EB6834"/>
+            <a:pPr algn="r" indent="0" marL="0">
+              <a:buNone/>
+            </a:pPr>
+            <a:r>
+              <a:rPr lang="en-US" sz="2600" b="1" dirty="0">
+                <a:solidFill>
+                  <a:srgbClr val="2A78D6"/>
                 </a:solidFill>
                 <a:latin typeface="Cambria" pitchFamily="34" charset="0"/>
                 <a:ea typeface="Cambria" pitchFamily="34" charset="-122"/>
                 <a:cs typeface="Cambria" pitchFamily="34" charset="-120"/>
               </a:rPr>
-              <a:t>100</a:t>
-            </a:r>
-            <a:endParaRPr lang="en-US" sz="3000" dirty="0"/>
-          </a:p>
-        </p:txBody>
-      </p:sp>
-      <p:sp>
-        <p:nvSpPr>
-          <p:cNvPr id="12" name="Text 9"/>
-          <p:cNvSpPr/>
-          <p:nvPr/>
-        </p:nvSpPr>
-        <p:spPr>
-          <a:xfrm>
-            <a:off x="5734202" y="5321808"/>
-            <a:ext cx="1884578" cy="841248"/>
-          </a:xfrm>
-          <a:prstGeom prst="rect">
-            <a:avLst/>
-          </a:prstGeom>
-          <a:noFill/>
-          <a:ln/>
-        </p:spPr>
-        <p:txBody>
-          <a:bodyPr wrap="square" lIns="0" tIns="0" rIns="0" bIns="0" rtlCol="0" anchor="ctr"/>
-          <a:lstStyle/>
-          <a:p>
-            <a:pPr algn="l" indent="0" marL="0">
-              <a:buNone/>
-            </a:pPr>
-            <a:r>
-              <a:rPr lang="en-US" sz="1300" dirty="0">
-                <a:solidFill>
-                  <a:srgbClr val="52514E"/>
-                </a:solidFill>
-                <a:latin typeface="Calibri" pitchFamily="34" charset="0"/>
-                <a:ea typeface="Calibri" pitchFamily="34" charset="-122"/>
-                <a:cs typeface="Calibri" pitchFamily="34" charset="-120"/>
-              </a:rPr>
-              <a:t>binarise + label</a:t>
-            </a:r>
-            <a:endParaRPr lang="en-US" sz="1300" dirty="0"/>
-          </a:p>
-        </p:txBody>
-      </p:sp>
-      <p:sp>
-        <p:nvSpPr>
-          <p:cNvPr id="13" name="Shape 10"/>
-          <p:cNvSpPr/>
-          <p:nvPr/>
-        </p:nvSpPr>
-        <p:spPr>
-          <a:xfrm>
-            <a:off x="7938821" y="5321808"/>
-            <a:ext cx="3484778" cy="841248"/>
-          </a:xfrm>
-          <a:prstGeom prst="roundRect">
-            <a:avLst>
-              <a:gd name="adj" fmla="val 10870"/>
-            </a:avLst>
-          </a:prstGeom>
-          <a:solidFill>
-            <a:srgbClr val="F4F3EF"/>
-          </a:solidFill>
-          <a:ln/>
-        </p:spPr>
-      </p:sp>
-      <p:sp>
-        <p:nvSpPr>
-          <p:cNvPr id="14" name="Text 11"/>
-          <p:cNvSpPr/>
-          <p:nvPr/>
-        </p:nvSpPr>
-        <p:spPr>
-          <a:xfrm>
-            <a:off x="8103413" y="5321808"/>
-            <a:ext cx="1371600" cy="841248"/>
-          </a:xfrm>
-          <a:prstGeom prst="rect">
-            <a:avLst/>
-          </a:prstGeom>
-          <a:noFill/>
-          <a:ln/>
-        </p:spPr>
-        <p:txBody>
-          <a:bodyPr wrap="square" lIns="0" tIns="0" rIns="0" bIns="0" rtlCol="0" anchor="ctr"/>
-          <a:lstStyle/>
-          <a:p>
-            <a:pPr algn="l" indent="0" marL="0">
-              <a:buNone/>
-            </a:pPr>
-            <a:r>
-              <a:rPr lang="en-US" sz="3000" b="1" dirty="0">
-                <a:solidFill>
-                  <a:srgbClr val="1E6F4C"/>
-                </a:solidFill>
-                <a:latin typeface="Cambria" pitchFamily="34" charset="0"/>
-                <a:ea typeface="Cambria" pitchFamily="34" charset="-122"/>
-                <a:cs typeface="Cambria" pitchFamily="34" charset="-120"/>
-              </a:rPr>
-              <a:t>118</a:t>
-            </a:r>
-            <a:endParaRPr lang="en-US" sz="3000" dirty="0"/>
-          </a:p>
-        </p:txBody>
-      </p:sp>
-      <p:sp>
-        <p:nvSpPr>
-          <p:cNvPr id="15" name="Text 12"/>
-          <p:cNvSpPr/>
-          <p:nvPr/>
-        </p:nvSpPr>
-        <p:spPr>
-          <a:xfrm>
-            <a:off x="9420149" y="5321808"/>
-            <a:ext cx="1884578" cy="841248"/>
-          </a:xfrm>
-          <a:prstGeom prst="rect">
-            <a:avLst/>
-          </a:prstGeom>
-          <a:noFill/>
-          <a:ln/>
-        </p:spPr>
-        <p:txBody>
-          <a:bodyPr wrap="square" lIns="0" tIns="0" rIns="0" bIns="0" rtlCol="0" anchor="ctr"/>
-          <a:lstStyle/>
-          <a:p>
-            <a:pPr algn="l" indent="0" marL="0">
-              <a:buNone/>
-            </a:pPr>
-            <a:r>
-              <a:rPr lang="en-US" sz="1300" dirty="0">
-                <a:solidFill>
-                  <a:srgbClr val="52514E"/>
-                </a:solidFill>
-                <a:latin typeface="Calibri" pitchFamily="34" charset="0"/>
-                <a:ea typeface="Calibri" pitchFamily="34" charset="-122"/>
-                <a:cs typeface="Calibri" pitchFamily="34" charset="-120"/>
-              </a:rPr>
-              <a:t>decoded correctly</a:t>
-            </a:r>
-            <a:endParaRPr lang="en-US" sz="1300" dirty="0"/>
+              <a:t>0.807</a:t>
+            </a:r>
+            <a:endParaRPr lang="en-US" sz="2600" dirty="0"/>
           </a:p>
         </p:txBody>
       </p:sp>
@@ -7437,7 +8468,7 @@
                 <a:ea typeface="Calibri" pitchFamily="34" charset="-122"/>
                 <a:cs typeface="Calibri" pitchFamily="34" charset="-120"/>
               </a:rPr>
-              <a:t>3</a:t>
+              <a:t>4</a:t>
             </a:r>
             <a:endParaRPr lang="en-US" sz="1500" dirty="0"/>
           </a:p>
@@ -7476,36 +8507,701 @@
                 <a:ea typeface="Cambria" pitchFamily="34" charset="-122"/>
                 <a:cs typeface="Cambria" pitchFamily="34" charset="-120"/>
               </a:rPr>
-              <a:t>What I built</a:t>
+              <a:t>What I chose to do with it</a:t>
             </a:r>
             <a:endParaRPr lang="en-US" sz="2700" dirty="0"/>
           </a:p>
         </p:txBody>
       </p:sp>
-      <p:pic>
-        <p:nvPicPr>
-          <p:cNvPr id="5" name="Image 0" descr="/Users/tejas/Take_Home_Neo/figures/slide4_what_i_built.png">    </p:cNvPr>
-          <p:cNvPicPr>
-            <a:picLocks noChangeAspect="1"/>
-          </p:cNvPicPr>
-          <p:nvPr/>
-        </p:nvPicPr>
-        <p:blipFill>
-          <a:blip r:embed="rId1"/>
-          <a:stretch>
-            <a:fillRect/>
-          </a:stretch>
-        </p:blipFill>
-        <p:spPr>
-          <a:xfrm>
-            <a:off x="566928" y="1917112"/>
-            <a:ext cx="11057839" cy="2932336"/>
-          </a:xfrm>
-          <a:prstGeom prst="rect">
-            <a:avLst/>
-          </a:prstGeom>
-        </p:spPr>
-      </p:pic>
+      <p:sp>
+        <p:nvSpPr>
+          <p:cNvPr id="5" name="Text 3"/>
+          <p:cNvSpPr/>
+          <p:nvPr/>
+        </p:nvSpPr>
+        <p:spPr>
+          <a:xfrm>
+            <a:off x="1133856" y="868680"/>
+            <a:ext cx="10490911" cy="310896"/>
+          </a:xfrm>
+          <a:prstGeom prst="rect">
+            <a:avLst/>
+          </a:prstGeom>
+          <a:noFill/>
+          <a:ln/>
+        </p:spPr>
+        <p:txBody>
+          <a:bodyPr wrap="square" lIns="0" tIns="0" rIns="0" bIns="0" rtlCol="0" anchor="ctr"/>
+          <a:lstStyle/>
+          <a:p>
+            <a:pPr indent="0" marL="0">
+              <a:buNone/>
+            </a:pPr>
+            <a:r>
+              <a:rPr lang="en-US" sz="1400" i="1" dirty="0">
+                <a:solidFill>
+                  <a:srgbClr val="52514E"/>
+                </a:solidFill>
+                <a:latin typeface="Calibri" pitchFamily="34" charset="0"/>
+                <a:ea typeface="Calibri" pitchFamily="34" charset="-122"/>
+                <a:cs typeface="Calibri" pitchFamily="34" charset="-120"/>
+              </a:rPr>
+              <a:t>200 fields · 100 for training · ~118 nuclei each · scored by mean AP over IoU 0.50 : 0.95</a:t>
+            </a:r>
+            <a:endParaRPr lang="en-US" sz="1400" dirty="0"/>
+          </a:p>
+        </p:txBody>
+      </p:sp>
+      <p:sp>
+        <p:nvSpPr>
+          <p:cNvPr id="6" name="Shape 4"/>
+          <p:cNvSpPr/>
+          <p:nvPr/>
+        </p:nvSpPr>
+        <p:spPr>
+          <a:xfrm>
+            <a:off x="566928" y="1389888"/>
+            <a:ext cx="5382616" cy="3127248"/>
+          </a:xfrm>
+          <a:prstGeom prst="roundRect">
+            <a:avLst>
+              <a:gd name="adj" fmla="val 3509"/>
+            </a:avLst>
+          </a:prstGeom>
+          <a:solidFill>
+            <a:srgbClr val="E8F1FC"/>
+          </a:solidFill>
+          <a:ln/>
+        </p:spPr>
+      </p:sp>
+      <p:sp>
+        <p:nvSpPr>
+          <p:cNvPr id="7" name="Text 5"/>
+          <p:cNvSpPr/>
+          <p:nvPr/>
+        </p:nvSpPr>
+        <p:spPr>
+          <a:xfrm>
+            <a:off x="804672" y="1517904"/>
+            <a:ext cx="4907128" cy="347472"/>
+          </a:xfrm>
+          <a:prstGeom prst="rect">
+            <a:avLst/>
+          </a:prstGeom>
+          <a:noFill/>
+          <a:ln/>
+        </p:spPr>
+        <p:txBody>
+          <a:bodyPr wrap="square" lIns="0" tIns="0" rIns="0" bIns="0" rtlCol="0" anchor="ctr"/>
+          <a:lstStyle/>
+          <a:p>
+            <a:pPr indent="0" marL="0">
+              <a:buNone/>
+            </a:pPr>
+            <a:r>
+              <a:rPr lang="en-US" sz="1500" b="1" dirty="0">
+                <a:solidFill>
+                  <a:srgbClr val="2A78D6"/>
+                </a:solidFill>
+                <a:latin typeface="Calibri" pitchFamily="34" charset="0"/>
+                <a:ea typeface="Calibri" pitchFamily="34" charset="-122"/>
+                <a:cs typeface="Calibri" pitchFamily="34" charset="-120"/>
+              </a:rPr>
+              <a:t>What I chose to build</a:t>
+            </a:r>
+            <a:endParaRPr lang="en-US" sz="1500" dirty="0"/>
+          </a:p>
+        </p:txBody>
+      </p:sp>
+      <p:sp>
+        <p:nvSpPr>
+          <p:cNvPr id="8" name="Text 6"/>
+          <p:cNvSpPr/>
+          <p:nvPr/>
+        </p:nvSpPr>
+        <p:spPr>
+          <a:xfrm>
+            <a:off x="804672" y="1956816"/>
+            <a:ext cx="4907128" cy="585216"/>
+          </a:xfrm>
+          <a:prstGeom prst="rect">
+            <a:avLst/>
+          </a:prstGeom>
+          <a:noFill/>
+          <a:ln/>
+        </p:spPr>
+        <p:txBody>
+          <a:bodyPr wrap="square" lIns="0" tIns="0" rIns="0" bIns="0" rtlCol="0" anchor="t"/>
+          <a:lstStyle/>
+          <a:p>
+            <a:pPr indent="0" marL="0">
+              <a:lnSpc>
+                <a:spcPts val="1600"/>
+              </a:lnSpc>
+              <a:buNone/>
+            </a:pPr>
+            <a:r>
+              <a:rPr lang="en-US" sz="1250" b="1" dirty="0">
+                <a:solidFill>
+                  <a:srgbClr val="0B0B0B"/>
+                </a:solidFill>
+                <a:latin typeface="Calibri" pitchFamily="34" charset="0"/>
+                <a:ea typeface="Calibri" pitchFamily="34" charset="-122"/>
+                <a:cs typeface="Calibri" pitchFamily="34" charset="-120"/>
+              </a:rPr>
+              <a:t>Decode the ground truth correctly  </a:t>
+            </a:r>
+            <a:pPr indent="0" marL="0">
+              <a:lnSpc>
+                <a:spcPts val="1600"/>
+              </a:lnSpc>
+              <a:buNone/>
+            </a:pPr>
+            <a:r>
+              <a:rPr lang="en-US" sz="1250" dirty="0">
+                <a:solidFill>
+                  <a:srgbClr val="52514E"/>
+                </a:solidFill>
+                <a:latin typeface="Calibri" pitchFamily="34" charset="0"/>
+                <a:ea typeface="Calibri" pitchFamily="34" charset="-122"/>
+                <a:cs typeface="Calibri" pitchFamily="34" charset="-120"/>
+              </a:rPr>
+              <a:t>Every downstream number is meaningless without it.</a:t>
+            </a:r>
+            <a:endParaRPr lang="en-US" sz="1250" dirty="0"/>
+          </a:p>
+        </p:txBody>
+      </p:sp>
+      <p:sp>
+        <p:nvSpPr>
+          <p:cNvPr id="9" name="Text 7"/>
+          <p:cNvSpPr/>
+          <p:nvPr/>
+        </p:nvSpPr>
+        <p:spPr>
+          <a:xfrm>
+            <a:off x="804672" y="2578608"/>
+            <a:ext cx="4907128" cy="585216"/>
+          </a:xfrm>
+          <a:prstGeom prst="rect">
+            <a:avLst/>
+          </a:prstGeom>
+          <a:noFill/>
+          <a:ln/>
+        </p:spPr>
+        <p:txBody>
+          <a:bodyPr wrap="square" lIns="0" tIns="0" rIns="0" bIns="0" rtlCol="0" anchor="t"/>
+          <a:lstStyle/>
+          <a:p>
+            <a:pPr indent="0" marL="0">
+              <a:lnSpc>
+                <a:spcPts val="1600"/>
+              </a:lnSpc>
+              <a:buNone/>
+            </a:pPr>
+            <a:r>
+              <a:rPr lang="en-US" sz="1250" b="1" dirty="0">
+                <a:solidFill>
+                  <a:srgbClr val="0B0B0B"/>
+                </a:solidFill>
+                <a:latin typeface="Calibri" pitchFamily="34" charset="0"/>
+                <a:ea typeface="Calibri" pitchFamily="34" charset="-122"/>
+                <a:cs typeface="Calibri" pitchFamily="34" charset="-120"/>
+              </a:rPr>
+              <a:t>Cellpose-SAM, pretrained, zero-shot  </a:t>
+            </a:r>
+            <a:pPr indent="0" marL="0">
+              <a:lnSpc>
+                <a:spcPts val="1600"/>
+              </a:lnSpc>
+              <a:buNone/>
+            </a:pPr>
+            <a:r>
+              <a:rPr lang="en-US" sz="1250" dirty="0">
+                <a:solidFill>
+                  <a:srgbClr val="52514E"/>
+                </a:solidFill>
+                <a:latin typeface="Calibri" pitchFamily="34" charset="0"/>
+                <a:ea typeface="Calibri" pitchFamily="34" charset="-122"/>
+                <a:cs typeface="Calibri" pitchFamily="34" charset="-120"/>
+              </a:rPr>
+              <a:t>The current state of the art for this modality.</a:t>
+            </a:r>
+            <a:endParaRPr lang="en-US" sz="1250" dirty="0"/>
+          </a:p>
+        </p:txBody>
+      </p:sp>
+      <p:sp>
+        <p:nvSpPr>
+          <p:cNvPr id="10" name="Text 8"/>
+          <p:cNvSpPr/>
+          <p:nvPr/>
+        </p:nvSpPr>
+        <p:spPr>
+          <a:xfrm>
+            <a:off x="804672" y="3200400"/>
+            <a:ext cx="4907128" cy="585216"/>
+          </a:xfrm>
+          <a:prstGeom prst="rect">
+            <a:avLst/>
+          </a:prstGeom>
+          <a:noFill/>
+          <a:ln/>
+        </p:spPr>
+        <p:txBody>
+          <a:bodyPr wrap="square" lIns="0" tIns="0" rIns="0" bIns="0" rtlCol="0" anchor="t"/>
+          <a:lstStyle/>
+          <a:p>
+            <a:pPr indent="0" marL="0">
+              <a:lnSpc>
+                <a:spcPts val="1600"/>
+              </a:lnSpc>
+              <a:buNone/>
+            </a:pPr>
+            <a:r>
+              <a:rPr lang="en-US" sz="1250" b="1" dirty="0">
+                <a:solidFill>
+                  <a:srgbClr val="0B0B0B"/>
+                </a:solidFill>
+                <a:latin typeface="Calibri" pitchFamily="34" charset="0"/>
+                <a:ea typeface="Calibri" pitchFamily="34" charset="-122"/>
+                <a:cs typeface="Calibri" pitchFamily="34" charset="-120"/>
+              </a:rPr>
+              <a:t>A 72× evaluation cache  </a:t>
+            </a:r>
+            <a:pPr indent="0" marL="0">
+              <a:lnSpc>
+                <a:spcPts val="1600"/>
+              </a:lnSpc>
+              <a:buNone/>
+            </a:pPr>
+            <a:r>
+              <a:rPr lang="en-US" sz="1250" dirty="0">
+                <a:solidFill>
+                  <a:srgbClr val="52514E"/>
+                </a:solidFill>
+                <a:latin typeface="Calibri" pitchFamily="34" charset="0"/>
+                <a:ea typeface="Calibri" pitchFamily="34" charset="-122"/>
+                <a:cs typeface="Calibri" pitchFamily="34" charset="-120"/>
+              </a:rPr>
+              <a:t>Turned parameter search and ablations from hours into minutes.</a:t>
+            </a:r>
+            <a:endParaRPr lang="en-US" sz="1250" dirty="0"/>
+          </a:p>
+        </p:txBody>
+      </p:sp>
+      <p:sp>
+        <p:nvSpPr>
+          <p:cNvPr id="11" name="Text 9"/>
+          <p:cNvSpPr/>
+          <p:nvPr/>
+        </p:nvSpPr>
+        <p:spPr>
+          <a:xfrm>
+            <a:off x="804672" y="3822192"/>
+            <a:ext cx="4907128" cy="585216"/>
+          </a:xfrm>
+          <a:prstGeom prst="rect">
+            <a:avLst/>
+          </a:prstGeom>
+          <a:noFill/>
+          <a:ln/>
+        </p:spPr>
+        <p:txBody>
+          <a:bodyPr wrap="square" lIns="0" tIns="0" rIns="0" bIns="0" rtlCol="0" anchor="t"/>
+          <a:lstStyle/>
+          <a:p>
+            <a:pPr indent="0" marL="0">
+              <a:lnSpc>
+                <a:spcPts val="1600"/>
+              </a:lnSpc>
+              <a:buNone/>
+            </a:pPr>
+            <a:r>
+              <a:rPr lang="en-US" sz="1250" b="1" dirty="0">
+                <a:solidFill>
+                  <a:srgbClr val="0B0B0B"/>
+                </a:solidFill>
+                <a:latin typeface="Calibri" pitchFamily="34" charset="0"/>
+                <a:ea typeface="Calibri" pitchFamily="34" charset="-122"/>
+                <a:cs typeface="Calibri" pitchFamily="34" charset="-120"/>
+              </a:rPr>
+              <a:t>Attribute the failures  </a:t>
+            </a:r>
+            <a:pPr indent="0" marL="0">
+              <a:lnSpc>
+                <a:spcPts val="1600"/>
+              </a:lnSpc>
+              <a:buNone/>
+            </a:pPr>
+            <a:r>
+              <a:rPr lang="en-US" sz="1250" dirty="0">
+                <a:solidFill>
+                  <a:srgbClr val="52514E"/>
+                </a:solidFill>
+                <a:latin typeface="Calibri" pitchFamily="34" charset="0"/>
+                <a:ea typeface="Calibri" pitchFamily="34" charset="-122"/>
+                <a:cs typeface="Calibri" pitchFamily="34" charset="-120"/>
+              </a:rPr>
+              <a:t>Where the score actually goes — the bulk of the work.</a:t>
+            </a:r>
+            <a:endParaRPr lang="en-US" sz="1250" dirty="0"/>
+          </a:p>
+        </p:txBody>
+      </p:sp>
+      <p:sp>
+        <p:nvSpPr>
+          <p:cNvPr id="12" name="Shape 10"/>
+          <p:cNvSpPr/>
+          <p:nvPr/>
+        </p:nvSpPr>
+        <p:spPr>
+          <a:xfrm>
+            <a:off x="6242152" y="1389888"/>
+            <a:ext cx="5382616" cy="3127248"/>
+          </a:xfrm>
+          <a:prstGeom prst="roundRect">
+            <a:avLst>
+              <a:gd name="adj" fmla="val 3509"/>
+            </a:avLst>
+          </a:prstGeom>
+          <a:solidFill>
+            <a:srgbClr val="F4F3EF"/>
+          </a:solidFill>
+          <a:ln/>
+        </p:spPr>
+      </p:sp>
+      <p:sp>
+        <p:nvSpPr>
+          <p:cNvPr id="13" name="Text 11"/>
+          <p:cNvSpPr/>
+          <p:nvPr/>
+        </p:nvSpPr>
+        <p:spPr>
+          <a:xfrm>
+            <a:off x="6479896" y="1517904"/>
+            <a:ext cx="4907128" cy="347472"/>
+          </a:xfrm>
+          <a:prstGeom prst="rect">
+            <a:avLst/>
+          </a:prstGeom>
+          <a:noFill/>
+          <a:ln/>
+        </p:spPr>
+        <p:txBody>
+          <a:bodyPr wrap="square" lIns="0" tIns="0" rIns="0" bIns="0" rtlCol="0" anchor="ctr"/>
+          <a:lstStyle/>
+          <a:p>
+            <a:pPr indent="0" marL="0">
+              <a:buNone/>
+            </a:pPr>
+            <a:r>
+              <a:rPr lang="en-US" sz="1500" b="1" dirty="0">
+                <a:solidFill>
+                  <a:srgbClr val="52514E"/>
+                </a:solidFill>
+                <a:latin typeface="Calibri" pitchFamily="34" charset="0"/>
+                <a:ea typeface="Calibri" pitchFamily="34" charset="-122"/>
+                <a:cs typeface="Calibri" pitchFamily="34" charset="-120"/>
+              </a:rPr>
+              <a:t>What I deliberately didn’t</a:t>
+            </a:r>
+            <a:endParaRPr lang="en-US" sz="1500" dirty="0"/>
+          </a:p>
+        </p:txBody>
+      </p:sp>
+      <p:sp>
+        <p:nvSpPr>
+          <p:cNvPr id="14" name="Text 12"/>
+          <p:cNvSpPr/>
+          <p:nvPr/>
+        </p:nvSpPr>
+        <p:spPr>
+          <a:xfrm>
+            <a:off x="6479896" y="1956816"/>
+            <a:ext cx="4907128" cy="786384"/>
+          </a:xfrm>
+          <a:prstGeom prst="rect">
+            <a:avLst/>
+          </a:prstGeom>
+          <a:noFill/>
+          <a:ln/>
+        </p:spPr>
+        <p:txBody>
+          <a:bodyPr wrap="square" lIns="0" tIns="0" rIns="0" bIns="0" rtlCol="0" anchor="t"/>
+          <a:lstStyle/>
+          <a:p>
+            <a:pPr indent="0" marL="0">
+              <a:lnSpc>
+                <a:spcPts val="1600"/>
+              </a:lnSpc>
+              <a:buNone/>
+            </a:pPr>
+            <a:r>
+              <a:rPr lang="en-US" sz="1250" b="1" dirty="0">
+                <a:solidFill>
+                  <a:srgbClr val="0B0B0B"/>
+                </a:solidFill>
+                <a:latin typeface="Calibri" pitchFamily="34" charset="0"/>
+                <a:ea typeface="Calibri" pitchFamily="34" charset="-122"/>
+                <a:cs typeface="Calibri" pitchFamily="34" charset="-120"/>
+              </a:rPr>
+              <a:t>Train a model from scratch  </a:t>
+            </a:r>
+            <a:pPr indent="0" marL="0">
+              <a:lnSpc>
+                <a:spcPts val="1600"/>
+              </a:lnSpc>
+              <a:buNone/>
+            </a:pPr>
+            <a:r>
+              <a:rPr lang="en-US" sz="1250" dirty="0">
+                <a:solidFill>
+                  <a:srgbClr val="52514E"/>
+                </a:solidFill>
+                <a:latin typeface="Calibri" pitchFamily="34" charset="0"/>
+                <a:ea typeface="Calibri" pitchFamily="34" charset="-122"/>
+                <a:cs typeface="Calibri" pitchFamily="34" charset="-120"/>
+              </a:rPr>
+              <a:t>100 training fields. I'd be measuring my training loop, not the problem.</a:t>
+            </a:r>
+            <a:endParaRPr lang="en-US" sz="1250" dirty="0"/>
+          </a:p>
+        </p:txBody>
+      </p:sp>
+      <p:sp>
+        <p:nvSpPr>
+          <p:cNvPr id="15" name="Text 13"/>
+          <p:cNvSpPr/>
+          <p:nvPr/>
+        </p:nvSpPr>
+        <p:spPr>
+          <a:xfrm>
+            <a:off x="6479896" y="2779776"/>
+            <a:ext cx="4907128" cy="786384"/>
+          </a:xfrm>
+          <a:prstGeom prst="rect">
+            <a:avLst/>
+          </a:prstGeom>
+          <a:noFill/>
+          <a:ln/>
+        </p:spPr>
+        <p:txBody>
+          <a:bodyPr wrap="square" lIns="0" tIns="0" rIns="0" bIns="0" rtlCol="0" anchor="t"/>
+          <a:lstStyle/>
+          <a:p>
+            <a:pPr indent="0" marL="0">
+              <a:lnSpc>
+                <a:spcPts val="1600"/>
+              </a:lnSpc>
+              <a:buNone/>
+            </a:pPr>
+            <a:r>
+              <a:rPr lang="en-US" sz="1250" b="1" dirty="0">
+                <a:solidFill>
+                  <a:srgbClr val="0B0B0B"/>
+                </a:solidFill>
+                <a:latin typeface="Calibri" pitchFamily="34" charset="0"/>
+                <a:ea typeface="Calibri" pitchFamily="34" charset="-122"/>
+                <a:cs typeface="Calibri" pitchFamily="34" charset="-120"/>
+              </a:rPr>
+              <a:t>Label more data  </a:t>
+            </a:r>
+            <a:pPr indent="0" marL="0">
+              <a:lnSpc>
+                <a:spcPts val="1600"/>
+              </a:lnSpc>
+              <a:buNone/>
+            </a:pPr>
+            <a:r>
+              <a:rPr lang="en-US" sz="1250" dirty="0">
+                <a:solidFill>
+                  <a:srgbClr val="52514E"/>
+                </a:solidFill>
+                <a:latin typeface="Calibri" pitchFamily="34" charset="0"/>
+                <a:ea typeface="Calibri" pitchFamily="34" charset="-122"/>
+                <a:cs typeface="Calibri" pitchFamily="34" charset="-120"/>
+              </a:rPr>
+              <a:t>23,617 nuclei are already labelled — and the annotation is what I'm auditing.</a:t>
+            </a:r>
+            <a:endParaRPr lang="en-US" sz="1250" dirty="0"/>
+          </a:p>
+        </p:txBody>
+      </p:sp>
+      <p:sp>
+        <p:nvSpPr>
+          <p:cNvPr id="16" name="Text 14"/>
+          <p:cNvSpPr/>
+          <p:nvPr/>
+        </p:nvSpPr>
+        <p:spPr>
+          <a:xfrm>
+            <a:off x="6479896" y="3602736"/>
+            <a:ext cx="4907128" cy="786384"/>
+          </a:xfrm>
+          <a:prstGeom prst="rect">
+            <a:avLst/>
+          </a:prstGeom>
+          <a:noFill/>
+          <a:ln/>
+        </p:spPr>
+        <p:txBody>
+          <a:bodyPr wrap="square" lIns="0" tIns="0" rIns="0" bIns="0" rtlCol="0" anchor="t"/>
+          <a:lstStyle/>
+          <a:p>
+            <a:pPr indent="0" marL="0">
+              <a:lnSpc>
+                <a:spcPts val="1600"/>
+              </a:lnSpc>
+              <a:buNone/>
+            </a:pPr>
+            <a:r>
+              <a:rPr lang="en-US" sz="1250" b="1" dirty="0">
+                <a:solidFill>
+                  <a:srgbClr val="0B0B0B"/>
+                </a:solidFill>
+                <a:latin typeface="Calibri" pitchFamily="34" charset="0"/>
+                <a:ea typeface="Calibri" pitchFamily="34" charset="-122"/>
+                <a:cs typeface="Calibri" pitchFamily="34" charset="-120"/>
+              </a:rPr>
+              <a:t>Fine-tune  </a:t>
+            </a:r>
+            <a:pPr indent="0" marL="0">
+              <a:lnSpc>
+                <a:spcPts val="1600"/>
+              </a:lnSpc>
+              <a:buNone/>
+            </a:pPr>
+            <a:r>
+              <a:rPr lang="en-US" sz="1250" dirty="0">
+                <a:solidFill>
+                  <a:srgbClr val="52514E"/>
+                </a:solidFill>
+                <a:latin typeface="Calibri" pitchFamily="34" charset="0"/>
+                <a:ea typeface="Calibri" pitchFamily="34" charset="-122"/>
+                <a:cs typeface="Calibri" pitchFamily="34" charset="-120"/>
+              </a:rPr>
+              <a:t>The interesting one. See below.</a:t>
+            </a:r>
+            <a:endParaRPr lang="en-US" sz="1250" dirty="0"/>
+          </a:p>
+        </p:txBody>
+      </p:sp>
+      <p:sp>
+        <p:nvSpPr>
+          <p:cNvPr id="17" name="Shape 15"/>
+          <p:cNvSpPr/>
+          <p:nvPr/>
+        </p:nvSpPr>
+        <p:spPr>
+          <a:xfrm>
+            <a:off x="566928" y="4718304"/>
+            <a:ext cx="11057839" cy="1316736"/>
+          </a:xfrm>
+          <a:prstGeom prst="roundRect">
+            <a:avLst>
+              <a:gd name="adj" fmla="val 8333"/>
+            </a:avLst>
+          </a:prstGeom>
+          <a:solidFill>
+            <a:srgbClr val="12233A"/>
+          </a:solidFill>
+          <a:ln/>
+        </p:spPr>
+      </p:sp>
+      <p:sp>
+        <p:nvSpPr>
+          <p:cNvPr id="18" name="Text 16"/>
+          <p:cNvSpPr/>
+          <p:nvPr/>
+        </p:nvSpPr>
+        <p:spPr>
+          <a:xfrm>
+            <a:off x="877824" y="4718304"/>
+            <a:ext cx="10436047" cy="1316736"/>
+          </a:xfrm>
+          <a:prstGeom prst="rect">
+            <a:avLst/>
+          </a:prstGeom>
+          <a:noFill/>
+          <a:ln/>
+        </p:spPr>
+        <p:txBody>
+          <a:bodyPr wrap="square" lIns="0" tIns="0" rIns="0" bIns="0" rtlCol="0" anchor="ctr"/>
+          <a:lstStyle/>
+          <a:p>
+            <a:pPr indent="0" marL="0">
+              <a:lnSpc>
+                <a:spcPts val="1900"/>
+              </a:lnSpc>
+              <a:buNone/>
+            </a:pPr>
+            <a:r>
+              <a:rPr lang="en-US" sz="1350" b="1" dirty="0">
+                <a:solidFill>
+                  <a:srgbClr val="EB6834"/>
+                </a:solidFill>
+                <a:latin typeface="Calibri" pitchFamily="34" charset="0"/>
+                <a:ea typeface="Calibri" pitchFamily="34" charset="-122"/>
+                <a:cs typeface="Calibri" pitchFamily="34" charset="-120"/>
+              </a:rPr>
+              <a:t>Why not fine-tune?  </a:t>
+            </a:r>
+            <a:pPr indent="0" marL="0">
+              <a:lnSpc>
+                <a:spcPts val="1900"/>
+              </a:lnSpc>
+              <a:buNone/>
+            </a:pPr>
+            <a:r>
+              <a:rPr lang="en-US" sz="1350" dirty="0">
+                <a:solidFill>
+                  <a:srgbClr val="D6E1EF"/>
+                </a:solidFill>
+                <a:latin typeface="Calibri" pitchFamily="34" charset="0"/>
+                <a:ea typeface="Calibri" pitchFamily="34" charset="-122"/>
+                <a:cs typeface="Calibri" pitchFamily="34" charset="-120"/>
+              </a:rPr>
+              <a:t>It would probably raise AP — and that’s the problem. A fine-tuned model would gain partly by learning the annotator’s systematic tightness: a better metric, not better segmentation. So it’s a </a:t>
+            </a:r>
+            <a:pPr indent="0" marL="0">
+              <a:lnSpc>
+                <a:spcPts val="1900"/>
+              </a:lnSpc>
+              <a:buNone/>
+            </a:pPr>
+            <a:r>
+              <a:rPr lang="en-US" sz="1350" b="1" dirty="0">
+                <a:solidFill>
+                  <a:srgbClr val="FFFFFF"/>
+                </a:solidFill>
+                <a:latin typeface="Calibri" pitchFamily="34" charset="0"/>
+                <a:ea typeface="Calibri" pitchFamily="34" charset="-122"/>
+                <a:cs typeface="Calibri" pitchFamily="34" charset="-120"/>
+              </a:rPr>
+              <a:t>test of the boundary finding</a:t>
+            </a:r>
+            <a:pPr indent="0" marL="0">
+              <a:lnSpc>
+                <a:spcPts val="1900"/>
+              </a:lnSpc>
+              <a:buNone/>
+            </a:pPr>
+            <a:r>
+              <a:rPr lang="en-US" sz="1350" dirty="0">
+                <a:solidFill>
+                  <a:srgbClr val="D6E1EF"/>
+                </a:solidFill>
+                <a:latin typeface="Calibri" pitchFamily="34" charset="0"/>
+                <a:ea typeface="Calibri" pitchFamily="34" charset="-122"/>
+                <a:cs typeface="Calibri" pitchFamily="34" charset="-120"/>
+              </a:rPr>
+              <a:t>, not an improvement — which is exactly how I’d spend the next day on it.</a:t>
+            </a:r>
+            <a:endParaRPr lang="en-US" sz="1350" dirty="0"/>
+          </a:p>
+        </p:txBody>
+      </p:sp>
     </p:spTree>
   </p:cSld>
   <p:clrMapOvr>
@@ -7591,7 +9287,7 @@
                 <a:ea typeface="Calibri" pitchFamily="34" charset="-122"/>
                 <a:cs typeface="Calibri" pitchFamily="34" charset="-120"/>
               </a:rPr>
-              <a:t>4</a:t>
+              <a:t>5</a:t>
             </a:r>
             <a:endParaRPr lang="en-US" sz="1500" dirty="0"/>
           </a:p>
@@ -7630,7 +9326,7 @@
                 <a:ea typeface="Cambria" pitchFamily="34" charset="-122"/>
                 <a:cs typeface="Cambria" pitchFamily="34" charset="-120"/>
               </a:rPr>
-              <a:t>The number</a:t>
+              <a:t>The trap in the data</a:t>
             </a:r>
             <a:endParaRPr lang="en-US" sz="2700" dirty="0"/>
           </a:p>
@@ -7644,8 +9340,8 @@
         </p:nvSpPr>
         <p:spPr>
           <a:xfrm>
-            <a:off x="566928" y="1737360"/>
-            <a:ext cx="11057839" cy="2286000"/>
+            <a:off x="1133856" y="868680"/>
+            <a:ext cx="10490911" cy="310896"/>
           </a:xfrm>
           <a:prstGeom prst="rect">
             <a:avLst/>
@@ -7657,34 +9353,119 @@
           <a:bodyPr wrap="square" lIns="0" tIns="0" rIns="0" bIns="0" rtlCol="0" anchor="ctr"/>
           <a:lstStyle/>
           <a:p>
-            <a:pPr algn="ctr" indent="0" marL="0">
-              <a:buNone/>
-            </a:pPr>
-            <a:r>
-              <a:rPr lang="en-US" sz="13000" b="1" dirty="0">
-                <a:solidFill>
-                  <a:srgbClr val="0B0B0B"/>
+            <a:pPr indent="0" marL="0">
+              <a:buNone/>
+            </a:pPr>
+            <a:r>
+              <a:rPr lang="en-US" sz="1400" i="1" dirty="0">
+                <a:solidFill>
+                  <a:srgbClr val="52514E"/>
+                </a:solidFill>
+                <a:latin typeface="Calibri" pitchFamily="34" charset="0"/>
+                <a:ea typeface="Calibri" pitchFamily="34" charset="-122"/>
+                <a:cs typeface="Calibri" pitchFamily="34" charset="-120"/>
+              </a:rPr>
+              <a:t>The masks are a 3-colour graph colouring, not instance IDs</a:t>
+            </a:r>
+            <a:endParaRPr lang="en-US" sz="1400" dirty="0"/>
+          </a:p>
+        </p:txBody>
+      </p:sp>
+      <p:pic>
+        <p:nvPicPr>
+          <p:cNvPr id="6" name="Image 0" descr="/Users/tejas/Take_Home_Neo/figures/slide3_the_trap.png">    </p:cNvPr>
+          <p:cNvPicPr>
+            <a:picLocks noChangeAspect="1"/>
+          </p:cNvPicPr>
+          <p:nvPr/>
+        </p:nvPicPr>
+        <p:blipFill>
+          <a:blip r:embed="rId1"/>
+          <a:stretch>
+            <a:fillRect/>
+          </a:stretch>
+        </p:blipFill>
+        <p:spPr>
+          <a:xfrm>
+            <a:off x="566928" y="1628533"/>
+            <a:ext cx="11057839" cy="3189455"/>
+          </a:xfrm>
+          <a:prstGeom prst="rect">
+            <a:avLst/>
+          </a:prstGeom>
+        </p:spPr>
+      </p:pic>
+      <p:sp>
+        <p:nvSpPr>
+          <p:cNvPr id="7" name="Shape 4"/>
+          <p:cNvSpPr/>
+          <p:nvPr/>
+        </p:nvSpPr>
+        <p:spPr>
+          <a:xfrm>
+            <a:off x="566928" y="5321808"/>
+            <a:ext cx="3484778" cy="841248"/>
+          </a:xfrm>
+          <a:prstGeom prst="roundRect">
+            <a:avLst>
+              <a:gd name="adj" fmla="val 10870"/>
+            </a:avLst>
+          </a:prstGeom>
+          <a:solidFill>
+            <a:srgbClr val="F4F3EF"/>
+          </a:solidFill>
+          <a:ln/>
+        </p:spPr>
+      </p:sp>
+      <p:sp>
+        <p:nvSpPr>
+          <p:cNvPr id="8" name="Text 5"/>
+          <p:cNvSpPr/>
+          <p:nvPr/>
+        </p:nvSpPr>
+        <p:spPr>
+          <a:xfrm>
+            <a:off x="731520" y="5321808"/>
+            <a:ext cx="1371600" cy="841248"/>
+          </a:xfrm>
+          <a:prstGeom prst="rect">
+            <a:avLst/>
+          </a:prstGeom>
+          <a:noFill/>
+          <a:ln/>
+        </p:spPr>
+        <p:txBody>
+          <a:bodyPr wrap="square" lIns="0" tIns="0" rIns="0" bIns="0" rtlCol="0" anchor="ctr"/>
+          <a:lstStyle/>
+          <a:p>
+            <a:pPr algn="l" indent="0" marL="0">
+              <a:buNone/>
+            </a:pPr>
+            <a:r>
+              <a:rPr lang="en-US" sz="3000" b="1" dirty="0">
+                <a:solidFill>
+                  <a:srgbClr val="A32E22"/>
                 </a:solidFill>
                 <a:latin typeface="Cambria" pitchFamily="34" charset="0"/>
                 <a:ea typeface="Cambria" pitchFamily="34" charset="-122"/>
                 <a:cs typeface="Cambria" pitchFamily="34" charset="-120"/>
               </a:rPr>
-              <a:t>0.791</a:t>
-            </a:r>
-            <a:endParaRPr lang="en-US" sz="13000" dirty="0"/>
-          </a:p>
-        </p:txBody>
-      </p:sp>
-      <p:sp>
-        <p:nvSpPr>
-          <p:cNvPr id="6" name="Text 4"/>
-          <p:cNvSpPr/>
-          <p:nvPr/>
-        </p:nvSpPr>
-        <p:spPr>
-          <a:xfrm>
-            <a:off x="566928" y="4041648"/>
-            <a:ext cx="11057839" cy="365760"/>
+              <a:t>3</a:t>
+            </a:r>
+            <a:endParaRPr lang="en-US" sz="3000" dirty="0"/>
+          </a:p>
+        </p:txBody>
+      </p:sp>
+      <p:sp>
+        <p:nvSpPr>
+          <p:cNvPr id="9" name="Text 6"/>
+          <p:cNvSpPr/>
+          <p:nvPr/>
+        </p:nvSpPr>
+        <p:spPr>
+          <a:xfrm>
+            <a:off x="2048256" y="5321808"/>
+            <a:ext cx="1884578" cy="841248"/>
           </a:xfrm>
           <a:prstGeom prst="rect">
             <a:avLst/>
@@ -7696,11 +9477,11 @@
           <a:bodyPr wrap="square" lIns="0" tIns="0" rIns="0" bIns="0" rtlCol="0" anchor="ctr"/>
           <a:lstStyle/>
           <a:p>
-            <a:pPr algn="ctr" indent="0" marL="0">
-              <a:buNone/>
-            </a:pPr>
-            <a:r>
-              <a:rPr lang="en-US" sz="1500" dirty="0">
+            <a:pPr algn="l" indent="0" marL="0">
+              <a:buNone/>
+            </a:pPr>
+            <a:r>
+              <a:rPr lang="en-US" sz="1300" dirty="0">
                 <a:solidFill>
                   <a:srgbClr val="52514E"/>
                 </a:solidFill>
@@ -7708,26 +9489,26 @@
                 <a:ea typeface="Calibri" pitchFamily="34" charset="-122"/>
                 <a:cs typeface="Calibri" pitchFamily="34" charset="-120"/>
               </a:rPr>
-              <a:t>mean AP over IoU 0.50 : 0.05 : 0.95   ·   held-out test set, 50 fields</a:t>
-            </a:r>
-            <a:endParaRPr lang="en-US" sz="1500" dirty="0"/>
-          </a:p>
-        </p:txBody>
-      </p:sp>
-      <p:sp>
-        <p:nvSpPr>
-          <p:cNvPr id="7" name="Shape 5"/>
-          <p:cNvSpPr/>
-          <p:nvPr/>
-        </p:nvSpPr>
-        <p:spPr>
-          <a:xfrm>
-            <a:off x="566928" y="4846320"/>
-            <a:ext cx="3551834" cy="1024128"/>
+              <a:t>read as IDs</a:t>
+            </a:r>
+            <a:endParaRPr lang="en-US" sz="1300" dirty="0"/>
+          </a:p>
+        </p:txBody>
+      </p:sp>
+      <p:sp>
+        <p:nvSpPr>
+          <p:cNvPr id="10" name="Shape 7"/>
+          <p:cNvSpPr/>
+          <p:nvPr/>
+        </p:nvSpPr>
+        <p:spPr>
+          <a:xfrm>
+            <a:off x="4252874" y="5321808"/>
+            <a:ext cx="3484778" cy="841248"/>
           </a:xfrm>
           <a:prstGeom prst="roundRect">
             <a:avLst>
-              <a:gd name="adj" fmla="val 8929"/>
+              <a:gd name="adj" fmla="val 10870"/>
             </a:avLst>
           </a:prstGeom>
           <a:solidFill>
@@ -7738,14 +9519,14 @@
       </p:sp>
       <p:sp>
         <p:nvSpPr>
-          <p:cNvPr id="8" name="Text 6"/>
-          <p:cNvSpPr/>
-          <p:nvPr/>
-        </p:nvSpPr>
-        <p:spPr>
-          <a:xfrm>
-            <a:off x="749808" y="4974336"/>
-            <a:ext cx="3186074" cy="384048"/>
+          <p:cNvPr id="11" name="Text 8"/>
+          <p:cNvSpPr/>
+          <p:nvPr/>
+        </p:nvSpPr>
+        <p:spPr>
+          <a:xfrm>
+            <a:off x="4417466" y="5321808"/>
+            <a:ext cx="1371600" cy="841248"/>
           </a:xfrm>
           <a:prstGeom prst="rect">
             <a:avLst/>
@@ -7757,34 +9538,95 @@
           <a:bodyPr wrap="square" lIns="0" tIns="0" rIns="0" bIns="0" rtlCol="0" anchor="ctr"/>
           <a:lstStyle/>
           <a:p>
-            <a:pPr indent="0" marL="0">
-              <a:buNone/>
-            </a:pPr>
-            <a:r>
-              <a:rPr lang="en-US" sz="1500" b="1" dirty="0">
-                <a:solidFill>
-                  <a:srgbClr val="0B0B0B"/>
+            <a:pPr algn="l" indent="0" marL="0">
+              <a:buNone/>
+            </a:pPr>
+            <a:r>
+              <a:rPr lang="en-US" sz="3000" b="1" dirty="0">
+                <a:solidFill>
+                  <a:srgbClr val="EB6834"/>
+                </a:solidFill>
+                <a:latin typeface="Cambria" pitchFamily="34" charset="0"/>
+                <a:ea typeface="Cambria" pitchFamily="34" charset="-122"/>
+                <a:cs typeface="Cambria" pitchFamily="34" charset="-120"/>
+              </a:rPr>
+              <a:t>100</a:t>
+            </a:r>
+            <a:endParaRPr lang="en-US" sz="3000" dirty="0"/>
+          </a:p>
+        </p:txBody>
+      </p:sp>
+      <p:sp>
+        <p:nvSpPr>
+          <p:cNvPr id="12" name="Text 9"/>
+          <p:cNvSpPr/>
+          <p:nvPr/>
+        </p:nvSpPr>
+        <p:spPr>
+          <a:xfrm>
+            <a:off x="5734202" y="5321808"/>
+            <a:ext cx="1884578" cy="841248"/>
+          </a:xfrm>
+          <a:prstGeom prst="rect">
+            <a:avLst/>
+          </a:prstGeom>
+          <a:noFill/>
+          <a:ln/>
+        </p:spPr>
+        <p:txBody>
+          <a:bodyPr wrap="square" lIns="0" tIns="0" rIns="0" bIns="0" rtlCol="0" anchor="ctr"/>
+          <a:lstStyle/>
+          <a:p>
+            <a:pPr algn="l" indent="0" marL="0">
+              <a:buNone/>
+            </a:pPr>
+            <a:r>
+              <a:rPr lang="en-US" sz="1300" dirty="0">
+                <a:solidFill>
+                  <a:srgbClr val="52514E"/>
                 </a:solidFill>
                 <a:latin typeface="Calibri" pitchFamily="34" charset="0"/>
                 <a:ea typeface="Calibri" pitchFamily="34" charset="-122"/>
                 <a:cs typeface="Calibri" pitchFamily="34" charset="-120"/>
               </a:rPr>
-              <a:t>95% CI  0.766 – 0.812</a:t>
-            </a:r>
-            <a:endParaRPr lang="en-US" sz="1500" dirty="0"/>
-          </a:p>
-        </p:txBody>
-      </p:sp>
-      <p:sp>
-        <p:nvSpPr>
-          <p:cNvPr id="9" name="Text 7"/>
-          <p:cNvSpPr/>
-          <p:nvPr/>
-        </p:nvSpPr>
-        <p:spPr>
-          <a:xfrm>
-            <a:off x="749808" y="5340096"/>
-            <a:ext cx="3186074" cy="365760"/>
+              <a:t>binarise + label</a:t>
+            </a:r>
+            <a:endParaRPr lang="en-US" sz="1300" dirty="0"/>
+          </a:p>
+        </p:txBody>
+      </p:sp>
+      <p:sp>
+        <p:nvSpPr>
+          <p:cNvPr id="13" name="Shape 10"/>
+          <p:cNvSpPr/>
+          <p:nvPr/>
+        </p:nvSpPr>
+        <p:spPr>
+          <a:xfrm>
+            <a:off x="7938821" y="5321808"/>
+            <a:ext cx="3484778" cy="841248"/>
+          </a:xfrm>
+          <a:prstGeom prst="roundRect">
+            <a:avLst>
+              <a:gd name="adj" fmla="val 10870"/>
+            </a:avLst>
+          </a:prstGeom>
+          <a:solidFill>
+            <a:srgbClr val="F4F3EF"/>
+          </a:solidFill>
+          <a:ln/>
+        </p:spPr>
+      </p:sp>
+      <p:sp>
+        <p:nvSpPr>
+          <p:cNvPr id="14" name="Text 11"/>
+          <p:cNvSpPr/>
+          <p:nvPr/>
+        </p:nvSpPr>
+        <p:spPr>
+          <a:xfrm>
+            <a:off x="8103413" y="5321808"/>
+            <a:ext cx="1371600" cy="841248"/>
           </a:xfrm>
           <a:prstGeom prst="rect">
             <a:avLst/>
@@ -7796,11 +9638,50 @@
           <a:bodyPr wrap="square" lIns="0" tIns="0" rIns="0" bIns="0" rtlCol="0" anchor="ctr"/>
           <a:lstStyle/>
           <a:p>
-            <a:pPr indent="0" marL="0">
-              <a:buNone/>
-            </a:pPr>
-            <a:r>
-              <a:rPr lang="en-US" sz="1200" dirty="0">
+            <a:pPr algn="l" indent="0" marL="0">
+              <a:buNone/>
+            </a:pPr>
+            <a:r>
+              <a:rPr lang="en-US" sz="3000" b="1" dirty="0">
+                <a:solidFill>
+                  <a:srgbClr val="1E6F4C"/>
+                </a:solidFill>
+                <a:latin typeface="Cambria" pitchFamily="34" charset="0"/>
+                <a:ea typeface="Cambria" pitchFamily="34" charset="-122"/>
+                <a:cs typeface="Cambria" pitchFamily="34" charset="-120"/>
+              </a:rPr>
+              <a:t>118</a:t>
+            </a:r>
+            <a:endParaRPr lang="en-US" sz="3000" dirty="0"/>
+          </a:p>
+        </p:txBody>
+      </p:sp>
+      <p:sp>
+        <p:nvSpPr>
+          <p:cNvPr id="15" name="Text 12"/>
+          <p:cNvSpPr/>
+          <p:nvPr/>
+        </p:nvSpPr>
+        <p:spPr>
+          <a:xfrm>
+            <a:off x="9420149" y="5321808"/>
+            <a:ext cx="1884578" cy="841248"/>
+          </a:xfrm>
+          <a:prstGeom prst="rect">
+            <a:avLst/>
+          </a:prstGeom>
+          <a:noFill/>
+          <a:ln/>
+        </p:spPr>
+        <p:txBody>
+          <a:bodyPr wrap="square" lIns="0" tIns="0" rIns="0" bIns="0" rtlCol="0" anchor="ctr"/>
+          <a:lstStyle/>
+          <a:p>
+            <a:pPr algn="l" indent="0" marL="0">
+              <a:buNone/>
+            </a:pPr>
+            <a:r>
+              <a:rPr lang="en-US" sz="1300" dirty="0">
                 <a:solidFill>
                   <a:srgbClr val="52514E"/>
                 </a:solidFill>
@@ -7808,209 +9689,9 @@
                 <a:ea typeface="Calibri" pitchFamily="34" charset="-122"/>
                 <a:cs typeface="Calibri" pitchFamily="34" charset="-120"/>
               </a:rPr>
-              <a:t>the spread that matters</a:t>
-            </a:r>
-            <a:endParaRPr lang="en-US" sz="1200" dirty="0"/>
-          </a:p>
-        </p:txBody>
-      </p:sp>
-      <p:sp>
-        <p:nvSpPr>
-          <p:cNvPr id="10" name="Shape 8"/>
-          <p:cNvSpPr/>
-          <p:nvPr/>
-        </p:nvSpPr>
-        <p:spPr>
-          <a:xfrm>
-            <a:off x="4319930" y="4846320"/>
-            <a:ext cx="3551834" cy="1024128"/>
-          </a:xfrm>
-          <a:prstGeom prst="roundRect">
-            <a:avLst>
-              <a:gd name="adj" fmla="val 8929"/>
-            </a:avLst>
-          </a:prstGeom>
-          <a:solidFill>
-            <a:srgbClr val="F4F3EF"/>
-          </a:solidFill>
-          <a:ln/>
-        </p:spPr>
-      </p:sp>
-      <p:sp>
-        <p:nvSpPr>
-          <p:cNvPr id="11" name="Text 9"/>
-          <p:cNvSpPr/>
-          <p:nvPr/>
-        </p:nvSpPr>
-        <p:spPr>
-          <a:xfrm>
-            <a:off x="4502810" y="4974336"/>
-            <a:ext cx="3186074" cy="384048"/>
-          </a:xfrm>
-          <a:prstGeom prst="rect">
-            <a:avLst/>
-          </a:prstGeom>
-          <a:noFill/>
-          <a:ln/>
-        </p:spPr>
-        <p:txBody>
-          <a:bodyPr wrap="square" lIns="0" tIns="0" rIns="0" bIns="0" rtlCol="0" anchor="ctr"/>
-          <a:lstStyle/>
-          <a:p>
-            <a:pPr indent="0" marL="0">
-              <a:buNone/>
-            </a:pPr>
-            <a:r>
-              <a:rPr lang="en-US" sz="1500" b="1" dirty="0">
-                <a:solidFill>
-                  <a:srgbClr val="0B0B0B"/>
-                </a:solidFill>
-                <a:latin typeface="Calibri" pitchFamily="34" charset="0"/>
-                <a:ea typeface="Calibri" pitchFamily="34" charset="-122"/>
-                <a:cs typeface="Calibri" pitchFamily="34" charset="-120"/>
-              </a:rPr>
-              <a:t>F1 = 0.956</a:t>
-            </a:r>
-            <a:endParaRPr lang="en-US" sz="1500" dirty="0"/>
-          </a:p>
-        </p:txBody>
-      </p:sp>
-      <p:sp>
-        <p:nvSpPr>
-          <p:cNvPr id="12" name="Text 10"/>
-          <p:cNvSpPr/>
-          <p:nvPr/>
-        </p:nvSpPr>
-        <p:spPr>
-          <a:xfrm>
-            <a:off x="4502810" y="5340096"/>
-            <a:ext cx="3186074" cy="365760"/>
-          </a:xfrm>
-          <a:prstGeom prst="rect">
-            <a:avLst/>
-          </a:prstGeom>
-          <a:noFill/>
-          <a:ln/>
-        </p:spPr>
-        <p:txBody>
-          <a:bodyPr wrap="square" lIns="0" tIns="0" rIns="0" bIns="0" rtlCol="0" anchor="ctr"/>
-          <a:lstStyle/>
-          <a:p>
-            <a:pPr indent="0" marL="0">
-              <a:buNone/>
-            </a:pPr>
-            <a:r>
-              <a:rPr lang="en-US" sz="1200" dirty="0">
-                <a:solidFill>
-                  <a:srgbClr val="52514E"/>
-                </a:solidFill>
-                <a:latin typeface="Calibri" pitchFamily="34" charset="0"/>
-                <a:ea typeface="Calibri" pitchFamily="34" charset="-122"/>
-                <a:cs typeface="Calibri" pitchFamily="34" charset="-120"/>
-              </a:rPr>
-              <a:t>at the loosest threshold</a:t>
-            </a:r>
-            <a:endParaRPr lang="en-US" sz="1200" dirty="0"/>
-          </a:p>
-        </p:txBody>
-      </p:sp>
-      <p:sp>
-        <p:nvSpPr>
-          <p:cNvPr id="13" name="Shape 11"/>
-          <p:cNvSpPr/>
-          <p:nvPr/>
-        </p:nvSpPr>
-        <p:spPr>
-          <a:xfrm>
-            <a:off x="8072933" y="4846320"/>
-            <a:ext cx="3551834" cy="1024128"/>
-          </a:xfrm>
-          <a:prstGeom prst="roundRect">
-            <a:avLst>
-              <a:gd name="adj" fmla="val 8929"/>
-            </a:avLst>
-          </a:prstGeom>
-          <a:solidFill>
-            <a:srgbClr val="F4F3EF"/>
-          </a:solidFill>
-          <a:ln/>
-        </p:spPr>
-      </p:sp>
-      <p:sp>
-        <p:nvSpPr>
-          <p:cNvPr id="14" name="Text 12"/>
-          <p:cNvSpPr/>
-          <p:nvPr/>
-        </p:nvSpPr>
-        <p:spPr>
-          <a:xfrm>
-            <a:off x="8255813" y="4974336"/>
-            <a:ext cx="3186074" cy="384048"/>
-          </a:xfrm>
-          <a:prstGeom prst="rect">
-            <a:avLst/>
-          </a:prstGeom>
-          <a:noFill/>
-          <a:ln/>
-        </p:spPr>
-        <p:txBody>
-          <a:bodyPr wrap="square" lIns="0" tIns="0" rIns="0" bIns="0" rtlCol="0" anchor="ctr"/>
-          <a:lstStyle/>
-          <a:p>
-            <a:pPr indent="0" marL="0">
-              <a:buNone/>
-            </a:pPr>
-            <a:r>
-              <a:rPr lang="en-US" sz="1500" b="1" dirty="0">
-                <a:solidFill>
-                  <a:srgbClr val="0B0B0B"/>
-                </a:solidFill>
-                <a:latin typeface="Calibri" pitchFamily="34" charset="0"/>
-                <a:ea typeface="Calibri" pitchFamily="34" charset="-122"/>
-                <a:cs typeface="Calibri" pitchFamily="34" charset="-120"/>
-              </a:rPr>
-              <a:t>mean IoU  0.926</a:t>
-            </a:r>
-            <a:endParaRPr lang="en-US" sz="1500" dirty="0"/>
-          </a:p>
-        </p:txBody>
-      </p:sp>
-      <p:sp>
-        <p:nvSpPr>
-          <p:cNvPr id="15" name="Text 13"/>
-          <p:cNvSpPr/>
-          <p:nvPr/>
-        </p:nvSpPr>
-        <p:spPr>
-          <a:xfrm>
-            <a:off x="8255813" y="5340096"/>
-            <a:ext cx="3186074" cy="365760"/>
-          </a:xfrm>
-          <a:prstGeom prst="rect">
-            <a:avLst/>
-          </a:prstGeom>
-          <a:noFill/>
-          <a:ln/>
-        </p:spPr>
-        <p:txBody>
-          <a:bodyPr wrap="square" lIns="0" tIns="0" rIns="0" bIns="0" rtlCol="0" anchor="ctr"/>
-          <a:lstStyle/>
-          <a:p>
-            <a:pPr indent="0" marL="0">
-              <a:buNone/>
-            </a:pPr>
-            <a:r>
-              <a:rPr lang="en-US" sz="1200" dirty="0">
-                <a:solidFill>
-                  <a:srgbClr val="52514E"/>
-                </a:solidFill>
-                <a:latin typeface="Calibri" pitchFamily="34" charset="0"/>
-                <a:ea typeface="Calibri" pitchFamily="34" charset="-122"/>
-                <a:cs typeface="Calibri" pitchFamily="34" charset="-120"/>
-              </a:rPr>
-              <a:t>over matched objects</a:t>
-            </a:r>
-            <a:endParaRPr lang="en-US" sz="1200" dirty="0"/>
+              <a:t>decoded correctly</a:t>
+            </a:r>
+            <a:endParaRPr lang="en-US" sz="1300" dirty="0"/>
           </a:p>
         </p:txBody>
       </p:sp>
@@ -8099,7 +9780,7 @@
                 <a:ea typeface="Calibri" pitchFamily="34" charset="-122"/>
                 <a:cs typeface="Calibri" pitchFamily="34" charset="-120"/>
               </a:rPr>
-              <a:t>5</a:t>
+              <a:t>6</a:t>
             </a:r>
             <a:endParaRPr lang="en-US" sz="1500" dirty="0"/>
           </a:p>
@@ -8138,54 +9819,15 @@
                 <a:ea typeface="Cambria" pitchFamily="34" charset="-122"/>
                 <a:cs typeface="Cambria" pitchFamily="34" charset="-120"/>
               </a:rPr>
-              <a:t>Where the score is actually lost</a:t>
+              <a:t>What I built</a:t>
             </a:r>
             <a:endParaRPr lang="en-US" sz="2700" dirty="0"/>
-          </a:p>
-        </p:txBody>
-      </p:sp>
-      <p:sp>
-        <p:nvSpPr>
-          <p:cNvPr id="5" name="Text 3"/>
-          <p:cNvSpPr/>
-          <p:nvPr/>
-        </p:nvSpPr>
-        <p:spPr>
-          <a:xfrm>
-            <a:off x="1133856" y="868680"/>
-            <a:ext cx="10490911" cy="310896"/>
-          </a:xfrm>
-          <a:prstGeom prst="rect">
-            <a:avLst/>
-          </a:prstGeom>
-          <a:noFill/>
-          <a:ln/>
-        </p:spPr>
-        <p:txBody>
-          <a:bodyPr wrap="square" lIns="0" tIns="0" rIns="0" bIns="0" rtlCol="0" anchor="ctr"/>
-          <a:lstStyle/>
-          <a:p>
-            <a:pPr indent="0" marL="0">
-              <a:buNone/>
-            </a:pPr>
-            <a:r>
-              <a:rPr lang="en-US" sz="1400" i="1" dirty="0">
-                <a:solidFill>
-                  <a:srgbClr val="52514E"/>
-                </a:solidFill>
-                <a:latin typeface="Calibri" pitchFamily="34" charset="0"/>
-                <a:ea typeface="Calibri" pitchFamily="34" charset="-122"/>
-                <a:cs typeface="Calibri" pitchFamily="34" charset="-120"/>
-              </a:rPr>
-              <a:t>The two strictest thresholds cause 54% of the total loss</a:t>
-            </a:r>
-            <a:endParaRPr lang="en-US" sz="1400" dirty="0"/>
           </a:p>
         </p:txBody>
       </p:sp>
       <p:pic>
         <p:nvPicPr>
-          <p:cNvPr id="6" name="Image 0" descr="/Users/tejas/Take_Home_Neo/figures/fig1_where_the_score_is_lost.png">    </p:cNvPr>
+          <p:cNvPr id="5" name="Image 0" descr="/Users/tejas/Take_Home_Neo/figures/slide4_what_i_built.png">    </p:cNvPr>
           <p:cNvPicPr>
             <a:picLocks noChangeAspect="1"/>
           </p:cNvPicPr>
@@ -8199,14 +9841,98 @@
         </p:blipFill>
         <p:spPr>
           <a:xfrm>
-            <a:off x="566928" y="1478497"/>
-            <a:ext cx="11057839" cy="4632526"/>
+            <a:off x="566928" y="1505632"/>
+            <a:ext cx="11057839" cy="2932336"/>
           </a:xfrm>
           <a:prstGeom prst="rect">
             <a:avLst/>
           </a:prstGeom>
         </p:spPr>
       </p:pic>
+      <p:sp>
+        <p:nvSpPr>
+          <p:cNvPr id="6" name="Shape 3"/>
+          <p:cNvSpPr/>
+          <p:nvPr/>
+        </p:nvSpPr>
+        <p:spPr>
+          <a:xfrm>
+            <a:off x="566928" y="4828032"/>
+            <a:ext cx="11057839" cy="1225296"/>
+          </a:xfrm>
+          <a:prstGeom prst="roundRect">
+            <a:avLst>
+              <a:gd name="adj" fmla="val 8955"/>
+            </a:avLst>
+          </a:prstGeom>
+          <a:solidFill>
+            <a:srgbClr val="F4F3EF"/>
+          </a:solidFill>
+          <a:ln/>
+        </p:spPr>
+      </p:sp>
+      <p:sp>
+        <p:nvSpPr>
+          <p:cNvPr id="7" name="Text 4"/>
+          <p:cNvSpPr/>
+          <p:nvPr/>
+        </p:nvSpPr>
+        <p:spPr>
+          <a:xfrm>
+            <a:off x="877824" y="4828032"/>
+            <a:ext cx="10436047" cy="1225296"/>
+          </a:xfrm>
+          <a:prstGeom prst="rect">
+            <a:avLst/>
+          </a:prstGeom>
+          <a:noFill/>
+          <a:ln/>
+        </p:spPr>
+        <p:txBody>
+          <a:bodyPr wrap="square" lIns="0" tIns="0" rIns="0" bIns="0" rtlCol="0" anchor="ctr"/>
+          <a:lstStyle/>
+          <a:p>
+            <a:pPr indent="0" marL="0">
+              <a:lnSpc>
+                <a:spcPts val="2200"/>
+              </a:lnSpc>
+              <a:buNone/>
+            </a:pPr>
+            <a:r>
+              <a:rPr lang="en-US" sz="1450" b="1" dirty="0">
+                <a:solidFill>
+                  <a:srgbClr val="0B0B0B"/>
+                </a:solidFill>
+                <a:latin typeface="Calibri" pitchFamily="34" charset="0"/>
+                <a:ea typeface="Calibri" pitchFamily="34" charset="-122"/>
+                <a:cs typeface="Calibri" pitchFamily="34" charset="-120"/>
+              </a:rPr>
+              <a:t>Byte-identical masks, verified on every cached call.</a:t>
+            </a:r>
+            <a:endParaRPr lang="en-US" sz="1450" dirty="0"/>
+          </a:p>
+          <a:p>
+            <a:pPr indent="0" marL="0">
+              <a:lnSpc>
+                <a:spcPts val="2200"/>
+              </a:lnSpc>
+              <a:buNone/>
+            </a:pPr>
+            <a:r>
+              <a:rPr lang="en-US" sz="1450" dirty="0">
+                <a:solidFill>
+                  <a:srgbClr val="52514E"/>
+                </a:solidFill>
+                <a:latin typeface="Calibri" pitchFamily="34" charset="0"/>
+                <a:ea typeface="Calibri" pitchFamily="34" charset="-122"/>
+                <a:cs typeface="Calibri" pitchFamily="34" charset="-120"/>
+              </a:rPr>
+              <a:t>A speedup that quietly perturbs the output isn’t a speedup — so the cache asserts equality rather than assuming it.</a:t>
+            </a:r>
+            <a:endParaRPr lang="en-US" sz="1450" dirty="0"/>
+          </a:p>
+        </p:txBody>
+      </p:sp>
     </p:spTree>
   </p:cSld>
   <p:clrMapOvr>
@@ -8292,7 +10018,7 @@
                 <a:ea typeface="Calibri" pitchFamily="34" charset="-122"/>
                 <a:cs typeface="Calibri" pitchFamily="34" charset="-120"/>
               </a:rPr>
-              <a:t>6</a:t>
+              <a:t>7</a:t>
             </a:r>
             <a:endParaRPr lang="en-US" sz="1500" dirty="0"/>
           </a:p>
@@ -8331,7 +10057,7 @@
                 <a:ea typeface="Cambria" pitchFamily="34" charset="-122"/>
                 <a:cs typeface="Cambria" pitchFamily="34" charset="-120"/>
               </a:rPr>
-              <a:t>What are those strict thresholds measuring?</a:t>
+              <a:t>The number</a:t>
             </a:r>
             <a:endParaRPr lang="en-US" sz="2700" dirty="0"/>
           </a:p>
@@ -8345,8 +10071,8 @@
         </p:nvSpPr>
         <p:spPr>
           <a:xfrm>
-            <a:off x="1133856" y="868680"/>
-            <a:ext cx="10490911" cy="310896"/>
+            <a:off x="566928" y="1737360"/>
+            <a:ext cx="11057839" cy="2286000"/>
           </a:xfrm>
           <a:prstGeom prst="rect">
             <a:avLst/>
@@ -8358,11 +10084,50 @@
           <a:bodyPr wrap="square" lIns="0" tIns="0" rIns="0" bIns="0" rtlCol="0" anchor="ctr"/>
           <a:lstStyle/>
           <a:p>
-            <a:pPr indent="0" marL="0">
-              <a:buNone/>
-            </a:pPr>
-            <a:r>
-              <a:rPr lang="en-US" sz="1400" i="1" dirty="0">
+            <a:pPr algn="ctr" indent="0" marL="0">
+              <a:buNone/>
+            </a:pPr>
+            <a:r>
+              <a:rPr lang="en-US" sz="13000" b="1" dirty="0">
+                <a:solidFill>
+                  <a:srgbClr val="0B0B0B"/>
+                </a:solidFill>
+                <a:latin typeface="Cambria" pitchFamily="34" charset="0"/>
+                <a:ea typeface="Cambria" pitchFamily="34" charset="-122"/>
+                <a:cs typeface="Cambria" pitchFamily="34" charset="-120"/>
+              </a:rPr>
+              <a:t>0.791</a:t>
+            </a:r>
+            <a:endParaRPr lang="en-US" sz="13000" dirty="0"/>
+          </a:p>
+        </p:txBody>
+      </p:sp>
+      <p:sp>
+        <p:nvSpPr>
+          <p:cNvPr id="6" name="Text 4"/>
+          <p:cNvSpPr/>
+          <p:nvPr/>
+        </p:nvSpPr>
+        <p:spPr>
+          <a:xfrm>
+            <a:off x="566928" y="4041648"/>
+            <a:ext cx="11057839" cy="365760"/>
+          </a:xfrm>
+          <a:prstGeom prst="rect">
+            <a:avLst/>
+          </a:prstGeom>
+          <a:noFill/>
+          <a:ln/>
+        </p:spPr>
+        <p:txBody>
+          <a:bodyPr wrap="square" lIns="0" tIns="0" rIns="0" bIns="0" rtlCol="0" anchor="ctr"/>
+          <a:lstStyle/>
+          <a:p>
+            <a:pPr algn="ctr" indent="0" marL="0">
+              <a:buNone/>
+            </a:pPr>
+            <a:r>
+              <a:rPr lang="en-US" sz="1500" dirty="0">
                 <a:solidFill>
                   <a:srgbClr val="52514E"/>
                 </a:solidFill>
@@ -8370,36 +10135,312 @@
                 <a:ea typeface="Calibri" pitchFamily="34" charset="-122"/>
                 <a:cs typeface="Calibri" pitchFamily="34" charset="-120"/>
               </a:rPr>
-              <a:t>Two reasonable definitions of “where the edge is” rank the outlines oppositely</a:t>
-            </a:r>
-            <a:endParaRPr lang="en-US" sz="1400" dirty="0"/>
-          </a:p>
-        </p:txBody>
-      </p:sp>
-      <p:pic>
-        <p:nvPicPr>
-          <p:cNvPr id="6" name="Image 0" descr="/Users/tejas/Take_Home_Neo/figures/fig2_annotation_ceiling.png">    </p:cNvPr>
-          <p:cNvPicPr>
-            <a:picLocks noChangeAspect="1"/>
-          </p:cNvPicPr>
-          <p:nvPr/>
-        </p:nvPicPr>
-        <p:blipFill>
-          <a:blip r:embed="rId1"/>
-          <a:stretch>
-            <a:fillRect/>
-          </a:stretch>
-        </p:blipFill>
-        <p:spPr>
-          <a:xfrm>
-            <a:off x="1171986" y="1371600"/>
-            <a:ext cx="9847722" cy="4846320"/>
-          </a:xfrm>
-          <a:prstGeom prst="rect">
-            <a:avLst/>
-          </a:prstGeom>
-        </p:spPr>
-      </p:pic>
+              <a:t>mean AP over IoU 0.50 : 0.05 : 0.95   ·   held-out test set, 50 fields</a:t>
+            </a:r>
+            <a:endParaRPr lang="en-US" sz="1500" dirty="0"/>
+          </a:p>
+        </p:txBody>
+      </p:sp>
+      <p:sp>
+        <p:nvSpPr>
+          <p:cNvPr id="7" name="Shape 5"/>
+          <p:cNvSpPr/>
+          <p:nvPr/>
+        </p:nvSpPr>
+        <p:spPr>
+          <a:xfrm>
+            <a:off x="566928" y="4846320"/>
+            <a:ext cx="3551834" cy="1024128"/>
+          </a:xfrm>
+          <a:prstGeom prst="roundRect">
+            <a:avLst>
+              <a:gd name="adj" fmla="val 8929"/>
+            </a:avLst>
+          </a:prstGeom>
+          <a:solidFill>
+            <a:srgbClr val="F4F3EF"/>
+          </a:solidFill>
+          <a:ln/>
+        </p:spPr>
+      </p:sp>
+      <p:sp>
+        <p:nvSpPr>
+          <p:cNvPr id="8" name="Text 6"/>
+          <p:cNvSpPr/>
+          <p:nvPr/>
+        </p:nvSpPr>
+        <p:spPr>
+          <a:xfrm>
+            <a:off x="749808" y="4974336"/>
+            <a:ext cx="3186074" cy="384048"/>
+          </a:xfrm>
+          <a:prstGeom prst="rect">
+            <a:avLst/>
+          </a:prstGeom>
+          <a:noFill/>
+          <a:ln/>
+        </p:spPr>
+        <p:txBody>
+          <a:bodyPr wrap="square" lIns="0" tIns="0" rIns="0" bIns="0" rtlCol="0" anchor="ctr"/>
+          <a:lstStyle/>
+          <a:p>
+            <a:pPr indent="0" marL="0">
+              <a:buNone/>
+            </a:pPr>
+            <a:r>
+              <a:rPr lang="en-US" sz="1500" b="1" dirty="0">
+                <a:solidFill>
+                  <a:srgbClr val="0B0B0B"/>
+                </a:solidFill>
+                <a:latin typeface="Calibri" pitchFamily="34" charset="0"/>
+                <a:ea typeface="Calibri" pitchFamily="34" charset="-122"/>
+                <a:cs typeface="Calibri" pitchFamily="34" charset="-120"/>
+              </a:rPr>
+              <a:t>95% CI  0.766 – 0.812</a:t>
+            </a:r>
+            <a:endParaRPr lang="en-US" sz="1500" dirty="0"/>
+          </a:p>
+        </p:txBody>
+      </p:sp>
+      <p:sp>
+        <p:nvSpPr>
+          <p:cNvPr id="9" name="Text 7"/>
+          <p:cNvSpPr/>
+          <p:nvPr/>
+        </p:nvSpPr>
+        <p:spPr>
+          <a:xfrm>
+            <a:off x="749808" y="5340096"/>
+            <a:ext cx="3186074" cy="365760"/>
+          </a:xfrm>
+          <a:prstGeom prst="rect">
+            <a:avLst/>
+          </a:prstGeom>
+          <a:noFill/>
+          <a:ln/>
+        </p:spPr>
+        <p:txBody>
+          <a:bodyPr wrap="square" lIns="0" tIns="0" rIns="0" bIns="0" rtlCol="0" anchor="ctr"/>
+          <a:lstStyle/>
+          <a:p>
+            <a:pPr indent="0" marL="0">
+              <a:buNone/>
+            </a:pPr>
+            <a:r>
+              <a:rPr lang="en-US" sz="1200" dirty="0">
+                <a:solidFill>
+                  <a:srgbClr val="52514E"/>
+                </a:solidFill>
+                <a:latin typeface="Calibri" pitchFamily="34" charset="0"/>
+                <a:ea typeface="Calibri" pitchFamily="34" charset="-122"/>
+                <a:cs typeface="Calibri" pitchFamily="34" charset="-120"/>
+              </a:rPr>
+              <a:t>the spread that matters</a:t>
+            </a:r>
+            <a:endParaRPr lang="en-US" sz="1200" dirty="0"/>
+          </a:p>
+        </p:txBody>
+      </p:sp>
+      <p:sp>
+        <p:nvSpPr>
+          <p:cNvPr id="10" name="Shape 8"/>
+          <p:cNvSpPr/>
+          <p:nvPr/>
+        </p:nvSpPr>
+        <p:spPr>
+          <a:xfrm>
+            <a:off x="4319930" y="4846320"/>
+            <a:ext cx="3551834" cy="1024128"/>
+          </a:xfrm>
+          <a:prstGeom prst="roundRect">
+            <a:avLst>
+              <a:gd name="adj" fmla="val 8929"/>
+            </a:avLst>
+          </a:prstGeom>
+          <a:solidFill>
+            <a:srgbClr val="F4F3EF"/>
+          </a:solidFill>
+          <a:ln/>
+        </p:spPr>
+      </p:sp>
+      <p:sp>
+        <p:nvSpPr>
+          <p:cNvPr id="11" name="Text 9"/>
+          <p:cNvSpPr/>
+          <p:nvPr/>
+        </p:nvSpPr>
+        <p:spPr>
+          <a:xfrm>
+            <a:off x="4502810" y="4974336"/>
+            <a:ext cx="3186074" cy="384048"/>
+          </a:xfrm>
+          <a:prstGeom prst="rect">
+            <a:avLst/>
+          </a:prstGeom>
+          <a:noFill/>
+          <a:ln/>
+        </p:spPr>
+        <p:txBody>
+          <a:bodyPr wrap="square" lIns="0" tIns="0" rIns="0" bIns="0" rtlCol="0" anchor="ctr"/>
+          <a:lstStyle/>
+          <a:p>
+            <a:pPr indent="0" marL="0">
+              <a:buNone/>
+            </a:pPr>
+            <a:r>
+              <a:rPr lang="en-US" sz="1500" b="1" dirty="0">
+                <a:solidFill>
+                  <a:srgbClr val="0B0B0B"/>
+                </a:solidFill>
+                <a:latin typeface="Calibri" pitchFamily="34" charset="0"/>
+                <a:ea typeface="Calibri" pitchFamily="34" charset="-122"/>
+                <a:cs typeface="Calibri" pitchFamily="34" charset="-120"/>
+              </a:rPr>
+              <a:t>F1 = 0.956</a:t>
+            </a:r>
+            <a:endParaRPr lang="en-US" sz="1500" dirty="0"/>
+          </a:p>
+        </p:txBody>
+      </p:sp>
+      <p:sp>
+        <p:nvSpPr>
+          <p:cNvPr id="12" name="Text 10"/>
+          <p:cNvSpPr/>
+          <p:nvPr/>
+        </p:nvSpPr>
+        <p:spPr>
+          <a:xfrm>
+            <a:off x="4502810" y="5340096"/>
+            <a:ext cx="3186074" cy="365760"/>
+          </a:xfrm>
+          <a:prstGeom prst="rect">
+            <a:avLst/>
+          </a:prstGeom>
+          <a:noFill/>
+          <a:ln/>
+        </p:spPr>
+        <p:txBody>
+          <a:bodyPr wrap="square" lIns="0" tIns="0" rIns="0" bIns="0" rtlCol="0" anchor="ctr"/>
+          <a:lstStyle/>
+          <a:p>
+            <a:pPr indent="0" marL="0">
+              <a:buNone/>
+            </a:pPr>
+            <a:r>
+              <a:rPr lang="en-US" sz="1200" dirty="0">
+                <a:solidFill>
+                  <a:srgbClr val="52514E"/>
+                </a:solidFill>
+                <a:latin typeface="Calibri" pitchFamily="34" charset="0"/>
+                <a:ea typeface="Calibri" pitchFamily="34" charset="-122"/>
+                <a:cs typeface="Calibri" pitchFamily="34" charset="-120"/>
+              </a:rPr>
+              <a:t>at the loosest threshold</a:t>
+            </a:r>
+            <a:endParaRPr lang="en-US" sz="1200" dirty="0"/>
+          </a:p>
+        </p:txBody>
+      </p:sp>
+      <p:sp>
+        <p:nvSpPr>
+          <p:cNvPr id="13" name="Shape 11"/>
+          <p:cNvSpPr/>
+          <p:nvPr/>
+        </p:nvSpPr>
+        <p:spPr>
+          <a:xfrm>
+            <a:off x="8072933" y="4846320"/>
+            <a:ext cx="3551834" cy="1024128"/>
+          </a:xfrm>
+          <a:prstGeom prst="roundRect">
+            <a:avLst>
+              <a:gd name="adj" fmla="val 8929"/>
+            </a:avLst>
+          </a:prstGeom>
+          <a:solidFill>
+            <a:srgbClr val="F4F3EF"/>
+          </a:solidFill>
+          <a:ln/>
+        </p:spPr>
+      </p:sp>
+      <p:sp>
+        <p:nvSpPr>
+          <p:cNvPr id="14" name="Text 12"/>
+          <p:cNvSpPr/>
+          <p:nvPr/>
+        </p:nvSpPr>
+        <p:spPr>
+          <a:xfrm>
+            <a:off x="8255813" y="4974336"/>
+            <a:ext cx="3186074" cy="384048"/>
+          </a:xfrm>
+          <a:prstGeom prst="rect">
+            <a:avLst/>
+          </a:prstGeom>
+          <a:noFill/>
+          <a:ln/>
+        </p:spPr>
+        <p:txBody>
+          <a:bodyPr wrap="square" lIns="0" tIns="0" rIns="0" bIns="0" rtlCol="0" anchor="ctr"/>
+          <a:lstStyle/>
+          <a:p>
+            <a:pPr indent="0" marL="0">
+              <a:buNone/>
+            </a:pPr>
+            <a:r>
+              <a:rPr lang="en-US" sz="1500" b="1" dirty="0">
+                <a:solidFill>
+                  <a:srgbClr val="0B0B0B"/>
+                </a:solidFill>
+                <a:latin typeface="Calibri" pitchFamily="34" charset="0"/>
+                <a:ea typeface="Calibri" pitchFamily="34" charset="-122"/>
+                <a:cs typeface="Calibri" pitchFamily="34" charset="-120"/>
+              </a:rPr>
+              <a:t>mean IoU  0.926</a:t>
+            </a:r>
+            <a:endParaRPr lang="en-US" sz="1500" dirty="0"/>
+          </a:p>
+        </p:txBody>
+      </p:sp>
+      <p:sp>
+        <p:nvSpPr>
+          <p:cNvPr id="15" name="Text 13"/>
+          <p:cNvSpPr/>
+          <p:nvPr/>
+        </p:nvSpPr>
+        <p:spPr>
+          <a:xfrm>
+            <a:off x="8255813" y="5340096"/>
+            <a:ext cx="3186074" cy="365760"/>
+          </a:xfrm>
+          <a:prstGeom prst="rect">
+            <a:avLst/>
+          </a:prstGeom>
+          <a:noFill/>
+          <a:ln/>
+        </p:spPr>
+        <p:txBody>
+          <a:bodyPr wrap="square" lIns="0" tIns="0" rIns="0" bIns="0" rtlCol="0" anchor="ctr"/>
+          <a:lstStyle/>
+          <a:p>
+            <a:pPr indent="0" marL="0">
+              <a:buNone/>
+            </a:pPr>
+            <a:r>
+              <a:rPr lang="en-US" sz="1200" dirty="0">
+                <a:solidFill>
+                  <a:srgbClr val="52514E"/>
+                </a:solidFill>
+                <a:latin typeface="Calibri" pitchFamily="34" charset="0"/>
+                <a:ea typeface="Calibri" pitchFamily="34" charset="-122"/>
+                <a:cs typeface="Calibri" pitchFamily="34" charset="-120"/>
+              </a:rPr>
+              <a:t>over matched objects</a:t>
+            </a:r>
+            <a:endParaRPr lang="en-US" sz="1200" dirty="0"/>
+          </a:p>
+        </p:txBody>
+      </p:sp>
     </p:spTree>
   </p:cSld>
   <p:clrMapOvr>
@@ -8485,7 +10526,7 @@
                 <a:ea typeface="Calibri" pitchFamily="34" charset="-122"/>
                 <a:cs typeface="Calibri" pitchFamily="34" charset="-120"/>
               </a:rPr>
-              <a:t>7</a:t>
+              <a:t>8</a:t>
             </a:r>
             <a:endParaRPr lang="en-US" sz="1500" dirty="0"/>
           </a:p>
@@ -8524,7 +10565,7 @@
                 <a:ea typeface="Cambria" pitchFamily="34" charset="-122"/>
                 <a:cs typeface="Cambria" pitchFamily="34" charset="-120"/>
               </a:rPr>
-              <a:t>I got this wrong first</a:t>
+              <a:t>Where the score is actually lost</a:t>
             </a:r>
             <a:endParaRPr lang="en-US" sz="2700" dirty="0"/>
           </a:p>
@@ -8563,375 +10604,36 @@
                 <a:ea typeface="Calibri" pitchFamily="34" charset="-122"/>
                 <a:cs typeface="Calibri" pitchFamily="34" charset="-120"/>
               </a:rPr>
-              <a:t>Synthetic sweep with a known right answer: ground truth exactly on the edge, prediction 0.25 px too large</a:t>
+              <a:t>The two strictest thresholds cause 54% of the total loss</a:t>
             </a:r>
             <a:endParaRPr lang="en-US" sz="1400" dirty="0"/>
           </a:p>
         </p:txBody>
       </p:sp>
-      <p:sp>
-        <p:nvSpPr>
-          <p:cNvPr id="6" name="Shape 4"/>
-          <p:cNvSpPr/>
-          <p:nvPr/>
-        </p:nvSpPr>
-        <p:spPr>
-          <a:xfrm>
-            <a:off x="566928" y="1874520"/>
-            <a:ext cx="11057839" cy="1225296"/>
-          </a:xfrm>
-          <a:prstGeom prst="roundRect">
-            <a:avLst>
-              <a:gd name="adj" fmla="val 8955"/>
-            </a:avLst>
-          </a:prstGeom>
-          <a:solidFill>
-            <a:srgbClr val="F4F3EF"/>
-          </a:solidFill>
-          <a:ln/>
-        </p:spPr>
-      </p:sp>
-      <p:sp>
-        <p:nvSpPr>
-          <p:cNvPr id="7" name="Text 5"/>
-          <p:cNvSpPr/>
-          <p:nvPr/>
-        </p:nvSpPr>
-        <p:spPr>
-          <a:xfrm>
-            <a:off x="877824" y="1874520"/>
-            <a:ext cx="4206240" cy="1225296"/>
-          </a:xfrm>
-          <a:prstGeom prst="rect">
-            <a:avLst/>
-          </a:prstGeom>
-          <a:noFill/>
-          <a:ln/>
-        </p:spPr>
-        <p:txBody>
-          <a:bodyPr wrap="square" lIns="0" tIns="0" rIns="0" bIns="0" rtlCol="0" anchor="ctr"/>
-          <a:lstStyle/>
-          <a:p>
-            <a:pPr indent="0" marL="0">
-              <a:lnSpc>
-                <a:spcPts val="2100"/>
-              </a:lnSpc>
-              <a:buNone/>
-            </a:pPr>
-            <a:r>
-              <a:rPr lang="en-US" sz="1500" dirty="0">
-                <a:solidFill>
-                  <a:srgbClr val="0B0B0B"/>
-                </a:solidFill>
-                <a:latin typeface="Calibri" pitchFamily="34" charset="0"/>
-                <a:ea typeface="Calibri" pitchFamily="34" charset="-122"/>
-                <a:cs typeface="Calibri" pitchFamily="34" charset="-120"/>
-              </a:rPr>
-              <a:t>my first version</a:t>
-            </a:r>
-            <a:endParaRPr lang="en-US" sz="1500" dirty="0"/>
-          </a:p>
-          <a:p>
-            <a:pPr indent="0" marL="0">
-              <a:lnSpc>
-                <a:spcPts val="2100"/>
-              </a:lnSpc>
-              <a:buNone/>
-            </a:pPr>
-            <a:r>
-              <a:rPr lang="en-US" sz="1500" dirty="0">
-                <a:solidFill>
-                  <a:srgbClr val="0B0B0B"/>
-                </a:solidFill>
-                <a:latin typeface="Calibri" pitchFamily="34" charset="0"/>
-                <a:ea typeface="Calibri" pitchFamily="34" charset="-122"/>
-                <a:cs typeface="Calibri" pitchFamily="34" charset="-120"/>
-              </a:rPr>
-              <a:t>inner-boundary ring</a:t>
-            </a:r>
-            <a:endParaRPr lang="en-US" sz="1500" dirty="0"/>
-          </a:p>
-        </p:txBody>
-      </p:sp>
-      <p:sp>
-        <p:nvSpPr>
-          <p:cNvPr id="8" name="Text 6"/>
-          <p:cNvSpPr/>
-          <p:nvPr/>
-        </p:nvSpPr>
-        <p:spPr>
-          <a:xfrm>
-            <a:off x="5230368" y="1874520"/>
-            <a:ext cx="2103120" cy="1225296"/>
-          </a:xfrm>
-          <a:prstGeom prst="rect">
-            <a:avLst/>
-          </a:prstGeom>
-          <a:noFill/>
-          <a:ln/>
-        </p:spPr>
-        <p:txBody>
-          <a:bodyPr wrap="square" lIns="0" tIns="0" rIns="0" bIns="0" rtlCol="0" anchor="ctr"/>
-          <a:lstStyle/>
-          <a:p>
-            <a:pPr algn="ctr" indent="0" marL="0">
-              <a:buNone/>
-            </a:pPr>
-            <a:r>
-              <a:rPr lang="en-US" sz="4000" b="1" dirty="0">
-                <a:solidFill>
-                  <a:srgbClr val="A32E22"/>
-                </a:solidFill>
-                <a:latin typeface="Cambria" pitchFamily="34" charset="0"/>
-                <a:ea typeface="Cambria" pitchFamily="34" charset="-122"/>
-                <a:cs typeface="Cambria" pitchFamily="34" charset="-120"/>
-              </a:rPr>
-              <a:t>9 of 9</a:t>
-            </a:r>
-            <a:endParaRPr lang="en-US" sz="4000" dirty="0"/>
-          </a:p>
-        </p:txBody>
-      </p:sp>
-      <p:sp>
-        <p:nvSpPr>
-          <p:cNvPr id="9" name="Text 7"/>
-          <p:cNvSpPr/>
-          <p:nvPr/>
-        </p:nvSpPr>
-        <p:spPr>
-          <a:xfrm>
-            <a:off x="7516368" y="1874520"/>
-            <a:ext cx="3840480" cy="1225296"/>
-          </a:xfrm>
-          <a:prstGeom prst="rect">
-            <a:avLst/>
-          </a:prstGeom>
-          <a:noFill/>
-          <a:ln/>
-        </p:spPr>
-        <p:txBody>
-          <a:bodyPr wrap="square" lIns="0" tIns="0" rIns="0" bIns="0" rtlCol="0" anchor="ctr"/>
-          <a:lstStyle/>
-          <a:p>
-            <a:pPr indent="0" marL="0">
-              <a:buNone/>
-            </a:pPr>
-            <a:r>
-              <a:rPr lang="en-US" sz="1400" dirty="0">
-                <a:solidFill>
-                  <a:srgbClr val="52514E"/>
-                </a:solidFill>
-                <a:latin typeface="Calibri" pitchFamily="34" charset="0"/>
-                <a:ea typeface="Calibri" pitchFamily="34" charset="-122"/>
-                <a:cs typeface="Calibri" pitchFamily="34" charset="-120"/>
-              </a:rPr>
-              <a:t>picked the wrong outline</a:t>
-            </a:r>
-            <a:endParaRPr lang="en-US" sz="1400" dirty="0"/>
-          </a:p>
-        </p:txBody>
-      </p:sp>
-      <p:sp>
-        <p:nvSpPr>
-          <p:cNvPr id="10" name="Shape 8"/>
-          <p:cNvSpPr/>
-          <p:nvPr/>
-        </p:nvSpPr>
-        <p:spPr>
-          <a:xfrm>
-            <a:off x="566928" y="3355848"/>
-            <a:ext cx="11057839" cy="1225296"/>
-          </a:xfrm>
-          <a:prstGeom prst="roundRect">
-            <a:avLst>
-              <a:gd name="adj" fmla="val 8955"/>
-            </a:avLst>
-          </a:prstGeom>
-          <a:solidFill>
-            <a:srgbClr val="F4F3EF"/>
-          </a:solidFill>
-          <a:ln/>
-        </p:spPr>
-      </p:sp>
-      <p:sp>
-        <p:nvSpPr>
-          <p:cNvPr id="11" name="Text 9"/>
-          <p:cNvSpPr/>
-          <p:nvPr/>
-        </p:nvSpPr>
-        <p:spPr>
-          <a:xfrm>
-            <a:off x="877824" y="3355848"/>
-            <a:ext cx="4206240" cy="1225296"/>
-          </a:xfrm>
-          <a:prstGeom prst="rect">
-            <a:avLst/>
-          </a:prstGeom>
-          <a:noFill/>
-          <a:ln/>
-        </p:spPr>
-        <p:txBody>
-          <a:bodyPr wrap="square" lIns="0" tIns="0" rIns="0" bIns="0" rtlCol="0" anchor="ctr"/>
-          <a:lstStyle/>
-          <a:p>
-            <a:pPr indent="0" marL="0">
-              <a:lnSpc>
-                <a:spcPts val="2100"/>
-              </a:lnSpc>
-              <a:buNone/>
-            </a:pPr>
-            <a:r>
-              <a:rPr lang="en-US" sz="1500" dirty="0">
-                <a:solidFill>
-                  <a:srgbClr val="0B0B0B"/>
-                </a:solidFill>
-                <a:latin typeface="Calibri" pitchFamily="34" charset="0"/>
-                <a:ea typeface="Calibri" pitchFamily="34" charset="-122"/>
-                <a:cs typeface="Calibri" pitchFamily="34" charset="-120"/>
-              </a:rPr>
-              <a:t>after the fix</a:t>
-            </a:r>
-            <a:endParaRPr lang="en-US" sz="1500" dirty="0"/>
-          </a:p>
-          <a:p>
-            <a:pPr indent="0" marL="0">
-              <a:lnSpc>
-                <a:spcPts val="2100"/>
-              </a:lnSpc>
-              <a:buNone/>
-            </a:pPr>
-            <a:r>
-              <a:rPr lang="en-US" sz="1500" dirty="0">
-                <a:solidFill>
-                  <a:srgbClr val="0B0B0B"/>
-                </a:solidFill>
-                <a:latin typeface="Calibri" pitchFamily="34" charset="0"/>
-                <a:ea typeface="Calibri" pitchFamily="34" charset="-122"/>
-                <a:cs typeface="Calibri" pitchFamily="34" charset="-120"/>
-              </a:rPr>
-              <a:t>marching-squares contour</a:t>
-            </a:r>
-            <a:endParaRPr lang="en-US" sz="1500" dirty="0"/>
-          </a:p>
-        </p:txBody>
-      </p:sp>
-      <p:sp>
-        <p:nvSpPr>
-          <p:cNvPr id="12" name="Text 10"/>
-          <p:cNvSpPr/>
-          <p:nvPr/>
-        </p:nvSpPr>
-        <p:spPr>
-          <a:xfrm>
-            <a:off x="5230368" y="3355848"/>
-            <a:ext cx="2103120" cy="1225296"/>
-          </a:xfrm>
-          <a:prstGeom prst="rect">
-            <a:avLst/>
-          </a:prstGeom>
-          <a:noFill/>
-          <a:ln/>
-        </p:spPr>
-        <p:txBody>
-          <a:bodyPr wrap="square" lIns="0" tIns="0" rIns="0" bIns="0" rtlCol="0" anchor="ctr"/>
-          <a:lstStyle/>
-          <a:p>
-            <a:pPr algn="ctr" indent="0" marL="0">
-              <a:buNone/>
-            </a:pPr>
-            <a:r>
-              <a:rPr lang="en-US" sz="4000" b="1" dirty="0">
-                <a:solidFill>
-                  <a:srgbClr val="1E6F4C"/>
-                </a:solidFill>
-                <a:latin typeface="Cambria" pitchFamily="34" charset="0"/>
-                <a:ea typeface="Cambria" pitchFamily="34" charset="-122"/>
-                <a:cs typeface="Cambria" pitchFamily="34" charset="-120"/>
-              </a:rPr>
-              <a:t>0 of 9</a:t>
-            </a:r>
-            <a:endParaRPr lang="en-US" sz="4000" dirty="0"/>
-          </a:p>
-        </p:txBody>
-      </p:sp>
-      <p:sp>
-        <p:nvSpPr>
-          <p:cNvPr id="13" name="Text 11"/>
-          <p:cNvSpPr/>
-          <p:nvPr/>
-        </p:nvSpPr>
-        <p:spPr>
-          <a:xfrm>
-            <a:off x="7516368" y="3355848"/>
-            <a:ext cx="3840480" cy="1225296"/>
-          </a:xfrm>
-          <a:prstGeom prst="rect">
-            <a:avLst/>
-          </a:prstGeom>
-          <a:noFill/>
-          <a:ln/>
-        </p:spPr>
-        <p:txBody>
-          <a:bodyPr wrap="square" lIns="0" tIns="0" rIns="0" bIns="0" rtlCol="0" anchor="ctr"/>
-          <a:lstStyle/>
-          <a:p>
-            <a:pPr indent="0" marL="0">
-              <a:buNone/>
-            </a:pPr>
-            <a:r>
-              <a:rPr lang="en-US" sz="1400" dirty="0">
-                <a:solidFill>
-                  <a:srgbClr val="52514E"/>
-                </a:solidFill>
-                <a:latin typeface="Calibri" pitchFamily="34" charset="0"/>
-                <a:ea typeface="Calibri" pitchFamily="34" charset="-122"/>
-                <a:cs typeface="Calibri" pitchFamily="34" charset="-120"/>
-              </a:rPr>
-              <a:t>picked correctly</a:t>
-            </a:r>
-            <a:endParaRPr lang="en-US" sz="1400" dirty="0"/>
-          </a:p>
-        </p:txBody>
-      </p:sp>
-      <p:sp>
-        <p:nvSpPr>
-          <p:cNvPr id="14" name="Text 12"/>
-          <p:cNvSpPr/>
-          <p:nvPr/>
-        </p:nvSpPr>
-        <p:spPr>
-          <a:xfrm>
-            <a:off x="566928" y="5138928"/>
-            <a:ext cx="11057839" cy="457200"/>
-          </a:xfrm>
-          <a:prstGeom prst="rect">
-            <a:avLst/>
-          </a:prstGeom>
-          <a:noFill/>
-          <a:ln/>
-        </p:spPr>
-        <p:txBody>
-          <a:bodyPr wrap="square" lIns="0" tIns="0" rIns="0" bIns="0" rtlCol="0" anchor="ctr"/>
-          <a:lstStyle/>
-          <a:p>
-            <a:pPr indent="0" marL="0">
-              <a:buNone/>
-            </a:pPr>
-            <a:r>
-              <a:rPr lang="en-US" sz="1500" b="1" dirty="0">
-                <a:solidFill>
-                  <a:srgbClr val="0B0B0B"/>
-                </a:solidFill>
-                <a:latin typeface="Calibri" pitchFamily="34" charset="0"/>
-                <a:ea typeface="Calibri" pitchFamily="34" charset="-122"/>
-                <a:cs typeface="Calibri" pitchFamily="34" charset="-120"/>
-              </a:rPr>
-              <a:t>The original claim reported the model closer in 48 of 49 fields. It did not survive. I retracted it.</a:t>
-            </a:r>
-            <a:endParaRPr lang="en-US" sz="1500" dirty="0"/>
-          </a:p>
-        </p:txBody>
-      </p:sp>
+      <p:pic>
+        <p:nvPicPr>
+          <p:cNvPr id="6" name="Image 0" descr="/Users/tejas/Take_Home_Neo/figures/fig1_where_the_score_is_lost.png">    </p:cNvPr>
+          <p:cNvPicPr>
+            <a:picLocks noChangeAspect="1"/>
+          </p:cNvPicPr>
+          <p:nvPr/>
+        </p:nvPicPr>
+        <p:blipFill>
+          <a:blip r:embed="rId1"/>
+          <a:stretch>
+            <a:fillRect/>
+          </a:stretch>
+        </p:blipFill>
+        <p:spPr>
+          <a:xfrm>
+            <a:off x="566928" y="1478497"/>
+            <a:ext cx="11057839" cy="4632526"/>
+          </a:xfrm>
+          <a:prstGeom prst="rect">
+            <a:avLst/>
+          </a:prstGeom>
+        </p:spPr>
+      </p:pic>
     </p:spTree>
   </p:cSld>
   <p:clrMapOvr>
@@ -9017,7 +10719,7 @@
                 <a:ea typeface="Calibri" pitchFamily="34" charset="-122"/>
                 <a:cs typeface="Calibri" pitchFamily="34" charset="-120"/>
               </a:rPr>
-              <a:t>8</a:t>
+              <a:t>9</a:t>
             </a:r>
             <a:endParaRPr lang="en-US" sz="1500" dirty="0"/>
           </a:p>
@@ -9056,7 +10758,7 @@
                 <a:ea typeface="Cambria" pitchFamily="34" charset="-122"/>
                 <a:cs typeface="Cambria" pitchFamily="34" charset="-120"/>
               </a:rPr>
-              <a:t>What actually fails</a:t>
+              <a:t>What are those strict thresholds measuring?</a:t>
             </a:r>
             <a:endParaRPr lang="en-US" sz="2700" dirty="0"/>
           </a:p>
@@ -9095,7 +10797,7 @@
                 <a:ea typeface="Calibri" pitchFamily="34" charset="-122"/>
                 <a:cs typeface="Calibri" pitchFamily="34" charset="-120"/>
               </a:rPr>
-              <a:t>One population: small and faint</a:t>
+              <a:t>Two reasonable definitions of “where the edge is” rank the outlines oppositely</a:t>
             </a:r>
             <a:endParaRPr lang="en-US" sz="1400" dirty="0"/>
           </a:p>
@@ -9103,7 +10805,7 @@
       </p:sp>
       <p:pic>
         <p:nvPicPr>
-          <p:cNvPr id="6" name="Image 0" descr="/Users/tejas/Take_Home_Neo/figures/fig3_what_gets_missed.png">    </p:cNvPr>
+          <p:cNvPr id="6" name="Image 0" descr="/Users/tejas/Take_Home_Neo/figures/fig2_annotation_ceiling.png">    </p:cNvPr>
           <p:cNvPicPr>
             <a:picLocks noChangeAspect="1"/>
           </p:cNvPicPr>
@@ -9117,8 +10819,8 @@
         </p:blipFill>
         <p:spPr>
           <a:xfrm>
-            <a:off x="566928" y="1866291"/>
-            <a:ext cx="11057839" cy="3856937"/>
+            <a:off x="1171986" y="1371600"/>
+            <a:ext cx="9847722" cy="4846320"/>
           </a:xfrm>
           <a:prstGeom prst="rect">
             <a:avLst/>

--- a/nuclei_segmentation_talk.pptx
+++ b/nuclei_segmentation_talk.pptx
@@ -23,10 +23,9 @@
     <p:sldId id="271" r:id="rId17"/>
     <p:sldId id="272" r:id="rId18"/>
     <p:sldId id="273" r:id="rId19"/>
-    <p:sldId id="274" r:id="rId20"/>
   </p:sldIdLst>
   <p:notesMasterIdLst>
-    <p:notesMasterId r:id="rId21"/>
+    <p:notesMasterId r:id="rId20"/>
   </p:notesMasterIdLst>
   <p:sldSz cx="12192000" cy="6858000"/>
   <p:notesSz cx="6858000" cy="12192000"/>
@@ -608,9 +607,7 @@
           <a:p>
             <a:r>
               <a:rPr lang="en-US" dirty="0"/>
-              <a:t>My first version of this said the model was closer, in 48 of 49 images. Someone suggested that might be an artifact of how I sampled pixels along each outline. So I built a test with a known right answer — human's outline exactly on the edge, model's slightly outside it — and my measurement picked the wrong one nine times out of nine.
-I'd been sampling the ring of pixels just inside each outline, which sits half a pixel in, the same size as the effect. And it isn't common-mode: it favours whichever outline is larger, which is the model's. So the artifact alone could have produced the entire original result. I fixed the sampling, re-ran, and my headline finding inverted. So I retracted it.
-This is the best slide in the deck. Don't rush it.</a:t>
+              <a:t>Setting the boundary question aside — of the objects it genuinely misses, the median is 20 pixels against 622 for a normal nucleus. 81% are under 100. Above 400 pixels it misses 9 out of 4,773, which is 0.2%. And the model finds 98% of bright objects but only 86% of faint ones. So it's one population: small and faint.</a:t>
             </a:r>
             <a:endParaRPr lang="en-US" dirty="0"/>
           </a:p>
@@ -698,7 +695,8 @@
           <a:p>
             <a:r>
               <a:rPr lang="en-US" dirty="0"/>
-              <a:t>Setting the boundary question aside — of the objects it genuinely misses, the median is 20 pixels against 622 for a normal nucleus. 81% are under 100. Above 400 pixels it misses 9 out of 4,773, which is 0.2%. And the model finds 98% of bright objects but only 86% of faint ones. So it's one population: small and faint.</a:t>
+              <a:t>There's a transition. Under about 15 pixels the annotation sits on visually empty background — that's label noise. Between 20 and 100 they're real but very faint. Above 100 they're unmistakable nuclei the model genuinely got wrong.
+So I can't dismiss the misses as bad labels, and I can't dismiss them as model failures either. Both are present.</a:t>
             </a:r>
             <a:endParaRPr lang="en-US" dirty="0"/>
           </a:p>
@@ -786,8 +784,8 @@
           <a:p>
             <a:r>
               <a:rPr lang="en-US" dirty="0"/>
-              <a:t>There's a transition. Under about 15 pixels the annotation sits on visually empty background — that's label noise. Between 20 and 100 they're real but very faint. Above 100 they're unmistakable nuclei the model genuinely got wrong.
-So I can't dismiss the misses as bad labels, and I can't dismiss them as model failures either. Both are present.</a:t>
+              <a:t>Each of these was motivated by a measurement, and each failure eliminated a cause. The score didn't move — but I know why for every one.
+The bandit one is the embarrassing one, and worth owning: bandits exist to save evaluations, and my own 72× cache made evaluations cheap enough that brute force won. I killed the premise myself.</a:t>
             </a:r>
             <a:endParaRPr lang="en-US" dirty="0"/>
           </a:p>
@@ -875,8 +873,9 @@
           <a:p>
             <a:r>
               <a:rPr lang="en-US" dirty="0"/>
-              <a:t>Each of these was motivated by a measurement, and each failure eliminated a cause. The score didn't move — but I know why for every one.
-The bandit one is the embarrassing one, and worth owning: bandits exist to save evaluations, and my own 72× cache made evaluations cheap enough that brute force won. I killed the premise myself.</a:t>
+              <a:t>I wrote down what I expected before running the last one: upscaling would recover small objects and leave merges alone. The opposite happened. Small objects didn't move at all — 265 to 266. But merges dropped by a third, 103 to 69.
+So resolution isn't why small objects are missed, and merging isn't the immovable problem I'd argued it was. The score stayed flat because it traded merges for splits — 24 splits up to 36 — but the error profile changed substantially, and I could only see that because I count those separately.
+CLOSING LINE: The score is roughly where a pretrained model puts it, and I couldn't move it. What I have instead is a map of which errors are reachable, which are definitional, and which are noise — and I can tell you which is which.</a:t>
             </a:r>
             <a:endParaRPr lang="en-US" dirty="0"/>
           </a:p>
@@ -964,9 +963,7 @@
           <a:p>
             <a:r>
               <a:rPr lang="en-US" dirty="0"/>
-              <a:t>I wrote down what I expected before running the last one: upscaling would recover small objects and leave merges alone. The opposite happened. Small objects didn't move at all — 265 to 266. But merges dropped by a third, 103 to 69.
-So resolution isn't why small objects are missed, and merging isn't the immovable problem I'd argued it was. The score stayed flat because it traded merges for splits — 24 splits up to 36 — but the error profile changed substantially, and I could only see that because I count those separately.
-CLOSING LINE: The score is roughly where a pretrained model puts it, and I couldn't move it. What I have instead is a map of which errors are reachable, which are definitional, and which are noise — and I can tell you which is which.</a:t>
+              <a:t/>
             </a:r>
             <a:endParaRPr lang="en-US" dirty="0"/>
           </a:p>
@@ -1360,94 +1357,6 @@
 </p:notes>
 </file>
 
-<file path=ppt/notesSlides/notesSlide19.xml><?xml version="1.0" encoding="utf-8"?>
-<p:notes xmlns:a="http://schemas.openxmlformats.org/drawingml/2006/main" xmlns:r="http://schemas.openxmlformats.org/officeDocument/2006/relationships" xmlns:p="http://schemas.openxmlformats.org/presentationml/2006/main">
-  <p:cSld>
-    <p:spTree>
-      <p:nvGrpSpPr>
-        <p:cNvPr id="1" name=""/>
-        <p:cNvGrpSpPr/>
-        <p:nvPr/>
-      </p:nvGrpSpPr>
-      <p:grpSpPr>
-        <a:xfrm>
-          <a:off x="0" y="0"/>
-          <a:ext cx="0" cy="0"/>
-          <a:chOff x="0" y="0"/>
-          <a:chExt cx="0" cy="0"/>
-        </a:xfrm>
-      </p:grpSpPr>
-      <p:sp>
-        <p:nvSpPr>
-          <p:cNvPr id="2" name="Slide Image Placeholder 1"/>
-          <p:cNvSpPr>
-            <a:spLocks noGrp="1" noRot="1" noChangeAspect="1"/>
-          </p:cNvSpPr>
-          <p:nvPr>
-            <p:ph type="sldImg"/>
-          </p:nvPr>
-        </p:nvSpPr>
-        <p:spPr/>
-      </p:sp>
-      <p:sp>
-        <p:nvSpPr>
-          <p:cNvPr id="3" name="Notes Placeholder 2"/>
-          <p:cNvSpPr>
-            <a:spLocks noGrp="1"/>
-          </p:cNvSpPr>
-          <p:nvPr>
-            <p:ph type="body" idx="1"/>
-          </p:nvPr>
-        </p:nvSpPr>
-        <p:spPr/>
-        <p:txBody>
-          <a:bodyPr/>
-          <a:lstStyle/>
-          <a:p>
-            <a:r>
-              <a:rPr lang="en-US" dirty="0"/>
-              <a:t/>
-            </a:r>
-            <a:endParaRPr lang="en-US" dirty="0"/>
-          </a:p>
-        </p:txBody>
-      </p:sp>
-      <p:sp>
-        <p:nvSpPr>
-          <p:cNvPr id="4" name="Slide Number Placeholder 3"/>
-          <p:cNvSpPr>
-            <a:spLocks noGrp="1"/>
-          </p:cNvSpPr>
-          <p:nvPr>
-            <p:ph type="sldNum" sz="quarter" idx="10"/>
-          </p:nvPr>
-        </p:nvSpPr>
-        <p:spPr/>
-        <p:txBody>
-          <a:bodyPr/>
-          <a:lstStyle/>
-          <a:p>
-            <a:fld id="{F7021451-1387-4CA6-816F-3879F97B5CBC}" type="slidenum">
-              <a:rPr lang="en-US"/>
-              <a:t>19</a:t>
-            </a:fld>
-            <a:endParaRPr lang="en-US"/>
-          </a:p>
-        </p:txBody>
-      </p:sp>
-    </p:spTree>
-    <p:extLst>
-      <p:ext uri="{BB962C8B-B14F-4D97-AF65-F5344CB8AC3E}">
-        <p14:creationId xmlns:p14="http://schemas.microsoft.com/office/powerpoint/2010/main" val="1024086991"/>
-      </p:ext>
-    </p:extLst>
-  </p:cSld>
-  <p:clrMapOvr>
-    <a:masterClrMapping/>
-  </p:clrMapOvr>
-</p:notes>
-</file>
-
 <file path=ppt/notesSlides/notesSlide2.xml><?xml version="1.0" encoding="utf-8"?>
 <p:notes xmlns:a="http://schemas.openxmlformats.org/drawingml/2006/main" xmlns:r="http://schemas.openxmlformats.org/officeDocument/2006/relationships" xmlns:p="http://schemas.openxmlformats.org/presentationml/2006/main">
   <p:cSld>
@@ -1495,11 +1404,13 @@
             <a:r>
               <a:rPr lang="en-US" dirty="0"/>
               <a:t>Quick orientation, because this problem is probably unfamiliar.
-These are cells under a fluorescence microscope. A stain called Hoechst binds DNA, so the nucleus of every cell lights up and everything else stays dark. That's why the images look like grey blobs on black.
-The use case is high-content screening. You treat plates of cells with different compounds, image them, and ask what changed. But the questions are all per-cell: how many cells are there, how big is each nucleus, how bright, what shape. 'How much total stain is in this image' is useless — it can't tell you whether you have twice as many cells or the same cells twice as bright. You need to count and measure them individually.
-That's the distinction on this slide. The middle panel is a foreground mask — which pixels are nucleus. That's genuinely easy; it's one line of Otsu thresholding and I'll come back to it. The right panel is what's actually wanted: every nucleus as its own object, with its own identity. That's called instance segmentation.
-And the reason it's hard is entirely visible in these panels — where nuclei touch, the foreground mask fuses them into one blob. Separating touching objects is the whole problem.
-The dataset is BBBC039: 200 fields, about 118 nuclei each, 23,617 hand-annotated nuclei in total.</a:t>
+WHAT YOU'RE LOOKING AT. These are cells under a fluorescence microscope. A stain called Hoechst binds DNA, so the nucleus of every cell lights up and everything else stays dark. That's why the images are grey blobs on black.
+WHY IT MATTERS. The use case is high-content screening: treat plates of cells with different compounds, image them, and ask what changed. But every question is per-cell — how many cells, how big is each nucleus, how bright, what shape. 'How much total stain is in this image' is useless, because it can't distinguish twice as many cells from the same cells twice as bright. So you need each nucleus as its own object. That's instance segmentation, and it's different from just finding the foreground. Finding foreground is easy — one line of Otsu. Where nuclei touch, though, a foreground mask fuses them into one blob, and separating touching objects is the whole problem.
+THE CLASSICAL APPROACH. No learning; every step is a hand-set rule. Otsu looks at the histogram of pixel brightness, assumes two populations — background and object — and picks the single cut that best separates them. That gives foreground. Then, to break fused blobs apart: a distance transform (for each foreground pixel, how far to the nearest background pixel), treat the local peaks as cell centres, and flood outward from each until the floods meet. The meeting line is the cut.
+That works when nuclei are round. It fails when they aren't — a bean-shaped or unevenly textured nucleus gives two distance peaks and gets sliced in half. Those purple lines through the middle panel are exactly that. Across validation it makes 405 of those false splits against Cellpose's 24, which is most of why it scores 0.555.
+CELLPOSE-SAM. The current state of the art for cell segmentation. The key idea is that it doesn't classify pixels as foreground or background at all. For every pixel it predicts a direction — which way is the centre of MY cell. Then you follow those arrows uphill, and every pixel that flows to the same point is one cell. Touching nuclei separate because their pixels flow to different centres even though there's no visible gap between them. A threshold can never do that.
+The SAM part is the backbone: it's built on Segment Anything and trained across a large corpus of cell images from many microscopes and modalities. That's why it's the default — it generalises to new data without retraining, which is exactly the position I'm in. Zero-shot, it scores 0.807.
+One caveat I'll flag now and come back to: because its training corpus is broad, I can't fully rule out that it has seen images like these.</a:t>
             </a:r>
             <a:endParaRPr lang="en-US" dirty="0"/>
           </a:p>
@@ -1587,13 +1498,10 @@
           <a:p>
             <a:r>
               <a:rPr lang="en-US" dirty="0"/>
-              <a:t>Two families of approach, and I implemented both so I had something to compare against.
-THE CLASSICAL PIPELINE — no learning at all, every step a hand-set rule. First Otsu thresholding: it looks at the histogram of pixel brightness, assumes there are two populations — background and object — and picks the single cut between them that best separates the two. That gives you foreground.
-But foreground fuses touching nuclei, so you need a second step to break blobs apart. That's a distance transform plus watershed: for every foreground pixel compute how far it is from the nearest background pixel, treat the local peaks as cell centres, and flood outward from each until the floods meet. The line where they meet is the cut.
-That works when nuclei are round. It fails when they aren't — a bean-shaped or unevenly textured nucleus produces two distance peaks and gets sliced in half. Those purple lines through the middle panel are exactly that. Across validation it makes 405 of those false splits, against Cellpose's 24. That's why it scores 0.555.
-CELLPOSE-SAM — the current state of the art for cell segmentation. The key idea is that it doesn't classify pixels as foreground or background at all. For every pixel it predicts a direction: which way is the centre of MY cell. Then you follow those arrows uphill, and every pixel that flows to the same point is one cell. Touching nuclei get separated because their pixels flow to different centres, even though there's no visible gap between them. A threshold can never do that.
-The SAM part is the backbone — it's built on Segment Anything and trained across a large corpus of cell images from many microscopes and modalities. That's why it's the default: it generalises to new data without retraining, which is exactly the position I'm in. I ran it zero-shot and it scores 0.807.
-One caveat I'll flag now and come back to: because its training corpus is broad, I can't fully rule out that it has seen images like these.</a:t>
+              <a:t>My read of the prompt: segment individual nuclei, and be scored on instance agreement with hand-drawn outlines. 200 fields, 100 of them training, about 118 nuclei each.
+Given that, the highest-value thing I could do was NOT to train a model. With 100 training fields, a from-scratch model measures my training loop, not the problem. And I didn't label more data — there are already 23,617 annotated nuclei, and the annotation turns out to be the thing I'm auditing, not a bottleneck.
+So: a state-of-the-art pretrained model — Cellpose-SAM — used zero-shot, and then I spent the time on making evaluation cheap and on working out where the score actually goes.
+The fine-tuning one is the interesting decision, and I'll own it. train_seg exists and 100 labelled fields is enough to adapt a generalist — it's the textbook biggest lever. I left it undone deliberately. Because of what's coming on the boundary slides, a fine-tuned model would improve AP partly by learning this annotator's systematic tightness — a better metric without better segmentation. That makes it a test of the ceiling claim rather than an improvement. The honest second reason: MPS training time was unmeasured against a deadline, and a probe that can't distinguish 'won't converge' from 'needs another 15 minutes' produces sunk cost rather than a decision.</a:t>
             </a:r>
             <a:endParaRPr lang="en-US" dirty="0"/>
           </a:p>
@@ -1681,10 +1589,8 @@
           <a:p>
             <a:r>
               <a:rPr lang="en-US" dirty="0"/>
-              <a:t>My read of the prompt: segment individual nuclei, and be scored on instance agreement with hand-drawn outlines. 200 fields, 100 of them training, about 118 nuclei each.
-Given that, the highest-value thing I could do was NOT to train a model. With 100 training fields, a from-scratch model measures my training loop, not the problem. And I didn't label more data — there are already 23,617 annotated nuclei, and the annotation turns out to be the thing I'm auditing, not a bottleneck.
-So: a state-of-the-art pretrained model — Cellpose-SAM — used zero-shot, and then I spent the time on making evaluation cheap and on working out where the score actually goes.
-The fine-tuning one is the interesting decision, and I'll own it. train_seg exists and 100 labelled fields is enough to adapt a generalist — it's the textbook biggest lever. I left it undone deliberately. Because of what's coming on the boundary slides, a fine-tuned model would improve AP partly by learning this annotator's systematic tightness — a better metric without better segmentation. That makes it a test of the ceiling claim rather than an improvement. The honest second reason: MPS training time was unmeasured against a deadline, and a probe that can't distinguish 'won't converge' from 'needs another 15 minutes' produces sunk cost rather than a decision.</a:t>
+              <a:t>The answer files look like they label each nucleus with its own ID. They don't — they only use three values, arranged so touching nuclei never share one. Take the pixel value as the object ID and the whole field collapses to three objects. Binarise and run connected components instead — the careful next guess — and every touching clump still fuses: 100 instead of 118 in this field. Either way your score goes UP, because the hard cases disappear from the test.
+I checked my decoding two ways: it recovers 23,617 objects, matching what the dataset documentation reports, and the count is identical under 4- and 8-connectivity.</a:t>
             </a:r>
             <a:endParaRPr lang="en-US" dirty="0"/>
           </a:p>
@@ -1772,8 +1678,8 @@
           <a:p>
             <a:r>
               <a:rPr lang="en-US" dirty="0"/>
-              <a:t>The answer files look like they label each nucleus with its own ID. They don't — they only use three values, arranged so touching nuclei never share one. Take the pixel value as the object ID and the whole field collapses to three objects. Binarise and run connected components instead — the careful next guess — and every touching clump still fuses: 100 instead of 118 in this field. Either way your score goes UP, because the hard cases disappear from the test.
-I checked my decoding two ways: it recovers 23,617 objects, matching what the dataset documentation reports, and the count is identical under 4- and 8-connectivity.</a:t>
+              <a:t>I used a pretrained model for the segmenting, and wrote a classical pipeline from scratch as a comparison. The piece that mattered most was a cache: testing a setting took 8.8 seconds per image, and I got it to 0.11 — about 72× faster, with byte-identical output. That's the median-based figure; the mean says 81×, but the first call includes loading the checkpoint, so 72× is the honest one. Everything after this depends on it.
+Pre-empts 'did you just call a library.' Don't be defensive, just state it.</a:t>
             </a:r>
             <a:endParaRPr lang="en-US" dirty="0"/>
           </a:p>
@@ -1861,8 +1767,8 @@
           <a:p>
             <a:r>
               <a:rPr lang="en-US" dirty="0"/>
-              <a:t>I used a pretrained model for the segmenting, and wrote a classical pipeline from scratch as a comparison. The piece that mattered most was a cache: testing a setting took 8.8 seconds per image, and I got it to 0.11 — about 72× faster, with byte-identical output. That's the median-based figure; the mean says 81×, but the first call includes loading the checkpoint, so 72× is the honest one. Everything after this depends on it.
-Pre-empts 'did you just call a library.' Don't be defensive, just state it.</a:t>
+              <a:t>That's the headline. But it's an average of ten increasingly strict judgments, and it's worth asking where it's actually losing points.
+Deliberately anticlimactic. You're setting up the pivot.</a:t>
             </a:r>
             <a:endParaRPr lang="en-US" dirty="0"/>
           </a:p>
@@ -1950,8 +1856,8 @@
           <a:p>
             <a:r>
               <a:rPr lang="en-US" dirty="0"/>
-              <a:t>That's the headline. But it's an average of ten increasingly strict judgments, and it's worth asking where it's actually losing points.
-Deliberately anticlimactic. You're setting up the pivot.</a:t>
+              <a:t>At the loosest setting, it finds 93% correctly. At the strictest, 31%. The two strictest settings cause 54% of the total loss. Everything else — every missed object, every wrongly merged pair — is under 4% of it. So if I want to improve the number, that's where it lives.
+This is the pivot slide. Everything before was setup. Slow down here.</a:t>
             </a:r>
             <a:endParaRPr lang="en-US" dirty="0"/>
           </a:p>
@@ -2039,8 +1945,9 @@
           <a:p>
             <a:r>
               <a:rPr lang="en-US" dirty="0"/>
-              <a:t>At the loosest setting, it finds 93% correctly. At the strictest, 31%. The two strictest settings cause 54% of the total loss. Everything else — every missed object, every wrongly merged pair — is under 4% of it. So if I want to improve the number, that's where it lives.
-This is the pivot slide. Everything before was setup. Slow down here.</a:t>
+              <a:t>To score at that strictness your outline must match the human's to within about half a pixel. So I asked whether a hand tracing is even that precise, using the image itself as a referee — two different definitions of where an edge is.
+They give opposite answers. Brightness-halfway favours the human in 67% of fields; edge-steepness favours the model in 96%. And the gradient measure is the one to weight, because it's reference-free — both outlines are divided by the same local contrast, so any calibration error cancels. The half-maximum measure needs 0.5 to be correctly located, and on this data it isn't: both outlines read about 0.40, not 0.50.
+Two reasonable definitions ranking them oppositely is itself the evidence that those strict thresholds are settling a convention rather than measuring correctness. Do NOT claim the annotation is wrong. Go straight to the next slide.</a:t>
             </a:r>
             <a:endParaRPr lang="en-US" dirty="0"/>
           </a:p>
@@ -2128,9 +2035,9 @@
           <a:p>
             <a:r>
               <a:rPr lang="en-US" dirty="0"/>
-              <a:t>To score at that strictness your outline must match the human's to within about half a pixel. So I asked whether a hand tracing is even that precise, using the image itself as a referee — two different definitions of where an edge is.
-They give opposite answers. Brightness-halfway favours the human in 67% of fields; edge-steepness favours the model in 96%. And the gradient measure is the one to weight, because it's reference-free — both outlines are divided by the same local contrast, so any calibration error cancels. The half-maximum measure needs 0.5 to be correctly located, and on this data it isn't: both outlines read about 0.40, not 0.50.
-Two reasonable definitions ranking them oppositely is itself the evidence that those strict thresholds are settling a convention rather than measuring correctness. Do NOT claim the annotation is wrong. Go straight to the next slide.</a:t>
+              <a:t>My first version of this said the model was closer, in 48 of 49 images. Someone suggested that might be an artifact of how I sampled pixels along each outline. So I built a test with a known right answer — human's outline exactly on the edge, model's slightly outside it — and my measurement picked the wrong one nine times out of nine.
+I'd been sampling the ring of pixels just inside each outline, which sits half a pixel in, the same size as the effect. And it isn't common-mode: it favours whichever outline is larger, which is the model's. So the artifact alone could have produced the entire original result. I fixed the sampling, re-ran, and my headline finding inverted. So I retracted it.
+This is the best slide in the deck. Don't rush it.</a:t>
             </a:r>
             <a:endParaRPr lang="en-US" dirty="0"/>
           </a:p>
@@ -2803,7 +2710,7 @@
                 <a:ea typeface="Cambria" pitchFamily="34" charset="-122"/>
                 <a:cs typeface="Cambria" pitchFamily="34" charset="-120"/>
               </a:rPr>
-              <a:t>I got this wrong first</a:t>
+              <a:t>What actually fails</a:t>
             </a:r>
             <a:endParaRPr lang="en-US" sz="2700" dirty="0"/>
           </a:p>
@@ -2842,375 +2749,36 @@
                 <a:ea typeface="Calibri" pitchFamily="34" charset="-122"/>
                 <a:cs typeface="Calibri" pitchFamily="34" charset="-120"/>
               </a:rPr>
-              <a:t>Synthetic sweep with a known right answer: ground truth exactly on the edge, prediction 0.25 px too large</a:t>
+              <a:t>One population: small and faint</a:t>
             </a:r>
             <a:endParaRPr lang="en-US" sz="1400" dirty="0"/>
           </a:p>
         </p:txBody>
       </p:sp>
-      <p:sp>
-        <p:nvSpPr>
-          <p:cNvPr id="6" name="Shape 4"/>
-          <p:cNvSpPr/>
-          <p:nvPr/>
-        </p:nvSpPr>
-        <p:spPr>
-          <a:xfrm>
-            <a:off x="566928" y="1874520"/>
-            <a:ext cx="11057839" cy="1225296"/>
-          </a:xfrm>
-          <a:prstGeom prst="roundRect">
-            <a:avLst>
-              <a:gd name="adj" fmla="val 8955"/>
-            </a:avLst>
-          </a:prstGeom>
-          <a:solidFill>
-            <a:srgbClr val="F4F3EF"/>
-          </a:solidFill>
-          <a:ln/>
-        </p:spPr>
-      </p:sp>
-      <p:sp>
-        <p:nvSpPr>
-          <p:cNvPr id="7" name="Text 5"/>
-          <p:cNvSpPr/>
-          <p:nvPr/>
-        </p:nvSpPr>
-        <p:spPr>
-          <a:xfrm>
-            <a:off x="877824" y="1874520"/>
-            <a:ext cx="4206240" cy="1225296"/>
-          </a:xfrm>
-          <a:prstGeom prst="rect">
-            <a:avLst/>
-          </a:prstGeom>
-          <a:noFill/>
-          <a:ln/>
-        </p:spPr>
-        <p:txBody>
-          <a:bodyPr wrap="square" lIns="0" tIns="0" rIns="0" bIns="0" rtlCol="0" anchor="ctr"/>
-          <a:lstStyle/>
-          <a:p>
-            <a:pPr indent="0" marL="0">
-              <a:lnSpc>
-                <a:spcPts val="2100"/>
-              </a:lnSpc>
-              <a:buNone/>
-            </a:pPr>
-            <a:r>
-              <a:rPr lang="en-US" sz="1500" dirty="0">
-                <a:solidFill>
-                  <a:srgbClr val="0B0B0B"/>
-                </a:solidFill>
-                <a:latin typeface="Calibri" pitchFamily="34" charset="0"/>
-                <a:ea typeface="Calibri" pitchFamily="34" charset="-122"/>
-                <a:cs typeface="Calibri" pitchFamily="34" charset="-120"/>
-              </a:rPr>
-              <a:t>my first version</a:t>
-            </a:r>
-            <a:endParaRPr lang="en-US" sz="1500" dirty="0"/>
-          </a:p>
-          <a:p>
-            <a:pPr indent="0" marL="0">
-              <a:lnSpc>
-                <a:spcPts val="2100"/>
-              </a:lnSpc>
-              <a:buNone/>
-            </a:pPr>
-            <a:r>
-              <a:rPr lang="en-US" sz="1500" dirty="0">
-                <a:solidFill>
-                  <a:srgbClr val="0B0B0B"/>
-                </a:solidFill>
-                <a:latin typeface="Calibri" pitchFamily="34" charset="0"/>
-                <a:ea typeface="Calibri" pitchFamily="34" charset="-122"/>
-                <a:cs typeface="Calibri" pitchFamily="34" charset="-120"/>
-              </a:rPr>
-              <a:t>inner-boundary ring</a:t>
-            </a:r>
-            <a:endParaRPr lang="en-US" sz="1500" dirty="0"/>
-          </a:p>
-        </p:txBody>
-      </p:sp>
-      <p:sp>
-        <p:nvSpPr>
-          <p:cNvPr id="8" name="Text 6"/>
-          <p:cNvSpPr/>
-          <p:nvPr/>
-        </p:nvSpPr>
-        <p:spPr>
-          <a:xfrm>
-            <a:off x="5230368" y="1874520"/>
-            <a:ext cx="2103120" cy="1225296"/>
-          </a:xfrm>
-          <a:prstGeom prst="rect">
-            <a:avLst/>
-          </a:prstGeom>
-          <a:noFill/>
-          <a:ln/>
-        </p:spPr>
-        <p:txBody>
-          <a:bodyPr wrap="square" lIns="0" tIns="0" rIns="0" bIns="0" rtlCol="0" anchor="ctr"/>
-          <a:lstStyle/>
-          <a:p>
-            <a:pPr algn="ctr" indent="0" marL="0">
-              <a:buNone/>
-            </a:pPr>
-            <a:r>
-              <a:rPr lang="en-US" sz="4000" b="1" dirty="0">
-                <a:solidFill>
-                  <a:srgbClr val="A32E22"/>
-                </a:solidFill>
-                <a:latin typeface="Cambria" pitchFamily="34" charset="0"/>
-                <a:ea typeface="Cambria" pitchFamily="34" charset="-122"/>
-                <a:cs typeface="Cambria" pitchFamily="34" charset="-120"/>
-              </a:rPr>
-              <a:t>9 of 9</a:t>
-            </a:r>
-            <a:endParaRPr lang="en-US" sz="4000" dirty="0"/>
-          </a:p>
-        </p:txBody>
-      </p:sp>
-      <p:sp>
-        <p:nvSpPr>
-          <p:cNvPr id="9" name="Text 7"/>
-          <p:cNvSpPr/>
-          <p:nvPr/>
-        </p:nvSpPr>
-        <p:spPr>
-          <a:xfrm>
-            <a:off x="7516368" y="1874520"/>
-            <a:ext cx="3840480" cy="1225296"/>
-          </a:xfrm>
-          <a:prstGeom prst="rect">
-            <a:avLst/>
-          </a:prstGeom>
-          <a:noFill/>
-          <a:ln/>
-        </p:spPr>
-        <p:txBody>
-          <a:bodyPr wrap="square" lIns="0" tIns="0" rIns="0" bIns="0" rtlCol="0" anchor="ctr"/>
-          <a:lstStyle/>
-          <a:p>
-            <a:pPr indent="0" marL="0">
-              <a:buNone/>
-            </a:pPr>
-            <a:r>
-              <a:rPr lang="en-US" sz="1400" dirty="0">
-                <a:solidFill>
-                  <a:srgbClr val="52514E"/>
-                </a:solidFill>
-                <a:latin typeface="Calibri" pitchFamily="34" charset="0"/>
-                <a:ea typeface="Calibri" pitchFamily="34" charset="-122"/>
-                <a:cs typeface="Calibri" pitchFamily="34" charset="-120"/>
-              </a:rPr>
-              <a:t>picked the wrong outline</a:t>
-            </a:r>
-            <a:endParaRPr lang="en-US" sz="1400" dirty="0"/>
-          </a:p>
-        </p:txBody>
-      </p:sp>
-      <p:sp>
-        <p:nvSpPr>
-          <p:cNvPr id="10" name="Shape 8"/>
-          <p:cNvSpPr/>
-          <p:nvPr/>
-        </p:nvSpPr>
-        <p:spPr>
-          <a:xfrm>
-            <a:off x="566928" y="3355848"/>
-            <a:ext cx="11057839" cy="1225296"/>
-          </a:xfrm>
-          <a:prstGeom prst="roundRect">
-            <a:avLst>
-              <a:gd name="adj" fmla="val 8955"/>
-            </a:avLst>
-          </a:prstGeom>
-          <a:solidFill>
-            <a:srgbClr val="F4F3EF"/>
-          </a:solidFill>
-          <a:ln/>
-        </p:spPr>
-      </p:sp>
-      <p:sp>
-        <p:nvSpPr>
-          <p:cNvPr id="11" name="Text 9"/>
-          <p:cNvSpPr/>
-          <p:nvPr/>
-        </p:nvSpPr>
-        <p:spPr>
-          <a:xfrm>
-            <a:off x="877824" y="3355848"/>
-            <a:ext cx="4206240" cy="1225296"/>
-          </a:xfrm>
-          <a:prstGeom prst="rect">
-            <a:avLst/>
-          </a:prstGeom>
-          <a:noFill/>
-          <a:ln/>
-        </p:spPr>
-        <p:txBody>
-          <a:bodyPr wrap="square" lIns="0" tIns="0" rIns="0" bIns="0" rtlCol="0" anchor="ctr"/>
-          <a:lstStyle/>
-          <a:p>
-            <a:pPr indent="0" marL="0">
-              <a:lnSpc>
-                <a:spcPts val="2100"/>
-              </a:lnSpc>
-              <a:buNone/>
-            </a:pPr>
-            <a:r>
-              <a:rPr lang="en-US" sz="1500" dirty="0">
-                <a:solidFill>
-                  <a:srgbClr val="0B0B0B"/>
-                </a:solidFill>
-                <a:latin typeface="Calibri" pitchFamily="34" charset="0"/>
-                <a:ea typeface="Calibri" pitchFamily="34" charset="-122"/>
-                <a:cs typeface="Calibri" pitchFamily="34" charset="-120"/>
-              </a:rPr>
-              <a:t>after the fix</a:t>
-            </a:r>
-            <a:endParaRPr lang="en-US" sz="1500" dirty="0"/>
-          </a:p>
-          <a:p>
-            <a:pPr indent="0" marL="0">
-              <a:lnSpc>
-                <a:spcPts val="2100"/>
-              </a:lnSpc>
-              <a:buNone/>
-            </a:pPr>
-            <a:r>
-              <a:rPr lang="en-US" sz="1500" dirty="0">
-                <a:solidFill>
-                  <a:srgbClr val="0B0B0B"/>
-                </a:solidFill>
-                <a:latin typeface="Calibri" pitchFamily="34" charset="0"/>
-                <a:ea typeface="Calibri" pitchFamily="34" charset="-122"/>
-                <a:cs typeface="Calibri" pitchFamily="34" charset="-120"/>
-              </a:rPr>
-              <a:t>marching-squares contour</a:t>
-            </a:r>
-            <a:endParaRPr lang="en-US" sz="1500" dirty="0"/>
-          </a:p>
-        </p:txBody>
-      </p:sp>
-      <p:sp>
-        <p:nvSpPr>
-          <p:cNvPr id="12" name="Text 10"/>
-          <p:cNvSpPr/>
-          <p:nvPr/>
-        </p:nvSpPr>
-        <p:spPr>
-          <a:xfrm>
-            <a:off x="5230368" y="3355848"/>
-            <a:ext cx="2103120" cy="1225296"/>
-          </a:xfrm>
-          <a:prstGeom prst="rect">
-            <a:avLst/>
-          </a:prstGeom>
-          <a:noFill/>
-          <a:ln/>
-        </p:spPr>
-        <p:txBody>
-          <a:bodyPr wrap="square" lIns="0" tIns="0" rIns="0" bIns="0" rtlCol="0" anchor="ctr"/>
-          <a:lstStyle/>
-          <a:p>
-            <a:pPr algn="ctr" indent="0" marL="0">
-              <a:buNone/>
-            </a:pPr>
-            <a:r>
-              <a:rPr lang="en-US" sz="4000" b="1" dirty="0">
-                <a:solidFill>
-                  <a:srgbClr val="1E6F4C"/>
-                </a:solidFill>
-                <a:latin typeface="Cambria" pitchFamily="34" charset="0"/>
-                <a:ea typeface="Cambria" pitchFamily="34" charset="-122"/>
-                <a:cs typeface="Cambria" pitchFamily="34" charset="-120"/>
-              </a:rPr>
-              <a:t>0 of 9</a:t>
-            </a:r>
-            <a:endParaRPr lang="en-US" sz="4000" dirty="0"/>
-          </a:p>
-        </p:txBody>
-      </p:sp>
-      <p:sp>
-        <p:nvSpPr>
-          <p:cNvPr id="13" name="Text 11"/>
-          <p:cNvSpPr/>
-          <p:nvPr/>
-        </p:nvSpPr>
-        <p:spPr>
-          <a:xfrm>
-            <a:off x="7516368" y="3355848"/>
-            <a:ext cx="3840480" cy="1225296"/>
-          </a:xfrm>
-          <a:prstGeom prst="rect">
-            <a:avLst/>
-          </a:prstGeom>
-          <a:noFill/>
-          <a:ln/>
-        </p:spPr>
-        <p:txBody>
-          <a:bodyPr wrap="square" lIns="0" tIns="0" rIns="0" bIns="0" rtlCol="0" anchor="ctr"/>
-          <a:lstStyle/>
-          <a:p>
-            <a:pPr indent="0" marL="0">
-              <a:buNone/>
-            </a:pPr>
-            <a:r>
-              <a:rPr lang="en-US" sz="1400" dirty="0">
-                <a:solidFill>
-                  <a:srgbClr val="52514E"/>
-                </a:solidFill>
-                <a:latin typeface="Calibri" pitchFamily="34" charset="0"/>
-                <a:ea typeface="Calibri" pitchFamily="34" charset="-122"/>
-                <a:cs typeface="Calibri" pitchFamily="34" charset="-120"/>
-              </a:rPr>
-              <a:t>picked correctly</a:t>
-            </a:r>
-            <a:endParaRPr lang="en-US" sz="1400" dirty="0"/>
-          </a:p>
-        </p:txBody>
-      </p:sp>
-      <p:sp>
-        <p:nvSpPr>
-          <p:cNvPr id="14" name="Text 12"/>
-          <p:cNvSpPr/>
-          <p:nvPr/>
-        </p:nvSpPr>
-        <p:spPr>
-          <a:xfrm>
-            <a:off x="566928" y="5138928"/>
-            <a:ext cx="11057839" cy="457200"/>
-          </a:xfrm>
-          <a:prstGeom prst="rect">
-            <a:avLst/>
-          </a:prstGeom>
-          <a:noFill/>
-          <a:ln/>
-        </p:spPr>
-        <p:txBody>
-          <a:bodyPr wrap="square" lIns="0" tIns="0" rIns="0" bIns="0" rtlCol="0" anchor="ctr"/>
-          <a:lstStyle/>
-          <a:p>
-            <a:pPr indent="0" marL="0">
-              <a:buNone/>
-            </a:pPr>
-            <a:r>
-              <a:rPr lang="en-US" sz="1500" b="1" dirty="0">
-                <a:solidFill>
-                  <a:srgbClr val="0B0B0B"/>
-                </a:solidFill>
-                <a:latin typeface="Calibri" pitchFamily="34" charset="0"/>
-                <a:ea typeface="Calibri" pitchFamily="34" charset="-122"/>
-                <a:cs typeface="Calibri" pitchFamily="34" charset="-120"/>
-              </a:rPr>
-              <a:t>The original claim reported the model closer in 48 of 49 fields. It did not survive. I retracted it.</a:t>
-            </a:r>
-            <a:endParaRPr lang="en-US" sz="1500" dirty="0"/>
-          </a:p>
-        </p:txBody>
-      </p:sp>
+      <p:pic>
+        <p:nvPicPr>
+          <p:cNvPr id="6" name="Image 0" descr="/Users/tejas/Take_Home_Neo/figures/fig3_what_gets_missed.png">    </p:cNvPr>
+          <p:cNvPicPr>
+            <a:picLocks noChangeAspect="1"/>
+          </p:cNvPicPr>
+          <p:nvPr/>
+        </p:nvPicPr>
+        <p:blipFill>
+          <a:blip r:embed="rId1"/>
+          <a:stretch>
+            <a:fillRect/>
+          </a:stretch>
+        </p:blipFill>
+        <p:spPr>
+          <a:xfrm>
+            <a:off x="566928" y="1866291"/>
+            <a:ext cx="11057839" cy="3856937"/>
+          </a:xfrm>
+          <a:prstGeom prst="rect">
+            <a:avLst/>
+          </a:prstGeom>
+        </p:spPr>
+      </p:pic>
     </p:spTree>
   </p:cSld>
   <p:clrMapOvr>
@@ -3335,7 +2903,7 @@
                 <a:ea typeface="Cambria" pitchFamily="34" charset="-122"/>
                 <a:cs typeface="Cambria" pitchFamily="34" charset="-120"/>
               </a:rPr>
-              <a:t>What actually fails</a:t>
+              <a:t>Are those even objects?</a:t>
             </a:r>
             <a:endParaRPr lang="en-US" sz="2700" dirty="0"/>
           </a:p>
@@ -3374,7 +2942,7 @@
                 <a:ea typeface="Calibri" pitchFamily="34" charset="-122"/>
                 <a:cs typeface="Calibri" pitchFamily="34" charset="-120"/>
               </a:rPr>
-              <a:t>One population: small and faint</a:t>
+              <a:t>I couldn’t answer that from a table, so I looked</a:t>
             </a:r>
             <a:endParaRPr lang="en-US" sz="1400" dirty="0"/>
           </a:p>
@@ -3382,7 +2950,7 @@
       </p:sp>
       <p:pic>
         <p:nvPicPr>
-          <p:cNvPr id="6" name="Image 0" descr="/Users/tejas/Take_Home_Neo/figures/fig3_what_gets_missed.png">    </p:cNvPr>
+          <p:cNvPr id="6" name="Image 0" descr="/Users/tejas/Take_Home_Neo/figures/fig6_are_these_nuclei.png">    </p:cNvPr>
           <p:cNvPicPr>
             <a:picLocks noChangeAspect="1"/>
           </p:cNvPicPr>
@@ -3396,8 +2964,8 @@
         </p:blipFill>
         <p:spPr>
           <a:xfrm>
-            <a:off x="566928" y="1866291"/>
-            <a:ext cx="11057839" cy="3856937"/>
+            <a:off x="3515182" y="1371600"/>
+            <a:ext cx="5161331" cy="4846320"/>
           </a:xfrm>
           <a:prstGeom prst="rect">
             <a:avLst/>
@@ -3528,7 +3096,7 @@
                 <a:ea typeface="Cambria" pitchFamily="34" charset="-122"/>
                 <a:cs typeface="Cambria" pitchFamily="34" charset="-120"/>
               </a:rPr>
-              <a:t>Are those even objects?</a:t>
+              <a:t>Six experiments, five null</a:t>
             </a:r>
             <a:endParaRPr lang="en-US" sz="2700" dirty="0"/>
           </a:p>
@@ -3567,199 +3135,6 @@
                 <a:ea typeface="Calibri" pitchFamily="34" charset="-122"/>
                 <a:cs typeface="Calibri" pitchFamily="34" charset="-120"/>
               </a:rPr>
-              <a:t>I couldn’t answer that from a table, so I looked</a:t>
-            </a:r>
-            <a:endParaRPr lang="en-US" sz="1400" dirty="0"/>
-          </a:p>
-        </p:txBody>
-      </p:sp>
-      <p:pic>
-        <p:nvPicPr>
-          <p:cNvPr id="6" name="Image 0" descr="/Users/tejas/Take_Home_Neo/figures/fig6_are_these_nuclei.png">    </p:cNvPr>
-          <p:cNvPicPr>
-            <a:picLocks noChangeAspect="1"/>
-          </p:cNvPicPr>
-          <p:nvPr/>
-        </p:nvPicPr>
-        <p:blipFill>
-          <a:blip r:embed="rId1"/>
-          <a:stretch>
-            <a:fillRect/>
-          </a:stretch>
-        </p:blipFill>
-        <p:spPr>
-          <a:xfrm>
-            <a:off x="3515182" y="1371600"/>
-            <a:ext cx="5161331" cy="4846320"/>
-          </a:xfrm>
-          <a:prstGeom prst="rect">
-            <a:avLst/>
-          </a:prstGeom>
-        </p:spPr>
-      </p:pic>
-    </p:spTree>
-  </p:cSld>
-  <p:clrMapOvr>
-    <a:masterClrMapping/>
-  </p:clrMapOvr>
-</p:sld>
-</file>
-
-<file path=ppt/slides/slide13.xml><?xml version="1.0" encoding="utf-8"?>
-<p:sld xmlns:a="http://schemas.openxmlformats.org/drawingml/2006/main" xmlns:r="http://schemas.openxmlformats.org/officeDocument/2006/relationships" xmlns:p="http://schemas.openxmlformats.org/presentationml/2006/main">
-  <p:cSld name="Slide 13">
-    <p:bg>
-      <p:bgPr>
-        <a:solidFill>
-          <a:srgbClr val="FFFFFF"/>
-        </a:solidFill>
-      </p:bgPr>
-    </p:bg>
-    <p:spTree>
-      <p:nvGrpSpPr>
-        <p:cNvPr id="1" name=""/>
-        <p:cNvGrpSpPr/>
-        <p:nvPr/>
-      </p:nvGrpSpPr>
-      <p:grpSpPr>
-        <a:xfrm>
-          <a:off x="0" y="0"/>
-          <a:ext cx="0" cy="0"/>
-          <a:chOff x="0" y="0"/>
-          <a:chExt cx="0" cy="0"/>
-        </a:xfrm>
-      </p:grpSpPr>
-      <p:sp>
-        <p:nvSpPr>
-          <p:cNvPr id="2" name="Shape 0"/>
-          <p:cNvSpPr/>
-          <p:nvPr/>
-        </p:nvSpPr>
-        <p:spPr>
-          <a:xfrm>
-            <a:off x="566928" y="384048"/>
-            <a:ext cx="384048" cy="384048"/>
-          </a:xfrm>
-          <a:prstGeom prst="ellipse">
-            <a:avLst/>
-          </a:prstGeom>
-          <a:solidFill>
-            <a:srgbClr val="EB6834"/>
-          </a:solidFill>
-          <a:ln/>
-        </p:spPr>
-      </p:sp>
-      <p:sp>
-        <p:nvSpPr>
-          <p:cNvPr id="3" name="Text 1"/>
-          <p:cNvSpPr/>
-          <p:nvPr/>
-        </p:nvSpPr>
-        <p:spPr>
-          <a:xfrm>
-            <a:off x="566928" y="384048"/>
-            <a:ext cx="384048" cy="384048"/>
-          </a:xfrm>
-          <a:prstGeom prst="rect">
-            <a:avLst/>
-          </a:prstGeom>
-          <a:noFill/>
-          <a:ln/>
-        </p:spPr>
-        <p:txBody>
-          <a:bodyPr wrap="square" lIns="0" tIns="0" rIns="0" bIns="0" rtlCol="0" anchor="ctr"/>
-          <a:lstStyle/>
-          <a:p>
-            <a:pPr algn="ctr" indent="0" marL="0">
-              <a:buNone/>
-            </a:pPr>
-            <a:r>
-              <a:rPr lang="en-US" sz="1500" b="1" dirty="0">
-                <a:solidFill>
-                  <a:srgbClr val="FFFFFF"/>
-                </a:solidFill>
-                <a:latin typeface="Calibri" pitchFamily="34" charset="0"/>
-                <a:ea typeface="Calibri" pitchFamily="34" charset="-122"/>
-                <a:cs typeface="Calibri" pitchFamily="34" charset="-120"/>
-              </a:rPr>
-              <a:t>13</a:t>
-            </a:r>
-            <a:endParaRPr lang="en-US" sz="1500" dirty="0"/>
-          </a:p>
-        </p:txBody>
-      </p:sp>
-      <p:sp>
-        <p:nvSpPr>
-          <p:cNvPr id="4" name="Text 2"/>
-          <p:cNvSpPr/>
-          <p:nvPr/>
-        </p:nvSpPr>
-        <p:spPr>
-          <a:xfrm>
-            <a:off x="1133856" y="329184"/>
-            <a:ext cx="10490911" cy="512064"/>
-          </a:xfrm>
-          <a:prstGeom prst="rect">
-            <a:avLst/>
-          </a:prstGeom>
-          <a:noFill/>
-          <a:ln/>
-        </p:spPr>
-        <p:txBody>
-          <a:bodyPr wrap="square" lIns="0" tIns="0" rIns="0" bIns="0" rtlCol="0" anchor="ctr"/>
-          <a:lstStyle/>
-          <a:p>
-            <a:pPr indent="0" marL="0">
-              <a:buNone/>
-            </a:pPr>
-            <a:r>
-              <a:rPr lang="en-US" sz="2700" b="1" dirty="0">
-                <a:solidFill>
-                  <a:srgbClr val="0B0B0B"/>
-                </a:solidFill>
-                <a:latin typeface="Cambria" pitchFamily="34" charset="0"/>
-                <a:ea typeface="Cambria" pitchFamily="34" charset="-122"/>
-                <a:cs typeface="Cambria" pitchFamily="34" charset="-120"/>
-              </a:rPr>
-              <a:t>Six experiments, five null</a:t>
-            </a:r>
-            <a:endParaRPr lang="en-US" sz="2700" dirty="0"/>
-          </a:p>
-        </p:txBody>
-      </p:sp>
-      <p:sp>
-        <p:nvSpPr>
-          <p:cNvPr id="5" name="Text 3"/>
-          <p:cNvSpPr/>
-          <p:nvPr/>
-        </p:nvSpPr>
-        <p:spPr>
-          <a:xfrm>
-            <a:off x="1133856" y="868680"/>
-            <a:ext cx="10490911" cy="310896"/>
-          </a:xfrm>
-          <a:prstGeom prst="rect">
-            <a:avLst/>
-          </a:prstGeom>
-          <a:noFill/>
-          <a:ln/>
-        </p:spPr>
-        <p:txBody>
-          <a:bodyPr wrap="square" lIns="0" tIns="0" rIns="0" bIns="0" rtlCol="0" anchor="ctr"/>
-          <a:lstStyle/>
-          <a:p>
-            <a:pPr indent="0" marL="0">
-              <a:buNone/>
-            </a:pPr>
-            <a:r>
-              <a:rPr lang="en-US" sz="1400" i="1" dirty="0">
-                <a:solidFill>
-                  <a:srgbClr val="52514E"/>
-                </a:solidFill>
-                <a:latin typeface="Calibri" pitchFamily="34" charset="0"/>
-                <a:ea typeface="Calibri" pitchFamily="34" charset="-122"/>
-                <a:cs typeface="Calibri" pitchFamily="34" charset="-120"/>
-              </a:rPr>
               <a:t>Each was motivated by a measurement, and each failure eliminated a cause</a:t>
             </a:r>
             <a:endParaRPr lang="en-US" sz="1400" dirty="0"/>
@@ -3768,7 +3143,7 @@
       </p:sp>
       <p:graphicFrame>
         <p:nvGraphicFramePr>
-          <p:cNvPr id="14" name="Table 0"/>
+          <p:cNvPr id="13" name="Table 0"/>
           <p:cNvGraphicFramePr>
             <a:graphicFrameLocks noGrp="1"/>
           </p:cNvGraphicFramePr>
@@ -4845,9 +4220,9 @@
 </p:sld>
 </file>
 
-<file path=ppt/slides/slide14.xml><?xml version="1.0" encoding="utf-8"?>
+<file path=ppt/slides/slide13.xml><?xml version="1.0" encoding="utf-8"?>
 <p:sld xmlns:a="http://schemas.openxmlformats.org/drawingml/2006/main" xmlns:r="http://schemas.openxmlformats.org/officeDocument/2006/relationships" xmlns:p="http://schemas.openxmlformats.org/presentationml/2006/main">
-  <p:cSld name="Slide 14">
+  <p:cSld name="Slide 13">
     <p:bg>
       <p:bgPr>
         <a:solidFill>
@@ -4922,7 +4297,7 @@
                 <a:ea typeface="Calibri" pitchFamily="34" charset="-122"/>
                 <a:cs typeface="Calibri" pitchFamily="34" charset="-120"/>
               </a:rPr>
-              <a:t>14</a:t>
+              <a:t>13</a:t>
             </a:r>
             <a:endParaRPr lang="en-US" sz="1500" dirty="0"/>
           </a:p>
@@ -5493,6 +4868,283 @@
               <a:t>AP stayed flat (0.807 → 0.809) because it traded merges for splits. The error profile changed substantially — visible only because those are counted separately.</a:t>
             </a:r>
             <a:endParaRPr lang="en-US" sz="1300" dirty="0"/>
+          </a:p>
+        </p:txBody>
+      </p:sp>
+    </p:spTree>
+  </p:cSld>
+  <p:clrMapOvr>
+    <a:masterClrMapping/>
+  </p:clrMapOvr>
+</p:sld>
+</file>
+
+<file path=ppt/slides/slide14.xml><?xml version="1.0" encoding="utf-8"?>
+<p:sld xmlns:a="http://schemas.openxmlformats.org/drawingml/2006/main" xmlns:r="http://schemas.openxmlformats.org/officeDocument/2006/relationships" xmlns:p="http://schemas.openxmlformats.org/presentationml/2006/main">
+  <p:cSld name="Slide 14">
+    <p:bg>
+      <p:bgPr>
+        <a:solidFill>
+          <a:srgbClr val="FFFFFF"/>
+        </a:solidFill>
+      </p:bgPr>
+    </p:bg>
+    <p:spTree>
+      <p:nvGrpSpPr>
+        <p:cNvPr id="1" name=""/>
+        <p:cNvGrpSpPr/>
+        <p:nvPr/>
+      </p:nvGrpSpPr>
+      <p:grpSpPr>
+        <a:xfrm>
+          <a:off x="0" y="0"/>
+          <a:ext cx="0" cy="0"/>
+          <a:chOff x="0" y="0"/>
+          <a:chExt cx="0" cy="0"/>
+        </a:xfrm>
+      </p:grpSpPr>
+      <p:sp>
+        <p:nvSpPr>
+          <p:cNvPr id="2" name="Shape 0"/>
+          <p:cNvSpPr/>
+          <p:nvPr/>
+        </p:nvSpPr>
+        <p:spPr>
+          <a:xfrm>
+            <a:off x="566928" y="384048"/>
+            <a:ext cx="566928" cy="384048"/>
+          </a:xfrm>
+          <a:prstGeom prst="roundRect">
+            <a:avLst>
+              <a:gd name="adj" fmla="val 19048"/>
+            </a:avLst>
+          </a:prstGeom>
+          <a:solidFill>
+            <a:srgbClr val="52514E"/>
+          </a:solidFill>
+          <a:ln/>
+        </p:spPr>
+      </p:sp>
+      <p:sp>
+        <p:nvSpPr>
+          <p:cNvPr id="3" name="Text 1"/>
+          <p:cNvSpPr/>
+          <p:nvPr/>
+        </p:nvSpPr>
+        <p:spPr>
+          <a:xfrm>
+            <a:off x="566928" y="384048"/>
+            <a:ext cx="566928" cy="384048"/>
+          </a:xfrm>
+          <a:prstGeom prst="rect">
+            <a:avLst/>
+          </a:prstGeom>
+          <a:noFill/>
+          <a:ln/>
+        </p:spPr>
+        <p:txBody>
+          <a:bodyPr wrap="square" lIns="0" tIns="0" rIns="0" bIns="0" rtlCol="0" anchor="ctr"/>
+          <a:lstStyle/>
+          <a:p>
+            <a:pPr algn="ctr" indent="0" marL="0">
+              <a:buNone/>
+            </a:pPr>
+            <a:r>
+              <a:rPr lang="en-US" sz="1300" b="1" dirty="0">
+                <a:solidFill>
+                  <a:srgbClr val="FFFFFF"/>
+                </a:solidFill>
+                <a:latin typeface="Calibri" pitchFamily="34" charset="0"/>
+                <a:ea typeface="Calibri" pitchFamily="34" charset="-122"/>
+                <a:cs typeface="Calibri" pitchFamily="34" charset="-120"/>
+              </a:rPr>
+              <a:t>B1</a:t>
+            </a:r>
+            <a:endParaRPr lang="en-US" sz="1300" dirty="0"/>
+          </a:p>
+        </p:txBody>
+      </p:sp>
+      <p:sp>
+        <p:nvSpPr>
+          <p:cNvPr id="4" name="Text 2"/>
+          <p:cNvSpPr/>
+          <p:nvPr/>
+        </p:nvSpPr>
+        <p:spPr>
+          <a:xfrm>
+            <a:off x="1316736" y="329184"/>
+            <a:ext cx="10308031" cy="512064"/>
+          </a:xfrm>
+          <a:prstGeom prst="rect">
+            <a:avLst/>
+          </a:prstGeom>
+          <a:noFill/>
+          <a:ln/>
+        </p:spPr>
+        <p:txBody>
+          <a:bodyPr wrap="square" lIns="0" tIns="0" rIns="0" bIns="0" rtlCol="0" anchor="ctr"/>
+          <a:lstStyle/>
+          <a:p>
+            <a:pPr indent="0" marL="0">
+              <a:buNone/>
+            </a:pPr>
+            <a:r>
+              <a:rPr lang="en-US" sz="2500" b="1" dirty="0">
+                <a:solidFill>
+                  <a:srgbClr val="0B0B0B"/>
+                </a:solidFill>
+                <a:latin typeface="Cambria" pitchFamily="34" charset="0"/>
+                <a:ea typeface="Cambria" pitchFamily="34" charset="-122"/>
+                <a:cs typeface="Cambria" pitchFamily="34" charset="-120"/>
+              </a:rPr>
+              <a:t>Did the model see this data?</a:t>
+            </a:r>
+            <a:endParaRPr lang="en-US" sz="2500" dirty="0"/>
+          </a:p>
+        </p:txBody>
+      </p:sp>
+      <p:sp>
+        <p:nvSpPr>
+          <p:cNvPr id="5" name="Text 3"/>
+          <p:cNvSpPr/>
+          <p:nvPr/>
+        </p:nvSpPr>
+        <p:spPr>
+          <a:xfrm>
+            <a:off x="1316736" y="868680"/>
+            <a:ext cx="10308031" cy="310896"/>
+          </a:xfrm>
+          <a:prstGeom prst="rect">
+            <a:avLst/>
+          </a:prstGeom>
+          <a:noFill/>
+          <a:ln/>
+        </p:spPr>
+        <p:txBody>
+          <a:bodyPr wrap="square" lIns="0" tIns="0" rIns="0" bIns="0" rtlCol="0" anchor="ctr"/>
+          <a:lstStyle/>
+          <a:p>
+            <a:pPr indent="0" marL="0">
+              <a:buNone/>
+            </a:pPr>
+            <a:r>
+              <a:rPr lang="en-US" sz="1350" i="1" dirty="0">
+                <a:solidFill>
+                  <a:srgbClr val="52514E"/>
+                </a:solidFill>
+                <a:latin typeface="Calibri" pitchFamily="34" charset="0"/>
+                <a:ea typeface="Calibri" pitchFamily="34" charset="-122"/>
+                <a:cs typeface="Calibri" pitchFamily="34" charset="-120"/>
+              </a:rPr>
+              <a:t>Raise it yourself if it comes up naturally — it reads as rigour</a:t>
+            </a:r>
+            <a:endParaRPr lang="en-US" sz="1350" dirty="0"/>
+          </a:p>
+        </p:txBody>
+      </p:sp>
+      <p:sp>
+        <p:nvSpPr>
+          <p:cNvPr id="6" name="Text 4"/>
+          <p:cNvSpPr/>
+          <p:nvPr/>
+        </p:nvSpPr>
+        <p:spPr>
+          <a:xfrm>
+            <a:off x="749808" y="1600200"/>
+            <a:ext cx="10692079" cy="2926080"/>
+          </a:xfrm>
+          <a:prstGeom prst="rect">
+            <a:avLst/>
+          </a:prstGeom>
+          <a:noFill/>
+          <a:ln/>
+        </p:spPr>
+        <p:txBody>
+          <a:bodyPr wrap="square" lIns="0" tIns="0" rIns="0" bIns="0" rtlCol="0" anchor="ctr"/>
+          <a:lstStyle/>
+          <a:p>
+            <a:pPr marL="342900" indent="-342900">
+              <a:spcAft>
+                <a:spcPts val="1200"/>
+              </a:spcAft>
+              <a:buSzPct val="100000"/>
+              <a:buChar char="•"/>
+            </a:pPr>
+            <a:r>
+              <a:rPr lang="en-US" sz="1700" dirty="0">
+                <a:solidFill>
+                  <a:srgbClr val="0B0B0B"/>
+                </a:solidFill>
+                <a:latin typeface="Calibri" pitchFamily="34" charset="0"/>
+                <a:ea typeface="Calibri" pitchFamily="34" charset="-122"/>
+                <a:cs typeface="Calibri" pitchFamily="34" charset="-120"/>
+              </a:rPr>
+              <a:t>Cellpose-SAM's training corpus includes the 2018 Data Science Bowl.</a:t>
+            </a:r>
+            <a:endParaRPr lang="en-US" sz="1700" dirty="0"/>
+          </a:p>
+          <a:p>
+            <a:pPr marL="342900" indent="-342900">
+              <a:spcAft>
+                <a:spcPts val="1200"/>
+              </a:spcAft>
+              <a:buSzPct val="100000"/>
+              <a:buChar char="•"/>
+            </a:pPr>
+            <a:r>
+              <a:rPr lang="en-US" sz="1700" dirty="0">
+                <a:solidFill>
+                  <a:srgbClr val="0B0B0B"/>
+                </a:solidFill>
+                <a:latin typeface="Calibri" pitchFamily="34" charset="0"/>
+                <a:ea typeface="Calibri" pitchFamily="34" charset="-122"/>
+                <a:cs typeface="Calibri" pitchFamily="34" charset="-120"/>
+              </a:rPr>
+              <a:t>BBBC039's own dataset page states some of its images appear in that collection.</a:t>
+            </a:r>
+            <a:endParaRPr lang="en-US" sz="1700" dirty="0"/>
+          </a:p>
+          <a:p>
+            <a:pPr marL="342900" indent="-342900">
+              <a:spcAft>
+                <a:spcPts val="1200"/>
+              </a:spcAft>
+              <a:buSzPct val="100000"/>
+              <a:buChar char="•"/>
+            </a:pPr>
+            <a:r>
+              <a:rPr lang="en-US" sz="1700" dirty="0">
+                <a:solidFill>
+                  <a:srgbClr val="0B0B0B"/>
+                </a:solidFill>
+                <a:latin typeface="Calibri" pitchFamily="34" charset="0"/>
+                <a:ea typeface="Calibri" pitchFamily="34" charset="-122"/>
+                <a:cs typeface="Calibri" pitchFamily="34" charset="-120"/>
+              </a:rPr>
+              <a:t>So the test score is not cleanly held out, and I don't claim it is.</a:t>
+            </a:r>
+            <a:endParaRPr lang="en-US" sz="1700" dirty="0"/>
+          </a:p>
+          <a:p>
+            <a:pPr marL="342900" indent="-342900">
+              <a:spcAft>
+                <a:spcPts val="1200"/>
+              </a:spcAft>
+              <a:buSzPct val="100000"/>
+              <a:buChar char="•"/>
+            </a:pPr>
+            <a:r>
+              <a:rPr lang="en-US" sz="1700" dirty="0">
+                <a:solidFill>
+                  <a:srgbClr val="0B0B0B"/>
+                </a:solidFill>
+                <a:latin typeface="Calibri" pitchFamily="34" charset="0"/>
+                <a:ea typeface="Calibri" pitchFamily="34" charset="-122"/>
+                <a:cs typeface="Calibri" pitchFamily="34" charset="-120"/>
+              </a:rPr>
+              <a:t>It does not affect the failure analysis, which is about error structure, not rank.</a:t>
+            </a:r>
+            <a:endParaRPr lang="en-US" sz="1700" dirty="0"/>
           </a:p>
         </p:txBody>
       </p:sp>
@@ -5583,7 +5235,7 @@
                 <a:ea typeface="Calibri" pitchFamily="34" charset="-122"/>
                 <a:cs typeface="Calibri" pitchFamily="34" charset="-120"/>
               </a:rPr>
-              <a:t>B1</a:t>
+              <a:t>B2</a:t>
             </a:r>
             <a:endParaRPr lang="en-US" sz="1300" dirty="0"/>
           </a:p>
@@ -5622,7 +5274,7 @@
                 <a:ea typeface="Cambria" pitchFamily="34" charset="-122"/>
                 <a:cs typeface="Cambria" pitchFamily="34" charset="-120"/>
               </a:rPr>
-              <a:t>Did the model see this data?</a:t>
+              <a:t>The classical pipeline</a:t>
             </a:r>
             <a:endParaRPr lang="en-US" sz="2500" dirty="0"/>
           </a:p>
@@ -5661,283 +5313,6 @@
                 <a:ea typeface="Calibri" pitchFamily="34" charset="-122"/>
                 <a:cs typeface="Calibri" pitchFamily="34" charset="-120"/>
               </a:rPr>
-              <a:t>Raise it yourself if it comes up naturally — it reads as rigour</a:t>
-            </a:r>
-            <a:endParaRPr lang="en-US" sz="1350" dirty="0"/>
-          </a:p>
-        </p:txBody>
-      </p:sp>
-      <p:sp>
-        <p:nvSpPr>
-          <p:cNvPr id="6" name="Text 4"/>
-          <p:cNvSpPr/>
-          <p:nvPr/>
-        </p:nvSpPr>
-        <p:spPr>
-          <a:xfrm>
-            <a:off x="749808" y="1600200"/>
-            <a:ext cx="10692079" cy="2926080"/>
-          </a:xfrm>
-          <a:prstGeom prst="rect">
-            <a:avLst/>
-          </a:prstGeom>
-          <a:noFill/>
-          <a:ln/>
-        </p:spPr>
-        <p:txBody>
-          <a:bodyPr wrap="square" lIns="0" tIns="0" rIns="0" bIns="0" rtlCol="0" anchor="ctr"/>
-          <a:lstStyle/>
-          <a:p>
-            <a:pPr marL="342900" indent="-342900">
-              <a:spcAft>
-                <a:spcPts val="1200"/>
-              </a:spcAft>
-              <a:buSzPct val="100000"/>
-              <a:buChar char="•"/>
-            </a:pPr>
-            <a:r>
-              <a:rPr lang="en-US" sz="1700" dirty="0">
-                <a:solidFill>
-                  <a:srgbClr val="0B0B0B"/>
-                </a:solidFill>
-                <a:latin typeface="Calibri" pitchFamily="34" charset="0"/>
-                <a:ea typeface="Calibri" pitchFamily="34" charset="-122"/>
-                <a:cs typeface="Calibri" pitchFamily="34" charset="-120"/>
-              </a:rPr>
-              <a:t>Cellpose-SAM's training corpus includes the 2018 Data Science Bowl.</a:t>
-            </a:r>
-            <a:endParaRPr lang="en-US" sz="1700" dirty="0"/>
-          </a:p>
-          <a:p>
-            <a:pPr marL="342900" indent="-342900">
-              <a:spcAft>
-                <a:spcPts val="1200"/>
-              </a:spcAft>
-              <a:buSzPct val="100000"/>
-              <a:buChar char="•"/>
-            </a:pPr>
-            <a:r>
-              <a:rPr lang="en-US" sz="1700" dirty="0">
-                <a:solidFill>
-                  <a:srgbClr val="0B0B0B"/>
-                </a:solidFill>
-                <a:latin typeface="Calibri" pitchFamily="34" charset="0"/>
-                <a:ea typeface="Calibri" pitchFamily="34" charset="-122"/>
-                <a:cs typeface="Calibri" pitchFamily="34" charset="-120"/>
-              </a:rPr>
-              <a:t>BBBC039's own dataset page states some of its images appear in that collection.</a:t>
-            </a:r>
-            <a:endParaRPr lang="en-US" sz="1700" dirty="0"/>
-          </a:p>
-          <a:p>
-            <a:pPr marL="342900" indent="-342900">
-              <a:spcAft>
-                <a:spcPts val="1200"/>
-              </a:spcAft>
-              <a:buSzPct val="100000"/>
-              <a:buChar char="•"/>
-            </a:pPr>
-            <a:r>
-              <a:rPr lang="en-US" sz="1700" dirty="0">
-                <a:solidFill>
-                  <a:srgbClr val="0B0B0B"/>
-                </a:solidFill>
-                <a:latin typeface="Calibri" pitchFamily="34" charset="0"/>
-                <a:ea typeface="Calibri" pitchFamily="34" charset="-122"/>
-                <a:cs typeface="Calibri" pitchFamily="34" charset="-120"/>
-              </a:rPr>
-              <a:t>So the test score is not cleanly held out, and I don't claim it is.</a:t>
-            </a:r>
-            <a:endParaRPr lang="en-US" sz="1700" dirty="0"/>
-          </a:p>
-          <a:p>
-            <a:pPr marL="342900" indent="-342900">
-              <a:spcAft>
-                <a:spcPts val="1200"/>
-              </a:spcAft>
-              <a:buSzPct val="100000"/>
-              <a:buChar char="•"/>
-            </a:pPr>
-            <a:r>
-              <a:rPr lang="en-US" sz="1700" dirty="0">
-                <a:solidFill>
-                  <a:srgbClr val="0B0B0B"/>
-                </a:solidFill>
-                <a:latin typeface="Calibri" pitchFamily="34" charset="0"/>
-                <a:ea typeface="Calibri" pitchFamily="34" charset="-122"/>
-                <a:cs typeface="Calibri" pitchFamily="34" charset="-120"/>
-              </a:rPr>
-              <a:t>It does not affect the failure analysis, which is about error structure, not rank.</a:t>
-            </a:r>
-            <a:endParaRPr lang="en-US" sz="1700" dirty="0"/>
-          </a:p>
-        </p:txBody>
-      </p:sp>
-    </p:spTree>
-  </p:cSld>
-  <p:clrMapOvr>
-    <a:masterClrMapping/>
-  </p:clrMapOvr>
-</p:sld>
-</file>
-
-<file path=ppt/slides/slide16.xml><?xml version="1.0" encoding="utf-8"?>
-<p:sld xmlns:a="http://schemas.openxmlformats.org/drawingml/2006/main" xmlns:r="http://schemas.openxmlformats.org/officeDocument/2006/relationships" xmlns:p="http://schemas.openxmlformats.org/presentationml/2006/main">
-  <p:cSld name="Slide 16">
-    <p:bg>
-      <p:bgPr>
-        <a:solidFill>
-          <a:srgbClr val="FFFFFF"/>
-        </a:solidFill>
-      </p:bgPr>
-    </p:bg>
-    <p:spTree>
-      <p:nvGrpSpPr>
-        <p:cNvPr id="1" name=""/>
-        <p:cNvGrpSpPr/>
-        <p:nvPr/>
-      </p:nvGrpSpPr>
-      <p:grpSpPr>
-        <a:xfrm>
-          <a:off x="0" y="0"/>
-          <a:ext cx="0" cy="0"/>
-          <a:chOff x="0" y="0"/>
-          <a:chExt cx="0" cy="0"/>
-        </a:xfrm>
-      </p:grpSpPr>
-      <p:sp>
-        <p:nvSpPr>
-          <p:cNvPr id="2" name="Shape 0"/>
-          <p:cNvSpPr/>
-          <p:nvPr/>
-        </p:nvSpPr>
-        <p:spPr>
-          <a:xfrm>
-            <a:off x="566928" y="384048"/>
-            <a:ext cx="566928" cy="384048"/>
-          </a:xfrm>
-          <a:prstGeom prst="roundRect">
-            <a:avLst>
-              <a:gd name="adj" fmla="val 19048"/>
-            </a:avLst>
-          </a:prstGeom>
-          <a:solidFill>
-            <a:srgbClr val="52514E"/>
-          </a:solidFill>
-          <a:ln/>
-        </p:spPr>
-      </p:sp>
-      <p:sp>
-        <p:nvSpPr>
-          <p:cNvPr id="3" name="Text 1"/>
-          <p:cNvSpPr/>
-          <p:nvPr/>
-        </p:nvSpPr>
-        <p:spPr>
-          <a:xfrm>
-            <a:off x="566928" y="384048"/>
-            <a:ext cx="566928" cy="384048"/>
-          </a:xfrm>
-          <a:prstGeom prst="rect">
-            <a:avLst/>
-          </a:prstGeom>
-          <a:noFill/>
-          <a:ln/>
-        </p:spPr>
-        <p:txBody>
-          <a:bodyPr wrap="square" lIns="0" tIns="0" rIns="0" bIns="0" rtlCol="0" anchor="ctr"/>
-          <a:lstStyle/>
-          <a:p>
-            <a:pPr algn="ctr" indent="0" marL="0">
-              <a:buNone/>
-            </a:pPr>
-            <a:r>
-              <a:rPr lang="en-US" sz="1300" b="1" dirty="0">
-                <a:solidFill>
-                  <a:srgbClr val="FFFFFF"/>
-                </a:solidFill>
-                <a:latin typeface="Calibri" pitchFamily="34" charset="0"/>
-                <a:ea typeface="Calibri" pitchFamily="34" charset="-122"/>
-                <a:cs typeface="Calibri" pitchFamily="34" charset="-120"/>
-              </a:rPr>
-              <a:t>B2</a:t>
-            </a:r>
-            <a:endParaRPr lang="en-US" sz="1300" dirty="0"/>
-          </a:p>
-        </p:txBody>
-      </p:sp>
-      <p:sp>
-        <p:nvSpPr>
-          <p:cNvPr id="4" name="Text 2"/>
-          <p:cNvSpPr/>
-          <p:nvPr/>
-        </p:nvSpPr>
-        <p:spPr>
-          <a:xfrm>
-            <a:off x="1316736" y="329184"/>
-            <a:ext cx="10308031" cy="512064"/>
-          </a:xfrm>
-          <a:prstGeom prst="rect">
-            <a:avLst/>
-          </a:prstGeom>
-          <a:noFill/>
-          <a:ln/>
-        </p:spPr>
-        <p:txBody>
-          <a:bodyPr wrap="square" lIns="0" tIns="0" rIns="0" bIns="0" rtlCol="0" anchor="ctr"/>
-          <a:lstStyle/>
-          <a:p>
-            <a:pPr indent="0" marL="0">
-              <a:buNone/>
-            </a:pPr>
-            <a:r>
-              <a:rPr lang="en-US" sz="2500" b="1" dirty="0">
-                <a:solidFill>
-                  <a:srgbClr val="0B0B0B"/>
-                </a:solidFill>
-                <a:latin typeface="Cambria" pitchFamily="34" charset="0"/>
-                <a:ea typeface="Cambria" pitchFamily="34" charset="-122"/>
-                <a:cs typeface="Cambria" pitchFamily="34" charset="-120"/>
-              </a:rPr>
-              <a:t>The classical pipeline</a:t>
-            </a:r>
-            <a:endParaRPr lang="en-US" sz="2500" dirty="0"/>
-          </a:p>
-        </p:txBody>
-      </p:sp>
-      <p:sp>
-        <p:nvSpPr>
-          <p:cNvPr id="5" name="Text 3"/>
-          <p:cNvSpPr/>
-          <p:nvPr/>
-        </p:nvSpPr>
-        <p:spPr>
-          <a:xfrm>
-            <a:off x="1316736" y="868680"/>
-            <a:ext cx="10308031" cy="310896"/>
-          </a:xfrm>
-          <a:prstGeom prst="rect">
-            <a:avLst/>
-          </a:prstGeom>
-          <a:noFill/>
-          <a:ln/>
-        </p:spPr>
-        <p:txBody>
-          <a:bodyPr wrap="square" lIns="0" tIns="0" rIns="0" bIns="0" rtlCol="0" anchor="ctr"/>
-          <a:lstStyle/>
-          <a:p>
-            <a:pPr indent="0" marL="0">
-              <a:buNone/>
-            </a:pPr>
-            <a:r>
-              <a:rPr lang="en-US" sz="1350" i="1" dirty="0">
-                <a:solidFill>
-                  <a:srgbClr val="52514E"/>
-                </a:solidFill>
-                <a:latin typeface="Calibri" pitchFamily="34" charset="0"/>
-                <a:ea typeface="Calibri" pitchFamily="34" charset="-122"/>
-                <a:cs typeface="Calibri" pitchFamily="34" charset="-120"/>
-              </a:rPr>
               <a:t>Why opposite error types must be counted separately</a:t>
             </a:r>
             <a:endParaRPr lang="en-US" sz="1350" dirty="0"/>
@@ -5946,7 +5321,7 @@
       </p:sp>
       <p:graphicFrame>
         <p:nvGraphicFramePr>
-          <p:cNvPr id="17" name="Table 0"/>
+          <p:cNvPr id="16" name="Table 0"/>
           <p:cNvGraphicFramePr>
             <a:graphicFrameLocks noGrp="1"/>
           </p:cNvGraphicFramePr>
@@ -7080,6 +6455,240 @@
 </p:sld>
 </file>
 
+<file path=ppt/slides/slide16.xml><?xml version="1.0" encoding="utf-8"?>
+<p:sld xmlns:a="http://schemas.openxmlformats.org/drawingml/2006/main" xmlns:r="http://schemas.openxmlformats.org/officeDocument/2006/relationships" xmlns:p="http://schemas.openxmlformats.org/presentationml/2006/main">
+  <p:cSld name="Slide 16">
+    <p:bg>
+      <p:bgPr>
+        <a:solidFill>
+          <a:srgbClr val="FFFFFF"/>
+        </a:solidFill>
+      </p:bgPr>
+    </p:bg>
+    <p:spTree>
+      <p:nvGrpSpPr>
+        <p:cNvPr id="1" name=""/>
+        <p:cNvGrpSpPr/>
+        <p:nvPr/>
+      </p:nvGrpSpPr>
+      <p:grpSpPr>
+        <a:xfrm>
+          <a:off x="0" y="0"/>
+          <a:ext cx="0" cy="0"/>
+          <a:chOff x="0" y="0"/>
+          <a:chExt cx="0" cy="0"/>
+        </a:xfrm>
+      </p:grpSpPr>
+      <p:sp>
+        <p:nvSpPr>
+          <p:cNvPr id="2" name="Shape 0"/>
+          <p:cNvSpPr/>
+          <p:nvPr/>
+        </p:nvSpPr>
+        <p:spPr>
+          <a:xfrm>
+            <a:off x="566928" y="384048"/>
+            <a:ext cx="566928" cy="384048"/>
+          </a:xfrm>
+          <a:prstGeom prst="roundRect">
+            <a:avLst>
+              <a:gd name="adj" fmla="val 19048"/>
+            </a:avLst>
+          </a:prstGeom>
+          <a:solidFill>
+            <a:srgbClr val="52514E"/>
+          </a:solidFill>
+          <a:ln/>
+        </p:spPr>
+      </p:sp>
+      <p:sp>
+        <p:nvSpPr>
+          <p:cNvPr id="3" name="Text 1"/>
+          <p:cNvSpPr/>
+          <p:nvPr/>
+        </p:nvSpPr>
+        <p:spPr>
+          <a:xfrm>
+            <a:off x="566928" y="384048"/>
+            <a:ext cx="566928" cy="384048"/>
+          </a:xfrm>
+          <a:prstGeom prst="rect">
+            <a:avLst/>
+          </a:prstGeom>
+          <a:noFill/>
+          <a:ln/>
+        </p:spPr>
+        <p:txBody>
+          <a:bodyPr wrap="square" lIns="0" tIns="0" rIns="0" bIns="0" rtlCol="0" anchor="ctr"/>
+          <a:lstStyle/>
+          <a:p>
+            <a:pPr algn="ctr" indent="0" marL="0">
+              <a:buNone/>
+            </a:pPr>
+            <a:r>
+              <a:rPr lang="en-US" sz="1300" b="1" dirty="0">
+                <a:solidFill>
+                  <a:srgbClr val="FFFFFF"/>
+                </a:solidFill>
+                <a:latin typeface="Calibri" pitchFamily="34" charset="0"/>
+                <a:ea typeface="Calibri" pitchFamily="34" charset="-122"/>
+                <a:cs typeface="Calibri" pitchFamily="34" charset="-120"/>
+              </a:rPr>
+              <a:t>B3</a:t>
+            </a:r>
+            <a:endParaRPr lang="en-US" sz="1300" dirty="0"/>
+          </a:p>
+        </p:txBody>
+      </p:sp>
+      <p:sp>
+        <p:nvSpPr>
+          <p:cNvPr id="4" name="Text 2"/>
+          <p:cNvSpPr/>
+          <p:nvPr/>
+        </p:nvSpPr>
+        <p:spPr>
+          <a:xfrm>
+            <a:off x="1316736" y="329184"/>
+            <a:ext cx="10308031" cy="512064"/>
+          </a:xfrm>
+          <a:prstGeom prst="rect">
+            <a:avLst/>
+          </a:prstGeom>
+          <a:noFill/>
+          <a:ln/>
+        </p:spPr>
+        <p:txBody>
+          <a:bodyPr wrap="square" lIns="0" tIns="0" rIns="0" bIns="0" rtlCol="0" anchor="ctr"/>
+          <a:lstStyle/>
+          <a:p>
+            <a:pPr indent="0" marL="0">
+              <a:buNone/>
+            </a:pPr>
+            <a:r>
+              <a:rPr lang="en-US" sz="2500" b="1" dirty="0">
+                <a:solidFill>
+                  <a:srgbClr val="0B0B0B"/>
+                </a:solidFill>
+                <a:latin typeface="Cambria" pitchFamily="34" charset="0"/>
+                <a:ea typeface="Cambria" pitchFamily="34" charset="-122"/>
+                <a:cs typeface="Cambria" pitchFamily="34" charset="-120"/>
+              </a:rPr>
+              <a:t>Worst cases</a:t>
+            </a:r>
+            <a:endParaRPr lang="en-US" sz="2500" dirty="0"/>
+          </a:p>
+        </p:txBody>
+      </p:sp>
+      <p:sp>
+        <p:nvSpPr>
+          <p:cNvPr id="5" name="Text 3"/>
+          <p:cNvSpPr/>
+          <p:nvPr/>
+        </p:nvSpPr>
+        <p:spPr>
+          <a:xfrm>
+            <a:off x="1316736" y="868680"/>
+            <a:ext cx="10308031" cy="310896"/>
+          </a:xfrm>
+          <a:prstGeom prst="rect">
+            <a:avLst/>
+          </a:prstGeom>
+          <a:noFill/>
+          <a:ln/>
+        </p:spPr>
+        <p:txBody>
+          <a:bodyPr wrap="square" lIns="0" tIns="0" rIns="0" bIns="0" rtlCol="0" anchor="ctr"/>
+          <a:lstStyle/>
+          <a:p>
+            <a:pPr indent="0" marL="0">
+              <a:buNone/>
+            </a:pPr>
+            <a:r>
+              <a:rPr lang="en-US" sz="1350" i="1" dirty="0">
+                <a:solidFill>
+                  <a:srgbClr val="52514E"/>
+                </a:solidFill>
+                <a:latin typeface="Calibri" pitchFamily="34" charset="0"/>
+                <a:ea typeface="Calibri" pitchFamily="34" charset="-122"/>
+                <a:cs typeface="Calibri" pitchFamily="34" charset="-120"/>
+              </a:rPr>
+              <a:t>Chosen by sorting the per-image results, never by eye</a:t>
+            </a:r>
+            <a:endParaRPr lang="en-US" sz="1350" dirty="0"/>
+          </a:p>
+        </p:txBody>
+      </p:sp>
+      <p:pic>
+        <p:nvPicPr>
+          <p:cNvPr id="6" name="Image 0" descr="/Users/tejas/Take_Home_Neo/figures/worst_cases/worst_01_IXMtest_I04_s9_w16A5.png">    </p:cNvPr>
+          <p:cNvPicPr>
+            <a:picLocks noChangeAspect="1"/>
+          </p:cNvPicPr>
+          <p:nvPr/>
+        </p:nvPicPr>
+        <p:blipFill>
+          <a:blip r:embed="rId1"/>
+          <a:stretch>
+            <a:fillRect/>
+          </a:stretch>
+        </p:blipFill>
+        <p:spPr>
+          <a:xfrm>
+            <a:off x="566928" y="2340250"/>
+            <a:ext cx="11057839" cy="2634701"/>
+          </a:xfrm>
+          <a:prstGeom prst="rect">
+            <a:avLst/>
+          </a:prstGeom>
+        </p:spPr>
+      </p:pic>
+      <p:sp>
+        <p:nvSpPr>
+          <p:cNvPr id="7" name="Text 4"/>
+          <p:cNvSpPr/>
+          <p:nvPr/>
+        </p:nvSpPr>
+        <p:spPr>
+          <a:xfrm>
+            <a:off x="566928" y="5943600"/>
+            <a:ext cx="7315200" cy="274320"/>
+          </a:xfrm>
+          <a:prstGeom prst="rect">
+            <a:avLst/>
+          </a:prstGeom>
+          <a:noFill/>
+          <a:ln/>
+        </p:spPr>
+        <p:txBody>
+          <a:bodyPr wrap="square" lIns="0" tIns="0" rIns="0" bIns="0" rtlCol="0" anchor="ctr"/>
+          <a:lstStyle/>
+          <a:p>
+            <a:pPr indent="0" marL="0">
+              <a:buNone/>
+            </a:pPr>
+            <a:r>
+              <a:rPr lang="en-US" sz="1150" i="1" dirty="0">
+                <a:solidFill>
+                  <a:srgbClr val="52514E"/>
+                </a:solidFill>
+                <a:latin typeface="Calibri" pitchFamily="34" charset="0"/>
+                <a:ea typeface="Calibri" pitchFamily="34" charset="-122"/>
+                <a:cs typeface="Calibri" pitchFamily="34" charset="-120"/>
+              </a:rPr>
+              <a:t>figures/worst_cases/ holds all four</a:t>
+            </a:r>
+            <a:endParaRPr lang="en-US" sz="1150" dirty="0"/>
+          </a:p>
+        </p:txBody>
+      </p:sp>
+    </p:spTree>
+  </p:cSld>
+  <p:clrMapOvr>
+    <a:masterClrMapping/>
+  </p:clrMapOvr>
+</p:sld>
+</file>
+
 <file path=ppt/slides/slide17.xml><?xml version="1.0" encoding="utf-8"?>
 <p:sld xmlns:a="http://schemas.openxmlformats.org/drawingml/2006/main" xmlns:r="http://schemas.openxmlformats.org/officeDocument/2006/relationships" xmlns:p="http://schemas.openxmlformats.org/presentationml/2006/main">
   <p:cSld name="Slide 17">
@@ -7159,7 +6768,7 @@
                 <a:ea typeface="Calibri" pitchFamily="34" charset="-122"/>
                 <a:cs typeface="Calibri" pitchFamily="34" charset="-120"/>
               </a:rPr>
-              <a:t>B3</a:t>
+              <a:t>B4</a:t>
             </a:r>
             <a:endParaRPr lang="en-US" sz="1300" dirty="0"/>
           </a:p>
@@ -7198,7 +6807,7 @@
                 <a:ea typeface="Cambria" pitchFamily="34" charset="-122"/>
                 <a:cs typeface="Cambria" pitchFamily="34" charset="-120"/>
               </a:rPr>
-              <a:t>Worst cases</a:t>
+              <a:t>Per-image spread</a:t>
             </a:r>
             <a:endParaRPr lang="en-US" sz="2500" dirty="0"/>
           </a:p>
@@ -7237,7 +6846,7 @@
                 <a:ea typeface="Calibri" pitchFamily="34" charset="-122"/>
                 <a:cs typeface="Calibri" pitchFamily="34" charset="-120"/>
               </a:rPr>
-              <a:t>Chosen by sorting the per-image results, never by eye</a:t>
+              <a:t>Why every number carries a confidence interval</a:t>
             </a:r>
             <a:endParaRPr lang="en-US" sz="1350" dirty="0"/>
           </a:p>
@@ -7245,7 +6854,7 @@
       </p:sp>
       <p:pic>
         <p:nvPicPr>
-          <p:cNvPr id="6" name="Image 0" descr="/Users/tejas/Take_Home_Neo/figures/worst_cases/worst_01_IXMtest_I04_s9_w16A5.png">    </p:cNvPr>
+          <p:cNvPr id="6" name="Image 0" descr="/Users/tejas/Take_Home_Neo/figures/fig5_per_image_scores.png">    </p:cNvPr>
           <p:cNvPicPr>
             <a:picLocks noChangeAspect="1"/>
           </p:cNvPicPr>
@@ -7259,53 +6868,14 @@
         </p:blipFill>
         <p:spPr>
           <a:xfrm>
-            <a:off x="566928" y="2340250"/>
-            <a:ext cx="11057839" cy="2634701"/>
+            <a:off x="2334738" y="1463040"/>
+            <a:ext cx="7522220" cy="4754880"/>
           </a:xfrm>
           <a:prstGeom prst="rect">
             <a:avLst/>
           </a:prstGeom>
         </p:spPr>
       </p:pic>
-      <p:sp>
-        <p:nvSpPr>
-          <p:cNvPr id="7" name="Text 4"/>
-          <p:cNvSpPr/>
-          <p:nvPr/>
-        </p:nvSpPr>
-        <p:spPr>
-          <a:xfrm>
-            <a:off x="566928" y="5943600"/>
-            <a:ext cx="7315200" cy="274320"/>
-          </a:xfrm>
-          <a:prstGeom prst="rect">
-            <a:avLst/>
-          </a:prstGeom>
-          <a:noFill/>
-          <a:ln/>
-        </p:spPr>
-        <p:txBody>
-          <a:bodyPr wrap="square" lIns="0" tIns="0" rIns="0" bIns="0" rtlCol="0" anchor="ctr"/>
-          <a:lstStyle/>
-          <a:p>
-            <a:pPr indent="0" marL="0">
-              <a:buNone/>
-            </a:pPr>
-            <a:r>
-              <a:rPr lang="en-US" sz="1150" i="1" dirty="0">
-                <a:solidFill>
-                  <a:srgbClr val="52514E"/>
-                </a:solidFill>
-                <a:latin typeface="Calibri" pitchFamily="34" charset="0"/>
-                <a:ea typeface="Calibri" pitchFamily="34" charset="-122"/>
-                <a:cs typeface="Calibri" pitchFamily="34" charset="-120"/>
-              </a:rPr>
-              <a:t>figures/worst_cases/ holds all four</a:t>
-            </a:r>
-            <a:endParaRPr lang="en-US" sz="1150" dirty="0"/>
-          </a:p>
-        </p:txBody>
-      </p:sp>
     </p:spTree>
   </p:cSld>
   <p:clrMapOvr>
@@ -7317,201 +6887,6 @@
 <file path=ppt/slides/slide18.xml><?xml version="1.0" encoding="utf-8"?>
 <p:sld xmlns:a="http://schemas.openxmlformats.org/drawingml/2006/main" xmlns:r="http://schemas.openxmlformats.org/officeDocument/2006/relationships" xmlns:p="http://schemas.openxmlformats.org/presentationml/2006/main">
   <p:cSld name="Slide 18">
-    <p:bg>
-      <p:bgPr>
-        <a:solidFill>
-          <a:srgbClr val="FFFFFF"/>
-        </a:solidFill>
-      </p:bgPr>
-    </p:bg>
-    <p:spTree>
-      <p:nvGrpSpPr>
-        <p:cNvPr id="1" name=""/>
-        <p:cNvGrpSpPr/>
-        <p:nvPr/>
-      </p:nvGrpSpPr>
-      <p:grpSpPr>
-        <a:xfrm>
-          <a:off x="0" y="0"/>
-          <a:ext cx="0" cy="0"/>
-          <a:chOff x="0" y="0"/>
-          <a:chExt cx="0" cy="0"/>
-        </a:xfrm>
-      </p:grpSpPr>
-      <p:sp>
-        <p:nvSpPr>
-          <p:cNvPr id="2" name="Shape 0"/>
-          <p:cNvSpPr/>
-          <p:nvPr/>
-        </p:nvSpPr>
-        <p:spPr>
-          <a:xfrm>
-            <a:off x="566928" y="384048"/>
-            <a:ext cx="566928" cy="384048"/>
-          </a:xfrm>
-          <a:prstGeom prst="roundRect">
-            <a:avLst>
-              <a:gd name="adj" fmla="val 19048"/>
-            </a:avLst>
-          </a:prstGeom>
-          <a:solidFill>
-            <a:srgbClr val="52514E"/>
-          </a:solidFill>
-          <a:ln/>
-        </p:spPr>
-      </p:sp>
-      <p:sp>
-        <p:nvSpPr>
-          <p:cNvPr id="3" name="Text 1"/>
-          <p:cNvSpPr/>
-          <p:nvPr/>
-        </p:nvSpPr>
-        <p:spPr>
-          <a:xfrm>
-            <a:off x="566928" y="384048"/>
-            <a:ext cx="566928" cy="384048"/>
-          </a:xfrm>
-          <a:prstGeom prst="rect">
-            <a:avLst/>
-          </a:prstGeom>
-          <a:noFill/>
-          <a:ln/>
-        </p:spPr>
-        <p:txBody>
-          <a:bodyPr wrap="square" lIns="0" tIns="0" rIns="0" bIns="0" rtlCol="0" anchor="ctr"/>
-          <a:lstStyle/>
-          <a:p>
-            <a:pPr algn="ctr" indent="0" marL="0">
-              <a:buNone/>
-            </a:pPr>
-            <a:r>
-              <a:rPr lang="en-US" sz="1300" b="1" dirty="0">
-                <a:solidFill>
-                  <a:srgbClr val="FFFFFF"/>
-                </a:solidFill>
-                <a:latin typeface="Calibri" pitchFamily="34" charset="0"/>
-                <a:ea typeface="Calibri" pitchFamily="34" charset="-122"/>
-                <a:cs typeface="Calibri" pitchFamily="34" charset="-120"/>
-              </a:rPr>
-              <a:t>B4</a:t>
-            </a:r>
-            <a:endParaRPr lang="en-US" sz="1300" dirty="0"/>
-          </a:p>
-        </p:txBody>
-      </p:sp>
-      <p:sp>
-        <p:nvSpPr>
-          <p:cNvPr id="4" name="Text 2"/>
-          <p:cNvSpPr/>
-          <p:nvPr/>
-        </p:nvSpPr>
-        <p:spPr>
-          <a:xfrm>
-            <a:off x="1316736" y="329184"/>
-            <a:ext cx="10308031" cy="512064"/>
-          </a:xfrm>
-          <a:prstGeom prst="rect">
-            <a:avLst/>
-          </a:prstGeom>
-          <a:noFill/>
-          <a:ln/>
-        </p:spPr>
-        <p:txBody>
-          <a:bodyPr wrap="square" lIns="0" tIns="0" rIns="0" bIns="0" rtlCol="0" anchor="ctr"/>
-          <a:lstStyle/>
-          <a:p>
-            <a:pPr indent="0" marL="0">
-              <a:buNone/>
-            </a:pPr>
-            <a:r>
-              <a:rPr lang="en-US" sz="2500" b="1" dirty="0">
-                <a:solidFill>
-                  <a:srgbClr val="0B0B0B"/>
-                </a:solidFill>
-                <a:latin typeface="Cambria" pitchFamily="34" charset="0"/>
-                <a:ea typeface="Cambria" pitchFamily="34" charset="-122"/>
-                <a:cs typeface="Cambria" pitchFamily="34" charset="-120"/>
-              </a:rPr>
-              <a:t>Per-image spread</a:t>
-            </a:r>
-            <a:endParaRPr lang="en-US" sz="2500" dirty="0"/>
-          </a:p>
-        </p:txBody>
-      </p:sp>
-      <p:sp>
-        <p:nvSpPr>
-          <p:cNvPr id="5" name="Text 3"/>
-          <p:cNvSpPr/>
-          <p:nvPr/>
-        </p:nvSpPr>
-        <p:spPr>
-          <a:xfrm>
-            <a:off x="1316736" y="868680"/>
-            <a:ext cx="10308031" cy="310896"/>
-          </a:xfrm>
-          <a:prstGeom prst="rect">
-            <a:avLst/>
-          </a:prstGeom>
-          <a:noFill/>
-          <a:ln/>
-        </p:spPr>
-        <p:txBody>
-          <a:bodyPr wrap="square" lIns="0" tIns="0" rIns="0" bIns="0" rtlCol="0" anchor="ctr"/>
-          <a:lstStyle/>
-          <a:p>
-            <a:pPr indent="0" marL="0">
-              <a:buNone/>
-            </a:pPr>
-            <a:r>
-              <a:rPr lang="en-US" sz="1350" i="1" dirty="0">
-                <a:solidFill>
-                  <a:srgbClr val="52514E"/>
-                </a:solidFill>
-                <a:latin typeface="Calibri" pitchFamily="34" charset="0"/>
-                <a:ea typeface="Calibri" pitchFamily="34" charset="-122"/>
-                <a:cs typeface="Calibri" pitchFamily="34" charset="-120"/>
-              </a:rPr>
-              <a:t>Why every number carries a confidence interval</a:t>
-            </a:r>
-            <a:endParaRPr lang="en-US" sz="1350" dirty="0"/>
-          </a:p>
-        </p:txBody>
-      </p:sp>
-      <p:pic>
-        <p:nvPicPr>
-          <p:cNvPr id="6" name="Image 0" descr="/Users/tejas/Take_Home_Neo/figures/fig5_per_image_scores.png">    </p:cNvPr>
-          <p:cNvPicPr>
-            <a:picLocks noChangeAspect="1"/>
-          </p:cNvPicPr>
-          <p:nvPr/>
-        </p:nvPicPr>
-        <p:blipFill>
-          <a:blip r:embed="rId1"/>
-          <a:stretch>
-            <a:fillRect/>
-          </a:stretch>
-        </p:blipFill>
-        <p:spPr>
-          <a:xfrm>
-            <a:off x="2334738" y="1463040"/>
-            <a:ext cx="7522220" cy="4754880"/>
-          </a:xfrm>
-          <a:prstGeom prst="rect">
-            <a:avLst/>
-          </a:prstGeom>
-        </p:spPr>
-      </p:pic>
-    </p:spTree>
-  </p:cSld>
-  <p:clrMapOvr>
-    <a:masterClrMapping/>
-  </p:clrMapOvr>
-</p:sld>
-</file>
-
-<file path=ppt/slides/slide19.xml><?xml version="1.0" encoding="utf-8"?>
-<p:sld xmlns:a="http://schemas.openxmlformats.org/drawingml/2006/main" xmlns:r="http://schemas.openxmlformats.org/officeDocument/2006/relationships" xmlns:p="http://schemas.openxmlformats.org/presentationml/2006/main">
-  <p:cSld name="Slide 19">
     <p:bg>
       <p:bgPr>
         <a:solidFill>
@@ -7820,7 +7195,7 @@
                 <a:ea typeface="Cambria" pitchFamily="34" charset="-122"/>
                 <a:cs typeface="Cambria" pitchFamily="34" charset="-120"/>
               </a:rPr>
-              <a:t>Why segment nuclei at all</a:t>
+              <a:t>Cell segmentation, and how it’s done</a:t>
             </a:r>
             <a:endParaRPr lang="en-US" sz="2700" dirty="0"/>
           </a:p>
@@ -7859,15 +7234,255 @@
                 <a:ea typeface="Calibri" pitchFamily="34" charset="-122"/>
                 <a:cs typeface="Calibri" pitchFamily="34" charset="-120"/>
               </a:rPr>
-              <a:t>Biology asks per-cell questions, so the answer has to be per cell</a:t>
+              <a:t>Orientation before the results — 60 seconds</a:t>
             </a:r>
             <a:endParaRPr lang="en-US" sz="1400" dirty="0"/>
+          </a:p>
+        </p:txBody>
+      </p:sp>
+      <p:sp>
+        <p:nvSpPr>
+          <p:cNvPr id="6" name="Shape 4"/>
+          <p:cNvSpPr/>
+          <p:nvPr/>
+        </p:nvSpPr>
+        <p:spPr>
+          <a:xfrm>
+            <a:off x="621792" y="1389888"/>
+            <a:ext cx="146304" cy="146304"/>
+          </a:xfrm>
+          <a:prstGeom prst="ellipse">
+            <a:avLst/>
+          </a:prstGeom>
+          <a:solidFill>
+            <a:srgbClr val="EB6834"/>
+          </a:solidFill>
+          <a:ln/>
+        </p:spPr>
+      </p:sp>
+      <p:sp>
+        <p:nvSpPr>
+          <p:cNvPr id="7" name="Text 5"/>
+          <p:cNvSpPr/>
+          <p:nvPr/>
+        </p:nvSpPr>
+        <p:spPr>
+          <a:xfrm>
+            <a:off x="950976" y="1280160"/>
+            <a:ext cx="10673791" cy="969264"/>
+          </a:xfrm>
+          <a:prstGeom prst="rect">
+            <a:avLst/>
+          </a:prstGeom>
+          <a:noFill/>
+          <a:ln/>
+        </p:spPr>
+        <p:txBody>
+          <a:bodyPr wrap="square" lIns="0" tIns="0" rIns="0" bIns="0" rtlCol="0" anchor="t"/>
+          <a:lstStyle/>
+          <a:p>
+            <a:pPr indent="0" marL="0">
+              <a:lnSpc>
+                <a:spcPts val="1800"/>
+              </a:lnSpc>
+              <a:buNone/>
+            </a:pPr>
+            <a:r>
+              <a:rPr lang="en-US" sz="1600" b="1" dirty="0">
+                <a:solidFill>
+                  <a:srgbClr val="0B0B0B"/>
+                </a:solidFill>
+                <a:latin typeface="Calibri" pitchFamily="34" charset="0"/>
+                <a:ea typeface="Calibri" pitchFamily="34" charset="-122"/>
+                <a:cs typeface="Calibri" pitchFamily="34" charset="-120"/>
+              </a:rPr>
+              <a:t>Why it matters here
+</a:t>
+            </a:r>
+            <a:pPr indent="0" marL="0">
+              <a:lnSpc>
+                <a:spcPts val="1800"/>
+              </a:lnSpc>
+              <a:buNone/>
+            </a:pPr>
+            <a:r>
+              <a:rPr lang="en-US" sz="1300" dirty="0">
+                <a:solidFill>
+                  <a:srgbClr val="52514E"/>
+                </a:solidFill>
+                <a:latin typeface="Calibri" pitchFamily="34" charset="0"/>
+                <a:ea typeface="Calibri" pitchFamily="34" charset="-122"/>
+                <a:cs typeface="Calibri" pitchFamily="34" charset="-120"/>
+              </a:rPr>
+              <a:t>Drug screening asks per-cell questions: how many cells, how big, how bright. A per-image total can’t tell “twice as many cells” from “the same cells twice as bright.” So every nucleus has to come out as its own object.</a:t>
+            </a:r>
+            <a:endParaRPr lang="en-US" sz="1600" dirty="0"/>
+          </a:p>
+        </p:txBody>
+      </p:sp>
+      <p:sp>
+        <p:nvSpPr>
+          <p:cNvPr id="8" name="Shape 6"/>
+          <p:cNvSpPr/>
+          <p:nvPr/>
+        </p:nvSpPr>
+        <p:spPr>
+          <a:xfrm>
+            <a:off x="621792" y="2377440"/>
+            <a:ext cx="146304" cy="146304"/>
+          </a:xfrm>
+          <a:prstGeom prst="ellipse">
+            <a:avLst/>
+          </a:prstGeom>
+          <a:solidFill>
+            <a:srgbClr val="EB6834"/>
+          </a:solidFill>
+          <a:ln/>
+        </p:spPr>
+      </p:sp>
+      <p:sp>
+        <p:nvSpPr>
+          <p:cNvPr id="9" name="Text 7"/>
+          <p:cNvSpPr/>
+          <p:nvPr/>
+        </p:nvSpPr>
+        <p:spPr>
+          <a:xfrm>
+            <a:off x="950976" y="2267712"/>
+            <a:ext cx="10673791" cy="969264"/>
+          </a:xfrm>
+          <a:prstGeom prst="rect">
+            <a:avLst/>
+          </a:prstGeom>
+          <a:noFill/>
+          <a:ln/>
+        </p:spPr>
+        <p:txBody>
+          <a:bodyPr wrap="square" lIns="0" tIns="0" rIns="0" bIns="0" rtlCol="0" anchor="t"/>
+          <a:lstStyle/>
+          <a:p>
+            <a:pPr indent="0" marL="0">
+              <a:lnSpc>
+                <a:spcPts val="1800"/>
+              </a:lnSpc>
+              <a:buNone/>
+            </a:pPr>
+            <a:r>
+              <a:rPr lang="en-US" sz="1600" b="1" dirty="0">
+                <a:solidFill>
+                  <a:srgbClr val="0B0B0B"/>
+                </a:solidFill>
+                <a:latin typeface="Calibri" pitchFamily="34" charset="0"/>
+                <a:ea typeface="Calibri" pitchFamily="34" charset="-122"/>
+                <a:cs typeface="Calibri" pitchFamily="34" charset="-120"/>
+              </a:rPr>
+              <a:t>Existing solutions
+</a:t>
+            </a:r>
+            <a:pPr indent="0" marL="0">
+              <a:lnSpc>
+                <a:spcPts val="1800"/>
+              </a:lnSpc>
+              <a:buNone/>
+            </a:pPr>
+            <a:r>
+              <a:rPr lang="en-US" sz="1300" dirty="0">
+                <a:solidFill>
+                  <a:srgbClr val="52514E"/>
+                </a:solidFill>
+                <a:latin typeface="Calibri" pitchFamily="34" charset="0"/>
+                <a:ea typeface="Calibri" pitchFamily="34" charset="-122"/>
+                <a:cs typeface="Calibri" pitchFamily="34" charset="-120"/>
+              </a:rPr>
+              <a:t>Classical rule pipelines — Otsu threshold, then watershed. Or a learned model — Cellpose-SAM, the current standard. I built both, so I had something to compare against.</a:t>
+            </a:r>
+            <a:endParaRPr lang="en-US" sz="1600" dirty="0"/>
+          </a:p>
+        </p:txBody>
+      </p:sp>
+      <p:sp>
+        <p:nvSpPr>
+          <p:cNvPr id="10" name="Shape 8"/>
+          <p:cNvSpPr/>
+          <p:nvPr/>
+        </p:nvSpPr>
+        <p:spPr>
+          <a:xfrm>
+            <a:off x="621792" y="3364992"/>
+            <a:ext cx="146304" cy="146304"/>
+          </a:xfrm>
+          <a:prstGeom prst="ellipse">
+            <a:avLst/>
+          </a:prstGeom>
+          <a:solidFill>
+            <a:srgbClr val="EB6834"/>
+          </a:solidFill>
+          <a:ln/>
+        </p:spPr>
+      </p:sp>
+      <p:sp>
+        <p:nvSpPr>
+          <p:cNvPr id="11" name="Text 9"/>
+          <p:cNvSpPr/>
+          <p:nvPr/>
+        </p:nvSpPr>
+        <p:spPr>
+          <a:xfrm>
+            <a:off x="950976" y="3255264"/>
+            <a:ext cx="10673791" cy="969264"/>
+          </a:xfrm>
+          <a:prstGeom prst="rect">
+            <a:avLst/>
+          </a:prstGeom>
+          <a:noFill/>
+          <a:ln/>
+        </p:spPr>
+        <p:txBody>
+          <a:bodyPr wrap="square" lIns="0" tIns="0" rIns="0" bIns="0" rtlCol="0" anchor="t"/>
+          <a:lstStyle/>
+          <a:p>
+            <a:pPr indent="0" marL="0">
+              <a:lnSpc>
+                <a:spcPts val="1800"/>
+              </a:lnSpc>
+              <a:buNone/>
+            </a:pPr>
+            <a:r>
+              <a:rPr lang="en-US" sz="1600" b="1" dirty="0">
+                <a:solidFill>
+                  <a:srgbClr val="0B0B0B"/>
+                </a:solidFill>
+                <a:latin typeface="Calibri" pitchFamily="34" charset="0"/>
+                <a:ea typeface="Calibri" pitchFamily="34" charset="-122"/>
+                <a:cs typeface="Calibri" pitchFamily="34" charset="-120"/>
+              </a:rPr>
+              <a:t>Otsu vs Cellpose-SAM
+</a:t>
+            </a:r>
+            <a:pPr indent="0" marL="0">
+              <a:lnSpc>
+                <a:spcPts val="1800"/>
+              </a:lnSpc>
+              <a:buNone/>
+            </a:pPr>
+            <a:r>
+              <a:rPr lang="en-US" sz="1300" dirty="0">
+                <a:solidFill>
+                  <a:srgbClr val="52514E"/>
+                </a:solidFill>
+                <a:latin typeface="Calibri" pitchFamily="34" charset="0"/>
+                <a:ea typeface="Calibri" pitchFamily="34" charset="-122"/>
+                <a:cs typeface="Calibri" pitchFamily="34" charset="-120"/>
+              </a:rPr>
+              <a:t>Otsu picks one brightness cut, then watershed splits blobs by shape — so it slices non-round nuclei in half (405 false splits vs 24). Cellpose-SAM predicts, for every pixel, the direction to its own cell’s centre; pixels flowing to the same centre are one cell. That separates touching nuclei a threshold never can.</a:t>
+            </a:r>
+            <a:endParaRPr lang="en-US" sz="1600" dirty="0"/>
           </a:p>
         </p:txBody>
       </p:sp>
       <p:pic>
         <p:nvPicPr>
-          <p:cNvPr id="6" name="Image 0" descr="/Users/tejas/Take_Home_Neo/figures/slideA_why_instances.png">    </p:cNvPr>
+          <p:cNvPr id="12" name="Image 0" descr="/Users/tejas/Take_Home_Neo/figures/slideB_otsu_vs_cellpose.png">    </p:cNvPr>
           <p:cNvPicPr>
             <a:picLocks noChangeAspect="1"/>
           </p:cNvPicPr>
@@ -7881,75 +7496,14 @@
         </p:blipFill>
         <p:spPr>
           <a:xfrm>
-            <a:off x="566928" y="1502552"/>
-            <a:ext cx="11057839" cy="3532856"/>
+            <a:off x="2598268" y="4334256"/>
+            <a:ext cx="6995160" cy="2331720"/>
           </a:xfrm>
           <a:prstGeom prst="rect">
             <a:avLst/>
           </a:prstGeom>
         </p:spPr>
       </p:pic>
-      <p:sp>
-        <p:nvSpPr>
-          <p:cNvPr id="7" name="Shape 4"/>
-          <p:cNvSpPr/>
-          <p:nvPr/>
-        </p:nvSpPr>
-        <p:spPr>
-          <a:xfrm>
-            <a:off x="566928" y="5321808"/>
-            <a:ext cx="11057839" cy="841248"/>
-          </a:xfrm>
-          <a:prstGeom prst="roundRect">
-            <a:avLst>
-              <a:gd name="adj" fmla="val 13043"/>
-            </a:avLst>
-          </a:prstGeom>
-          <a:solidFill>
-            <a:srgbClr val="F4F3EF"/>
-          </a:solidFill>
-          <a:ln/>
-        </p:spPr>
-      </p:sp>
-      <p:sp>
-        <p:nvSpPr>
-          <p:cNvPr id="8" name="Text 5"/>
-          <p:cNvSpPr/>
-          <p:nvPr/>
-        </p:nvSpPr>
-        <p:spPr>
-          <a:xfrm>
-            <a:off x="877824" y="5321808"/>
-            <a:ext cx="10436047" cy="841248"/>
-          </a:xfrm>
-          <a:prstGeom prst="rect">
-            <a:avLst/>
-          </a:prstGeom>
-          <a:noFill/>
-          <a:ln/>
-        </p:spPr>
-        <p:txBody>
-          <a:bodyPr wrap="square" lIns="0" tIns="0" rIns="0" bIns="0" rtlCol="0" anchor="ctr"/>
-          <a:lstStyle/>
-          <a:p>
-            <a:pPr indent="0" marL="0">
-              <a:buNone/>
-            </a:pPr>
-            <a:r>
-              <a:rPr lang="en-US" sz="1600" b="1" dirty="0">
-                <a:solidFill>
-                  <a:srgbClr val="0B0B0B"/>
-                </a:solidFill>
-                <a:latin typeface="Calibri" pitchFamily="34" charset="0"/>
-                <a:ea typeface="Calibri" pitchFamily="34" charset="-122"/>
-                <a:cs typeface="Calibri" pitchFamily="34" charset="-120"/>
-              </a:rPr>
-              <a:t>Finding the cells is easy. Telling them apart is the job.</a:t>
-            </a:r>
-            <a:endParaRPr lang="en-US" sz="1600" dirty="0"/>
-          </a:p>
-        </p:txBody>
-      </p:sp>
     </p:spTree>
   </p:cSld>
   <p:clrMapOvr>
@@ -8074,7 +7628,7 @@
                 <a:ea typeface="Cambria" pitchFamily="34" charset="-122"/>
                 <a:cs typeface="Cambria" pitchFamily="34" charset="-120"/>
               </a:rPr>
-              <a:t>How people solve it</a:t>
+              <a:t>What I chose to do with it</a:t>
             </a:r>
             <a:endParaRPr lang="en-US" sz="2700" dirty="0"/>
           </a:p>
@@ -8113,50 +7667,323 @@
                 <a:ea typeface="Calibri" pitchFamily="34" charset="-122"/>
                 <a:cs typeface="Calibri" pitchFamily="34" charset="-120"/>
               </a:rPr>
-              <a:t>A hand-written rule pipeline, and a pretrained model — I built both</a:t>
+              <a:t>200 fields · 100 for training · ~118 nuclei each · scored by mean AP over IoU 0.50 : 0.95</a:t>
             </a:r>
             <a:endParaRPr lang="en-US" sz="1400" dirty="0"/>
           </a:p>
         </p:txBody>
       </p:sp>
-      <p:pic>
-        <p:nvPicPr>
-          <p:cNvPr id="6" name="Image 0" descr="/Users/tejas/Take_Home_Neo/figures/slideB_otsu_vs_cellpose.png">    </p:cNvPr>
-          <p:cNvPicPr>
-            <a:picLocks noChangeAspect="1"/>
-          </p:cNvPicPr>
-          <p:nvPr/>
-        </p:nvPicPr>
-        <p:blipFill>
-          <a:blip r:embed="rId1"/>
-          <a:stretch>
-            <a:fillRect/>
-          </a:stretch>
-        </p:blipFill>
-        <p:spPr>
-          <a:xfrm>
-            <a:off x="566928" y="1426007"/>
-            <a:ext cx="11057839" cy="3685946"/>
-          </a:xfrm>
-          <a:prstGeom prst="rect">
-            <a:avLst/>
-          </a:prstGeom>
-        </p:spPr>
-      </p:pic>
-      <p:sp>
-        <p:nvSpPr>
-          <p:cNvPr id="7" name="Shape 4"/>
-          <p:cNvSpPr/>
-          <p:nvPr/>
-        </p:nvSpPr>
-        <p:spPr>
-          <a:xfrm>
-            <a:off x="566928" y="5285232"/>
-            <a:ext cx="5382616" cy="914400"/>
+      <p:sp>
+        <p:nvSpPr>
+          <p:cNvPr id="6" name="Shape 4"/>
+          <p:cNvSpPr/>
+          <p:nvPr/>
+        </p:nvSpPr>
+        <p:spPr>
+          <a:xfrm>
+            <a:off x="566928" y="1389888"/>
+            <a:ext cx="5382616" cy="3127248"/>
           </a:xfrm>
           <a:prstGeom prst="roundRect">
             <a:avLst>
-              <a:gd name="adj" fmla="val 12000"/>
+              <a:gd name="adj" fmla="val 3509"/>
+            </a:avLst>
+          </a:prstGeom>
+          <a:solidFill>
+            <a:srgbClr val="E8F1FC"/>
+          </a:solidFill>
+          <a:ln/>
+        </p:spPr>
+      </p:sp>
+      <p:sp>
+        <p:nvSpPr>
+          <p:cNvPr id="7" name="Text 5"/>
+          <p:cNvSpPr/>
+          <p:nvPr/>
+        </p:nvSpPr>
+        <p:spPr>
+          <a:xfrm>
+            <a:off x="804672" y="1517904"/>
+            <a:ext cx="4907128" cy="347472"/>
+          </a:xfrm>
+          <a:prstGeom prst="rect">
+            <a:avLst/>
+          </a:prstGeom>
+          <a:noFill/>
+          <a:ln/>
+        </p:spPr>
+        <p:txBody>
+          <a:bodyPr wrap="square" lIns="0" tIns="0" rIns="0" bIns="0" rtlCol="0" anchor="ctr"/>
+          <a:lstStyle/>
+          <a:p>
+            <a:pPr indent="0" marL="0">
+              <a:buNone/>
+            </a:pPr>
+            <a:r>
+              <a:rPr lang="en-US" sz="1500" b="1" dirty="0">
+                <a:solidFill>
+                  <a:srgbClr val="2A78D6"/>
+                </a:solidFill>
+                <a:latin typeface="Calibri" pitchFamily="34" charset="0"/>
+                <a:ea typeface="Calibri" pitchFamily="34" charset="-122"/>
+                <a:cs typeface="Calibri" pitchFamily="34" charset="-120"/>
+              </a:rPr>
+              <a:t>What I chose to build</a:t>
+            </a:r>
+            <a:endParaRPr lang="en-US" sz="1500" dirty="0"/>
+          </a:p>
+        </p:txBody>
+      </p:sp>
+      <p:sp>
+        <p:nvSpPr>
+          <p:cNvPr id="8" name="Text 6"/>
+          <p:cNvSpPr/>
+          <p:nvPr/>
+        </p:nvSpPr>
+        <p:spPr>
+          <a:xfrm>
+            <a:off x="804672" y="1956816"/>
+            <a:ext cx="4907128" cy="585216"/>
+          </a:xfrm>
+          <a:prstGeom prst="rect">
+            <a:avLst/>
+          </a:prstGeom>
+          <a:noFill/>
+          <a:ln/>
+        </p:spPr>
+        <p:txBody>
+          <a:bodyPr wrap="square" lIns="0" tIns="0" rIns="0" bIns="0" rtlCol="0" anchor="t"/>
+          <a:lstStyle/>
+          <a:p>
+            <a:pPr indent="0" marL="0">
+              <a:lnSpc>
+                <a:spcPts val="1600"/>
+              </a:lnSpc>
+              <a:buNone/>
+            </a:pPr>
+            <a:r>
+              <a:rPr lang="en-US" sz="1250" b="1" dirty="0">
+                <a:solidFill>
+                  <a:srgbClr val="0B0B0B"/>
+                </a:solidFill>
+                <a:latin typeface="Calibri" pitchFamily="34" charset="0"/>
+                <a:ea typeface="Calibri" pitchFamily="34" charset="-122"/>
+                <a:cs typeface="Calibri" pitchFamily="34" charset="-120"/>
+              </a:rPr>
+              <a:t>Decode the ground truth correctly  </a:t>
+            </a:r>
+            <a:pPr indent="0" marL="0">
+              <a:lnSpc>
+                <a:spcPts val="1600"/>
+              </a:lnSpc>
+              <a:buNone/>
+            </a:pPr>
+            <a:r>
+              <a:rPr lang="en-US" sz="1250" dirty="0">
+                <a:solidFill>
+                  <a:srgbClr val="52514E"/>
+                </a:solidFill>
+                <a:latin typeface="Calibri" pitchFamily="34" charset="0"/>
+                <a:ea typeface="Calibri" pitchFamily="34" charset="-122"/>
+                <a:cs typeface="Calibri" pitchFamily="34" charset="-120"/>
+              </a:rPr>
+              <a:t>Every downstream number is meaningless without it.</a:t>
+            </a:r>
+            <a:endParaRPr lang="en-US" sz="1250" dirty="0"/>
+          </a:p>
+        </p:txBody>
+      </p:sp>
+      <p:sp>
+        <p:nvSpPr>
+          <p:cNvPr id="9" name="Text 7"/>
+          <p:cNvSpPr/>
+          <p:nvPr/>
+        </p:nvSpPr>
+        <p:spPr>
+          <a:xfrm>
+            <a:off x="804672" y="2578608"/>
+            <a:ext cx="4907128" cy="585216"/>
+          </a:xfrm>
+          <a:prstGeom prst="rect">
+            <a:avLst/>
+          </a:prstGeom>
+          <a:noFill/>
+          <a:ln/>
+        </p:spPr>
+        <p:txBody>
+          <a:bodyPr wrap="square" lIns="0" tIns="0" rIns="0" bIns="0" rtlCol="0" anchor="t"/>
+          <a:lstStyle/>
+          <a:p>
+            <a:pPr indent="0" marL="0">
+              <a:lnSpc>
+                <a:spcPts val="1600"/>
+              </a:lnSpc>
+              <a:buNone/>
+            </a:pPr>
+            <a:r>
+              <a:rPr lang="en-US" sz="1250" b="1" dirty="0">
+                <a:solidFill>
+                  <a:srgbClr val="0B0B0B"/>
+                </a:solidFill>
+                <a:latin typeface="Calibri" pitchFamily="34" charset="0"/>
+                <a:ea typeface="Calibri" pitchFamily="34" charset="-122"/>
+                <a:cs typeface="Calibri" pitchFamily="34" charset="-120"/>
+              </a:rPr>
+              <a:t>Cellpose-SAM, pretrained, zero-shot  </a:t>
+            </a:r>
+            <a:pPr indent="0" marL="0">
+              <a:lnSpc>
+                <a:spcPts val="1600"/>
+              </a:lnSpc>
+              <a:buNone/>
+            </a:pPr>
+            <a:r>
+              <a:rPr lang="en-US" sz="1250" dirty="0">
+                <a:solidFill>
+                  <a:srgbClr val="52514E"/>
+                </a:solidFill>
+                <a:latin typeface="Calibri" pitchFamily="34" charset="0"/>
+                <a:ea typeface="Calibri" pitchFamily="34" charset="-122"/>
+                <a:cs typeface="Calibri" pitchFamily="34" charset="-120"/>
+              </a:rPr>
+              <a:t>The current state of the art for this modality.</a:t>
+            </a:r>
+            <a:endParaRPr lang="en-US" sz="1250" dirty="0"/>
+          </a:p>
+        </p:txBody>
+      </p:sp>
+      <p:sp>
+        <p:nvSpPr>
+          <p:cNvPr id="10" name="Text 8"/>
+          <p:cNvSpPr/>
+          <p:nvPr/>
+        </p:nvSpPr>
+        <p:spPr>
+          <a:xfrm>
+            <a:off x="804672" y="3200400"/>
+            <a:ext cx="4907128" cy="585216"/>
+          </a:xfrm>
+          <a:prstGeom prst="rect">
+            <a:avLst/>
+          </a:prstGeom>
+          <a:noFill/>
+          <a:ln/>
+        </p:spPr>
+        <p:txBody>
+          <a:bodyPr wrap="square" lIns="0" tIns="0" rIns="0" bIns="0" rtlCol="0" anchor="t"/>
+          <a:lstStyle/>
+          <a:p>
+            <a:pPr indent="0" marL="0">
+              <a:lnSpc>
+                <a:spcPts val="1600"/>
+              </a:lnSpc>
+              <a:buNone/>
+            </a:pPr>
+            <a:r>
+              <a:rPr lang="en-US" sz="1250" b="1" dirty="0">
+                <a:solidFill>
+                  <a:srgbClr val="0B0B0B"/>
+                </a:solidFill>
+                <a:latin typeface="Calibri" pitchFamily="34" charset="0"/>
+                <a:ea typeface="Calibri" pitchFamily="34" charset="-122"/>
+                <a:cs typeface="Calibri" pitchFamily="34" charset="-120"/>
+              </a:rPr>
+              <a:t>A 72× evaluation cache  </a:t>
+            </a:r>
+            <a:pPr indent="0" marL="0">
+              <a:lnSpc>
+                <a:spcPts val="1600"/>
+              </a:lnSpc>
+              <a:buNone/>
+            </a:pPr>
+            <a:r>
+              <a:rPr lang="en-US" sz="1250" dirty="0">
+                <a:solidFill>
+                  <a:srgbClr val="52514E"/>
+                </a:solidFill>
+                <a:latin typeface="Calibri" pitchFamily="34" charset="0"/>
+                <a:ea typeface="Calibri" pitchFamily="34" charset="-122"/>
+                <a:cs typeface="Calibri" pitchFamily="34" charset="-120"/>
+              </a:rPr>
+              <a:t>Turned parameter search and ablations from hours into minutes.</a:t>
+            </a:r>
+            <a:endParaRPr lang="en-US" sz="1250" dirty="0"/>
+          </a:p>
+        </p:txBody>
+      </p:sp>
+      <p:sp>
+        <p:nvSpPr>
+          <p:cNvPr id="11" name="Text 9"/>
+          <p:cNvSpPr/>
+          <p:nvPr/>
+        </p:nvSpPr>
+        <p:spPr>
+          <a:xfrm>
+            <a:off x="804672" y="3822192"/>
+            <a:ext cx="4907128" cy="585216"/>
+          </a:xfrm>
+          <a:prstGeom prst="rect">
+            <a:avLst/>
+          </a:prstGeom>
+          <a:noFill/>
+          <a:ln/>
+        </p:spPr>
+        <p:txBody>
+          <a:bodyPr wrap="square" lIns="0" tIns="0" rIns="0" bIns="0" rtlCol="0" anchor="t"/>
+          <a:lstStyle/>
+          <a:p>
+            <a:pPr indent="0" marL="0">
+              <a:lnSpc>
+                <a:spcPts val="1600"/>
+              </a:lnSpc>
+              <a:buNone/>
+            </a:pPr>
+            <a:r>
+              <a:rPr lang="en-US" sz="1250" b="1" dirty="0">
+                <a:solidFill>
+                  <a:srgbClr val="0B0B0B"/>
+                </a:solidFill>
+                <a:latin typeface="Calibri" pitchFamily="34" charset="0"/>
+                <a:ea typeface="Calibri" pitchFamily="34" charset="-122"/>
+                <a:cs typeface="Calibri" pitchFamily="34" charset="-120"/>
+              </a:rPr>
+              <a:t>Attribute the failures  </a:t>
+            </a:r>
+            <a:pPr indent="0" marL="0">
+              <a:lnSpc>
+                <a:spcPts val="1600"/>
+              </a:lnSpc>
+              <a:buNone/>
+            </a:pPr>
+            <a:r>
+              <a:rPr lang="en-US" sz="1250" dirty="0">
+                <a:solidFill>
+                  <a:srgbClr val="52514E"/>
+                </a:solidFill>
+                <a:latin typeface="Calibri" pitchFamily="34" charset="0"/>
+                <a:ea typeface="Calibri" pitchFamily="34" charset="-122"/>
+                <a:cs typeface="Calibri" pitchFamily="34" charset="-120"/>
+              </a:rPr>
+              <a:t>Where the score actually goes — the bulk of the work.</a:t>
+            </a:r>
+            <a:endParaRPr lang="en-US" sz="1250" dirty="0"/>
+          </a:p>
+        </p:txBody>
+      </p:sp>
+      <p:sp>
+        <p:nvSpPr>
+          <p:cNvPr id="12" name="Shape 10"/>
+          <p:cNvSpPr/>
+          <p:nvPr/>
+        </p:nvSpPr>
+        <p:spPr>
+          <a:xfrm>
+            <a:off x="6242152" y="1389888"/>
+            <a:ext cx="5382616" cy="3127248"/>
+          </a:xfrm>
+          <a:prstGeom prst="roundRect">
+            <a:avLst>
+              <a:gd name="adj" fmla="val 3509"/>
             </a:avLst>
           </a:prstGeom>
           <a:solidFill>
@@ -8167,14 +7994,14 @@
       </p:sp>
       <p:sp>
         <p:nvSpPr>
-          <p:cNvPr id="8" name="Text 5"/>
-          <p:cNvSpPr/>
-          <p:nvPr/>
-        </p:nvSpPr>
-        <p:spPr>
-          <a:xfrm>
-            <a:off x="822960" y="5285232"/>
-            <a:ext cx="3828136" cy="914400"/>
+          <p:cNvPr id="13" name="Text 11"/>
+          <p:cNvSpPr/>
+          <p:nvPr/>
+        </p:nvSpPr>
+        <p:spPr>
+          <a:xfrm>
+            <a:off x="6479896" y="1517904"/>
+            <a:ext cx="4907128" cy="347472"/>
           </a:xfrm>
           <a:prstGeom prst="rect">
             <a:avLst/>
@@ -8187,199 +8014,312 @@
           <a:lstStyle/>
           <a:p>
             <a:pPr indent="0" marL="0">
-              <a:lnSpc>
-                <a:spcPts val="1700"/>
-              </a:lnSpc>
-              <a:buNone/>
-            </a:pPr>
-            <a:r>
-              <a:rPr lang="en-US" sz="1350" b="1" dirty="0">
-                <a:solidFill>
-                  <a:srgbClr val="0B0B0B"/>
+              <a:buNone/>
+            </a:pPr>
+            <a:r>
+              <a:rPr lang="en-US" sz="1500" b="1" dirty="0">
+                <a:solidFill>
+                  <a:srgbClr val="52514E"/>
                 </a:solidFill>
                 <a:latin typeface="Calibri" pitchFamily="34" charset="0"/>
                 <a:ea typeface="Calibri" pitchFamily="34" charset="-122"/>
                 <a:cs typeface="Calibri" pitchFamily="34" charset="-120"/>
               </a:rPr>
-              <a:t>Otsu → watershed  </a:t>
-            </a:r>
+              <a:t>What I deliberately didn’t</a:t>
+            </a:r>
+            <a:endParaRPr lang="en-US" sz="1500" dirty="0"/>
+          </a:p>
+        </p:txBody>
+      </p:sp>
+      <p:sp>
+        <p:nvSpPr>
+          <p:cNvPr id="14" name="Text 12"/>
+          <p:cNvSpPr/>
+          <p:nvPr/>
+        </p:nvSpPr>
+        <p:spPr>
+          <a:xfrm>
+            <a:off x="6479896" y="1956816"/>
+            <a:ext cx="4907128" cy="786384"/>
+          </a:xfrm>
+          <a:prstGeom prst="rect">
+            <a:avLst/>
+          </a:prstGeom>
+          <a:noFill/>
+          <a:ln/>
+        </p:spPr>
+        <p:txBody>
+          <a:bodyPr wrap="square" lIns="0" tIns="0" rIns="0" bIns="0" rtlCol="0" anchor="t"/>
+          <a:lstStyle/>
+          <a:p>
             <a:pPr indent="0" marL="0">
               <a:lnSpc>
-                <a:spcPts val="1700"/>
+                <a:spcPts val="1600"/>
               </a:lnSpc>
               <a:buNone/>
             </a:pPr>
             <a:r>
-              <a:rPr lang="en-US" sz="1350" dirty="0">
-                <a:solidFill>
-                  <a:srgbClr val="52514E"/>
+              <a:rPr lang="en-US" sz="1250" b="1" dirty="0">
+                <a:solidFill>
+                  <a:srgbClr val="0B0B0B"/>
                 </a:solidFill>
                 <a:latin typeface="Calibri" pitchFamily="34" charset="0"/>
                 <a:ea typeface="Calibri" pitchFamily="34" charset="-122"/>
                 <a:cs typeface="Calibri" pitchFamily="34" charset="-120"/>
               </a:rPr>
-              <a:t>splits nuclei on shape</a:t>
-            </a:r>
-            <a:endParaRPr lang="en-US" sz="1350" dirty="0"/>
-          </a:p>
-        </p:txBody>
-      </p:sp>
-      <p:sp>
-        <p:nvSpPr>
-          <p:cNvPr id="9" name="Text 6"/>
-          <p:cNvSpPr/>
-          <p:nvPr/>
-        </p:nvSpPr>
-        <p:spPr>
-          <a:xfrm>
-            <a:off x="4486504" y="5285232"/>
-            <a:ext cx="1234440" cy="914400"/>
-          </a:xfrm>
-          <a:prstGeom prst="rect">
-            <a:avLst/>
-          </a:prstGeom>
-          <a:noFill/>
-          <a:ln/>
-        </p:spPr>
-        <p:txBody>
-          <a:bodyPr wrap="square" lIns="0" tIns="0" rIns="0" bIns="0" rtlCol="0" anchor="ctr"/>
-          <a:lstStyle/>
-          <a:p>
-            <a:pPr algn="r" indent="0" marL="0">
-              <a:buNone/>
-            </a:pPr>
-            <a:r>
-              <a:rPr lang="en-US" sz="2600" b="1" dirty="0">
-                <a:solidFill>
-                  <a:srgbClr val="7B4FC4"/>
-                </a:solidFill>
-                <a:latin typeface="Cambria" pitchFamily="34" charset="0"/>
-                <a:ea typeface="Cambria" pitchFamily="34" charset="-122"/>
-                <a:cs typeface="Cambria" pitchFamily="34" charset="-120"/>
-              </a:rPr>
-              <a:t>0.555</a:t>
-            </a:r>
-            <a:endParaRPr lang="en-US" sz="2600" dirty="0"/>
-          </a:p>
-        </p:txBody>
-      </p:sp>
-      <p:sp>
-        <p:nvSpPr>
-          <p:cNvPr id="10" name="Shape 7"/>
-          <p:cNvSpPr/>
-          <p:nvPr/>
-        </p:nvSpPr>
-        <p:spPr>
-          <a:xfrm>
-            <a:off x="6242152" y="5285232"/>
-            <a:ext cx="5382616" cy="914400"/>
-          </a:xfrm>
-          <a:prstGeom prst="roundRect">
-            <a:avLst>
-              <a:gd name="adj" fmla="val 12000"/>
-            </a:avLst>
-          </a:prstGeom>
-          <a:solidFill>
-            <a:srgbClr val="F4F3EF"/>
-          </a:solidFill>
-          <a:ln/>
-        </p:spPr>
-      </p:sp>
-      <p:sp>
-        <p:nvSpPr>
-          <p:cNvPr id="11" name="Text 8"/>
-          <p:cNvSpPr/>
-          <p:nvPr/>
-        </p:nvSpPr>
-        <p:spPr>
-          <a:xfrm>
-            <a:off x="6498184" y="5285232"/>
-            <a:ext cx="3828136" cy="914400"/>
-          </a:xfrm>
-          <a:prstGeom prst="rect">
-            <a:avLst/>
-          </a:prstGeom>
-          <a:noFill/>
-          <a:ln/>
-        </p:spPr>
-        <p:txBody>
-          <a:bodyPr wrap="square" lIns="0" tIns="0" rIns="0" bIns="0" rtlCol="0" anchor="ctr"/>
-          <a:lstStyle/>
-          <a:p>
+              <a:t>Train a model from scratch  </a:t>
+            </a:r>
             <a:pPr indent="0" marL="0">
               <a:lnSpc>
-                <a:spcPts val="1700"/>
+                <a:spcPts val="1600"/>
               </a:lnSpc>
               <a:buNone/>
             </a:pPr>
             <a:r>
-              <a:rPr lang="en-US" sz="1350" b="1" dirty="0">
-                <a:solidFill>
-                  <a:srgbClr val="0B0B0B"/>
+              <a:rPr lang="en-US" sz="1250" dirty="0">
+                <a:solidFill>
+                  <a:srgbClr val="52514E"/>
                 </a:solidFill>
                 <a:latin typeface="Calibri" pitchFamily="34" charset="0"/>
                 <a:ea typeface="Calibri" pitchFamily="34" charset="-122"/>
                 <a:cs typeface="Calibri" pitchFamily="34" charset="-120"/>
               </a:rPr>
-              <a:t>Cellpose-SAM  </a:t>
-            </a:r>
+              <a:t>100 training fields. I'd be measuring my training loop, not the problem.</a:t>
+            </a:r>
+            <a:endParaRPr lang="en-US" sz="1250" dirty="0"/>
+          </a:p>
+        </p:txBody>
+      </p:sp>
+      <p:sp>
+        <p:nvSpPr>
+          <p:cNvPr id="15" name="Text 13"/>
+          <p:cNvSpPr/>
+          <p:nvPr/>
+        </p:nvSpPr>
+        <p:spPr>
+          <a:xfrm>
+            <a:off x="6479896" y="2779776"/>
+            <a:ext cx="4907128" cy="786384"/>
+          </a:xfrm>
+          <a:prstGeom prst="rect">
+            <a:avLst/>
+          </a:prstGeom>
+          <a:noFill/>
+          <a:ln/>
+        </p:spPr>
+        <p:txBody>
+          <a:bodyPr wrap="square" lIns="0" tIns="0" rIns="0" bIns="0" rtlCol="0" anchor="t"/>
+          <a:lstStyle/>
+          <a:p>
             <a:pPr indent="0" marL="0">
               <a:lnSpc>
-                <a:spcPts val="1700"/>
+                <a:spcPts val="1600"/>
               </a:lnSpc>
               <a:buNone/>
             </a:pPr>
             <a:r>
-              <a:rPr lang="en-US" sz="1350" dirty="0">
-                <a:solidFill>
-                  <a:srgbClr val="52514E"/>
+              <a:rPr lang="en-US" sz="1250" b="1" dirty="0">
+                <a:solidFill>
+                  <a:srgbClr val="0B0B0B"/>
                 </a:solidFill>
                 <a:latin typeface="Calibri" pitchFamily="34" charset="0"/>
                 <a:ea typeface="Calibri" pitchFamily="34" charset="-122"/>
                 <a:cs typeface="Calibri" pitchFamily="34" charset="-120"/>
               </a:rPr>
-              <a:t>learns where cells flow</a:t>
+              <a:t>Label more data  </a:t>
+            </a:r>
+            <a:pPr indent="0" marL="0">
+              <a:lnSpc>
+                <a:spcPts val="1600"/>
+              </a:lnSpc>
+              <a:buNone/>
+            </a:pPr>
+            <a:r>
+              <a:rPr lang="en-US" sz="1250" dirty="0">
+                <a:solidFill>
+                  <a:srgbClr val="52514E"/>
+                </a:solidFill>
+                <a:latin typeface="Calibri" pitchFamily="34" charset="0"/>
+                <a:ea typeface="Calibri" pitchFamily="34" charset="-122"/>
+                <a:cs typeface="Calibri" pitchFamily="34" charset="-120"/>
+              </a:rPr>
+              <a:t>23,617 nuclei are already labelled — and the annotation is what I'm auditing.</a:t>
+            </a:r>
+            <a:endParaRPr lang="en-US" sz="1250" dirty="0"/>
+          </a:p>
+        </p:txBody>
+      </p:sp>
+      <p:sp>
+        <p:nvSpPr>
+          <p:cNvPr id="16" name="Text 14"/>
+          <p:cNvSpPr/>
+          <p:nvPr/>
+        </p:nvSpPr>
+        <p:spPr>
+          <a:xfrm>
+            <a:off x="6479896" y="3602736"/>
+            <a:ext cx="4907128" cy="786384"/>
+          </a:xfrm>
+          <a:prstGeom prst="rect">
+            <a:avLst/>
+          </a:prstGeom>
+          <a:noFill/>
+          <a:ln/>
+        </p:spPr>
+        <p:txBody>
+          <a:bodyPr wrap="square" lIns="0" tIns="0" rIns="0" bIns="0" rtlCol="0" anchor="t"/>
+          <a:lstStyle/>
+          <a:p>
+            <a:pPr indent="0" marL="0">
+              <a:lnSpc>
+                <a:spcPts val="1600"/>
+              </a:lnSpc>
+              <a:buNone/>
+            </a:pPr>
+            <a:r>
+              <a:rPr lang="en-US" sz="1250" b="1" dirty="0">
+                <a:solidFill>
+                  <a:srgbClr val="0B0B0B"/>
+                </a:solidFill>
+                <a:latin typeface="Calibri" pitchFamily="34" charset="0"/>
+                <a:ea typeface="Calibri" pitchFamily="34" charset="-122"/>
+                <a:cs typeface="Calibri" pitchFamily="34" charset="-120"/>
+              </a:rPr>
+              <a:t>Fine-tune  </a:t>
+            </a:r>
+            <a:pPr indent="0" marL="0">
+              <a:lnSpc>
+                <a:spcPts val="1600"/>
+              </a:lnSpc>
+              <a:buNone/>
+            </a:pPr>
+            <a:r>
+              <a:rPr lang="en-US" sz="1250" dirty="0">
+                <a:solidFill>
+                  <a:srgbClr val="52514E"/>
+                </a:solidFill>
+                <a:latin typeface="Calibri" pitchFamily="34" charset="0"/>
+                <a:ea typeface="Calibri" pitchFamily="34" charset="-122"/>
+                <a:cs typeface="Calibri" pitchFamily="34" charset="-120"/>
+              </a:rPr>
+              <a:t>The interesting one. See below.</a:t>
+            </a:r>
+            <a:endParaRPr lang="en-US" sz="1250" dirty="0"/>
+          </a:p>
+        </p:txBody>
+      </p:sp>
+      <p:sp>
+        <p:nvSpPr>
+          <p:cNvPr id="17" name="Shape 15"/>
+          <p:cNvSpPr/>
+          <p:nvPr/>
+        </p:nvSpPr>
+        <p:spPr>
+          <a:xfrm>
+            <a:off x="566928" y="4718304"/>
+            <a:ext cx="11057839" cy="1316736"/>
+          </a:xfrm>
+          <a:prstGeom prst="roundRect">
+            <a:avLst>
+              <a:gd name="adj" fmla="val 8333"/>
+            </a:avLst>
+          </a:prstGeom>
+          <a:solidFill>
+            <a:srgbClr val="12233A"/>
+          </a:solidFill>
+          <a:ln/>
+        </p:spPr>
+      </p:sp>
+      <p:sp>
+        <p:nvSpPr>
+          <p:cNvPr id="18" name="Text 16"/>
+          <p:cNvSpPr/>
+          <p:nvPr/>
+        </p:nvSpPr>
+        <p:spPr>
+          <a:xfrm>
+            <a:off x="877824" y="4718304"/>
+            <a:ext cx="10436047" cy="1316736"/>
+          </a:xfrm>
+          <a:prstGeom prst="rect">
+            <a:avLst/>
+          </a:prstGeom>
+          <a:noFill/>
+          <a:ln/>
+        </p:spPr>
+        <p:txBody>
+          <a:bodyPr wrap="square" lIns="0" tIns="0" rIns="0" bIns="0" rtlCol="0" anchor="ctr"/>
+          <a:lstStyle/>
+          <a:p>
+            <a:pPr indent="0" marL="0">
+              <a:lnSpc>
+                <a:spcPts val="1900"/>
+              </a:lnSpc>
+              <a:buNone/>
+            </a:pPr>
+            <a:r>
+              <a:rPr lang="en-US" sz="1350" b="1" dirty="0">
+                <a:solidFill>
+                  <a:srgbClr val="EB6834"/>
+                </a:solidFill>
+                <a:latin typeface="Calibri" pitchFamily="34" charset="0"/>
+                <a:ea typeface="Calibri" pitchFamily="34" charset="-122"/>
+                <a:cs typeface="Calibri" pitchFamily="34" charset="-120"/>
+              </a:rPr>
+              <a:t>Why not fine-tune?  </a:t>
+            </a:r>
+            <a:pPr indent="0" marL="0">
+              <a:lnSpc>
+                <a:spcPts val="1900"/>
+              </a:lnSpc>
+              <a:buNone/>
+            </a:pPr>
+            <a:r>
+              <a:rPr lang="en-US" sz="1350" dirty="0">
+                <a:solidFill>
+                  <a:srgbClr val="D6E1EF"/>
+                </a:solidFill>
+                <a:latin typeface="Calibri" pitchFamily="34" charset="0"/>
+                <a:ea typeface="Calibri" pitchFamily="34" charset="-122"/>
+                <a:cs typeface="Calibri" pitchFamily="34" charset="-120"/>
+              </a:rPr>
+              <a:t>It would probably raise AP — and that’s the problem. A fine-tuned model would gain partly by learning the annotator’s systematic tightness: a better metric, not better segmentation. So it’s a </a:t>
+            </a:r>
+            <a:pPr indent="0" marL="0">
+              <a:lnSpc>
+                <a:spcPts val="1900"/>
+              </a:lnSpc>
+              <a:buNone/>
+            </a:pPr>
+            <a:r>
+              <a:rPr lang="en-US" sz="1350" b="1" dirty="0">
+                <a:solidFill>
+                  <a:srgbClr val="FFFFFF"/>
+                </a:solidFill>
+                <a:latin typeface="Calibri" pitchFamily="34" charset="0"/>
+                <a:ea typeface="Calibri" pitchFamily="34" charset="-122"/>
+                <a:cs typeface="Calibri" pitchFamily="34" charset="-120"/>
+              </a:rPr>
+              <a:t>test of the boundary finding</a:t>
+            </a:r>
+            <a:pPr indent="0" marL="0">
+              <a:lnSpc>
+                <a:spcPts val="1900"/>
+              </a:lnSpc>
+              <a:buNone/>
+            </a:pPr>
+            <a:r>
+              <a:rPr lang="en-US" sz="1350" dirty="0">
+                <a:solidFill>
+                  <a:srgbClr val="D6E1EF"/>
+                </a:solidFill>
+                <a:latin typeface="Calibri" pitchFamily="34" charset="0"/>
+                <a:ea typeface="Calibri" pitchFamily="34" charset="-122"/>
+                <a:cs typeface="Calibri" pitchFamily="34" charset="-120"/>
+              </a:rPr>
+              <a:t>, not an improvement — which is exactly how I’d spend the next day on it.</a:t>
             </a:r>
             <a:endParaRPr lang="en-US" sz="1350" dirty="0"/>
-          </a:p>
-        </p:txBody>
-      </p:sp>
-      <p:sp>
-        <p:nvSpPr>
-          <p:cNvPr id="12" name="Text 9"/>
-          <p:cNvSpPr/>
-          <p:nvPr/>
-        </p:nvSpPr>
-        <p:spPr>
-          <a:xfrm>
-            <a:off x="10161727" y="5285232"/>
-            <a:ext cx="1234440" cy="914400"/>
-          </a:xfrm>
-          <a:prstGeom prst="rect">
-            <a:avLst/>
-          </a:prstGeom>
-          <a:noFill/>
-          <a:ln/>
-        </p:spPr>
-        <p:txBody>
-          <a:bodyPr wrap="square" lIns="0" tIns="0" rIns="0" bIns="0" rtlCol="0" anchor="ctr"/>
-          <a:lstStyle/>
-          <a:p>
-            <a:pPr algn="r" indent="0" marL="0">
-              <a:buNone/>
-            </a:pPr>
-            <a:r>
-              <a:rPr lang="en-US" sz="2600" b="1" dirty="0">
-                <a:solidFill>
-                  <a:srgbClr val="2A78D6"/>
-                </a:solidFill>
-                <a:latin typeface="Cambria" pitchFamily="34" charset="0"/>
-                <a:ea typeface="Cambria" pitchFamily="34" charset="-122"/>
-                <a:cs typeface="Cambria" pitchFamily="34" charset="-120"/>
-              </a:rPr>
-              <a:t>0.807</a:t>
-            </a:r>
-            <a:endParaRPr lang="en-US" sz="2600" dirty="0"/>
           </a:p>
         </p:txBody>
       </p:sp>
@@ -8507,7 +8447,7 @@
                 <a:ea typeface="Cambria" pitchFamily="34" charset="-122"/>
                 <a:cs typeface="Cambria" pitchFamily="34" charset="-120"/>
               </a:rPr>
-              <a:t>What I chose to do with it</a:t>
+              <a:t>The trap in the data</a:t>
             </a:r>
             <a:endParaRPr lang="en-US" sz="2700" dirty="0"/>
           </a:p>
@@ -8546,44 +8486,68 @@
                 <a:ea typeface="Calibri" pitchFamily="34" charset="-122"/>
                 <a:cs typeface="Calibri" pitchFamily="34" charset="-120"/>
               </a:rPr>
-              <a:t>200 fields · 100 for training · ~118 nuclei each · scored by mean AP over IoU 0.50 : 0.95</a:t>
+              <a:t>The masks are a 3-colour graph colouring, not instance IDs</a:t>
             </a:r>
             <a:endParaRPr lang="en-US" sz="1400" dirty="0"/>
           </a:p>
         </p:txBody>
       </p:sp>
-      <p:sp>
-        <p:nvSpPr>
-          <p:cNvPr id="6" name="Shape 4"/>
-          <p:cNvSpPr/>
-          <p:nvPr/>
-        </p:nvSpPr>
-        <p:spPr>
-          <a:xfrm>
-            <a:off x="566928" y="1389888"/>
-            <a:ext cx="5382616" cy="3127248"/>
+      <p:pic>
+        <p:nvPicPr>
+          <p:cNvPr id="6" name="Image 0" descr="/Users/tejas/Take_Home_Neo/figures/slide3_the_trap.png">    </p:cNvPr>
+          <p:cNvPicPr>
+            <a:picLocks noChangeAspect="1"/>
+          </p:cNvPicPr>
+          <p:nvPr/>
+        </p:nvPicPr>
+        <p:blipFill>
+          <a:blip r:embed="rId1"/>
+          <a:stretch>
+            <a:fillRect/>
+          </a:stretch>
+        </p:blipFill>
+        <p:spPr>
+          <a:xfrm>
+            <a:off x="566928" y="1628533"/>
+            <a:ext cx="11057839" cy="3189455"/>
+          </a:xfrm>
+          <a:prstGeom prst="rect">
+            <a:avLst/>
+          </a:prstGeom>
+        </p:spPr>
+      </p:pic>
+      <p:sp>
+        <p:nvSpPr>
+          <p:cNvPr id="7" name="Shape 4"/>
+          <p:cNvSpPr/>
+          <p:nvPr/>
+        </p:nvSpPr>
+        <p:spPr>
+          <a:xfrm>
+            <a:off x="566928" y="5321808"/>
+            <a:ext cx="3484778" cy="841248"/>
           </a:xfrm>
           <a:prstGeom prst="roundRect">
             <a:avLst>
-              <a:gd name="adj" fmla="val 3509"/>
+              <a:gd name="adj" fmla="val 10870"/>
             </a:avLst>
           </a:prstGeom>
           <a:solidFill>
-            <a:srgbClr val="E8F1FC"/>
+            <a:srgbClr val="F4F3EF"/>
           </a:solidFill>
           <a:ln/>
         </p:spPr>
       </p:sp>
       <p:sp>
         <p:nvSpPr>
-          <p:cNvPr id="7" name="Text 5"/>
-          <p:cNvSpPr/>
-          <p:nvPr/>
-        </p:nvSpPr>
-        <p:spPr>
-          <a:xfrm>
-            <a:off x="804672" y="1517904"/>
-            <a:ext cx="4907128" cy="347472"/>
+          <p:cNvPr id="8" name="Text 5"/>
+          <p:cNvSpPr/>
+          <p:nvPr/>
+        </p:nvSpPr>
+        <p:spPr>
+          <a:xfrm>
+            <a:off x="731520" y="5321808"/>
+            <a:ext cx="1371600" cy="841248"/>
           </a:xfrm>
           <a:prstGeom prst="rect">
             <a:avLst/>
@@ -8595,34 +8559,95 @@
           <a:bodyPr wrap="square" lIns="0" tIns="0" rIns="0" bIns="0" rtlCol="0" anchor="ctr"/>
           <a:lstStyle/>
           <a:p>
-            <a:pPr indent="0" marL="0">
-              <a:buNone/>
-            </a:pPr>
-            <a:r>
-              <a:rPr lang="en-US" sz="1500" b="1" dirty="0">
-                <a:solidFill>
-                  <a:srgbClr val="2A78D6"/>
+            <a:pPr algn="l" indent="0" marL="0">
+              <a:buNone/>
+            </a:pPr>
+            <a:r>
+              <a:rPr lang="en-US" sz="3000" b="1" dirty="0">
+                <a:solidFill>
+                  <a:srgbClr val="A32E22"/>
+                </a:solidFill>
+                <a:latin typeface="Cambria" pitchFamily="34" charset="0"/>
+                <a:ea typeface="Cambria" pitchFamily="34" charset="-122"/>
+                <a:cs typeface="Cambria" pitchFamily="34" charset="-120"/>
+              </a:rPr>
+              <a:t>3</a:t>
+            </a:r>
+            <a:endParaRPr lang="en-US" sz="3000" dirty="0"/>
+          </a:p>
+        </p:txBody>
+      </p:sp>
+      <p:sp>
+        <p:nvSpPr>
+          <p:cNvPr id="9" name="Text 6"/>
+          <p:cNvSpPr/>
+          <p:nvPr/>
+        </p:nvSpPr>
+        <p:spPr>
+          <a:xfrm>
+            <a:off x="2048256" y="5321808"/>
+            <a:ext cx="1884578" cy="841248"/>
+          </a:xfrm>
+          <a:prstGeom prst="rect">
+            <a:avLst/>
+          </a:prstGeom>
+          <a:noFill/>
+          <a:ln/>
+        </p:spPr>
+        <p:txBody>
+          <a:bodyPr wrap="square" lIns="0" tIns="0" rIns="0" bIns="0" rtlCol="0" anchor="ctr"/>
+          <a:lstStyle/>
+          <a:p>
+            <a:pPr algn="l" indent="0" marL="0">
+              <a:buNone/>
+            </a:pPr>
+            <a:r>
+              <a:rPr lang="en-US" sz="1300" dirty="0">
+                <a:solidFill>
+                  <a:srgbClr val="52514E"/>
                 </a:solidFill>
                 <a:latin typeface="Calibri" pitchFamily="34" charset="0"/>
                 <a:ea typeface="Calibri" pitchFamily="34" charset="-122"/>
                 <a:cs typeface="Calibri" pitchFamily="34" charset="-120"/>
               </a:rPr>
-              <a:t>What I chose to build</a:t>
-            </a:r>
-            <a:endParaRPr lang="en-US" sz="1500" dirty="0"/>
-          </a:p>
-        </p:txBody>
-      </p:sp>
-      <p:sp>
-        <p:nvSpPr>
-          <p:cNvPr id="8" name="Text 6"/>
-          <p:cNvSpPr/>
-          <p:nvPr/>
-        </p:nvSpPr>
-        <p:spPr>
-          <a:xfrm>
-            <a:off x="804672" y="1956816"/>
-            <a:ext cx="4907128" cy="585216"/>
+              <a:t>read as IDs</a:t>
+            </a:r>
+            <a:endParaRPr lang="en-US" sz="1300" dirty="0"/>
+          </a:p>
+        </p:txBody>
+      </p:sp>
+      <p:sp>
+        <p:nvSpPr>
+          <p:cNvPr id="10" name="Shape 7"/>
+          <p:cNvSpPr/>
+          <p:nvPr/>
+        </p:nvSpPr>
+        <p:spPr>
+          <a:xfrm>
+            <a:off x="4252874" y="5321808"/>
+            <a:ext cx="3484778" cy="841248"/>
+          </a:xfrm>
+          <a:prstGeom prst="roundRect">
+            <a:avLst>
+              <a:gd name="adj" fmla="val 10870"/>
+            </a:avLst>
+          </a:prstGeom>
+          <a:solidFill>
+            <a:srgbClr val="F4F3EF"/>
+          </a:solidFill>
+          <a:ln/>
+        </p:spPr>
+      </p:sp>
+      <p:sp>
+        <p:nvSpPr>
+          <p:cNvPr id="11" name="Text 8"/>
+          <p:cNvSpPr/>
+          <p:nvPr/>
+        </p:nvSpPr>
+        <p:spPr>
+          <a:xfrm>
+            <a:off x="4417466" y="5321808"/>
+            <a:ext cx="1371600" cy="841248"/>
           </a:xfrm>
           <a:prstGeom prst="rect">
             <a:avLst/>
@@ -8631,34 +8656,153 @@
           <a:ln/>
         </p:spPr>
         <p:txBody>
-          <a:bodyPr wrap="square" lIns="0" tIns="0" rIns="0" bIns="0" rtlCol="0" anchor="t"/>
-          <a:lstStyle/>
-          <a:p>
-            <a:pPr indent="0" marL="0">
-              <a:lnSpc>
-                <a:spcPts val="1600"/>
-              </a:lnSpc>
-              <a:buNone/>
-            </a:pPr>
-            <a:r>
-              <a:rPr lang="en-US" sz="1250" b="1" dirty="0">
-                <a:solidFill>
-                  <a:srgbClr val="0B0B0B"/>
+          <a:bodyPr wrap="square" lIns="0" tIns="0" rIns="0" bIns="0" rtlCol="0" anchor="ctr"/>
+          <a:lstStyle/>
+          <a:p>
+            <a:pPr algn="l" indent="0" marL="0">
+              <a:buNone/>
+            </a:pPr>
+            <a:r>
+              <a:rPr lang="en-US" sz="3000" b="1" dirty="0">
+                <a:solidFill>
+                  <a:srgbClr val="EB6834"/>
+                </a:solidFill>
+                <a:latin typeface="Cambria" pitchFamily="34" charset="0"/>
+                <a:ea typeface="Cambria" pitchFamily="34" charset="-122"/>
+                <a:cs typeface="Cambria" pitchFamily="34" charset="-120"/>
+              </a:rPr>
+              <a:t>100</a:t>
+            </a:r>
+            <a:endParaRPr lang="en-US" sz="3000" dirty="0"/>
+          </a:p>
+        </p:txBody>
+      </p:sp>
+      <p:sp>
+        <p:nvSpPr>
+          <p:cNvPr id="12" name="Text 9"/>
+          <p:cNvSpPr/>
+          <p:nvPr/>
+        </p:nvSpPr>
+        <p:spPr>
+          <a:xfrm>
+            <a:off x="5734202" y="5321808"/>
+            <a:ext cx="1884578" cy="841248"/>
+          </a:xfrm>
+          <a:prstGeom prst="rect">
+            <a:avLst/>
+          </a:prstGeom>
+          <a:noFill/>
+          <a:ln/>
+        </p:spPr>
+        <p:txBody>
+          <a:bodyPr wrap="square" lIns="0" tIns="0" rIns="0" bIns="0" rtlCol="0" anchor="ctr"/>
+          <a:lstStyle/>
+          <a:p>
+            <a:pPr algn="l" indent="0" marL="0">
+              <a:buNone/>
+            </a:pPr>
+            <a:r>
+              <a:rPr lang="en-US" sz="1300" dirty="0">
+                <a:solidFill>
+                  <a:srgbClr val="52514E"/>
                 </a:solidFill>
                 <a:latin typeface="Calibri" pitchFamily="34" charset="0"/>
                 <a:ea typeface="Calibri" pitchFamily="34" charset="-122"/>
                 <a:cs typeface="Calibri" pitchFamily="34" charset="-120"/>
               </a:rPr>
-              <a:t>Decode the ground truth correctly  </a:t>
-            </a:r>
-            <a:pPr indent="0" marL="0">
-              <a:lnSpc>
-                <a:spcPts val="1600"/>
-              </a:lnSpc>
-              <a:buNone/>
-            </a:pPr>
-            <a:r>
-              <a:rPr lang="en-US" sz="1250" dirty="0">
+              <a:t>binarise + label</a:t>
+            </a:r>
+            <a:endParaRPr lang="en-US" sz="1300" dirty="0"/>
+          </a:p>
+        </p:txBody>
+      </p:sp>
+      <p:sp>
+        <p:nvSpPr>
+          <p:cNvPr id="13" name="Shape 10"/>
+          <p:cNvSpPr/>
+          <p:nvPr/>
+        </p:nvSpPr>
+        <p:spPr>
+          <a:xfrm>
+            <a:off x="7938821" y="5321808"/>
+            <a:ext cx="3484778" cy="841248"/>
+          </a:xfrm>
+          <a:prstGeom prst="roundRect">
+            <a:avLst>
+              <a:gd name="adj" fmla="val 10870"/>
+            </a:avLst>
+          </a:prstGeom>
+          <a:solidFill>
+            <a:srgbClr val="F4F3EF"/>
+          </a:solidFill>
+          <a:ln/>
+        </p:spPr>
+      </p:sp>
+      <p:sp>
+        <p:nvSpPr>
+          <p:cNvPr id="14" name="Text 11"/>
+          <p:cNvSpPr/>
+          <p:nvPr/>
+        </p:nvSpPr>
+        <p:spPr>
+          <a:xfrm>
+            <a:off x="8103413" y="5321808"/>
+            <a:ext cx="1371600" cy="841248"/>
+          </a:xfrm>
+          <a:prstGeom prst="rect">
+            <a:avLst/>
+          </a:prstGeom>
+          <a:noFill/>
+          <a:ln/>
+        </p:spPr>
+        <p:txBody>
+          <a:bodyPr wrap="square" lIns="0" tIns="0" rIns="0" bIns="0" rtlCol="0" anchor="ctr"/>
+          <a:lstStyle/>
+          <a:p>
+            <a:pPr algn="l" indent="0" marL="0">
+              <a:buNone/>
+            </a:pPr>
+            <a:r>
+              <a:rPr lang="en-US" sz="3000" b="1" dirty="0">
+                <a:solidFill>
+                  <a:srgbClr val="1E6F4C"/>
+                </a:solidFill>
+                <a:latin typeface="Cambria" pitchFamily="34" charset="0"/>
+                <a:ea typeface="Cambria" pitchFamily="34" charset="-122"/>
+                <a:cs typeface="Cambria" pitchFamily="34" charset="-120"/>
+              </a:rPr>
+              <a:t>118</a:t>
+            </a:r>
+            <a:endParaRPr lang="en-US" sz="3000" dirty="0"/>
+          </a:p>
+        </p:txBody>
+      </p:sp>
+      <p:sp>
+        <p:nvSpPr>
+          <p:cNvPr id="15" name="Text 12"/>
+          <p:cNvSpPr/>
+          <p:nvPr/>
+        </p:nvSpPr>
+        <p:spPr>
+          <a:xfrm>
+            <a:off x="9420149" y="5321808"/>
+            <a:ext cx="1884578" cy="841248"/>
+          </a:xfrm>
+          <a:prstGeom prst="rect">
+            <a:avLst/>
+          </a:prstGeom>
+          <a:noFill/>
+          <a:ln/>
+        </p:spPr>
+        <p:txBody>
+          <a:bodyPr wrap="square" lIns="0" tIns="0" rIns="0" bIns="0" rtlCol="0" anchor="ctr"/>
+          <a:lstStyle/>
+          <a:p>
+            <a:pPr algn="l" indent="0" marL="0">
+              <a:buNone/>
+            </a:pPr>
+            <a:r>
+              <a:rPr lang="en-US" sz="1300" dirty="0">
                 <a:solidFill>
                   <a:srgbClr val="52514E"/>
                 </a:solidFill>
@@ -8666,539 +8810,9 @@
                 <a:ea typeface="Calibri" pitchFamily="34" charset="-122"/>
                 <a:cs typeface="Calibri" pitchFamily="34" charset="-120"/>
               </a:rPr>
-              <a:t>Every downstream number is meaningless without it.</a:t>
-            </a:r>
-            <a:endParaRPr lang="en-US" sz="1250" dirty="0"/>
-          </a:p>
-        </p:txBody>
-      </p:sp>
-      <p:sp>
-        <p:nvSpPr>
-          <p:cNvPr id="9" name="Text 7"/>
-          <p:cNvSpPr/>
-          <p:nvPr/>
-        </p:nvSpPr>
-        <p:spPr>
-          <a:xfrm>
-            <a:off x="804672" y="2578608"/>
-            <a:ext cx="4907128" cy="585216"/>
-          </a:xfrm>
-          <a:prstGeom prst="rect">
-            <a:avLst/>
-          </a:prstGeom>
-          <a:noFill/>
-          <a:ln/>
-        </p:spPr>
-        <p:txBody>
-          <a:bodyPr wrap="square" lIns="0" tIns="0" rIns="0" bIns="0" rtlCol="0" anchor="t"/>
-          <a:lstStyle/>
-          <a:p>
-            <a:pPr indent="0" marL="0">
-              <a:lnSpc>
-                <a:spcPts val="1600"/>
-              </a:lnSpc>
-              <a:buNone/>
-            </a:pPr>
-            <a:r>
-              <a:rPr lang="en-US" sz="1250" b="1" dirty="0">
-                <a:solidFill>
-                  <a:srgbClr val="0B0B0B"/>
-                </a:solidFill>
-                <a:latin typeface="Calibri" pitchFamily="34" charset="0"/>
-                <a:ea typeface="Calibri" pitchFamily="34" charset="-122"/>
-                <a:cs typeface="Calibri" pitchFamily="34" charset="-120"/>
-              </a:rPr>
-              <a:t>Cellpose-SAM, pretrained, zero-shot  </a:t>
-            </a:r>
-            <a:pPr indent="0" marL="0">
-              <a:lnSpc>
-                <a:spcPts val="1600"/>
-              </a:lnSpc>
-              <a:buNone/>
-            </a:pPr>
-            <a:r>
-              <a:rPr lang="en-US" sz="1250" dirty="0">
-                <a:solidFill>
-                  <a:srgbClr val="52514E"/>
-                </a:solidFill>
-                <a:latin typeface="Calibri" pitchFamily="34" charset="0"/>
-                <a:ea typeface="Calibri" pitchFamily="34" charset="-122"/>
-                <a:cs typeface="Calibri" pitchFamily="34" charset="-120"/>
-              </a:rPr>
-              <a:t>The current state of the art for this modality.</a:t>
-            </a:r>
-            <a:endParaRPr lang="en-US" sz="1250" dirty="0"/>
-          </a:p>
-        </p:txBody>
-      </p:sp>
-      <p:sp>
-        <p:nvSpPr>
-          <p:cNvPr id="10" name="Text 8"/>
-          <p:cNvSpPr/>
-          <p:nvPr/>
-        </p:nvSpPr>
-        <p:spPr>
-          <a:xfrm>
-            <a:off x="804672" y="3200400"/>
-            <a:ext cx="4907128" cy="585216"/>
-          </a:xfrm>
-          <a:prstGeom prst="rect">
-            <a:avLst/>
-          </a:prstGeom>
-          <a:noFill/>
-          <a:ln/>
-        </p:spPr>
-        <p:txBody>
-          <a:bodyPr wrap="square" lIns="0" tIns="0" rIns="0" bIns="0" rtlCol="0" anchor="t"/>
-          <a:lstStyle/>
-          <a:p>
-            <a:pPr indent="0" marL="0">
-              <a:lnSpc>
-                <a:spcPts val="1600"/>
-              </a:lnSpc>
-              <a:buNone/>
-            </a:pPr>
-            <a:r>
-              <a:rPr lang="en-US" sz="1250" b="1" dirty="0">
-                <a:solidFill>
-                  <a:srgbClr val="0B0B0B"/>
-                </a:solidFill>
-                <a:latin typeface="Calibri" pitchFamily="34" charset="0"/>
-                <a:ea typeface="Calibri" pitchFamily="34" charset="-122"/>
-                <a:cs typeface="Calibri" pitchFamily="34" charset="-120"/>
-              </a:rPr>
-              <a:t>A 72× evaluation cache  </a:t>
-            </a:r>
-            <a:pPr indent="0" marL="0">
-              <a:lnSpc>
-                <a:spcPts val="1600"/>
-              </a:lnSpc>
-              <a:buNone/>
-            </a:pPr>
-            <a:r>
-              <a:rPr lang="en-US" sz="1250" dirty="0">
-                <a:solidFill>
-                  <a:srgbClr val="52514E"/>
-                </a:solidFill>
-                <a:latin typeface="Calibri" pitchFamily="34" charset="0"/>
-                <a:ea typeface="Calibri" pitchFamily="34" charset="-122"/>
-                <a:cs typeface="Calibri" pitchFamily="34" charset="-120"/>
-              </a:rPr>
-              <a:t>Turned parameter search and ablations from hours into minutes.</a:t>
-            </a:r>
-            <a:endParaRPr lang="en-US" sz="1250" dirty="0"/>
-          </a:p>
-        </p:txBody>
-      </p:sp>
-      <p:sp>
-        <p:nvSpPr>
-          <p:cNvPr id="11" name="Text 9"/>
-          <p:cNvSpPr/>
-          <p:nvPr/>
-        </p:nvSpPr>
-        <p:spPr>
-          <a:xfrm>
-            <a:off x="804672" y="3822192"/>
-            <a:ext cx="4907128" cy="585216"/>
-          </a:xfrm>
-          <a:prstGeom prst="rect">
-            <a:avLst/>
-          </a:prstGeom>
-          <a:noFill/>
-          <a:ln/>
-        </p:spPr>
-        <p:txBody>
-          <a:bodyPr wrap="square" lIns="0" tIns="0" rIns="0" bIns="0" rtlCol="0" anchor="t"/>
-          <a:lstStyle/>
-          <a:p>
-            <a:pPr indent="0" marL="0">
-              <a:lnSpc>
-                <a:spcPts val="1600"/>
-              </a:lnSpc>
-              <a:buNone/>
-            </a:pPr>
-            <a:r>
-              <a:rPr lang="en-US" sz="1250" b="1" dirty="0">
-                <a:solidFill>
-                  <a:srgbClr val="0B0B0B"/>
-                </a:solidFill>
-                <a:latin typeface="Calibri" pitchFamily="34" charset="0"/>
-                <a:ea typeface="Calibri" pitchFamily="34" charset="-122"/>
-                <a:cs typeface="Calibri" pitchFamily="34" charset="-120"/>
-              </a:rPr>
-              <a:t>Attribute the failures  </a:t>
-            </a:r>
-            <a:pPr indent="0" marL="0">
-              <a:lnSpc>
-                <a:spcPts val="1600"/>
-              </a:lnSpc>
-              <a:buNone/>
-            </a:pPr>
-            <a:r>
-              <a:rPr lang="en-US" sz="1250" dirty="0">
-                <a:solidFill>
-                  <a:srgbClr val="52514E"/>
-                </a:solidFill>
-                <a:latin typeface="Calibri" pitchFamily="34" charset="0"/>
-                <a:ea typeface="Calibri" pitchFamily="34" charset="-122"/>
-                <a:cs typeface="Calibri" pitchFamily="34" charset="-120"/>
-              </a:rPr>
-              <a:t>Where the score actually goes — the bulk of the work.</a:t>
-            </a:r>
-            <a:endParaRPr lang="en-US" sz="1250" dirty="0"/>
-          </a:p>
-        </p:txBody>
-      </p:sp>
-      <p:sp>
-        <p:nvSpPr>
-          <p:cNvPr id="12" name="Shape 10"/>
-          <p:cNvSpPr/>
-          <p:nvPr/>
-        </p:nvSpPr>
-        <p:spPr>
-          <a:xfrm>
-            <a:off x="6242152" y="1389888"/>
-            <a:ext cx="5382616" cy="3127248"/>
-          </a:xfrm>
-          <a:prstGeom prst="roundRect">
-            <a:avLst>
-              <a:gd name="adj" fmla="val 3509"/>
-            </a:avLst>
-          </a:prstGeom>
-          <a:solidFill>
-            <a:srgbClr val="F4F3EF"/>
-          </a:solidFill>
-          <a:ln/>
-        </p:spPr>
-      </p:sp>
-      <p:sp>
-        <p:nvSpPr>
-          <p:cNvPr id="13" name="Text 11"/>
-          <p:cNvSpPr/>
-          <p:nvPr/>
-        </p:nvSpPr>
-        <p:spPr>
-          <a:xfrm>
-            <a:off x="6479896" y="1517904"/>
-            <a:ext cx="4907128" cy="347472"/>
-          </a:xfrm>
-          <a:prstGeom prst="rect">
-            <a:avLst/>
-          </a:prstGeom>
-          <a:noFill/>
-          <a:ln/>
-        </p:spPr>
-        <p:txBody>
-          <a:bodyPr wrap="square" lIns="0" tIns="0" rIns="0" bIns="0" rtlCol="0" anchor="ctr"/>
-          <a:lstStyle/>
-          <a:p>
-            <a:pPr indent="0" marL="0">
-              <a:buNone/>
-            </a:pPr>
-            <a:r>
-              <a:rPr lang="en-US" sz="1500" b="1" dirty="0">
-                <a:solidFill>
-                  <a:srgbClr val="52514E"/>
-                </a:solidFill>
-                <a:latin typeface="Calibri" pitchFamily="34" charset="0"/>
-                <a:ea typeface="Calibri" pitchFamily="34" charset="-122"/>
-                <a:cs typeface="Calibri" pitchFamily="34" charset="-120"/>
-              </a:rPr>
-              <a:t>What I deliberately didn’t</a:t>
-            </a:r>
-            <a:endParaRPr lang="en-US" sz="1500" dirty="0"/>
-          </a:p>
-        </p:txBody>
-      </p:sp>
-      <p:sp>
-        <p:nvSpPr>
-          <p:cNvPr id="14" name="Text 12"/>
-          <p:cNvSpPr/>
-          <p:nvPr/>
-        </p:nvSpPr>
-        <p:spPr>
-          <a:xfrm>
-            <a:off x="6479896" y="1956816"/>
-            <a:ext cx="4907128" cy="786384"/>
-          </a:xfrm>
-          <a:prstGeom prst="rect">
-            <a:avLst/>
-          </a:prstGeom>
-          <a:noFill/>
-          <a:ln/>
-        </p:spPr>
-        <p:txBody>
-          <a:bodyPr wrap="square" lIns="0" tIns="0" rIns="0" bIns="0" rtlCol="0" anchor="t"/>
-          <a:lstStyle/>
-          <a:p>
-            <a:pPr indent="0" marL="0">
-              <a:lnSpc>
-                <a:spcPts val="1600"/>
-              </a:lnSpc>
-              <a:buNone/>
-            </a:pPr>
-            <a:r>
-              <a:rPr lang="en-US" sz="1250" b="1" dirty="0">
-                <a:solidFill>
-                  <a:srgbClr val="0B0B0B"/>
-                </a:solidFill>
-                <a:latin typeface="Calibri" pitchFamily="34" charset="0"/>
-                <a:ea typeface="Calibri" pitchFamily="34" charset="-122"/>
-                <a:cs typeface="Calibri" pitchFamily="34" charset="-120"/>
-              </a:rPr>
-              <a:t>Train a model from scratch  </a:t>
-            </a:r>
-            <a:pPr indent="0" marL="0">
-              <a:lnSpc>
-                <a:spcPts val="1600"/>
-              </a:lnSpc>
-              <a:buNone/>
-            </a:pPr>
-            <a:r>
-              <a:rPr lang="en-US" sz="1250" dirty="0">
-                <a:solidFill>
-                  <a:srgbClr val="52514E"/>
-                </a:solidFill>
-                <a:latin typeface="Calibri" pitchFamily="34" charset="0"/>
-                <a:ea typeface="Calibri" pitchFamily="34" charset="-122"/>
-                <a:cs typeface="Calibri" pitchFamily="34" charset="-120"/>
-              </a:rPr>
-              <a:t>100 training fields. I'd be measuring my training loop, not the problem.</a:t>
-            </a:r>
-            <a:endParaRPr lang="en-US" sz="1250" dirty="0"/>
-          </a:p>
-        </p:txBody>
-      </p:sp>
-      <p:sp>
-        <p:nvSpPr>
-          <p:cNvPr id="15" name="Text 13"/>
-          <p:cNvSpPr/>
-          <p:nvPr/>
-        </p:nvSpPr>
-        <p:spPr>
-          <a:xfrm>
-            <a:off x="6479896" y="2779776"/>
-            <a:ext cx="4907128" cy="786384"/>
-          </a:xfrm>
-          <a:prstGeom prst="rect">
-            <a:avLst/>
-          </a:prstGeom>
-          <a:noFill/>
-          <a:ln/>
-        </p:spPr>
-        <p:txBody>
-          <a:bodyPr wrap="square" lIns="0" tIns="0" rIns="0" bIns="0" rtlCol="0" anchor="t"/>
-          <a:lstStyle/>
-          <a:p>
-            <a:pPr indent="0" marL="0">
-              <a:lnSpc>
-                <a:spcPts val="1600"/>
-              </a:lnSpc>
-              <a:buNone/>
-            </a:pPr>
-            <a:r>
-              <a:rPr lang="en-US" sz="1250" b="1" dirty="0">
-                <a:solidFill>
-                  <a:srgbClr val="0B0B0B"/>
-                </a:solidFill>
-                <a:latin typeface="Calibri" pitchFamily="34" charset="0"/>
-                <a:ea typeface="Calibri" pitchFamily="34" charset="-122"/>
-                <a:cs typeface="Calibri" pitchFamily="34" charset="-120"/>
-              </a:rPr>
-              <a:t>Label more data  </a:t>
-            </a:r>
-            <a:pPr indent="0" marL="0">
-              <a:lnSpc>
-                <a:spcPts val="1600"/>
-              </a:lnSpc>
-              <a:buNone/>
-            </a:pPr>
-            <a:r>
-              <a:rPr lang="en-US" sz="1250" dirty="0">
-                <a:solidFill>
-                  <a:srgbClr val="52514E"/>
-                </a:solidFill>
-                <a:latin typeface="Calibri" pitchFamily="34" charset="0"/>
-                <a:ea typeface="Calibri" pitchFamily="34" charset="-122"/>
-                <a:cs typeface="Calibri" pitchFamily="34" charset="-120"/>
-              </a:rPr>
-              <a:t>23,617 nuclei are already labelled — and the annotation is what I'm auditing.</a:t>
-            </a:r>
-            <a:endParaRPr lang="en-US" sz="1250" dirty="0"/>
-          </a:p>
-        </p:txBody>
-      </p:sp>
-      <p:sp>
-        <p:nvSpPr>
-          <p:cNvPr id="16" name="Text 14"/>
-          <p:cNvSpPr/>
-          <p:nvPr/>
-        </p:nvSpPr>
-        <p:spPr>
-          <a:xfrm>
-            <a:off x="6479896" y="3602736"/>
-            <a:ext cx="4907128" cy="786384"/>
-          </a:xfrm>
-          <a:prstGeom prst="rect">
-            <a:avLst/>
-          </a:prstGeom>
-          <a:noFill/>
-          <a:ln/>
-        </p:spPr>
-        <p:txBody>
-          <a:bodyPr wrap="square" lIns="0" tIns="0" rIns="0" bIns="0" rtlCol="0" anchor="t"/>
-          <a:lstStyle/>
-          <a:p>
-            <a:pPr indent="0" marL="0">
-              <a:lnSpc>
-                <a:spcPts val="1600"/>
-              </a:lnSpc>
-              <a:buNone/>
-            </a:pPr>
-            <a:r>
-              <a:rPr lang="en-US" sz="1250" b="1" dirty="0">
-                <a:solidFill>
-                  <a:srgbClr val="0B0B0B"/>
-                </a:solidFill>
-                <a:latin typeface="Calibri" pitchFamily="34" charset="0"/>
-                <a:ea typeface="Calibri" pitchFamily="34" charset="-122"/>
-                <a:cs typeface="Calibri" pitchFamily="34" charset="-120"/>
-              </a:rPr>
-              <a:t>Fine-tune  </a:t>
-            </a:r>
-            <a:pPr indent="0" marL="0">
-              <a:lnSpc>
-                <a:spcPts val="1600"/>
-              </a:lnSpc>
-              <a:buNone/>
-            </a:pPr>
-            <a:r>
-              <a:rPr lang="en-US" sz="1250" dirty="0">
-                <a:solidFill>
-                  <a:srgbClr val="52514E"/>
-                </a:solidFill>
-                <a:latin typeface="Calibri" pitchFamily="34" charset="0"/>
-                <a:ea typeface="Calibri" pitchFamily="34" charset="-122"/>
-                <a:cs typeface="Calibri" pitchFamily="34" charset="-120"/>
-              </a:rPr>
-              <a:t>The interesting one. See below.</a:t>
-            </a:r>
-            <a:endParaRPr lang="en-US" sz="1250" dirty="0"/>
-          </a:p>
-        </p:txBody>
-      </p:sp>
-      <p:sp>
-        <p:nvSpPr>
-          <p:cNvPr id="17" name="Shape 15"/>
-          <p:cNvSpPr/>
-          <p:nvPr/>
-        </p:nvSpPr>
-        <p:spPr>
-          <a:xfrm>
-            <a:off x="566928" y="4718304"/>
-            <a:ext cx="11057839" cy="1316736"/>
-          </a:xfrm>
-          <a:prstGeom prst="roundRect">
-            <a:avLst>
-              <a:gd name="adj" fmla="val 8333"/>
-            </a:avLst>
-          </a:prstGeom>
-          <a:solidFill>
-            <a:srgbClr val="12233A"/>
-          </a:solidFill>
-          <a:ln/>
-        </p:spPr>
-      </p:sp>
-      <p:sp>
-        <p:nvSpPr>
-          <p:cNvPr id="18" name="Text 16"/>
-          <p:cNvSpPr/>
-          <p:nvPr/>
-        </p:nvSpPr>
-        <p:spPr>
-          <a:xfrm>
-            <a:off x="877824" y="4718304"/>
-            <a:ext cx="10436047" cy="1316736"/>
-          </a:xfrm>
-          <a:prstGeom prst="rect">
-            <a:avLst/>
-          </a:prstGeom>
-          <a:noFill/>
-          <a:ln/>
-        </p:spPr>
-        <p:txBody>
-          <a:bodyPr wrap="square" lIns="0" tIns="0" rIns="0" bIns="0" rtlCol="0" anchor="ctr"/>
-          <a:lstStyle/>
-          <a:p>
-            <a:pPr indent="0" marL="0">
-              <a:lnSpc>
-                <a:spcPts val="1900"/>
-              </a:lnSpc>
-              <a:buNone/>
-            </a:pPr>
-            <a:r>
-              <a:rPr lang="en-US" sz="1350" b="1" dirty="0">
-                <a:solidFill>
-                  <a:srgbClr val="EB6834"/>
-                </a:solidFill>
-                <a:latin typeface="Calibri" pitchFamily="34" charset="0"/>
-                <a:ea typeface="Calibri" pitchFamily="34" charset="-122"/>
-                <a:cs typeface="Calibri" pitchFamily="34" charset="-120"/>
-              </a:rPr>
-              <a:t>Why not fine-tune?  </a:t>
-            </a:r>
-            <a:pPr indent="0" marL="0">
-              <a:lnSpc>
-                <a:spcPts val="1900"/>
-              </a:lnSpc>
-              <a:buNone/>
-            </a:pPr>
-            <a:r>
-              <a:rPr lang="en-US" sz="1350" dirty="0">
-                <a:solidFill>
-                  <a:srgbClr val="D6E1EF"/>
-                </a:solidFill>
-                <a:latin typeface="Calibri" pitchFamily="34" charset="0"/>
-                <a:ea typeface="Calibri" pitchFamily="34" charset="-122"/>
-                <a:cs typeface="Calibri" pitchFamily="34" charset="-120"/>
-              </a:rPr>
-              <a:t>It would probably raise AP — and that’s the problem. A fine-tuned model would gain partly by learning the annotator’s systematic tightness: a better metric, not better segmentation. So it’s a </a:t>
-            </a:r>
-            <a:pPr indent="0" marL="0">
-              <a:lnSpc>
-                <a:spcPts val="1900"/>
-              </a:lnSpc>
-              <a:buNone/>
-            </a:pPr>
-            <a:r>
-              <a:rPr lang="en-US" sz="1350" b="1" dirty="0">
-                <a:solidFill>
-                  <a:srgbClr val="FFFFFF"/>
-                </a:solidFill>
-                <a:latin typeface="Calibri" pitchFamily="34" charset="0"/>
-                <a:ea typeface="Calibri" pitchFamily="34" charset="-122"/>
-                <a:cs typeface="Calibri" pitchFamily="34" charset="-120"/>
-              </a:rPr>
-              <a:t>test of the boundary finding</a:t>
-            </a:r>
-            <a:pPr indent="0" marL="0">
-              <a:lnSpc>
-                <a:spcPts val="1900"/>
-              </a:lnSpc>
-              <a:buNone/>
-            </a:pPr>
-            <a:r>
-              <a:rPr lang="en-US" sz="1350" dirty="0">
-                <a:solidFill>
-                  <a:srgbClr val="D6E1EF"/>
-                </a:solidFill>
-                <a:latin typeface="Calibri" pitchFamily="34" charset="0"/>
-                <a:ea typeface="Calibri" pitchFamily="34" charset="-122"/>
-                <a:cs typeface="Calibri" pitchFamily="34" charset="-120"/>
-              </a:rPr>
-              <a:t>, not an improvement — which is exactly how I’d spend the next day on it.</a:t>
-            </a:r>
-            <a:endParaRPr lang="en-US" sz="1350" dirty="0"/>
+              <a:t>decoded correctly</a:t>
+            </a:r>
+            <a:endParaRPr lang="en-US" sz="1300" dirty="0"/>
           </a:p>
         </p:txBody>
       </p:sp>
@@ -9326,54 +8940,15 @@
                 <a:ea typeface="Cambria" pitchFamily="34" charset="-122"/>
                 <a:cs typeface="Cambria" pitchFamily="34" charset="-120"/>
               </a:rPr>
-              <a:t>The trap in the data</a:t>
+              <a:t>What I built</a:t>
             </a:r>
             <a:endParaRPr lang="en-US" sz="2700" dirty="0"/>
-          </a:p>
-        </p:txBody>
-      </p:sp>
-      <p:sp>
-        <p:nvSpPr>
-          <p:cNvPr id="5" name="Text 3"/>
-          <p:cNvSpPr/>
-          <p:nvPr/>
-        </p:nvSpPr>
-        <p:spPr>
-          <a:xfrm>
-            <a:off x="1133856" y="868680"/>
-            <a:ext cx="10490911" cy="310896"/>
-          </a:xfrm>
-          <a:prstGeom prst="rect">
-            <a:avLst/>
-          </a:prstGeom>
-          <a:noFill/>
-          <a:ln/>
-        </p:spPr>
-        <p:txBody>
-          <a:bodyPr wrap="square" lIns="0" tIns="0" rIns="0" bIns="0" rtlCol="0" anchor="ctr"/>
-          <a:lstStyle/>
-          <a:p>
-            <a:pPr indent="0" marL="0">
-              <a:buNone/>
-            </a:pPr>
-            <a:r>
-              <a:rPr lang="en-US" sz="1400" i="1" dirty="0">
-                <a:solidFill>
-                  <a:srgbClr val="52514E"/>
-                </a:solidFill>
-                <a:latin typeface="Calibri" pitchFamily="34" charset="0"/>
-                <a:ea typeface="Calibri" pitchFamily="34" charset="-122"/>
-                <a:cs typeface="Calibri" pitchFamily="34" charset="-120"/>
-              </a:rPr>
-              <a:t>The masks are a 3-colour graph colouring, not instance IDs</a:t>
-            </a:r>
-            <a:endParaRPr lang="en-US" sz="1400" dirty="0"/>
           </a:p>
         </p:txBody>
       </p:sp>
       <p:pic>
         <p:nvPicPr>
-          <p:cNvPr id="6" name="Image 0" descr="/Users/tejas/Take_Home_Neo/figures/slide3_the_trap.png">    </p:cNvPr>
+          <p:cNvPr id="5" name="Image 0" descr="/Users/tejas/Take_Home_Neo/figures/slide4_what_i_built.png">    </p:cNvPr>
           <p:cNvPicPr>
             <a:picLocks noChangeAspect="1"/>
           </p:cNvPicPr>
@@ -9387,8 +8962,8 @@
         </p:blipFill>
         <p:spPr>
           <a:xfrm>
-            <a:off x="566928" y="1628533"/>
-            <a:ext cx="11057839" cy="3189455"/>
+            <a:off x="566928" y="1505632"/>
+            <a:ext cx="11057839" cy="2932336"/>
           </a:xfrm>
           <a:prstGeom prst="rect">
             <a:avLst/>
@@ -9397,18 +8972,18 @@
       </p:pic>
       <p:sp>
         <p:nvSpPr>
-          <p:cNvPr id="7" name="Shape 4"/>
-          <p:cNvSpPr/>
-          <p:nvPr/>
-        </p:nvSpPr>
-        <p:spPr>
-          <a:xfrm>
-            <a:off x="566928" y="5321808"/>
-            <a:ext cx="3484778" cy="841248"/>
+          <p:cNvPr id="6" name="Shape 3"/>
+          <p:cNvSpPr/>
+          <p:nvPr/>
+        </p:nvSpPr>
+        <p:spPr>
+          <a:xfrm>
+            <a:off x="566928" y="4828032"/>
+            <a:ext cx="11057839" cy="1225296"/>
           </a:xfrm>
           <a:prstGeom prst="roundRect">
             <a:avLst>
-              <a:gd name="adj" fmla="val 10870"/>
+              <a:gd name="adj" fmla="val 8955"/>
             </a:avLst>
           </a:prstGeom>
           <a:solidFill>
@@ -9419,14 +8994,14 @@
       </p:sp>
       <p:sp>
         <p:nvSpPr>
-          <p:cNvPr id="8" name="Text 5"/>
-          <p:cNvSpPr/>
-          <p:nvPr/>
-        </p:nvSpPr>
-        <p:spPr>
-          <a:xfrm>
-            <a:off x="731520" y="5321808"/>
-            <a:ext cx="1371600" cy="841248"/>
+          <p:cNvPr id="7" name="Text 4"/>
+          <p:cNvSpPr/>
+          <p:nvPr/>
+        </p:nvSpPr>
+        <p:spPr>
+          <a:xfrm>
+            <a:off x="877824" y="4828032"/>
+            <a:ext cx="10436047" cy="1225296"/>
           </a:xfrm>
           <a:prstGeom prst="rect">
             <a:avLst/>
@@ -9438,150 +9013,34 @@
           <a:bodyPr wrap="square" lIns="0" tIns="0" rIns="0" bIns="0" rtlCol="0" anchor="ctr"/>
           <a:lstStyle/>
           <a:p>
-            <a:pPr algn="l" indent="0" marL="0">
-              <a:buNone/>
-            </a:pPr>
-            <a:r>
-              <a:rPr lang="en-US" sz="3000" b="1" dirty="0">
-                <a:solidFill>
-                  <a:srgbClr val="A32E22"/>
-                </a:solidFill>
-                <a:latin typeface="Cambria" pitchFamily="34" charset="0"/>
-                <a:ea typeface="Cambria" pitchFamily="34" charset="-122"/>
-                <a:cs typeface="Cambria" pitchFamily="34" charset="-120"/>
-              </a:rPr>
-              <a:t>3</a:t>
-            </a:r>
-            <a:endParaRPr lang="en-US" sz="3000" dirty="0"/>
-          </a:p>
-        </p:txBody>
-      </p:sp>
-      <p:sp>
-        <p:nvSpPr>
-          <p:cNvPr id="9" name="Text 6"/>
-          <p:cNvSpPr/>
-          <p:nvPr/>
-        </p:nvSpPr>
-        <p:spPr>
-          <a:xfrm>
-            <a:off x="2048256" y="5321808"/>
-            <a:ext cx="1884578" cy="841248"/>
-          </a:xfrm>
-          <a:prstGeom prst="rect">
-            <a:avLst/>
-          </a:prstGeom>
-          <a:noFill/>
-          <a:ln/>
-        </p:spPr>
-        <p:txBody>
-          <a:bodyPr wrap="square" lIns="0" tIns="0" rIns="0" bIns="0" rtlCol="0" anchor="ctr"/>
-          <a:lstStyle/>
-          <a:p>
-            <a:pPr algn="l" indent="0" marL="0">
-              <a:buNone/>
-            </a:pPr>
-            <a:r>
-              <a:rPr lang="en-US" sz="1300" dirty="0">
-                <a:solidFill>
-                  <a:srgbClr val="52514E"/>
+            <a:pPr indent="0" marL="0">
+              <a:lnSpc>
+                <a:spcPts val="2200"/>
+              </a:lnSpc>
+              <a:buNone/>
+            </a:pPr>
+            <a:r>
+              <a:rPr lang="en-US" sz="1450" b="1" dirty="0">
+                <a:solidFill>
+                  <a:srgbClr val="0B0B0B"/>
                 </a:solidFill>
                 <a:latin typeface="Calibri" pitchFamily="34" charset="0"/>
                 <a:ea typeface="Calibri" pitchFamily="34" charset="-122"/>
                 <a:cs typeface="Calibri" pitchFamily="34" charset="-120"/>
               </a:rPr>
-              <a:t>read as IDs</a:t>
-            </a:r>
-            <a:endParaRPr lang="en-US" sz="1300" dirty="0"/>
-          </a:p>
-        </p:txBody>
-      </p:sp>
-      <p:sp>
-        <p:nvSpPr>
-          <p:cNvPr id="10" name="Shape 7"/>
-          <p:cNvSpPr/>
-          <p:nvPr/>
-        </p:nvSpPr>
-        <p:spPr>
-          <a:xfrm>
-            <a:off x="4252874" y="5321808"/>
-            <a:ext cx="3484778" cy="841248"/>
-          </a:xfrm>
-          <a:prstGeom prst="roundRect">
-            <a:avLst>
-              <a:gd name="adj" fmla="val 10870"/>
-            </a:avLst>
-          </a:prstGeom>
-          <a:solidFill>
-            <a:srgbClr val="F4F3EF"/>
-          </a:solidFill>
-          <a:ln/>
-        </p:spPr>
-      </p:sp>
-      <p:sp>
-        <p:nvSpPr>
-          <p:cNvPr id="11" name="Text 8"/>
-          <p:cNvSpPr/>
-          <p:nvPr/>
-        </p:nvSpPr>
-        <p:spPr>
-          <a:xfrm>
-            <a:off x="4417466" y="5321808"/>
-            <a:ext cx="1371600" cy="841248"/>
-          </a:xfrm>
-          <a:prstGeom prst="rect">
-            <a:avLst/>
-          </a:prstGeom>
-          <a:noFill/>
-          <a:ln/>
-        </p:spPr>
-        <p:txBody>
-          <a:bodyPr wrap="square" lIns="0" tIns="0" rIns="0" bIns="0" rtlCol="0" anchor="ctr"/>
-          <a:lstStyle/>
-          <a:p>
-            <a:pPr algn="l" indent="0" marL="0">
-              <a:buNone/>
-            </a:pPr>
-            <a:r>
-              <a:rPr lang="en-US" sz="3000" b="1" dirty="0">
-                <a:solidFill>
-                  <a:srgbClr val="EB6834"/>
-                </a:solidFill>
-                <a:latin typeface="Cambria" pitchFamily="34" charset="0"/>
-                <a:ea typeface="Cambria" pitchFamily="34" charset="-122"/>
-                <a:cs typeface="Cambria" pitchFamily="34" charset="-120"/>
-              </a:rPr>
-              <a:t>100</a:t>
-            </a:r>
-            <a:endParaRPr lang="en-US" sz="3000" dirty="0"/>
-          </a:p>
-        </p:txBody>
-      </p:sp>
-      <p:sp>
-        <p:nvSpPr>
-          <p:cNvPr id="12" name="Text 9"/>
-          <p:cNvSpPr/>
-          <p:nvPr/>
-        </p:nvSpPr>
-        <p:spPr>
-          <a:xfrm>
-            <a:off x="5734202" y="5321808"/>
-            <a:ext cx="1884578" cy="841248"/>
-          </a:xfrm>
-          <a:prstGeom prst="rect">
-            <a:avLst/>
-          </a:prstGeom>
-          <a:noFill/>
-          <a:ln/>
-        </p:spPr>
-        <p:txBody>
-          <a:bodyPr wrap="square" lIns="0" tIns="0" rIns="0" bIns="0" rtlCol="0" anchor="ctr"/>
-          <a:lstStyle/>
-          <a:p>
-            <a:pPr algn="l" indent="0" marL="0">
-              <a:buNone/>
-            </a:pPr>
-            <a:r>
-              <a:rPr lang="en-US" sz="1300" dirty="0">
+              <a:t>Byte-identical masks, verified on every cached call.</a:t>
+            </a:r>
+            <a:endParaRPr lang="en-US" sz="1450" dirty="0"/>
+          </a:p>
+          <a:p>
+            <a:pPr indent="0" marL="0">
+              <a:lnSpc>
+                <a:spcPts val="2200"/>
+              </a:lnSpc>
+              <a:buNone/>
+            </a:pPr>
+            <a:r>
+              <a:rPr lang="en-US" sz="1450" dirty="0">
                 <a:solidFill>
                   <a:srgbClr val="52514E"/>
                 </a:solidFill>
@@ -9589,109 +9048,9 @@
                 <a:ea typeface="Calibri" pitchFamily="34" charset="-122"/>
                 <a:cs typeface="Calibri" pitchFamily="34" charset="-120"/>
               </a:rPr>
-              <a:t>binarise + label</a:t>
-            </a:r>
-            <a:endParaRPr lang="en-US" sz="1300" dirty="0"/>
-          </a:p>
-        </p:txBody>
-      </p:sp>
-      <p:sp>
-        <p:nvSpPr>
-          <p:cNvPr id="13" name="Shape 10"/>
-          <p:cNvSpPr/>
-          <p:nvPr/>
-        </p:nvSpPr>
-        <p:spPr>
-          <a:xfrm>
-            <a:off x="7938821" y="5321808"/>
-            <a:ext cx="3484778" cy="841248"/>
-          </a:xfrm>
-          <a:prstGeom prst="roundRect">
-            <a:avLst>
-              <a:gd name="adj" fmla="val 10870"/>
-            </a:avLst>
-          </a:prstGeom>
-          <a:solidFill>
-            <a:srgbClr val="F4F3EF"/>
-          </a:solidFill>
-          <a:ln/>
-        </p:spPr>
-      </p:sp>
-      <p:sp>
-        <p:nvSpPr>
-          <p:cNvPr id="14" name="Text 11"/>
-          <p:cNvSpPr/>
-          <p:nvPr/>
-        </p:nvSpPr>
-        <p:spPr>
-          <a:xfrm>
-            <a:off x="8103413" y="5321808"/>
-            <a:ext cx="1371600" cy="841248"/>
-          </a:xfrm>
-          <a:prstGeom prst="rect">
-            <a:avLst/>
-          </a:prstGeom>
-          <a:noFill/>
-          <a:ln/>
-        </p:spPr>
-        <p:txBody>
-          <a:bodyPr wrap="square" lIns="0" tIns="0" rIns="0" bIns="0" rtlCol="0" anchor="ctr"/>
-          <a:lstStyle/>
-          <a:p>
-            <a:pPr algn="l" indent="0" marL="0">
-              <a:buNone/>
-            </a:pPr>
-            <a:r>
-              <a:rPr lang="en-US" sz="3000" b="1" dirty="0">
-                <a:solidFill>
-                  <a:srgbClr val="1E6F4C"/>
-                </a:solidFill>
-                <a:latin typeface="Cambria" pitchFamily="34" charset="0"/>
-                <a:ea typeface="Cambria" pitchFamily="34" charset="-122"/>
-                <a:cs typeface="Cambria" pitchFamily="34" charset="-120"/>
-              </a:rPr>
-              <a:t>118</a:t>
-            </a:r>
-            <a:endParaRPr lang="en-US" sz="3000" dirty="0"/>
-          </a:p>
-        </p:txBody>
-      </p:sp>
-      <p:sp>
-        <p:nvSpPr>
-          <p:cNvPr id="15" name="Text 12"/>
-          <p:cNvSpPr/>
-          <p:nvPr/>
-        </p:nvSpPr>
-        <p:spPr>
-          <a:xfrm>
-            <a:off x="9420149" y="5321808"/>
-            <a:ext cx="1884578" cy="841248"/>
-          </a:xfrm>
-          <a:prstGeom prst="rect">
-            <a:avLst/>
-          </a:prstGeom>
-          <a:noFill/>
-          <a:ln/>
-        </p:spPr>
-        <p:txBody>
-          <a:bodyPr wrap="square" lIns="0" tIns="0" rIns="0" bIns="0" rtlCol="0" anchor="ctr"/>
-          <a:lstStyle/>
-          <a:p>
-            <a:pPr algn="l" indent="0" marL="0">
-              <a:buNone/>
-            </a:pPr>
-            <a:r>
-              <a:rPr lang="en-US" sz="1300" dirty="0">
-                <a:solidFill>
-                  <a:srgbClr val="52514E"/>
-                </a:solidFill>
-                <a:latin typeface="Calibri" pitchFamily="34" charset="0"/>
-                <a:ea typeface="Calibri" pitchFamily="34" charset="-122"/>
-                <a:cs typeface="Calibri" pitchFamily="34" charset="-120"/>
-              </a:rPr>
-              <a:t>decoded correctly</a:t>
-            </a:r>
-            <a:endParaRPr lang="en-US" sz="1300" dirty="0"/>
+              <a:t>A speedup that quietly perturbs the output isn’t a speedup — so the cache asserts equality rather than assuming it.</a:t>
+            </a:r>
+            <a:endParaRPr lang="en-US" sz="1450" dirty="0"/>
           </a:p>
         </p:txBody>
       </p:sp>
@@ -9819,50 +9178,104 @@
                 <a:ea typeface="Cambria" pitchFamily="34" charset="-122"/>
                 <a:cs typeface="Cambria" pitchFamily="34" charset="-120"/>
               </a:rPr>
-              <a:t>What I built</a:t>
+              <a:t>The number</a:t>
             </a:r>
             <a:endParaRPr lang="en-US" sz="2700" dirty="0"/>
           </a:p>
         </p:txBody>
       </p:sp>
-      <p:pic>
-        <p:nvPicPr>
-          <p:cNvPr id="5" name="Image 0" descr="/Users/tejas/Take_Home_Neo/figures/slide4_what_i_built.png">    </p:cNvPr>
-          <p:cNvPicPr>
-            <a:picLocks noChangeAspect="1"/>
-          </p:cNvPicPr>
-          <p:nvPr/>
-        </p:nvPicPr>
-        <p:blipFill>
-          <a:blip r:embed="rId1"/>
-          <a:stretch>
-            <a:fillRect/>
-          </a:stretch>
-        </p:blipFill>
-        <p:spPr>
-          <a:xfrm>
-            <a:off x="566928" y="1505632"/>
-            <a:ext cx="11057839" cy="2932336"/>
-          </a:xfrm>
-          <a:prstGeom prst="rect">
-            <a:avLst/>
-          </a:prstGeom>
-        </p:spPr>
-      </p:pic>
-      <p:sp>
-        <p:nvSpPr>
-          <p:cNvPr id="6" name="Shape 3"/>
-          <p:cNvSpPr/>
-          <p:nvPr/>
-        </p:nvSpPr>
-        <p:spPr>
-          <a:xfrm>
-            <a:off x="566928" y="4828032"/>
-            <a:ext cx="11057839" cy="1225296"/>
+      <p:sp>
+        <p:nvSpPr>
+          <p:cNvPr id="5" name="Text 3"/>
+          <p:cNvSpPr/>
+          <p:nvPr/>
+        </p:nvSpPr>
+        <p:spPr>
+          <a:xfrm>
+            <a:off x="566928" y="1737360"/>
+            <a:ext cx="11057839" cy="2286000"/>
+          </a:xfrm>
+          <a:prstGeom prst="rect">
+            <a:avLst/>
+          </a:prstGeom>
+          <a:noFill/>
+          <a:ln/>
+        </p:spPr>
+        <p:txBody>
+          <a:bodyPr wrap="square" lIns="0" tIns="0" rIns="0" bIns="0" rtlCol="0" anchor="ctr"/>
+          <a:lstStyle/>
+          <a:p>
+            <a:pPr algn="ctr" indent="0" marL="0">
+              <a:buNone/>
+            </a:pPr>
+            <a:r>
+              <a:rPr lang="en-US" sz="13000" b="1" dirty="0">
+                <a:solidFill>
+                  <a:srgbClr val="0B0B0B"/>
+                </a:solidFill>
+                <a:latin typeface="Cambria" pitchFamily="34" charset="0"/>
+                <a:ea typeface="Cambria" pitchFamily="34" charset="-122"/>
+                <a:cs typeface="Cambria" pitchFamily="34" charset="-120"/>
+              </a:rPr>
+              <a:t>0.791</a:t>
+            </a:r>
+            <a:endParaRPr lang="en-US" sz="13000" dirty="0"/>
+          </a:p>
+        </p:txBody>
+      </p:sp>
+      <p:sp>
+        <p:nvSpPr>
+          <p:cNvPr id="6" name="Text 4"/>
+          <p:cNvSpPr/>
+          <p:nvPr/>
+        </p:nvSpPr>
+        <p:spPr>
+          <a:xfrm>
+            <a:off x="566928" y="4041648"/>
+            <a:ext cx="11057839" cy="365760"/>
+          </a:xfrm>
+          <a:prstGeom prst="rect">
+            <a:avLst/>
+          </a:prstGeom>
+          <a:noFill/>
+          <a:ln/>
+        </p:spPr>
+        <p:txBody>
+          <a:bodyPr wrap="square" lIns="0" tIns="0" rIns="0" bIns="0" rtlCol="0" anchor="ctr"/>
+          <a:lstStyle/>
+          <a:p>
+            <a:pPr algn="ctr" indent="0" marL="0">
+              <a:buNone/>
+            </a:pPr>
+            <a:r>
+              <a:rPr lang="en-US" sz="1500" dirty="0">
+                <a:solidFill>
+                  <a:srgbClr val="52514E"/>
+                </a:solidFill>
+                <a:latin typeface="Calibri" pitchFamily="34" charset="0"/>
+                <a:ea typeface="Calibri" pitchFamily="34" charset="-122"/>
+                <a:cs typeface="Calibri" pitchFamily="34" charset="-120"/>
+              </a:rPr>
+              <a:t>mean AP over IoU 0.50 : 0.05 : 0.95   ·   held-out test set, 50 fields</a:t>
+            </a:r>
+            <a:endParaRPr lang="en-US" sz="1500" dirty="0"/>
+          </a:p>
+        </p:txBody>
+      </p:sp>
+      <p:sp>
+        <p:nvSpPr>
+          <p:cNvPr id="7" name="Shape 5"/>
+          <p:cNvSpPr/>
+          <p:nvPr/>
+        </p:nvSpPr>
+        <p:spPr>
+          <a:xfrm>
+            <a:off x="566928" y="4846320"/>
+            <a:ext cx="3551834" cy="1024128"/>
           </a:xfrm>
           <a:prstGeom prst="roundRect">
             <a:avLst>
-              <a:gd name="adj" fmla="val 8955"/>
+              <a:gd name="adj" fmla="val 8929"/>
             </a:avLst>
           </a:prstGeom>
           <a:solidFill>
@@ -9873,14 +9286,14 @@
       </p:sp>
       <p:sp>
         <p:nvSpPr>
-          <p:cNvPr id="7" name="Text 4"/>
-          <p:cNvSpPr/>
-          <p:nvPr/>
-        </p:nvSpPr>
-        <p:spPr>
-          <a:xfrm>
-            <a:off x="877824" y="4828032"/>
-            <a:ext cx="10436047" cy="1225296"/>
+          <p:cNvPr id="8" name="Text 6"/>
+          <p:cNvSpPr/>
+          <p:nvPr/>
+        </p:nvSpPr>
+        <p:spPr>
+          <a:xfrm>
+            <a:off x="749808" y="4974336"/>
+            <a:ext cx="3186074" cy="384048"/>
           </a:xfrm>
           <a:prstGeom prst="rect">
             <a:avLst/>
@@ -9893,13 +9306,10 @@
           <a:lstStyle/>
           <a:p>
             <a:pPr indent="0" marL="0">
-              <a:lnSpc>
-                <a:spcPts val="2200"/>
-              </a:lnSpc>
-              <a:buNone/>
-            </a:pPr>
-            <a:r>
-              <a:rPr lang="en-US" sz="1450" b="1" dirty="0">
+              <a:buNone/>
+            </a:pPr>
+            <a:r>
+              <a:rPr lang="en-US" sz="1500" b="1" dirty="0">
                 <a:solidFill>
                   <a:srgbClr val="0B0B0B"/>
                 </a:solidFill>
@@ -9907,19 +9317,38 @@
                 <a:ea typeface="Calibri" pitchFamily="34" charset="-122"/>
                 <a:cs typeface="Calibri" pitchFamily="34" charset="-120"/>
               </a:rPr>
-              <a:t>Byte-identical masks, verified on every cached call.</a:t>
-            </a:r>
-            <a:endParaRPr lang="en-US" sz="1450" dirty="0"/>
-          </a:p>
+              <a:t>95% CI  0.766 – 0.812</a:t>
+            </a:r>
+            <a:endParaRPr lang="en-US" sz="1500" dirty="0"/>
+          </a:p>
+        </p:txBody>
+      </p:sp>
+      <p:sp>
+        <p:nvSpPr>
+          <p:cNvPr id="9" name="Text 7"/>
+          <p:cNvSpPr/>
+          <p:nvPr/>
+        </p:nvSpPr>
+        <p:spPr>
+          <a:xfrm>
+            <a:off x="749808" y="5340096"/>
+            <a:ext cx="3186074" cy="365760"/>
+          </a:xfrm>
+          <a:prstGeom prst="rect">
+            <a:avLst/>
+          </a:prstGeom>
+          <a:noFill/>
+          <a:ln/>
+        </p:spPr>
+        <p:txBody>
+          <a:bodyPr wrap="square" lIns="0" tIns="0" rIns="0" bIns="0" rtlCol="0" anchor="ctr"/>
+          <a:lstStyle/>
           <a:p>
             <a:pPr indent="0" marL="0">
-              <a:lnSpc>
-                <a:spcPts val="2200"/>
-              </a:lnSpc>
-              <a:buNone/>
-            </a:pPr>
-            <a:r>
-              <a:rPr lang="en-US" sz="1450" dirty="0">
+              <a:buNone/>
+            </a:pPr>
+            <a:r>
+              <a:rPr lang="en-US" sz="1200" dirty="0">
                 <a:solidFill>
                   <a:srgbClr val="52514E"/>
                 </a:solidFill>
@@ -9927,9 +9356,209 @@
                 <a:ea typeface="Calibri" pitchFamily="34" charset="-122"/>
                 <a:cs typeface="Calibri" pitchFamily="34" charset="-120"/>
               </a:rPr>
-              <a:t>A speedup that quietly perturbs the output isn’t a speedup — so the cache asserts equality rather than assuming it.</a:t>
-            </a:r>
-            <a:endParaRPr lang="en-US" sz="1450" dirty="0"/>
+              <a:t>the spread that matters</a:t>
+            </a:r>
+            <a:endParaRPr lang="en-US" sz="1200" dirty="0"/>
+          </a:p>
+        </p:txBody>
+      </p:sp>
+      <p:sp>
+        <p:nvSpPr>
+          <p:cNvPr id="10" name="Shape 8"/>
+          <p:cNvSpPr/>
+          <p:nvPr/>
+        </p:nvSpPr>
+        <p:spPr>
+          <a:xfrm>
+            <a:off x="4319930" y="4846320"/>
+            <a:ext cx="3551834" cy="1024128"/>
+          </a:xfrm>
+          <a:prstGeom prst="roundRect">
+            <a:avLst>
+              <a:gd name="adj" fmla="val 8929"/>
+            </a:avLst>
+          </a:prstGeom>
+          <a:solidFill>
+            <a:srgbClr val="F4F3EF"/>
+          </a:solidFill>
+          <a:ln/>
+        </p:spPr>
+      </p:sp>
+      <p:sp>
+        <p:nvSpPr>
+          <p:cNvPr id="11" name="Text 9"/>
+          <p:cNvSpPr/>
+          <p:nvPr/>
+        </p:nvSpPr>
+        <p:spPr>
+          <a:xfrm>
+            <a:off x="4502810" y="4974336"/>
+            <a:ext cx="3186074" cy="384048"/>
+          </a:xfrm>
+          <a:prstGeom prst="rect">
+            <a:avLst/>
+          </a:prstGeom>
+          <a:noFill/>
+          <a:ln/>
+        </p:spPr>
+        <p:txBody>
+          <a:bodyPr wrap="square" lIns="0" tIns="0" rIns="0" bIns="0" rtlCol="0" anchor="ctr"/>
+          <a:lstStyle/>
+          <a:p>
+            <a:pPr indent="0" marL="0">
+              <a:buNone/>
+            </a:pPr>
+            <a:r>
+              <a:rPr lang="en-US" sz="1500" b="1" dirty="0">
+                <a:solidFill>
+                  <a:srgbClr val="0B0B0B"/>
+                </a:solidFill>
+                <a:latin typeface="Calibri" pitchFamily="34" charset="0"/>
+                <a:ea typeface="Calibri" pitchFamily="34" charset="-122"/>
+                <a:cs typeface="Calibri" pitchFamily="34" charset="-120"/>
+              </a:rPr>
+              <a:t>F1 = 0.956</a:t>
+            </a:r>
+            <a:endParaRPr lang="en-US" sz="1500" dirty="0"/>
+          </a:p>
+        </p:txBody>
+      </p:sp>
+      <p:sp>
+        <p:nvSpPr>
+          <p:cNvPr id="12" name="Text 10"/>
+          <p:cNvSpPr/>
+          <p:nvPr/>
+        </p:nvSpPr>
+        <p:spPr>
+          <a:xfrm>
+            <a:off x="4502810" y="5340096"/>
+            <a:ext cx="3186074" cy="365760"/>
+          </a:xfrm>
+          <a:prstGeom prst="rect">
+            <a:avLst/>
+          </a:prstGeom>
+          <a:noFill/>
+          <a:ln/>
+        </p:spPr>
+        <p:txBody>
+          <a:bodyPr wrap="square" lIns="0" tIns="0" rIns="0" bIns="0" rtlCol="0" anchor="ctr"/>
+          <a:lstStyle/>
+          <a:p>
+            <a:pPr indent="0" marL="0">
+              <a:buNone/>
+            </a:pPr>
+            <a:r>
+              <a:rPr lang="en-US" sz="1200" dirty="0">
+                <a:solidFill>
+                  <a:srgbClr val="52514E"/>
+                </a:solidFill>
+                <a:latin typeface="Calibri" pitchFamily="34" charset="0"/>
+                <a:ea typeface="Calibri" pitchFamily="34" charset="-122"/>
+                <a:cs typeface="Calibri" pitchFamily="34" charset="-120"/>
+              </a:rPr>
+              <a:t>at the loosest threshold</a:t>
+            </a:r>
+            <a:endParaRPr lang="en-US" sz="1200" dirty="0"/>
+          </a:p>
+        </p:txBody>
+      </p:sp>
+      <p:sp>
+        <p:nvSpPr>
+          <p:cNvPr id="13" name="Shape 11"/>
+          <p:cNvSpPr/>
+          <p:nvPr/>
+        </p:nvSpPr>
+        <p:spPr>
+          <a:xfrm>
+            <a:off x="8072933" y="4846320"/>
+            <a:ext cx="3551834" cy="1024128"/>
+          </a:xfrm>
+          <a:prstGeom prst="roundRect">
+            <a:avLst>
+              <a:gd name="adj" fmla="val 8929"/>
+            </a:avLst>
+          </a:prstGeom>
+          <a:solidFill>
+            <a:srgbClr val="F4F3EF"/>
+          </a:solidFill>
+          <a:ln/>
+        </p:spPr>
+      </p:sp>
+      <p:sp>
+        <p:nvSpPr>
+          <p:cNvPr id="14" name="Text 12"/>
+          <p:cNvSpPr/>
+          <p:nvPr/>
+        </p:nvSpPr>
+        <p:spPr>
+          <a:xfrm>
+            <a:off x="8255813" y="4974336"/>
+            <a:ext cx="3186074" cy="384048"/>
+          </a:xfrm>
+          <a:prstGeom prst="rect">
+            <a:avLst/>
+          </a:prstGeom>
+          <a:noFill/>
+          <a:ln/>
+        </p:spPr>
+        <p:txBody>
+          <a:bodyPr wrap="square" lIns="0" tIns="0" rIns="0" bIns="0" rtlCol="0" anchor="ctr"/>
+          <a:lstStyle/>
+          <a:p>
+            <a:pPr indent="0" marL="0">
+              <a:buNone/>
+            </a:pPr>
+            <a:r>
+              <a:rPr lang="en-US" sz="1500" b="1" dirty="0">
+                <a:solidFill>
+                  <a:srgbClr val="0B0B0B"/>
+                </a:solidFill>
+                <a:latin typeface="Calibri" pitchFamily="34" charset="0"/>
+                <a:ea typeface="Calibri" pitchFamily="34" charset="-122"/>
+                <a:cs typeface="Calibri" pitchFamily="34" charset="-120"/>
+              </a:rPr>
+              <a:t>mean IoU  0.926</a:t>
+            </a:r>
+            <a:endParaRPr lang="en-US" sz="1500" dirty="0"/>
+          </a:p>
+        </p:txBody>
+      </p:sp>
+      <p:sp>
+        <p:nvSpPr>
+          <p:cNvPr id="15" name="Text 13"/>
+          <p:cNvSpPr/>
+          <p:nvPr/>
+        </p:nvSpPr>
+        <p:spPr>
+          <a:xfrm>
+            <a:off x="8255813" y="5340096"/>
+            <a:ext cx="3186074" cy="365760"/>
+          </a:xfrm>
+          <a:prstGeom prst="rect">
+            <a:avLst/>
+          </a:prstGeom>
+          <a:noFill/>
+          <a:ln/>
+        </p:spPr>
+        <p:txBody>
+          <a:bodyPr wrap="square" lIns="0" tIns="0" rIns="0" bIns="0" rtlCol="0" anchor="ctr"/>
+          <a:lstStyle/>
+          <a:p>
+            <a:pPr indent="0" marL="0">
+              <a:buNone/>
+            </a:pPr>
+            <a:r>
+              <a:rPr lang="en-US" sz="1200" dirty="0">
+                <a:solidFill>
+                  <a:srgbClr val="52514E"/>
+                </a:solidFill>
+                <a:latin typeface="Calibri" pitchFamily="34" charset="0"/>
+                <a:ea typeface="Calibri" pitchFamily="34" charset="-122"/>
+                <a:cs typeface="Calibri" pitchFamily="34" charset="-120"/>
+              </a:rPr>
+              <a:t>over matched objects</a:t>
+            </a:r>
+            <a:endParaRPr lang="en-US" sz="1200" dirty="0"/>
           </a:p>
         </p:txBody>
       </p:sp>
@@ -10057,7 +9686,7 @@
                 <a:ea typeface="Cambria" pitchFamily="34" charset="-122"/>
                 <a:cs typeface="Cambria" pitchFamily="34" charset="-120"/>
               </a:rPr>
-              <a:t>The number</a:t>
+              <a:t>Where the score is actually lost</a:t>
             </a:r>
             <a:endParaRPr lang="en-US" sz="2700" dirty="0"/>
           </a:p>
@@ -10071,8 +9700,8 @@
         </p:nvSpPr>
         <p:spPr>
           <a:xfrm>
-            <a:off x="566928" y="1737360"/>
-            <a:ext cx="11057839" cy="2286000"/>
+            <a:off x="1133856" y="868680"/>
+            <a:ext cx="10490911" cy="310896"/>
           </a:xfrm>
           <a:prstGeom prst="rect">
             <a:avLst/>
@@ -10084,50 +9713,11 @@
           <a:bodyPr wrap="square" lIns="0" tIns="0" rIns="0" bIns="0" rtlCol="0" anchor="ctr"/>
           <a:lstStyle/>
           <a:p>
-            <a:pPr algn="ctr" indent="0" marL="0">
-              <a:buNone/>
-            </a:pPr>
-            <a:r>
-              <a:rPr lang="en-US" sz="13000" b="1" dirty="0">
-                <a:solidFill>
-                  <a:srgbClr val="0B0B0B"/>
-                </a:solidFill>
-                <a:latin typeface="Cambria" pitchFamily="34" charset="0"/>
-                <a:ea typeface="Cambria" pitchFamily="34" charset="-122"/>
-                <a:cs typeface="Cambria" pitchFamily="34" charset="-120"/>
-              </a:rPr>
-              <a:t>0.791</a:t>
-            </a:r>
-            <a:endParaRPr lang="en-US" sz="13000" dirty="0"/>
-          </a:p>
-        </p:txBody>
-      </p:sp>
-      <p:sp>
-        <p:nvSpPr>
-          <p:cNvPr id="6" name="Text 4"/>
-          <p:cNvSpPr/>
-          <p:nvPr/>
-        </p:nvSpPr>
-        <p:spPr>
-          <a:xfrm>
-            <a:off x="566928" y="4041648"/>
-            <a:ext cx="11057839" cy="365760"/>
-          </a:xfrm>
-          <a:prstGeom prst="rect">
-            <a:avLst/>
-          </a:prstGeom>
-          <a:noFill/>
-          <a:ln/>
-        </p:spPr>
-        <p:txBody>
-          <a:bodyPr wrap="square" lIns="0" tIns="0" rIns="0" bIns="0" rtlCol="0" anchor="ctr"/>
-          <a:lstStyle/>
-          <a:p>
-            <a:pPr algn="ctr" indent="0" marL="0">
-              <a:buNone/>
-            </a:pPr>
-            <a:r>
-              <a:rPr lang="en-US" sz="1500" dirty="0">
+            <a:pPr indent="0" marL="0">
+              <a:buNone/>
+            </a:pPr>
+            <a:r>
+              <a:rPr lang="en-US" sz="1400" i="1" dirty="0">
                 <a:solidFill>
                   <a:srgbClr val="52514E"/>
                 </a:solidFill>
@@ -10135,312 +9725,36 @@
                 <a:ea typeface="Calibri" pitchFamily="34" charset="-122"/>
                 <a:cs typeface="Calibri" pitchFamily="34" charset="-120"/>
               </a:rPr>
-              <a:t>mean AP over IoU 0.50 : 0.05 : 0.95   ·   held-out test set, 50 fields</a:t>
-            </a:r>
-            <a:endParaRPr lang="en-US" sz="1500" dirty="0"/>
-          </a:p>
-        </p:txBody>
-      </p:sp>
-      <p:sp>
-        <p:nvSpPr>
-          <p:cNvPr id="7" name="Shape 5"/>
-          <p:cNvSpPr/>
-          <p:nvPr/>
-        </p:nvSpPr>
-        <p:spPr>
-          <a:xfrm>
-            <a:off x="566928" y="4846320"/>
-            <a:ext cx="3551834" cy="1024128"/>
-          </a:xfrm>
-          <a:prstGeom prst="roundRect">
-            <a:avLst>
-              <a:gd name="adj" fmla="val 8929"/>
-            </a:avLst>
-          </a:prstGeom>
-          <a:solidFill>
-            <a:srgbClr val="F4F3EF"/>
-          </a:solidFill>
-          <a:ln/>
-        </p:spPr>
-      </p:sp>
-      <p:sp>
-        <p:nvSpPr>
-          <p:cNvPr id="8" name="Text 6"/>
-          <p:cNvSpPr/>
-          <p:nvPr/>
-        </p:nvSpPr>
-        <p:spPr>
-          <a:xfrm>
-            <a:off x="749808" y="4974336"/>
-            <a:ext cx="3186074" cy="384048"/>
-          </a:xfrm>
-          <a:prstGeom prst="rect">
-            <a:avLst/>
-          </a:prstGeom>
-          <a:noFill/>
-          <a:ln/>
-        </p:spPr>
-        <p:txBody>
-          <a:bodyPr wrap="square" lIns="0" tIns="0" rIns="0" bIns="0" rtlCol="0" anchor="ctr"/>
-          <a:lstStyle/>
-          <a:p>
-            <a:pPr indent="0" marL="0">
-              <a:buNone/>
-            </a:pPr>
-            <a:r>
-              <a:rPr lang="en-US" sz="1500" b="1" dirty="0">
-                <a:solidFill>
-                  <a:srgbClr val="0B0B0B"/>
-                </a:solidFill>
-                <a:latin typeface="Calibri" pitchFamily="34" charset="0"/>
-                <a:ea typeface="Calibri" pitchFamily="34" charset="-122"/>
-                <a:cs typeface="Calibri" pitchFamily="34" charset="-120"/>
-              </a:rPr>
-              <a:t>95% CI  0.766 – 0.812</a:t>
-            </a:r>
-            <a:endParaRPr lang="en-US" sz="1500" dirty="0"/>
-          </a:p>
-        </p:txBody>
-      </p:sp>
-      <p:sp>
-        <p:nvSpPr>
-          <p:cNvPr id="9" name="Text 7"/>
-          <p:cNvSpPr/>
-          <p:nvPr/>
-        </p:nvSpPr>
-        <p:spPr>
-          <a:xfrm>
-            <a:off x="749808" y="5340096"/>
-            <a:ext cx="3186074" cy="365760"/>
-          </a:xfrm>
-          <a:prstGeom prst="rect">
-            <a:avLst/>
-          </a:prstGeom>
-          <a:noFill/>
-          <a:ln/>
-        </p:spPr>
-        <p:txBody>
-          <a:bodyPr wrap="square" lIns="0" tIns="0" rIns="0" bIns="0" rtlCol="0" anchor="ctr"/>
-          <a:lstStyle/>
-          <a:p>
-            <a:pPr indent="0" marL="0">
-              <a:buNone/>
-            </a:pPr>
-            <a:r>
-              <a:rPr lang="en-US" sz="1200" dirty="0">
-                <a:solidFill>
-                  <a:srgbClr val="52514E"/>
-                </a:solidFill>
-                <a:latin typeface="Calibri" pitchFamily="34" charset="0"/>
-                <a:ea typeface="Calibri" pitchFamily="34" charset="-122"/>
-                <a:cs typeface="Calibri" pitchFamily="34" charset="-120"/>
-              </a:rPr>
-              <a:t>the spread that matters</a:t>
-            </a:r>
-            <a:endParaRPr lang="en-US" sz="1200" dirty="0"/>
-          </a:p>
-        </p:txBody>
-      </p:sp>
-      <p:sp>
-        <p:nvSpPr>
-          <p:cNvPr id="10" name="Shape 8"/>
-          <p:cNvSpPr/>
-          <p:nvPr/>
-        </p:nvSpPr>
-        <p:spPr>
-          <a:xfrm>
-            <a:off x="4319930" y="4846320"/>
-            <a:ext cx="3551834" cy="1024128"/>
-          </a:xfrm>
-          <a:prstGeom prst="roundRect">
-            <a:avLst>
-              <a:gd name="adj" fmla="val 8929"/>
-            </a:avLst>
-          </a:prstGeom>
-          <a:solidFill>
-            <a:srgbClr val="F4F3EF"/>
-          </a:solidFill>
-          <a:ln/>
-        </p:spPr>
-      </p:sp>
-      <p:sp>
-        <p:nvSpPr>
-          <p:cNvPr id="11" name="Text 9"/>
-          <p:cNvSpPr/>
-          <p:nvPr/>
-        </p:nvSpPr>
-        <p:spPr>
-          <a:xfrm>
-            <a:off x="4502810" y="4974336"/>
-            <a:ext cx="3186074" cy="384048"/>
-          </a:xfrm>
-          <a:prstGeom prst="rect">
-            <a:avLst/>
-          </a:prstGeom>
-          <a:noFill/>
-          <a:ln/>
-        </p:spPr>
-        <p:txBody>
-          <a:bodyPr wrap="square" lIns="0" tIns="0" rIns="0" bIns="0" rtlCol="0" anchor="ctr"/>
-          <a:lstStyle/>
-          <a:p>
-            <a:pPr indent="0" marL="0">
-              <a:buNone/>
-            </a:pPr>
-            <a:r>
-              <a:rPr lang="en-US" sz="1500" b="1" dirty="0">
-                <a:solidFill>
-                  <a:srgbClr val="0B0B0B"/>
-                </a:solidFill>
-                <a:latin typeface="Calibri" pitchFamily="34" charset="0"/>
-                <a:ea typeface="Calibri" pitchFamily="34" charset="-122"/>
-                <a:cs typeface="Calibri" pitchFamily="34" charset="-120"/>
-              </a:rPr>
-              <a:t>F1 = 0.956</a:t>
-            </a:r>
-            <a:endParaRPr lang="en-US" sz="1500" dirty="0"/>
-          </a:p>
-        </p:txBody>
-      </p:sp>
-      <p:sp>
-        <p:nvSpPr>
-          <p:cNvPr id="12" name="Text 10"/>
-          <p:cNvSpPr/>
-          <p:nvPr/>
-        </p:nvSpPr>
-        <p:spPr>
-          <a:xfrm>
-            <a:off x="4502810" y="5340096"/>
-            <a:ext cx="3186074" cy="365760"/>
-          </a:xfrm>
-          <a:prstGeom prst="rect">
-            <a:avLst/>
-          </a:prstGeom>
-          <a:noFill/>
-          <a:ln/>
-        </p:spPr>
-        <p:txBody>
-          <a:bodyPr wrap="square" lIns="0" tIns="0" rIns="0" bIns="0" rtlCol="0" anchor="ctr"/>
-          <a:lstStyle/>
-          <a:p>
-            <a:pPr indent="0" marL="0">
-              <a:buNone/>
-            </a:pPr>
-            <a:r>
-              <a:rPr lang="en-US" sz="1200" dirty="0">
-                <a:solidFill>
-                  <a:srgbClr val="52514E"/>
-                </a:solidFill>
-                <a:latin typeface="Calibri" pitchFamily="34" charset="0"/>
-                <a:ea typeface="Calibri" pitchFamily="34" charset="-122"/>
-                <a:cs typeface="Calibri" pitchFamily="34" charset="-120"/>
-              </a:rPr>
-              <a:t>at the loosest threshold</a:t>
-            </a:r>
-            <a:endParaRPr lang="en-US" sz="1200" dirty="0"/>
-          </a:p>
-        </p:txBody>
-      </p:sp>
-      <p:sp>
-        <p:nvSpPr>
-          <p:cNvPr id="13" name="Shape 11"/>
-          <p:cNvSpPr/>
-          <p:nvPr/>
-        </p:nvSpPr>
-        <p:spPr>
-          <a:xfrm>
-            <a:off x="8072933" y="4846320"/>
-            <a:ext cx="3551834" cy="1024128"/>
-          </a:xfrm>
-          <a:prstGeom prst="roundRect">
-            <a:avLst>
-              <a:gd name="adj" fmla="val 8929"/>
-            </a:avLst>
-          </a:prstGeom>
-          <a:solidFill>
-            <a:srgbClr val="F4F3EF"/>
-          </a:solidFill>
-          <a:ln/>
-        </p:spPr>
-      </p:sp>
-      <p:sp>
-        <p:nvSpPr>
-          <p:cNvPr id="14" name="Text 12"/>
-          <p:cNvSpPr/>
-          <p:nvPr/>
-        </p:nvSpPr>
-        <p:spPr>
-          <a:xfrm>
-            <a:off x="8255813" y="4974336"/>
-            <a:ext cx="3186074" cy="384048"/>
-          </a:xfrm>
-          <a:prstGeom prst="rect">
-            <a:avLst/>
-          </a:prstGeom>
-          <a:noFill/>
-          <a:ln/>
-        </p:spPr>
-        <p:txBody>
-          <a:bodyPr wrap="square" lIns="0" tIns="0" rIns="0" bIns="0" rtlCol="0" anchor="ctr"/>
-          <a:lstStyle/>
-          <a:p>
-            <a:pPr indent="0" marL="0">
-              <a:buNone/>
-            </a:pPr>
-            <a:r>
-              <a:rPr lang="en-US" sz="1500" b="1" dirty="0">
-                <a:solidFill>
-                  <a:srgbClr val="0B0B0B"/>
-                </a:solidFill>
-                <a:latin typeface="Calibri" pitchFamily="34" charset="0"/>
-                <a:ea typeface="Calibri" pitchFamily="34" charset="-122"/>
-                <a:cs typeface="Calibri" pitchFamily="34" charset="-120"/>
-              </a:rPr>
-              <a:t>mean IoU  0.926</a:t>
-            </a:r>
-            <a:endParaRPr lang="en-US" sz="1500" dirty="0"/>
-          </a:p>
-        </p:txBody>
-      </p:sp>
-      <p:sp>
-        <p:nvSpPr>
-          <p:cNvPr id="15" name="Text 13"/>
-          <p:cNvSpPr/>
-          <p:nvPr/>
-        </p:nvSpPr>
-        <p:spPr>
-          <a:xfrm>
-            <a:off x="8255813" y="5340096"/>
-            <a:ext cx="3186074" cy="365760"/>
-          </a:xfrm>
-          <a:prstGeom prst="rect">
-            <a:avLst/>
-          </a:prstGeom>
-          <a:noFill/>
-          <a:ln/>
-        </p:spPr>
-        <p:txBody>
-          <a:bodyPr wrap="square" lIns="0" tIns="0" rIns="0" bIns="0" rtlCol="0" anchor="ctr"/>
-          <a:lstStyle/>
-          <a:p>
-            <a:pPr indent="0" marL="0">
-              <a:buNone/>
-            </a:pPr>
-            <a:r>
-              <a:rPr lang="en-US" sz="1200" dirty="0">
-                <a:solidFill>
-                  <a:srgbClr val="52514E"/>
-                </a:solidFill>
-                <a:latin typeface="Calibri" pitchFamily="34" charset="0"/>
-                <a:ea typeface="Calibri" pitchFamily="34" charset="-122"/>
-                <a:cs typeface="Calibri" pitchFamily="34" charset="-120"/>
-              </a:rPr>
-              <a:t>over matched objects</a:t>
-            </a:r>
-            <a:endParaRPr lang="en-US" sz="1200" dirty="0"/>
-          </a:p>
-        </p:txBody>
-      </p:sp>
+              <a:t>The two strictest thresholds cause 54% of the total loss</a:t>
+            </a:r>
+            <a:endParaRPr lang="en-US" sz="1400" dirty="0"/>
+          </a:p>
+        </p:txBody>
+      </p:sp>
+      <p:pic>
+        <p:nvPicPr>
+          <p:cNvPr id="6" name="Image 0" descr="/Users/tejas/Take_Home_Neo/figures/fig1_where_the_score_is_lost.png">    </p:cNvPr>
+          <p:cNvPicPr>
+            <a:picLocks noChangeAspect="1"/>
+          </p:cNvPicPr>
+          <p:nvPr/>
+        </p:nvPicPr>
+        <p:blipFill>
+          <a:blip r:embed="rId1"/>
+          <a:stretch>
+            <a:fillRect/>
+          </a:stretch>
+        </p:blipFill>
+        <p:spPr>
+          <a:xfrm>
+            <a:off x="566928" y="1478497"/>
+            <a:ext cx="11057839" cy="4632526"/>
+          </a:xfrm>
+          <a:prstGeom prst="rect">
+            <a:avLst/>
+          </a:prstGeom>
+        </p:spPr>
+      </p:pic>
     </p:spTree>
   </p:cSld>
   <p:clrMapOvr>
@@ -10565,7 +9879,7 @@
                 <a:ea typeface="Cambria" pitchFamily="34" charset="-122"/>
                 <a:cs typeface="Cambria" pitchFamily="34" charset="-120"/>
               </a:rPr>
-              <a:t>Where the score is actually lost</a:t>
+              <a:t>What are those strict thresholds measuring?</a:t>
             </a:r>
             <a:endParaRPr lang="en-US" sz="2700" dirty="0"/>
           </a:p>
@@ -10604,7 +9918,7 @@
                 <a:ea typeface="Calibri" pitchFamily="34" charset="-122"/>
                 <a:cs typeface="Calibri" pitchFamily="34" charset="-120"/>
               </a:rPr>
-              <a:t>The two strictest thresholds cause 54% of the total loss</a:t>
+              <a:t>Two reasonable definitions of “where the edge is” rank the outlines oppositely</a:t>
             </a:r>
             <a:endParaRPr lang="en-US" sz="1400" dirty="0"/>
           </a:p>
@@ -10612,7 +9926,7 @@
       </p:sp>
       <p:pic>
         <p:nvPicPr>
-          <p:cNvPr id="6" name="Image 0" descr="/Users/tejas/Take_Home_Neo/figures/fig1_where_the_score_is_lost.png">    </p:cNvPr>
+          <p:cNvPr id="6" name="Image 0" descr="/Users/tejas/Take_Home_Neo/figures/fig2_annotation_ceiling.png">    </p:cNvPr>
           <p:cNvPicPr>
             <a:picLocks noChangeAspect="1"/>
           </p:cNvPicPr>
@@ -10626,8 +9940,8 @@
         </p:blipFill>
         <p:spPr>
           <a:xfrm>
-            <a:off x="566928" y="1478497"/>
-            <a:ext cx="11057839" cy="4632526"/>
+            <a:off x="1171986" y="1371600"/>
+            <a:ext cx="9847722" cy="4846320"/>
           </a:xfrm>
           <a:prstGeom prst="rect">
             <a:avLst/>
@@ -10758,7 +10072,7 @@
                 <a:ea typeface="Cambria" pitchFamily="34" charset="-122"/>
                 <a:cs typeface="Cambria" pitchFamily="34" charset="-120"/>
               </a:rPr>
-              <a:t>What are those strict thresholds measuring?</a:t>
+              <a:t>I got this wrong first</a:t>
             </a:r>
             <a:endParaRPr lang="en-US" sz="2700" dirty="0"/>
           </a:p>
@@ -10797,36 +10111,375 @@
                 <a:ea typeface="Calibri" pitchFamily="34" charset="-122"/>
                 <a:cs typeface="Calibri" pitchFamily="34" charset="-120"/>
               </a:rPr>
-              <a:t>Two reasonable definitions of “where the edge is” rank the outlines oppositely</a:t>
+              <a:t>Synthetic sweep with a known right answer: ground truth exactly on the edge, prediction 0.25 px too large</a:t>
             </a:r>
             <a:endParaRPr lang="en-US" sz="1400" dirty="0"/>
           </a:p>
         </p:txBody>
       </p:sp>
-      <p:pic>
-        <p:nvPicPr>
-          <p:cNvPr id="6" name="Image 0" descr="/Users/tejas/Take_Home_Neo/figures/fig2_annotation_ceiling.png">    </p:cNvPr>
-          <p:cNvPicPr>
-            <a:picLocks noChangeAspect="1"/>
-          </p:cNvPicPr>
-          <p:nvPr/>
-        </p:nvPicPr>
-        <p:blipFill>
-          <a:blip r:embed="rId1"/>
-          <a:stretch>
-            <a:fillRect/>
-          </a:stretch>
-        </p:blipFill>
-        <p:spPr>
-          <a:xfrm>
-            <a:off x="1171986" y="1371600"/>
-            <a:ext cx="9847722" cy="4846320"/>
-          </a:xfrm>
-          <a:prstGeom prst="rect">
-            <a:avLst/>
-          </a:prstGeom>
-        </p:spPr>
-      </p:pic>
+      <p:sp>
+        <p:nvSpPr>
+          <p:cNvPr id="6" name="Shape 4"/>
+          <p:cNvSpPr/>
+          <p:nvPr/>
+        </p:nvSpPr>
+        <p:spPr>
+          <a:xfrm>
+            <a:off x="566928" y="1874520"/>
+            <a:ext cx="11057839" cy="1225296"/>
+          </a:xfrm>
+          <a:prstGeom prst="roundRect">
+            <a:avLst>
+              <a:gd name="adj" fmla="val 8955"/>
+            </a:avLst>
+          </a:prstGeom>
+          <a:solidFill>
+            <a:srgbClr val="F4F3EF"/>
+          </a:solidFill>
+          <a:ln/>
+        </p:spPr>
+      </p:sp>
+      <p:sp>
+        <p:nvSpPr>
+          <p:cNvPr id="7" name="Text 5"/>
+          <p:cNvSpPr/>
+          <p:nvPr/>
+        </p:nvSpPr>
+        <p:spPr>
+          <a:xfrm>
+            <a:off x="877824" y="1874520"/>
+            <a:ext cx="4206240" cy="1225296"/>
+          </a:xfrm>
+          <a:prstGeom prst="rect">
+            <a:avLst/>
+          </a:prstGeom>
+          <a:noFill/>
+          <a:ln/>
+        </p:spPr>
+        <p:txBody>
+          <a:bodyPr wrap="square" lIns="0" tIns="0" rIns="0" bIns="0" rtlCol="0" anchor="ctr"/>
+          <a:lstStyle/>
+          <a:p>
+            <a:pPr indent="0" marL="0">
+              <a:lnSpc>
+                <a:spcPts val="2100"/>
+              </a:lnSpc>
+              <a:buNone/>
+            </a:pPr>
+            <a:r>
+              <a:rPr lang="en-US" sz="1500" dirty="0">
+                <a:solidFill>
+                  <a:srgbClr val="0B0B0B"/>
+                </a:solidFill>
+                <a:latin typeface="Calibri" pitchFamily="34" charset="0"/>
+                <a:ea typeface="Calibri" pitchFamily="34" charset="-122"/>
+                <a:cs typeface="Calibri" pitchFamily="34" charset="-120"/>
+              </a:rPr>
+              <a:t>my first version</a:t>
+            </a:r>
+            <a:endParaRPr lang="en-US" sz="1500" dirty="0"/>
+          </a:p>
+          <a:p>
+            <a:pPr indent="0" marL="0">
+              <a:lnSpc>
+                <a:spcPts val="2100"/>
+              </a:lnSpc>
+              <a:buNone/>
+            </a:pPr>
+            <a:r>
+              <a:rPr lang="en-US" sz="1500" dirty="0">
+                <a:solidFill>
+                  <a:srgbClr val="0B0B0B"/>
+                </a:solidFill>
+                <a:latin typeface="Calibri" pitchFamily="34" charset="0"/>
+                <a:ea typeface="Calibri" pitchFamily="34" charset="-122"/>
+                <a:cs typeface="Calibri" pitchFamily="34" charset="-120"/>
+              </a:rPr>
+              <a:t>inner-boundary ring</a:t>
+            </a:r>
+            <a:endParaRPr lang="en-US" sz="1500" dirty="0"/>
+          </a:p>
+        </p:txBody>
+      </p:sp>
+      <p:sp>
+        <p:nvSpPr>
+          <p:cNvPr id="8" name="Text 6"/>
+          <p:cNvSpPr/>
+          <p:nvPr/>
+        </p:nvSpPr>
+        <p:spPr>
+          <a:xfrm>
+            <a:off x="5230368" y="1874520"/>
+            <a:ext cx="2103120" cy="1225296"/>
+          </a:xfrm>
+          <a:prstGeom prst="rect">
+            <a:avLst/>
+          </a:prstGeom>
+          <a:noFill/>
+          <a:ln/>
+        </p:spPr>
+        <p:txBody>
+          <a:bodyPr wrap="square" lIns="0" tIns="0" rIns="0" bIns="0" rtlCol="0" anchor="ctr"/>
+          <a:lstStyle/>
+          <a:p>
+            <a:pPr algn="ctr" indent="0" marL="0">
+              <a:buNone/>
+            </a:pPr>
+            <a:r>
+              <a:rPr lang="en-US" sz="4000" b="1" dirty="0">
+                <a:solidFill>
+                  <a:srgbClr val="A32E22"/>
+                </a:solidFill>
+                <a:latin typeface="Cambria" pitchFamily="34" charset="0"/>
+                <a:ea typeface="Cambria" pitchFamily="34" charset="-122"/>
+                <a:cs typeface="Cambria" pitchFamily="34" charset="-120"/>
+              </a:rPr>
+              <a:t>9 of 9</a:t>
+            </a:r>
+            <a:endParaRPr lang="en-US" sz="4000" dirty="0"/>
+          </a:p>
+        </p:txBody>
+      </p:sp>
+      <p:sp>
+        <p:nvSpPr>
+          <p:cNvPr id="9" name="Text 7"/>
+          <p:cNvSpPr/>
+          <p:nvPr/>
+        </p:nvSpPr>
+        <p:spPr>
+          <a:xfrm>
+            <a:off x="7516368" y="1874520"/>
+            <a:ext cx="3840480" cy="1225296"/>
+          </a:xfrm>
+          <a:prstGeom prst="rect">
+            <a:avLst/>
+          </a:prstGeom>
+          <a:noFill/>
+          <a:ln/>
+        </p:spPr>
+        <p:txBody>
+          <a:bodyPr wrap="square" lIns="0" tIns="0" rIns="0" bIns="0" rtlCol="0" anchor="ctr"/>
+          <a:lstStyle/>
+          <a:p>
+            <a:pPr indent="0" marL="0">
+              <a:buNone/>
+            </a:pPr>
+            <a:r>
+              <a:rPr lang="en-US" sz="1400" dirty="0">
+                <a:solidFill>
+                  <a:srgbClr val="52514E"/>
+                </a:solidFill>
+                <a:latin typeface="Calibri" pitchFamily="34" charset="0"/>
+                <a:ea typeface="Calibri" pitchFamily="34" charset="-122"/>
+                <a:cs typeface="Calibri" pitchFamily="34" charset="-120"/>
+              </a:rPr>
+              <a:t>picked the wrong outline</a:t>
+            </a:r>
+            <a:endParaRPr lang="en-US" sz="1400" dirty="0"/>
+          </a:p>
+        </p:txBody>
+      </p:sp>
+      <p:sp>
+        <p:nvSpPr>
+          <p:cNvPr id="10" name="Shape 8"/>
+          <p:cNvSpPr/>
+          <p:nvPr/>
+        </p:nvSpPr>
+        <p:spPr>
+          <a:xfrm>
+            <a:off x="566928" y="3355848"/>
+            <a:ext cx="11057839" cy="1225296"/>
+          </a:xfrm>
+          <a:prstGeom prst="roundRect">
+            <a:avLst>
+              <a:gd name="adj" fmla="val 8955"/>
+            </a:avLst>
+          </a:prstGeom>
+          <a:solidFill>
+            <a:srgbClr val="F4F3EF"/>
+          </a:solidFill>
+          <a:ln/>
+        </p:spPr>
+      </p:sp>
+      <p:sp>
+        <p:nvSpPr>
+          <p:cNvPr id="11" name="Text 9"/>
+          <p:cNvSpPr/>
+          <p:nvPr/>
+        </p:nvSpPr>
+        <p:spPr>
+          <a:xfrm>
+            <a:off x="877824" y="3355848"/>
+            <a:ext cx="4206240" cy="1225296"/>
+          </a:xfrm>
+          <a:prstGeom prst="rect">
+            <a:avLst/>
+          </a:prstGeom>
+          <a:noFill/>
+          <a:ln/>
+        </p:spPr>
+        <p:txBody>
+          <a:bodyPr wrap="square" lIns="0" tIns="0" rIns="0" bIns="0" rtlCol="0" anchor="ctr"/>
+          <a:lstStyle/>
+          <a:p>
+            <a:pPr indent="0" marL="0">
+              <a:lnSpc>
+                <a:spcPts val="2100"/>
+              </a:lnSpc>
+              <a:buNone/>
+            </a:pPr>
+            <a:r>
+              <a:rPr lang="en-US" sz="1500" dirty="0">
+                <a:solidFill>
+                  <a:srgbClr val="0B0B0B"/>
+                </a:solidFill>
+                <a:latin typeface="Calibri" pitchFamily="34" charset="0"/>
+                <a:ea typeface="Calibri" pitchFamily="34" charset="-122"/>
+                <a:cs typeface="Calibri" pitchFamily="34" charset="-120"/>
+              </a:rPr>
+              <a:t>after the fix</a:t>
+            </a:r>
+            <a:endParaRPr lang="en-US" sz="1500" dirty="0"/>
+          </a:p>
+          <a:p>
+            <a:pPr indent="0" marL="0">
+              <a:lnSpc>
+                <a:spcPts val="2100"/>
+              </a:lnSpc>
+              <a:buNone/>
+            </a:pPr>
+            <a:r>
+              <a:rPr lang="en-US" sz="1500" dirty="0">
+                <a:solidFill>
+                  <a:srgbClr val="0B0B0B"/>
+                </a:solidFill>
+                <a:latin typeface="Calibri" pitchFamily="34" charset="0"/>
+                <a:ea typeface="Calibri" pitchFamily="34" charset="-122"/>
+                <a:cs typeface="Calibri" pitchFamily="34" charset="-120"/>
+              </a:rPr>
+              <a:t>marching-squares contour</a:t>
+            </a:r>
+            <a:endParaRPr lang="en-US" sz="1500" dirty="0"/>
+          </a:p>
+        </p:txBody>
+      </p:sp>
+      <p:sp>
+        <p:nvSpPr>
+          <p:cNvPr id="12" name="Text 10"/>
+          <p:cNvSpPr/>
+          <p:nvPr/>
+        </p:nvSpPr>
+        <p:spPr>
+          <a:xfrm>
+            <a:off x="5230368" y="3355848"/>
+            <a:ext cx="2103120" cy="1225296"/>
+          </a:xfrm>
+          <a:prstGeom prst="rect">
+            <a:avLst/>
+          </a:prstGeom>
+          <a:noFill/>
+          <a:ln/>
+        </p:spPr>
+        <p:txBody>
+          <a:bodyPr wrap="square" lIns="0" tIns="0" rIns="0" bIns="0" rtlCol="0" anchor="ctr"/>
+          <a:lstStyle/>
+          <a:p>
+            <a:pPr algn="ctr" indent="0" marL="0">
+              <a:buNone/>
+            </a:pPr>
+            <a:r>
+              <a:rPr lang="en-US" sz="4000" b="1" dirty="0">
+                <a:solidFill>
+                  <a:srgbClr val="1E6F4C"/>
+                </a:solidFill>
+                <a:latin typeface="Cambria" pitchFamily="34" charset="0"/>
+                <a:ea typeface="Cambria" pitchFamily="34" charset="-122"/>
+                <a:cs typeface="Cambria" pitchFamily="34" charset="-120"/>
+              </a:rPr>
+              <a:t>0 of 9</a:t>
+            </a:r>
+            <a:endParaRPr lang="en-US" sz="4000" dirty="0"/>
+          </a:p>
+        </p:txBody>
+      </p:sp>
+      <p:sp>
+        <p:nvSpPr>
+          <p:cNvPr id="13" name="Text 11"/>
+          <p:cNvSpPr/>
+          <p:nvPr/>
+        </p:nvSpPr>
+        <p:spPr>
+          <a:xfrm>
+            <a:off x="7516368" y="3355848"/>
+            <a:ext cx="3840480" cy="1225296"/>
+          </a:xfrm>
+          <a:prstGeom prst="rect">
+            <a:avLst/>
+          </a:prstGeom>
+          <a:noFill/>
+          <a:ln/>
+        </p:spPr>
+        <p:txBody>
+          <a:bodyPr wrap="square" lIns="0" tIns="0" rIns="0" bIns="0" rtlCol="0" anchor="ctr"/>
+          <a:lstStyle/>
+          <a:p>
+            <a:pPr indent="0" marL="0">
+              <a:buNone/>
+            </a:pPr>
+            <a:r>
+              <a:rPr lang="en-US" sz="1400" dirty="0">
+                <a:solidFill>
+                  <a:srgbClr val="52514E"/>
+                </a:solidFill>
+                <a:latin typeface="Calibri" pitchFamily="34" charset="0"/>
+                <a:ea typeface="Calibri" pitchFamily="34" charset="-122"/>
+                <a:cs typeface="Calibri" pitchFamily="34" charset="-120"/>
+              </a:rPr>
+              <a:t>picked correctly</a:t>
+            </a:r>
+            <a:endParaRPr lang="en-US" sz="1400" dirty="0"/>
+          </a:p>
+        </p:txBody>
+      </p:sp>
+      <p:sp>
+        <p:nvSpPr>
+          <p:cNvPr id="14" name="Text 12"/>
+          <p:cNvSpPr/>
+          <p:nvPr/>
+        </p:nvSpPr>
+        <p:spPr>
+          <a:xfrm>
+            <a:off x="566928" y="5138928"/>
+            <a:ext cx="11057839" cy="457200"/>
+          </a:xfrm>
+          <a:prstGeom prst="rect">
+            <a:avLst/>
+          </a:prstGeom>
+          <a:noFill/>
+          <a:ln/>
+        </p:spPr>
+        <p:txBody>
+          <a:bodyPr wrap="square" lIns="0" tIns="0" rIns="0" bIns="0" rtlCol="0" anchor="ctr"/>
+          <a:lstStyle/>
+          <a:p>
+            <a:pPr indent="0" marL="0">
+              <a:buNone/>
+            </a:pPr>
+            <a:r>
+              <a:rPr lang="en-US" sz="1500" b="1" dirty="0">
+                <a:solidFill>
+                  <a:srgbClr val="0B0B0B"/>
+                </a:solidFill>
+                <a:latin typeface="Calibri" pitchFamily="34" charset="0"/>
+                <a:ea typeface="Calibri" pitchFamily="34" charset="-122"/>
+                <a:cs typeface="Calibri" pitchFamily="34" charset="-120"/>
+              </a:rPr>
+              <a:t>The original claim reported the model closer in 48 of 49 fields. It did not survive. I retracted it.</a:t>
+            </a:r>
+            <a:endParaRPr lang="en-US" sz="1500" dirty="0"/>
+          </a:p>
+        </p:txBody>
+      </p:sp>
     </p:spTree>
   </p:cSld>
   <p:clrMapOvr>
